--- a/Programacion II/Clases/Clase 7 - Patrones de diseno Singleton y Factory/Presentacion.pptx
+++ b/Programacion II/Clases/Clase 7 - Patrones de diseno Singleton y Factory/Presentacion.pptx
@@ -18,6 +18,11 @@
     <p:sldId id="266" r:id="rId17"/>
     <p:sldId id="267" r:id="rId18"/>
     <p:sldId id="268" r:id="rId19"/>
+    <p:sldId id="269" r:id="rId20"/>
+    <p:sldId id="270" r:id="rId21"/>
+    <p:sldId id="271" r:id="rId22"/>
+    <p:sldId id="272" r:id="rId23"/>
+    <p:sldId id="273" r:id="rId24"/>
   </p:sldIdLst>
   <p:sldSz cx="12191695" cy="6858000" type="screen4x3"/>
   <p:notesSz cx="6858000" cy="9144000"/>
@@ -3618,7 +3623,7 @@
                 </a:solidFill>
                 <a:latin typeface="Calibri"/>
               </a:rPr>
-              <a:t>Antes de entregar — autochequeo</a:t>
+              <a:t>Singleton: un solo archivador para toda la clinica</a:t>
             </a:r>
           </a:p>
         </p:txBody>
@@ -3632,7 +3637,7 @@
         <p:spPr>
           <a:xfrm>
             <a:off x="457200" y="1261872"/>
-            <a:ext cx="11277295" cy="566928"/>
+            <a:ext cx="11277295" cy="4773168"/>
           </a:xfrm>
           <a:prstGeom prst="roundRect">
             <a:avLst>
@@ -3640,7 +3645,7 @@
             </a:avLst>
           </a:prstGeom>
           <a:solidFill>
-            <a:srgbClr val="F2F2F2"/>
+            <a:srgbClr val="1E2A38"/>
           </a:solidFill>
           <a:ln>
             <a:noFill/>
@@ -3676,19 +3681,17 @@
         </p:nvSpPr>
         <p:spPr>
           <a:xfrm>
-            <a:off x="640080" y="1408175"/>
-            <a:ext cx="274320" cy="274320"/>
+            <a:off x="457200" y="1261872"/>
+            <a:ext cx="11277295" cy="320040"/>
           </a:xfrm>
           <a:prstGeom prst="rect">
             <a:avLst/>
           </a:prstGeom>
           <a:solidFill>
-            <a:srgbClr val="FFFFFF"/>
+            <a:srgbClr val="095292"/>
           </a:solidFill>
           <a:ln>
-            <a:solidFill>
-              <a:srgbClr val="333333"/>
-            </a:solidFill>
+            <a:noFill/>
           </a:ln>
         </p:spPr>
         <p:style>
@@ -3715,44 +3718,33 @@
       </p:sp>
       <p:sp>
         <p:nvSpPr>
-          <p:cNvPr id="7" name="Rectangle 6"/>
-          <p:cNvSpPr/>
-          <p:nvPr/>
-        </p:nvSpPr>
-        <p:spPr>
-          <a:xfrm>
-            <a:off x="640080" y="1408175"/>
-            <a:ext cx="73152" cy="274320"/>
-          </a:xfrm>
-          <a:prstGeom prst="rect">
-            <a:avLst/>
-          </a:prstGeom>
-          <a:solidFill>
-            <a:srgbClr val="269CCB"/>
-          </a:solidFill>
-          <a:ln>
-            <a:noFill/>
-          </a:ln>
-        </p:spPr>
-        <p:style>
-          <a:lnRef idx="1">
-            <a:schemeClr val="accent1"/>
-          </a:lnRef>
-          <a:fillRef idx="3">
-            <a:schemeClr val="accent1"/>
-          </a:fillRef>
-          <a:effectRef idx="2">
-            <a:schemeClr val="accent1"/>
-          </a:effectRef>
-          <a:fontRef idx="minor">
-            <a:schemeClr val="lt1"/>
-          </a:fontRef>
-        </p:style>
-        <p:txBody>
-          <a:bodyPr rtlCol="0" anchor="ctr"/>
-          <a:lstStyle/>
-          <a:p>
-            <a:pPr algn="ctr"/>
+          <p:cNvPr id="7" name="TextBox 6"/>
+          <p:cNvSpPr txBox="1"/>
+          <p:nvPr/>
+        </p:nvSpPr>
+        <p:spPr>
+          <a:xfrm>
+            <a:off x="685800" y="1307592"/>
+            <a:ext cx="10820095" cy="256032"/>
+          </a:xfrm>
+          <a:prstGeom prst="rect">
+            <a:avLst/>
+          </a:prstGeom>
+          <a:noFill/>
+        </p:spPr>
+        <p:txBody>
+          <a:bodyPr wrap="square" anchor="ctr"/>
+          <a:lstStyle/>
+          <a:p>
+            <a:r>
+              <a:rPr sz="1000" b="1" i="0">
+                <a:solidFill>
+                  <a:srgbClr val="269CCB"/>
+                </a:solidFill>
+                <a:latin typeface="Calibri"/>
+              </a:rPr>
+              <a:t>● ● ●</a:t>
+            </a:r>
           </a:p>
         </p:txBody>
       </p:sp>
@@ -3764,8 +3756,8 @@
         </p:nvSpPr>
         <p:spPr>
           <a:xfrm>
-            <a:off x="1097280" y="1353312"/>
-            <a:ext cx="10362895" cy="402336"/>
+            <a:off x="777240" y="1719072"/>
+            <a:ext cx="10637215" cy="4133087"/>
           </a:xfrm>
           <a:prstGeom prst="rect">
             <a:avLst/>
@@ -3773,354 +3765,274 @@
           <a:noFill/>
         </p:spPr>
         <p:txBody>
-          <a:bodyPr wrap="square" anchor="ctr"/>
-          <a:lstStyle/>
-          <a:p>
-            <a:r>
-              <a:rPr sz="1500" b="0" i="0">
-                <a:solidFill>
-                  <a:srgbClr val="333333"/>
-                </a:solidFill>
-                <a:latin typeface="Calibri"/>
-              </a:rPr>
-              <a:t>Si el mensaje del constructor aparece dos veces, quien mas esta creando el objeto y en que linea quedo un new olvidado?</a:t>
-            </a:r>
-          </a:p>
-        </p:txBody>
-      </p:sp>
-      <p:sp>
-        <p:nvSpPr>
-          <p:cNvPr id="9" name="Rounded Rectangle 8"/>
-          <p:cNvSpPr/>
-          <p:nvPr/>
-        </p:nvSpPr>
-        <p:spPr>
-          <a:xfrm>
-            <a:off x="457200" y="1938528"/>
-            <a:ext cx="11277295" cy="566928"/>
-          </a:xfrm>
-          <a:prstGeom prst="roundRect">
-            <a:avLst>
-              <a:gd name="adj" fmla="val 12000"/>
-            </a:avLst>
-          </a:prstGeom>
-          <a:solidFill>
-            <a:srgbClr val="F2F2F2"/>
-          </a:solidFill>
-          <a:ln>
-            <a:noFill/>
-          </a:ln>
-        </p:spPr>
-        <p:style>
-          <a:lnRef idx="1">
-            <a:schemeClr val="accent1"/>
-          </a:lnRef>
-          <a:fillRef idx="3">
-            <a:schemeClr val="accent1"/>
-          </a:fillRef>
-          <a:effectRef idx="2">
-            <a:schemeClr val="accent1"/>
-          </a:effectRef>
-          <a:fontRef idx="minor">
-            <a:schemeClr val="lt1"/>
-          </a:fontRef>
-        </p:style>
-        <p:txBody>
-          <a:bodyPr rtlCol="0" anchor="ctr"/>
+          <a:bodyPr wrap="square">
+            <a:spAutoFit/>
+          </a:bodyPr>
+          <a:lstStyle/>
+          <a:p>
+            <a:pPr>
+              <a:spcAft>
+                <a:spcPts val="400"/>
+              </a:spcAft>
+            </a:pPr>
+            <a:r>
+              <a:rPr sz="1400" b="0" i="0">
+                <a:solidFill>
+                  <a:srgbClr val="FFFFFF"/>
+                </a:solidFill>
+                <a:latin typeface="Calibri"/>
+              </a:rPr>
+              <a:t>public class RepositorioVetCare {                  // el archivador de Huellitas</a:t>
+            </a:r>
+          </a:p>
+          <a:p>
+            <a:pPr>
+              <a:spcAft>
+                <a:spcPts val="400"/>
+              </a:spcAft>
+            </a:pPr>
+            <a:r>
+              <a:rPr sz="1400" b="0" i="0">
+                <a:solidFill>
+                  <a:srgbClr val="FFFFFF"/>
+                </a:solidFill>
+                <a:latin typeface="Calibri"/>
+              </a:rPr>
+              <a:t>    private static RepositorioVetCare instancia;   // 1. unica referencia, privada y estatica</a:t>
+            </a:r>
+          </a:p>
+          <a:p>
+            <a:pPr>
+              <a:spcAft>
+                <a:spcPts val="400"/>
+              </a:spcAft>
+            </a:pPr>
+            <a:r>
+              <a:rPr sz="1400" b="0" i="0">
+                <a:solidFill>
+                  <a:srgbClr val="FFFFFF"/>
+                </a:solidFill>
+                <a:latin typeface="Calibri"/>
+              </a:rPr>
+              <a:t>    private final List&lt;Mascota&gt; mascotas = new ArrayList&lt;Mascota&gt;();</a:t>
+            </a:r>
+          </a:p>
+          <a:p>
+            <a:pPr>
+              <a:spcAft>
+                <a:spcPts val="400"/>
+              </a:spcAft>
+            </a:pPr>
+            <a:r>
+              <a:rPr sz="1400" b="0" i="0">
+                <a:solidFill>
+                  <a:srgbClr val="FFFFFF"/>
+                </a:solidFill>
+                <a:latin typeface="Calibri"/>
+              </a:rPr>
+              <a:t/>
+            </a:r>
+          </a:p>
+          <a:p>
+            <a:pPr>
+              <a:spcAft>
+                <a:spcPts val="400"/>
+              </a:spcAft>
+            </a:pPr>
+            <a:r>
+              <a:rPr sz="1400" b="0" i="0">
+                <a:solidFill>
+                  <a:srgbClr val="FFFFFF"/>
+                </a:solidFill>
+                <a:latin typeface="Calibri"/>
+              </a:rPr>
+              <a:t>    private RepositorioVetCare() { }               // 2. privado: nadie puede hacer new</a:t>
+            </a:r>
+          </a:p>
+          <a:p>
+            <a:pPr>
+              <a:spcAft>
+                <a:spcPts val="400"/>
+              </a:spcAft>
+            </a:pPr>
+            <a:r>
+              <a:rPr sz="1400" b="0" i="0">
+                <a:solidFill>
+                  <a:srgbClr val="FFFFFF"/>
+                </a:solidFill>
+                <a:latin typeface="Calibri"/>
+              </a:rPr>
+              <a:t/>
+            </a:r>
+          </a:p>
+          <a:p>
+            <a:pPr>
+              <a:spcAft>
+                <a:spcPts val="400"/>
+              </a:spcAft>
+            </a:pPr>
+            <a:r>
+              <a:rPr sz="1400" b="0" i="0">
+                <a:solidFill>
+                  <a:srgbClr val="FFFFFF"/>
+                </a:solidFill>
+                <a:latin typeface="Calibri"/>
+              </a:rPr>
+              <a:t>    public static synchronized RepositorioVetCare getInstancia() {</a:t>
+            </a:r>
+          </a:p>
+          <a:p>
+            <a:pPr>
+              <a:spcAft>
+                <a:spcPts val="400"/>
+              </a:spcAft>
+            </a:pPr>
+            <a:r>
+              <a:rPr sz="1400" b="0" i="0">
+                <a:solidFill>
+                  <a:srgbClr val="FFFFFF"/>
+                </a:solidFill>
+                <a:latin typeface="Calibri"/>
+              </a:rPr>
+              <a:t>        if (instancia == null) {                   // 3. se crea la primera vez que la piden</a:t>
+            </a:r>
+          </a:p>
+          <a:p>
+            <a:pPr>
+              <a:spcAft>
+                <a:spcPts val="400"/>
+              </a:spcAft>
+            </a:pPr>
+            <a:r>
+              <a:rPr sz="1400" b="0" i="0">
+                <a:solidFill>
+                  <a:srgbClr val="FFFFFF"/>
+                </a:solidFill>
+                <a:latin typeface="Calibri"/>
+              </a:rPr>
+              <a:t>            instancia = new RepositorioVetCare();</a:t>
+            </a:r>
+          </a:p>
+          <a:p>
+            <a:pPr>
+              <a:spcAft>
+                <a:spcPts val="400"/>
+              </a:spcAft>
+            </a:pPr>
+            <a:r>
+              <a:rPr sz="1400" b="0" i="0">
+                <a:solidFill>
+                  <a:srgbClr val="FFFFFF"/>
+                </a:solidFill>
+                <a:latin typeface="Calibri"/>
+              </a:rPr>
+              <a:t>        }</a:t>
+            </a:r>
+          </a:p>
+          <a:p>
+            <a:pPr>
+              <a:spcAft>
+                <a:spcPts val="400"/>
+              </a:spcAft>
+            </a:pPr>
+            <a:r>
+              <a:rPr sz="1400" b="0" i="0">
+                <a:solidFill>
+                  <a:srgbClr val="FFFFFF"/>
+                </a:solidFill>
+                <a:latin typeface="Calibri"/>
+              </a:rPr>
+              <a:t>        return instancia;                          // 4. de ahi en adelante, siempre la misma</a:t>
+            </a:r>
+          </a:p>
+          <a:p>
+            <a:pPr>
+              <a:spcAft>
+                <a:spcPts val="400"/>
+              </a:spcAft>
+            </a:pPr>
+            <a:r>
+              <a:rPr sz="1400" b="0" i="0">
+                <a:solidFill>
+                  <a:srgbClr val="FFFFFF"/>
+                </a:solidFill>
+                <a:latin typeface="Calibri"/>
+              </a:rPr>
+              <a:t>    }</a:t>
+            </a:r>
+          </a:p>
+          <a:p>
+            <a:pPr>
+              <a:spcAft>
+                <a:spcPts val="400"/>
+              </a:spcAft>
+            </a:pPr>
+            <a:r>
+              <a:rPr sz="1400" b="0" i="0">
+                <a:solidFill>
+                  <a:srgbClr val="FFFFFF"/>
+                </a:solidFill>
+                <a:latin typeface="Calibri"/>
+              </a:rPr>
+              <a:t>}</a:t>
+            </a:r>
+          </a:p>
+          <a:p>
+            <a:pPr>
+              <a:spcAft>
+                <a:spcPts val="400"/>
+              </a:spcAft>
+            </a:pPr>
+            <a:r>
+              <a:rPr sz="1400" b="0" i="0">
+                <a:solidFill>
+                  <a:srgbClr val="FFFFFF"/>
+                </a:solidFill>
+                <a:latin typeface="Calibri"/>
+              </a:rPr>
+              <a:t>// En cada ventana: RepositorioVetCare repo = RepositorioVetCare.getInstancia();  // nunca new</a:t>
+            </a:r>
+          </a:p>
+        </p:txBody>
+      </p:sp>
+      <p:sp>
+        <p:nvSpPr>
+          <p:cNvPr id="9" name="TextBox 8"/>
+          <p:cNvSpPr txBox="1"/>
+          <p:nvPr/>
+        </p:nvSpPr>
+        <p:spPr>
+          <a:xfrm>
+            <a:off x="457200" y="6080760"/>
+            <a:ext cx="11277295" cy="320040"/>
+          </a:xfrm>
+          <a:prstGeom prst="rect">
+            <a:avLst/>
+          </a:prstGeom>
+          <a:noFill/>
+        </p:spPr>
+        <p:txBody>
+          <a:bodyPr wrap="square">
+            <a:spAutoFit/>
+          </a:bodyPr>
           <a:lstStyle/>
           <a:p>
             <a:pPr algn="ctr"/>
-          </a:p>
-        </p:txBody>
-      </p:sp>
-      <p:sp>
-        <p:nvSpPr>
-          <p:cNvPr id="10" name="Rectangle 9"/>
-          <p:cNvSpPr/>
-          <p:nvPr/>
-        </p:nvSpPr>
-        <p:spPr>
-          <a:xfrm>
-            <a:off x="640080" y="2084832"/>
-            <a:ext cx="274320" cy="274320"/>
-          </a:xfrm>
-          <a:prstGeom prst="rect">
-            <a:avLst/>
-          </a:prstGeom>
-          <a:solidFill>
-            <a:srgbClr val="FFFFFF"/>
-          </a:solidFill>
-          <a:ln>
-            <a:solidFill>
-              <a:srgbClr val="333333"/>
-            </a:solidFill>
-          </a:ln>
-        </p:spPr>
-        <p:style>
-          <a:lnRef idx="1">
-            <a:schemeClr val="accent1"/>
-          </a:lnRef>
-          <a:fillRef idx="3">
-            <a:schemeClr val="accent1"/>
-          </a:fillRef>
-          <a:effectRef idx="2">
-            <a:schemeClr val="accent1"/>
-          </a:effectRef>
-          <a:fontRef idx="minor">
-            <a:schemeClr val="lt1"/>
-          </a:fontRef>
-        </p:style>
-        <p:txBody>
-          <a:bodyPr rtlCol="0" anchor="ctr"/>
-          <a:lstStyle/>
-          <a:p>
-            <a:pPr algn="ctr"/>
-          </a:p>
-        </p:txBody>
-      </p:sp>
-      <p:sp>
-        <p:nvSpPr>
-          <p:cNvPr id="11" name="Rectangle 10"/>
-          <p:cNvSpPr/>
-          <p:nvPr/>
-        </p:nvSpPr>
-        <p:spPr>
-          <a:xfrm>
-            <a:off x="640080" y="2084832"/>
-            <a:ext cx="73152" cy="274320"/>
-          </a:xfrm>
-          <a:prstGeom prst="rect">
-            <a:avLst/>
-          </a:prstGeom>
-          <a:solidFill>
-            <a:srgbClr val="269CCB"/>
-          </a:solidFill>
-          <a:ln>
-            <a:noFill/>
-          </a:ln>
-        </p:spPr>
-        <p:style>
-          <a:lnRef idx="1">
-            <a:schemeClr val="accent1"/>
-          </a:lnRef>
-          <a:fillRef idx="3">
-            <a:schemeClr val="accent1"/>
-          </a:fillRef>
-          <a:effectRef idx="2">
-            <a:schemeClr val="accent1"/>
-          </a:effectRef>
-          <a:fontRef idx="minor">
-            <a:schemeClr val="lt1"/>
-          </a:fontRef>
-        </p:style>
-        <p:txBody>
-          <a:bodyPr rtlCol="0" anchor="ctr"/>
-          <a:lstStyle/>
-          <a:p>
-            <a:pPr algn="ctr"/>
-          </a:p>
-        </p:txBody>
-      </p:sp>
-      <p:sp>
-        <p:nvSpPr>
-          <p:cNvPr id="12" name="TextBox 11"/>
-          <p:cNvSpPr txBox="1"/>
-          <p:nvPr/>
-        </p:nvSpPr>
-        <p:spPr>
-          <a:xfrm>
-            <a:off x="1097280" y="2029968"/>
-            <a:ext cx="10362895" cy="402336"/>
-          </a:xfrm>
-          <a:prstGeom prst="rect">
-            <a:avLst/>
-          </a:prstGeom>
-          <a:noFill/>
-        </p:spPr>
-        <p:txBody>
-          <a:bodyPr wrap="square" anchor="ctr"/>
-          <a:lstStyle/>
-          <a:p>
-            <a:r>
-              <a:rPr sz="1500" b="0" i="0">
-                <a:solidFill>
-                  <a:srgbClr val="333333"/>
-                </a:solidFill>
-                <a:latin typeface="Calibri"/>
-              </a:rPr>
-              <a:t>Si alguien hace 'RepositorioVetCare.instancia = null;' desde otra clase y el programa se lo permite, que modificador de acceso quedo mal puesto?</a:t>
-            </a:r>
-          </a:p>
-        </p:txBody>
-      </p:sp>
-      <p:sp>
-        <p:nvSpPr>
-          <p:cNvPr id="13" name="Rounded Rectangle 12"/>
-          <p:cNvSpPr/>
-          <p:nvPr/>
-        </p:nvSpPr>
-        <p:spPr>
-          <a:xfrm>
-            <a:off x="457200" y="2615184"/>
-            <a:ext cx="11277295" cy="566928"/>
-          </a:xfrm>
-          <a:prstGeom prst="roundRect">
-            <a:avLst>
-              <a:gd name="adj" fmla="val 12000"/>
-            </a:avLst>
-          </a:prstGeom>
-          <a:solidFill>
-            <a:srgbClr val="F2F2F2"/>
-          </a:solidFill>
-          <a:ln>
-            <a:noFill/>
-          </a:ln>
-        </p:spPr>
-        <p:style>
-          <a:lnRef idx="1">
-            <a:schemeClr val="accent1"/>
-          </a:lnRef>
-          <a:fillRef idx="3">
-            <a:schemeClr val="accent1"/>
-          </a:fillRef>
-          <a:effectRef idx="2">
-            <a:schemeClr val="accent1"/>
-          </a:effectRef>
-          <a:fontRef idx="minor">
-            <a:schemeClr val="lt1"/>
-          </a:fontRef>
-        </p:style>
-        <p:txBody>
-          <a:bodyPr rtlCol="0" anchor="ctr"/>
-          <a:lstStyle/>
-          <a:p>
-            <a:pPr algn="ctr"/>
-          </a:p>
-        </p:txBody>
-      </p:sp>
-      <p:sp>
-        <p:nvSpPr>
-          <p:cNvPr id="14" name="Rectangle 13"/>
-          <p:cNvSpPr/>
-          <p:nvPr/>
-        </p:nvSpPr>
-        <p:spPr>
-          <a:xfrm>
-            <a:off x="640080" y="2761488"/>
-            <a:ext cx="274320" cy="274320"/>
-          </a:xfrm>
-          <a:prstGeom prst="rect">
-            <a:avLst/>
-          </a:prstGeom>
-          <a:solidFill>
-            <a:srgbClr val="FFFFFF"/>
-          </a:solidFill>
-          <a:ln>
-            <a:solidFill>
-              <a:srgbClr val="333333"/>
-            </a:solidFill>
-          </a:ln>
-        </p:spPr>
-        <p:style>
-          <a:lnRef idx="1">
-            <a:schemeClr val="accent1"/>
-          </a:lnRef>
-          <a:fillRef idx="3">
-            <a:schemeClr val="accent1"/>
-          </a:fillRef>
-          <a:effectRef idx="2">
-            <a:schemeClr val="accent1"/>
-          </a:effectRef>
-          <a:fontRef idx="minor">
-            <a:schemeClr val="lt1"/>
-          </a:fontRef>
-        </p:style>
-        <p:txBody>
-          <a:bodyPr rtlCol="0" anchor="ctr"/>
-          <a:lstStyle/>
-          <a:p>
-            <a:pPr algn="ctr"/>
-          </a:p>
-        </p:txBody>
-      </p:sp>
-      <p:sp>
-        <p:nvSpPr>
-          <p:cNvPr id="15" name="Rectangle 14"/>
-          <p:cNvSpPr/>
-          <p:nvPr/>
-        </p:nvSpPr>
-        <p:spPr>
-          <a:xfrm>
-            <a:off x="640080" y="2761488"/>
-            <a:ext cx="73152" cy="274320"/>
-          </a:xfrm>
-          <a:prstGeom prst="rect">
-            <a:avLst/>
-          </a:prstGeom>
-          <a:solidFill>
-            <a:srgbClr val="269CCB"/>
-          </a:solidFill>
-          <a:ln>
-            <a:noFill/>
-          </a:ln>
-        </p:spPr>
-        <p:style>
-          <a:lnRef idx="1">
-            <a:schemeClr val="accent1"/>
-          </a:lnRef>
-          <a:fillRef idx="3">
-            <a:schemeClr val="accent1"/>
-          </a:fillRef>
-          <a:effectRef idx="2">
-            <a:schemeClr val="accent1"/>
-          </a:effectRef>
-          <a:fontRef idx="minor">
-            <a:schemeClr val="lt1"/>
-          </a:fontRef>
-        </p:style>
-        <p:txBody>
-          <a:bodyPr rtlCol="0" anchor="ctr"/>
-          <a:lstStyle/>
-          <a:p>
-            <a:pPr algn="ctr"/>
-          </a:p>
-        </p:txBody>
-      </p:sp>
-      <p:sp>
-        <p:nvSpPr>
-          <p:cNvPr id="16" name="TextBox 15"/>
-          <p:cNvSpPr txBox="1"/>
-          <p:nvPr/>
-        </p:nvSpPr>
-        <p:spPr>
-          <a:xfrm>
-            <a:off x="1097280" y="2706624"/>
-            <a:ext cx="10362895" cy="402336"/>
-          </a:xfrm>
-          <a:prstGeom prst="rect">
-            <a:avLst/>
-          </a:prstGeom>
-          <a:noFill/>
-        </p:spPr>
-        <p:txBody>
-          <a:bodyPr wrap="square" anchor="ctr"/>
-          <a:lstStyle/>
-          <a:p>
-            <a:r>
-              <a:rPr sz="1500" b="0" i="0">
-                <a:solidFill>
-                  <a:srgbClr val="333333"/>
-                </a:solidFill>
-                <a:latin typeface="Calibri"/>
-              </a:rPr>
-              <a:t>Pregunta de criterio: cuantas mascotas hay en la clinica y cuantos archivadores hay? Cual de esos dos conceptos merece ser Singleton?</a:t>
-            </a:r>
-          </a:p>
-        </p:txBody>
-      </p:sp>
-      <p:sp>
-        <p:nvSpPr>
-          <p:cNvPr id="17" name="TextBox 16"/>
+            <a:r>
+              <a:rPr sz="1200" b="0" i="1">
+                <a:solidFill>
+                  <a:srgbClr val="666666"/>
+                </a:solidFill>
+                <a:latin typeface="Calibri"/>
+              </a:rPr>
+              <a:t>El constructor privado no es un adorno: es lo unico que le garantiza al compilador que existira una sola instancia.</a:t>
+            </a:r>
+          </a:p>
+        </p:txBody>
+      </p:sp>
+      <p:sp>
+        <p:nvSpPr>
+          <p:cNvPr id="10" name="TextBox 9"/>
           <p:cNvSpPr txBox="1"/>
           <p:nvPr/>
         </p:nvSpPr>
@@ -4294,7 +4206,7 @@
                 </a:solidFill>
                 <a:latin typeface="Calibri"/>
               </a:rPr>
-              <a:t>Criterios de exito / entregable</a:t>
+              <a:t>Demo del dia</a:t>
             </a:r>
           </a:p>
         </p:txBody>
@@ -4342,7 +4254,7 @@
                 </a:solidFill>
                 <a:latin typeface="Calibri"/>
               </a:rPr>
-              <a:t>Entregable:</a:t>
+              <a:t>Herramienta:</a:t>
             </a:r>
             <a:r>
               <a:rPr sz="2000" b="0" i="0">
@@ -4351,7 +4263,7 @@
                 </a:solidFill>
                 <a:latin typeface="Calibri"/>
               </a:rPr>
-              <a:t> Clase RepositorioVetCare convertida en Singleton, FabricaConsultas con tres tipos y evidencia de que dos ventanas ven la misma lista, subido a la plataforma del curso.</a:t>
+              <a:t> Visual Studio Code (Java)</a:t>
             </a:r>
           </a:p>
           <a:p>
@@ -4376,7 +4288,7 @@
                 </a:solidFill>
                 <a:latin typeface="Calibri"/>
               </a:rPr>
-              <a:t>Exito:</a:t>
+              <a:t>Demo:</a:t>
             </a:r>
             <a:r>
               <a:rPr sz="2000" b="0" i="0">
@@ -4385,7 +4297,7 @@
                 </a:solidFill>
                 <a:latin typeface="Calibri"/>
               </a:rPr>
-              <a:t> El mensaje del constructor del repositorio se imprime una sola vez en toda la ejecucion, sin importar cuantas veces se pida la instancia.</a:t>
+              <a:t> El docente abre dos ventanas de VetCare, registra una mascota en la primera y la muestra apareciendo en la segunda porque ambas comparten la unica instancia del repositorio.</a:t>
             </a:r>
           </a:p>
           <a:p>
@@ -4401,127 +4313,7 @@
                 </a:solidFill>
                 <a:latin typeface="Calibri"/>
               </a:rPr>
-              <a:t>–   </a:t>
-            </a:r>
-            <a:r>
-              <a:rPr sz="2000" b="1" i="0">
-                <a:solidFill>
-                  <a:srgbClr val="333333"/>
-                </a:solidFill>
-                <a:latin typeface="Calibri"/>
-              </a:rPr>
-              <a:t>Exito:</a:t>
-            </a:r>
-            <a:r>
-              <a:rPr sz="2000" b="0" i="0">
-                <a:solidFill>
-                  <a:srgbClr val="333333"/>
-                </a:solidFill>
-                <a:latin typeface="Calibri"/>
-              </a:rPr>
-              <a:t> El constructor del repositorio es privado y no existe ningun new RepositorioVetCare() fuera de getInstancia().</a:t>
-            </a:r>
-          </a:p>
-          <a:p>
-            <a:pPr>
-              <a:spcAft>
-                <a:spcPts val="800"/>
-              </a:spcAft>
-            </a:pPr>
-            <a:r>
-              <a:rPr sz="2000" b="0" i="0">
-                <a:solidFill>
-                  <a:srgbClr val="333333"/>
-                </a:solidFill>
-                <a:latin typeface="Calibri"/>
-              </a:rPr>
-              <a:t>–   </a:t>
-            </a:r>
-            <a:r>
-              <a:rPr sz="2000" b="1" i="0">
-                <a:solidFill>
-                  <a:srgbClr val="333333"/>
-                </a:solidFill>
-                <a:latin typeface="Calibri"/>
-              </a:rPr>
-              <a:t>Exito:</a:t>
-            </a:r>
-            <a:r>
-              <a:rPr sz="2000" b="0" i="0">
-                <a:solidFill>
-                  <a:srgbClr val="333333"/>
-                </a:solidFill>
-                <a:latin typeface="Calibri"/>
-              </a:rPr>
-              <a:t> Registrar una mascota en la ventana Recepcion y refrescar la ventana Consultorio muestra esa mascota en ambas, y el identityHashCode del repositorio impreso en las dos ventanas es identico.</a:t>
-            </a:r>
-          </a:p>
-          <a:p>
-            <a:pPr>
-              <a:spcAft>
-                <a:spcPts val="800"/>
-              </a:spcAft>
-            </a:pPr>
-            <a:r>
-              <a:rPr sz="2000" b="0" i="0">
-                <a:solidFill>
-                  <a:srgbClr val="333333"/>
-                </a:solidFill>
-                <a:latin typeface="Calibri"/>
-              </a:rPr>
-              <a:t>–   </a:t>
-            </a:r>
-            <a:r>
-              <a:rPr sz="2000" b="1" i="0">
-                <a:solidFill>
-                  <a:srgbClr val="333333"/>
-                </a:solidFill>
-                <a:latin typeface="Calibri"/>
-              </a:rPr>
-              <a:t>Exito:</a:t>
-            </a:r>
-            <a:r>
-              <a:rPr sz="2000" b="0" i="0">
-                <a:solidFill>
-                  <a:srgbClr val="333333"/>
-                </a:solidFill>
-                <a:latin typeface="Calibri"/>
-              </a:rPr>
-              <a:t> FabricaConsultas devuelve el tipo base Consulta para los tres tipos validos y rechaza con excepcion un tipo desconocido como 'peluqueria espacial'.</a:t>
-            </a:r>
-          </a:p>
-          <a:p>
-            <a:pPr>
-              <a:spcAft>
-                <a:spcPts val="800"/>
-              </a:spcAft>
-            </a:pPr>
-            <a:r>
-              <a:rPr sz="2000" b="0" i="0">
-                <a:solidFill>
-                  <a:srgbClr val="333333"/>
-                </a:solidFill>
-                <a:latin typeface="Calibri"/>
-              </a:rPr>
-              <a:t>–   </a:t>
-            </a:r>
-            <a:r>
-              <a:rPr sz="2000" b="1" i="0">
-                <a:solidFill>
-                  <a:srgbClr val="333333"/>
-                </a:solidFill>
-                <a:latin typeface="Calibri"/>
-              </a:rPr>
-              <a:t>Entrega en la plataforma del curso</a:t>
-            </a:r>
-            <a:r>
-              <a:rPr sz="2000" b="0" i="0">
-                <a:solidFill>
-                  <a:srgbClr val="333333"/>
-                </a:solidFill>
-                <a:latin typeface="Calibri"/>
-              </a:rPr>
-              <a:t> — en la fecha que indique el docente.</a:t>
+              <a:t>–   Mismo dominio VetCare — no otro ejemplo.</a:t>
             </a:r>
           </a:p>
         </p:txBody>
@@ -4702,109 +4494,21 @@
                 </a:solidFill>
                 <a:latin typeface="Calibri"/>
               </a:rPr>
-              <a:t>Para el PI esta semana</a:t>
-            </a:r>
-          </a:p>
-        </p:txBody>
-      </p:sp>
-      <p:sp>
-        <p:nvSpPr>
-          <p:cNvPr id="5" name="Rounded Rectangle 4"/>
-          <p:cNvSpPr/>
-          <p:nvPr/>
-        </p:nvSpPr>
-        <p:spPr>
-          <a:xfrm>
-            <a:off x="457200" y="1261872"/>
-            <a:ext cx="11277295" cy="1051560"/>
-          </a:xfrm>
-          <a:prstGeom prst="roundRect">
-            <a:avLst>
-              <a:gd name="adj" fmla="val 12000"/>
-            </a:avLst>
-          </a:prstGeom>
-          <a:solidFill>
-            <a:srgbClr val="E8F4FA"/>
-          </a:solidFill>
-          <a:ln>
-            <a:noFill/>
-          </a:ln>
-        </p:spPr>
-        <p:style>
-          <a:lnRef idx="1">
-            <a:schemeClr val="accent1"/>
-          </a:lnRef>
-          <a:fillRef idx="3">
-            <a:schemeClr val="accent1"/>
-          </a:fillRef>
-          <a:effectRef idx="2">
-            <a:schemeClr val="accent1"/>
-          </a:effectRef>
-          <a:fontRef idx="minor">
-            <a:schemeClr val="lt1"/>
-          </a:fontRef>
-        </p:style>
-        <p:txBody>
-          <a:bodyPr rtlCol="0" anchor="ctr"/>
-          <a:lstStyle/>
-          <a:p>
-            <a:pPr algn="ctr"/>
-          </a:p>
-        </p:txBody>
-      </p:sp>
-      <p:sp>
-        <p:nvSpPr>
-          <p:cNvPr id="6" name="Rectangle 5"/>
-          <p:cNvSpPr/>
-          <p:nvPr/>
-        </p:nvSpPr>
-        <p:spPr>
-          <a:xfrm>
-            <a:off x="457200" y="1261872"/>
-            <a:ext cx="128016" cy="1051560"/>
-          </a:xfrm>
-          <a:prstGeom prst="rect">
-            <a:avLst/>
-          </a:prstGeom>
-          <a:solidFill>
-            <a:srgbClr val="269CCB"/>
-          </a:solidFill>
-          <a:ln>
-            <a:noFill/>
-          </a:ln>
-        </p:spPr>
-        <p:style>
-          <a:lnRef idx="1">
-            <a:schemeClr val="accent1"/>
-          </a:lnRef>
-          <a:fillRef idx="3">
-            <a:schemeClr val="accent1"/>
-          </a:fillRef>
-          <a:effectRef idx="2">
-            <a:schemeClr val="accent1"/>
-          </a:effectRef>
-          <a:fontRef idx="minor">
-            <a:schemeClr val="lt1"/>
-          </a:fontRef>
-        </p:style>
-        <p:txBody>
-          <a:bodyPr rtlCol="0" anchor="ctr"/>
-          <a:lstStyle/>
-          <a:p>
-            <a:pPr algn="ctr"/>
-          </a:p>
-        </p:txBody>
-      </p:sp>
-      <p:sp>
-        <p:nvSpPr>
-          <p:cNvPr id="7" name="TextBox 6"/>
+              <a:t>Taller PI — por que importa</a:t>
+            </a:r>
+          </a:p>
+        </p:txBody>
+      </p:sp>
+      <p:sp>
+        <p:nvSpPr>
+          <p:cNvPr id="5" name="TextBox 4"/>
           <p:cNvSpPr txBox="1"/>
           <p:nvPr/>
         </p:nvSpPr>
         <p:spPr>
           <a:xfrm>
-            <a:off x="777240" y="1399031"/>
-            <a:ext cx="10774375" cy="822959"/>
+            <a:off x="457200" y="1170432"/>
+            <a:ext cx="11277295" cy="5230368"/>
           </a:xfrm>
           <a:prstGeom prst="rect">
             <a:avLst/>
@@ -4817,313 +4521,76 @@
           </a:bodyPr>
           <a:lstStyle/>
           <a:p>
-            <a:r>
-              <a:rPr sz="1200" b="1" i="0">
-                <a:solidFill>
-                  <a:srgbClr val="269CCB"/>
-                </a:solidFill>
-                <a:latin typeface="Calibri"/>
-              </a:rPr>
-              <a:t>Info</a:t>
-            </a:r>
-          </a:p>
-          <a:p>
             <a:pPr>
-              <a:spcBef>
-                <a:spcPts val="400"/>
-              </a:spcBef>
+              <a:spcAft>
+                <a:spcPts val="800"/>
+              </a:spcAft>
             </a:pPr>
             <a:r>
-              <a:rPr sz="1400" b="0" i="0">
+              <a:rPr sz="2000" b="0" i="0">
                 <a:solidFill>
                   <a:srgbClr val="333333"/>
                 </a:solidFill>
                 <a:latin typeface="Calibri"/>
               </a:rPr>
-              <a:t>Hito: VetCare queda con un unico repositorio de datos en memoria compartido por todas las ventanas y una fabrica que crea las consultas del dominio.</a:t>
-            </a:r>
-          </a:p>
-        </p:txBody>
-      </p:sp>
-      <p:sp>
-        <p:nvSpPr>
-          <p:cNvPr id="8" name="Rounded Rectangle 7"/>
-          <p:cNvSpPr/>
-          <p:nvPr/>
-        </p:nvSpPr>
-        <p:spPr>
-          <a:xfrm>
-            <a:off x="457200" y="2478024"/>
-            <a:ext cx="11277295" cy="1051560"/>
-          </a:xfrm>
-          <a:prstGeom prst="roundRect">
-            <a:avLst>
-              <a:gd name="adj" fmla="val 12000"/>
-            </a:avLst>
-          </a:prstGeom>
-          <a:solidFill>
-            <a:srgbClr val="FFF8E1"/>
-          </a:solidFill>
-          <a:ln>
-            <a:noFill/>
-          </a:ln>
-        </p:spPr>
-        <p:style>
-          <a:lnRef idx="1">
-            <a:schemeClr val="accent1"/>
-          </a:lnRef>
-          <a:fillRef idx="3">
-            <a:schemeClr val="accent1"/>
-          </a:fillRef>
-          <a:effectRef idx="2">
-            <a:schemeClr val="accent1"/>
-          </a:effectRef>
-          <a:fontRef idx="minor">
-            <a:schemeClr val="lt1"/>
-          </a:fontRef>
-        </p:style>
-        <p:txBody>
-          <a:bodyPr rtlCol="0" anchor="ctr"/>
-          <a:lstStyle/>
-          <a:p>
-            <a:pPr algn="ctr"/>
-          </a:p>
-        </p:txBody>
-      </p:sp>
-      <p:sp>
-        <p:nvSpPr>
-          <p:cNvPr id="9" name="Rectangle 8"/>
-          <p:cNvSpPr/>
-          <p:nvPr/>
-        </p:nvSpPr>
-        <p:spPr>
-          <a:xfrm>
-            <a:off x="457200" y="2478024"/>
-            <a:ext cx="128016" cy="1051560"/>
-          </a:xfrm>
-          <a:prstGeom prst="rect">
-            <a:avLst/>
-          </a:prstGeom>
-          <a:solidFill>
-            <a:srgbClr val="FFD000"/>
-          </a:solidFill>
-          <a:ln>
-            <a:noFill/>
-          </a:ln>
-        </p:spPr>
-        <p:style>
-          <a:lnRef idx="1">
-            <a:schemeClr val="accent1"/>
-          </a:lnRef>
-          <a:fillRef idx="3">
-            <a:schemeClr val="accent1"/>
-          </a:fillRef>
-          <a:effectRef idx="2">
-            <a:schemeClr val="accent1"/>
-          </a:effectRef>
-          <a:fontRef idx="minor">
-            <a:schemeClr val="lt1"/>
-          </a:fontRef>
-        </p:style>
-        <p:txBody>
-          <a:bodyPr rtlCol="0" anchor="ctr"/>
-          <a:lstStyle/>
-          <a:p>
-            <a:pPr algn="ctr"/>
-          </a:p>
-        </p:txBody>
-      </p:sp>
-      <p:sp>
-        <p:nvSpPr>
-          <p:cNvPr id="10" name="TextBox 9"/>
-          <p:cNvSpPr txBox="1"/>
-          <p:nvPr/>
-        </p:nvSpPr>
-        <p:spPr>
-          <a:xfrm>
-            <a:off x="777240" y="2615184"/>
-            <a:ext cx="10774375" cy="822959"/>
-          </a:xfrm>
-          <a:prstGeom prst="rect">
-            <a:avLst/>
-          </a:prstGeom>
-          <a:noFill/>
-        </p:spPr>
-        <p:txBody>
-          <a:bodyPr wrap="square">
-            <a:spAutoFit/>
-          </a:bodyPr>
-          <a:lstStyle/>
-          <a:p>
-            <a:r>
-              <a:rPr sz="1200" b="1" i="0">
-                <a:solidFill>
-                  <a:srgbClr val="FFD000"/>
-                </a:solidFill>
-                <a:latin typeface="Calibri"/>
-              </a:rPr>
-              <a:t>Aclaración</a:t>
+              <a:t>–   </a:t>
+            </a:r>
+            <a:r>
+              <a:rPr sz="2000" b="1" i="0">
+                <a:solidFill>
+                  <a:srgbClr val="333333"/>
+                </a:solidFill>
+                <a:latin typeface="Calibri"/>
+              </a:rPr>
+              <a:t>Por que importa al PI:</a:t>
+            </a:r>
+            <a:r>
+              <a:rPr sz="2000" b="0" i="0">
+                <a:solidFill>
+                  <a:srgbClr val="333333"/>
+                </a:solidFill>
+                <a:latin typeface="Calibri"/>
+              </a:rPr>
+              <a:t> el PI pide una sola aplicacion con varias ventanas trabajando sobre los mismos datos; sin un unico repositorio compartido, la agenda de citas nunca vera las mascotas registradas.</a:t>
             </a:r>
           </a:p>
           <a:p>
             <a:pPr>
-              <a:spcBef>
-                <a:spcPts val="400"/>
-              </a:spcBef>
+              <a:spcAft>
+                <a:spcPts val="800"/>
+              </a:spcAft>
             </a:pPr>
             <a:r>
-              <a:rPr sz="1400" b="0" i="0">
+              <a:rPr sz="2000" b="0" i="0">
                 <a:solidFill>
                   <a:srgbClr val="333333"/>
                 </a:solidFill>
                 <a:latin typeface="Calibri"/>
               </a:rPr>
-              <a:t>Enunciado completo: Clases/Proyecto Integrador/ (VetCare).</a:t>
-            </a:r>
-          </a:p>
-        </p:txBody>
-      </p:sp>
-      <p:sp>
-        <p:nvSpPr>
-          <p:cNvPr id="11" name="Rounded Rectangle 10"/>
-          <p:cNvSpPr/>
-          <p:nvPr/>
-        </p:nvSpPr>
-        <p:spPr>
-          <a:xfrm>
-            <a:off x="457200" y="3694176"/>
-            <a:ext cx="11277295" cy="1051560"/>
-          </a:xfrm>
-          <a:prstGeom prst="roundRect">
-            <a:avLst>
-              <a:gd name="adj" fmla="val 12000"/>
-            </a:avLst>
-          </a:prstGeom>
-          <a:solidFill>
-            <a:srgbClr val="FBE4E4"/>
-          </a:solidFill>
-          <a:ln>
-            <a:noFill/>
-          </a:ln>
-        </p:spPr>
-        <p:style>
-          <a:lnRef idx="1">
-            <a:schemeClr val="accent1"/>
-          </a:lnRef>
-          <a:fillRef idx="3">
-            <a:schemeClr val="accent1"/>
-          </a:fillRef>
-          <a:effectRef idx="2">
-            <a:schemeClr val="accent1"/>
-          </a:effectRef>
-          <a:fontRef idx="minor">
-            <a:schemeClr val="lt1"/>
-          </a:fontRef>
-        </p:style>
-        <p:txBody>
-          <a:bodyPr rtlCol="0" anchor="ctr"/>
-          <a:lstStyle/>
-          <a:p>
-            <a:pPr algn="ctr"/>
-          </a:p>
-        </p:txBody>
-      </p:sp>
-      <p:sp>
-        <p:nvSpPr>
-          <p:cNvPr id="12" name="Rectangle 11"/>
-          <p:cNvSpPr/>
-          <p:nvPr/>
-        </p:nvSpPr>
-        <p:spPr>
-          <a:xfrm>
-            <a:off x="457200" y="3694176"/>
-            <a:ext cx="128016" cy="1051560"/>
-          </a:xfrm>
-          <a:prstGeom prst="rect">
-            <a:avLst/>
-          </a:prstGeom>
-          <a:solidFill>
-            <a:srgbClr val="A02030"/>
-          </a:solidFill>
-          <a:ln>
-            <a:noFill/>
-          </a:ln>
-        </p:spPr>
-        <p:style>
-          <a:lnRef idx="1">
-            <a:schemeClr val="accent1"/>
-          </a:lnRef>
-          <a:fillRef idx="3">
-            <a:schemeClr val="accent1"/>
-          </a:fillRef>
-          <a:effectRef idx="2">
-            <a:schemeClr val="accent1"/>
-          </a:effectRef>
-          <a:fontRef idx="minor">
-            <a:schemeClr val="lt1"/>
-          </a:fontRef>
-        </p:style>
-        <p:txBody>
-          <a:bodyPr rtlCol="0" anchor="ctr"/>
-          <a:lstStyle/>
-          <a:p>
-            <a:pPr algn="ctr"/>
-          </a:p>
-        </p:txBody>
-      </p:sp>
-      <p:sp>
-        <p:nvSpPr>
-          <p:cNvPr id="13" name="TextBox 12"/>
-          <p:cNvSpPr txBox="1"/>
-          <p:nvPr/>
-        </p:nvSpPr>
-        <p:spPr>
-          <a:xfrm>
-            <a:off x="777240" y="3831336"/>
-            <a:ext cx="10774375" cy="822959"/>
-          </a:xfrm>
-          <a:prstGeom prst="rect">
-            <a:avLst/>
-          </a:prstGeom>
-          <a:noFill/>
-        </p:spPr>
-        <p:txBody>
-          <a:bodyPr wrap="square">
-            <a:spAutoFit/>
-          </a:bodyPr>
-          <a:lstStyle/>
-          <a:p>
-            <a:r>
-              <a:rPr sz="1200" b="1" i="0">
-                <a:solidFill>
-                  <a:srgbClr val="A02030"/>
-                </a:solidFill>
-                <a:latin typeface="Calibri"/>
-              </a:rPr>
-              <a:t>Atención</a:t>
+              <a:t>–   La fabrica de consultas es la que va a permitir agregar nuevos servicios de la clinica (guarderia, cirugia) sin tocar el codigo de las ventanas.</a:t>
             </a:r>
           </a:p>
           <a:p>
             <a:pPr>
-              <a:spcBef>
-                <a:spcPts val="400"/>
-              </a:spcBef>
+              <a:spcAft>
+                <a:spcPts val="800"/>
+              </a:spcAft>
             </a:pPr>
             <a:r>
-              <a:rPr sz="1400" b="0" i="0">
+              <a:rPr sz="2000" b="0" i="0">
                 <a:solidFill>
                   <a:srgbClr val="333333"/>
                 </a:solidFill>
                 <a:latin typeface="Calibri"/>
               </a:rPr>
-              <a:t>Entrega del taller, si el docente lo asigna · en la fecha que indique el docente.</a:t>
-            </a:r>
-          </a:p>
-        </p:txBody>
-      </p:sp>
-      <p:sp>
-        <p:nvSpPr>
-          <p:cNvPr id="14" name="TextBox 13"/>
+              <a:t>–   El punto unico de acceso a los datos es tambien el punto unico por donde despues pasara la lectura y escritura de los archivos .txt/.csv del PI.</a:t>
+            </a:r>
+          </a:p>
+        </p:txBody>
+      </p:sp>
+      <p:sp>
+        <p:nvSpPr>
+          <p:cNvPr id="6" name="TextBox 5"/>
           <p:cNvSpPr txBox="1"/>
           <p:nvPr/>
         </p:nvSpPr>
@@ -5191,6 +4658,2893 @@
         <p:spPr>
           <a:xfrm>
             <a:off x="0" y="0"/>
+            <a:ext cx="12191695" cy="960120"/>
+          </a:xfrm>
+          <a:prstGeom prst="rect">
+            <a:avLst/>
+          </a:prstGeom>
+          <a:solidFill>
+            <a:srgbClr val="095292"/>
+          </a:solidFill>
+          <a:ln>
+            <a:noFill/>
+          </a:ln>
+        </p:spPr>
+        <p:style>
+          <a:lnRef idx="1">
+            <a:schemeClr val="accent1"/>
+          </a:lnRef>
+          <a:fillRef idx="3">
+            <a:schemeClr val="accent1"/>
+          </a:fillRef>
+          <a:effectRef idx="2">
+            <a:schemeClr val="accent1"/>
+          </a:effectRef>
+          <a:fontRef idx="minor">
+            <a:schemeClr val="lt1"/>
+          </a:fontRef>
+        </p:style>
+        <p:txBody>
+          <a:bodyPr rtlCol="0" anchor="ctr"/>
+          <a:lstStyle/>
+          <a:p>
+            <a:pPr algn="ctr"/>
+          </a:p>
+        </p:txBody>
+      </p:sp>
+      <p:sp>
+        <p:nvSpPr>
+          <p:cNvPr id="3" name="Rectangle 2"/>
+          <p:cNvSpPr/>
+          <p:nvPr/>
+        </p:nvSpPr>
+        <p:spPr>
+          <a:xfrm>
+            <a:off x="0" y="960120"/>
+            <a:ext cx="12191695" cy="41148"/>
+          </a:xfrm>
+          <a:prstGeom prst="rect">
+            <a:avLst/>
+          </a:prstGeom>
+          <a:solidFill>
+            <a:srgbClr val="FFD000"/>
+          </a:solidFill>
+          <a:ln>
+            <a:noFill/>
+          </a:ln>
+        </p:spPr>
+        <p:style>
+          <a:lnRef idx="1">
+            <a:schemeClr val="accent1"/>
+          </a:lnRef>
+          <a:fillRef idx="3">
+            <a:schemeClr val="accent1"/>
+          </a:fillRef>
+          <a:effectRef idx="2">
+            <a:schemeClr val="accent1"/>
+          </a:effectRef>
+          <a:fontRef idx="minor">
+            <a:schemeClr val="lt1"/>
+          </a:fontRef>
+        </p:style>
+        <p:txBody>
+          <a:bodyPr rtlCol="0" anchor="ctr"/>
+          <a:lstStyle/>
+          <a:p>
+            <a:pPr algn="ctr"/>
+          </a:p>
+        </p:txBody>
+      </p:sp>
+      <p:sp>
+        <p:nvSpPr>
+          <p:cNvPr id="4" name="TextBox 3"/>
+          <p:cNvSpPr txBox="1"/>
+          <p:nvPr/>
+        </p:nvSpPr>
+        <p:spPr>
+          <a:xfrm>
+            <a:off x="457200" y="164592"/>
+            <a:ext cx="11277295" cy="502920"/>
+          </a:xfrm>
+          <a:prstGeom prst="rect">
+            <a:avLst/>
+          </a:prstGeom>
+          <a:noFill/>
+        </p:spPr>
+        <p:txBody>
+          <a:bodyPr wrap="square">
+            <a:spAutoFit/>
+          </a:bodyPr>
+          <a:lstStyle/>
+          <a:p>
+            <a:r>
+              <a:rPr sz="2600" b="1" i="0">
+                <a:solidFill>
+                  <a:srgbClr val="FFFFFF"/>
+                </a:solidFill>
+                <a:latin typeface="Calibri"/>
+              </a:rPr>
+              <a:t>Taller PI — punto de partida</a:t>
+            </a:r>
+          </a:p>
+        </p:txBody>
+      </p:sp>
+      <p:sp>
+        <p:nvSpPr>
+          <p:cNvPr id="5" name="TextBox 4"/>
+          <p:cNvSpPr txBox="1"/>
+          <p:nvPr/>
+        </p:nvSpPr>
+        <p:spPr>
+          <a:xfrm>
+            <a:off x="457200" y="1170432"/>
+            <a:ext cx="11277295" cy="5230368"/>
+          </a:xfrm>
+          <a:prstGeom prst="rect">
+            <a:avLst/>
+          </a:prstGeom>
+          <a:noFill/>
+        </p:spPr>
+        <p:txBody>
+          <a:bodyPr wrap="square">
+            <a:spAutoFit/>
+          </a:bodyPr>
+          <a:lstStyle/>
+          <a:p>
+            <a:pPr>
+              <a:spcAft>
+                <a:spcPts val="800"/>
+              </a:spcAft>
+            </a:pPr>
+            <a:r>
+              <a:rPr sz="2000" b="0" i="0">
+                <a:solidFill>
+                  <a:srgbClr val="333333"/>
+                </a:solidFill>
+                <a:latin typeface="Calibri"/>
+              </a:rPr>
+              <a:t>–   VetCare ya tiene la ventana de registro funcionando y esta a punto de nacer la ventana de agendamiento de citas.</a:t>
+            </a:r>
+          </a:p>
+          <a:p>
+            <a:pPr>
+              <a:spcAft>
+                <a:spcPts val="800"/>
+              </a:spcAft>
+            </a:pPr>
+            <a:r>
+              <a:rPr sz="2000" b="0" i="0">
+                <a:solidFill>
+                  <a:srgbClr val="333333"/>
+                </a:solidFill>
+                <a:latin typeface="Calibri"/>
+              </a:rPr>
+              <a:t>–   Cada ventana esta creando hoy su propio repositorio, asi que lo registrado en una es invisible para la otra.</a:t>
+            </a:r>
+          </a:p>
+          <a:p>
+            <a:pPr>
+              <a:spcAft>
+                <a:spcPts val="800"/>
+              </a:spcAft>
+            </a:pPr>
+            <a:r>
+              <a:rPr sz="2000" b="0" i="0">
+                <a:solidFill>
+                  <a:srgbClr val="333333"/>
+                </a:solidFill>
+                <a:latin typeface="Calibri"/>
+              </a:rPr>
+              <a:t>–   La clinica Huellitas maneja por ahora tres tipos de consulta: vacunacion (15 min, 35.000), control (30 min, 60.000) y urgencia (45 min, 120.000).</a:t>
+            </a:r>
+          </a:p>
+        </p:txBody>
+      </p:sp>
+      <p:sp>
+        <p:nvSpPr>
+          <p:cNvPr id="6" name="TextBox 5"/>
+          <p:cNvSpPr txBox="1"/>
+          <p:nvPr/>
+        </p:nvSpPr>
+        <p:spPr>
+          <a:xfrm>
+            <a:off x="11185855" y="6473952"/>
+            <a:ext cx="640080" cy="274320"/>
+          </a:xfrm>
+          <a:prstGeom prst="rect">
+            <a:avLst/>
+          </a:prstGeom>
+          <a:noFill/>
+        </p:spPr>
+        <p:txBody>
+          <a:bodyPr wrap="square">
+            <a:spAutoFit/>
+          </a:bodyPr>
+          <a:lstStyle/>
+          <a:p>
+            <a:pPr algn="r"/>
+            <a:r>
+              <a:rPr sz="1100" b="0" i="0">
+                <a:solidFill>
+                  <a:srgbClr val="666666"/>
+                </a:solidFill>
+                <a:latin typeface="Calibri"/>
+              </a:rPr>
+              <a:t>13</a:t>
+            </a:r>
+          </a:p>
+        </p:txBody>
+      </p:sp>
+    </p:spTree>
+  </p:cSld>
+  <p:clrMapOvr>
+    <a:masterClrMapping/>
+  </p:clrMapOvr>
+</p:sld>
+</file>
+
+<file path=ppt/slides/slide14.xml><?xml version="1.0" encoding="utf-8"?>
+<p:sld xmlns:a="http://schemas.openxmlformats.org/drawingml/2006/main" xmlns:p="http://schemas.openxmlformats.org/presentationml/2006/main" xmlns:r="http://schemas.openxmlformats.org/officeDocument/2006/relationships">
+  <p:cSld>
+    <p:bg>
+      <p:bgPr>
+        <a:solidFill>
+          <a:srgbClr val="FFFFFF"/>
+        </a:solidFill>
+        <a:effectLst/>
+      </p:bgPr>
+    </p:bg>
+    <p:spTree>
+      <p:nvGrpSpPr>
+        <p:cNvPr id="1" name=""/>
+        <p:cNvGrpSpPr/>
+        <p:nvPr/>
+      </p:nvGrpSpPr>
+      <p:grpSpPr/>
+      <p:sp>
+        <p:nvSpPr>
+          <p:cNvPr id="2" name="Rectangle 1"/>
+          <p:cNvSpPr/>
+          <p:nvPr/>
+        </p:nvSpPr>
+        <p:spPr>
+          <a:xfrm>
+            <a:off x="0" y="0"/>
+            <a:ext cx="12191695" cy="960120"/>
+          </a:xfrm>
+          <a:prstGeom prst="rect">
+            <a:avLst/>
+          </a:prstGeom>
+          <a:solidFill>
+            <a:srgbClr val="095292"/>
+          </a:solidFill>
+          <a:ln>
+            <a:noFill/>
+          </a:ln>
+        </p:spPr>
+        <p:style>
+          <a:lnRef idx="1">
+            <a:schemeClr val="accent1"/>
+          </a:lnRef>
+          <a:fillRef idx="3">
+            <a:schemeClr val="accent1"/>
+          </a:fillRef>
+          <a:effectRef idx="2">
+            <a:schemeClr val="accent1"/>
+          </a:effectRef>
+          <a:fontRef idx="minor">
+            <a:schemeClr val="lt1"/>
+          </a:fontRef>
+        </p:style>
+        <p:txBody>
+          <a:bodyPr rtlCol="0" anchor="ctr"/>
+          <a:lstStyle/>
+          <a:p>
+            <a:pPr algn="ctr"/>
+          </a:p>
+        </p:txBody>
+      </p:sp>
+      <p:sp>
+        <p:nvSpPr>
+          <p:cNvPr id="3" name="Rectangle 2"/>
+          <p:cNvSpPr/>
+          <p:nvPr/>
+        </p:nvSpPr>
+        <p:spPr>
+          <a:xfrm>
+            <a:off x="0" y="960120"/>
+            <a:ext cx="12191695" cy="41148"/>
+          </a:xfrm>
+          <a:prstGeom prst="rect">
+            <a:avLst/>
+          </a:prstGeom>
+          <a:solidFill>
+            <a:srgbClr val="FFD000"/>
+          </a:solidFill>
+          <a:ln>
+            <a:noFill/>
+          </a:ln>
+        </p:spPr>
+        <p:style>
+          <a:lnRef idx="1">
+            <a:schemeClr val="accent1"/>
+          </a:lnRef>
+          <a:fillRef idx="3">
+            <a:schemeClr val="accent1"/>
+          </a:fillRef>
+          <a:effectRef idx="2">
+            <a:schemeClr val="accent1"/>
+          </a:effectRef>
+          <a:fontRef idx="minor">
+            <a:schemeClr val="lt1"/>
+          </a:fontRef>
+        </p:style>
+        <p:txBody>
+          <a:bodyPr rtlCol="0" anchor="ctr"/>
+          <a:lstStyle/>
+          <a:p>
+            <a:pPr algn="ctr"/>
+          </a:p>
+        </p:txBody>
+      </p:sp>
+      <p:sp>
+        <p:nvSpPr>
+          <p:cNvPr id="4" name="TextBox 3"/>
+          <p:cNvSpPr txBox="1"/>
+          <p:nvPr/>
+        </p:nvSpPr>
+        <p:spPr>
+          <a:xfrm>
+            <a:off x="457200" y="164592"/>
+            <a:ext cx="11277295" cy="502920"/>
+          </a:xfrm>
+          <a:prstGeom prst="rect">
+            <a:avLst/>
+          </a:prstGeom>
+          <a:noFill/>
+        </p:spPr>
+        <p:txBody>
+          <a:bodyPr wrap="square">
+            <a:spAutoFit/>
+          </a:bodyPr>
+          <a:lstStyle/>
+          <a:p>
+            <a:r>
+              <a:rPr sz="2600" b="1" i="0">
+                <a:solidFill>
+                  <a:srgbClr val="FFFFFF"/>
+                </a:solidFill>
+                <a:latin typeface="Calibri"/>
+              </a:rPr>
+              <a:t>Taller PI — pasos guiados</a:t>
+            </a:r>
+          </a:p>
+        </p:txBody>
+      </p:sp>
+      <p:sp>
+        <p:nvSpPr>
+          <p:cNvPr id="5" name="Rounded Rectangle 4"/>
+          <p:cNvSpPr/>
+          <p:nvPr/>
+        </p:nvSpPr>
+        <p:spPr>
+          <a:xfrm>
+            <a:off x="457200" y="1234440"/>
+            <a:ext cx="11277295" cy="950976"/>
+          </a:xfrm>
+          <a:prstGeom prst="roundRect">
+            <a:avLst>
+              <a:gd name="adj" fmla="val 12000"/>
+            </a:avLst>
+          </a:prstGeom>
+          <a:solidFill>
+            <a:srgbClr val="F2F2F2"/>
+          </a:solidFill>
+          <a:ln>
+            <a:noFill/>
+          </a:ln>
+        </p:spPr>
+        <p:style>
+          <a:lnRef idx="1">
+            <a:schemeClr val="accent1"/>
+          </a:lnRef>
+          <a:fillRef idx="3">
+            <a:schemeClr val="accent1"/>
+          </a:fillRef>
+          <a:effectRef idx="2">
+            <a:schemeClr val="accent1"/>
+          </a:effectRef>
+          <a:fontRef idx="minor">
+            <a:schemeClr val="lt1"/>
+          </a:fontRef>
+        </p:style>
+        <p:txBody>
+          <a:bodyPr rtlCol="0" anchor="ctr"/>
+          <a:lstStyle/>
+          <a:p>
+            <a:pPr algn="ctr"/>
+          </a:p>
+        </p:txBody>
+      </p:sp>
+      <p:sp>
+        <p:nvSpPr>
+          <p:cNvPr id="6" name="Rounded Rectangle 5"/>
+          <p:cNvSpPr/>
+          <p:nvPr/>
+        </p:nvSpPr>
+        <p:spPr>
+          <a:xfrm>
+            <a:off x="594360" y="1490472"/>
+            <a:ext cx="438912" cy="438912"/>
+          </a:xfrm>
+          <a:prstGeom prst="roundRect">
+            <a:avLst>
+              <a:gd name="adj" fmla="val 12000"/>
+            </a:avLst>
+          </a:prstGeom>
+          <a:solidFill>
+            <a:srgbClr val="095292"/>
+          </a:solidFill>
+          <a:ln>
+            <a:noFill/>
+          </a:ln>
+        </p:spPr>
+        <p:style>
+          <a:lnRef idx="1">
+            <a:schemeClr val="accent1"/>
+          </a:lnRef>
+          <a:fillRef idx="3">
+            <a:schemeClr val="accent1"/>
+          </a:fillRef>
+          <a:effectRef idx="2">
+            <a:schemeClr val="accent1"/>
+          </a:effectRef>
+          <a:fontRef idx="minor">
+            <a:schemeClr val="lt1"/>
+          </a:fontRef>
+        </p:style>
+        <p:txBody>
+          <a:bodyPr rtlCol="0" anchor="ctr"/>
+          <a:lstStyle/>
+          <a:p>
+            <a:pPr algn="ctr"/>
+          </a:p>
+        </p:txBody>
+      </p:sp>
+      <p:sp>
+        <p:nvSpPr>
+          <p:cNvPr id="7" name="TextBox 6"/>
+          <p:cNvSpPr txBox="1"/>
+          <p:nvPr/>
+        </p:nvSpPr>
+        <p:spPr>
+          <a:xfrm>
+            <a:off x="594360" y="1490472"/>
+            <a:ext cx="438912" cy="438912"/>
+          </a:xfrm>
+          <a:prstGeom prst="rect">
+            <a:avLst/>
+          </a:prstGeom>
+          <a:noFill/>
+        </p:spPr>
+        <p:txBody>
+          <a:bodyPr wrap="square" anchor="ctr"/>
+          <a:lstStyle/>
+          <a:p>
+            <a:pPr algn="ctr"/>
+            <a:r>
+              <a:rPr sz="1600" b="1" i="0">
+                <a:solidFill>
+                  <a:srgbClr val="FFFFFF"/>
+                </a:solidFill>
+                <a:latin typeface="Calibri"/>
+              </a:rPr>
+              <a:t>1</a:t>
+            </a:r>
+          </a:p>
+        </p:txBody>
+      </p:sp>
+      <p:sp>
+        <p:nvSpPr>
+          <p:cNvPr id="8" name="TextBox 7"/>
+          <p:cNvSpPr txBox="1"/>
+          <p:nvPr/>
+        </p:nvSpPr>
+        <p:spPr>
+          <a:xfrm>
+            <a:off x="1188720" y="1325880"/>
+            <a:ext cx="10271455" cy="786384"/>
+          </a:xfrm>
+          <a:prstGeom prst="rect">
+            <a:avLst/>
+          </a:prstGeom>
+          <a:noFill/>
+        </p:spPr>
+        <p:txBody>
+          <a:bodyPr wrap="square" anchor="ctr"/>
+          <a:lstStyle/>
+          <a:p>
+            <a:r>
+              <a:rPr sz="1400" b="1" i="0">
+                <a:solidFill>
+                  <a:srgbClr val="095292"/>
+                </a:solidFill>
+                <a:latin typeface="Calibri"/>
+              </a:rPr>
+              <a:t>Convierta RepositorioVetCare en Singleton: atributo private static instancia, constructor private con un System.out.println que avise cuando se crea, y metodo public static synchronized getInstancia(); ejecute el programa y verifique que el mensaje de creacion aparece una sola vez aunque llame getInstancia() tres veces.</a:t>
+            </a:r>
+          </a:p>
+        </p:txBody>
+      </p:sp>
+      <p:sp>
+        <p:nvSpPr>
+          <p:cNvPr id="9" name="Rounded Rectangle 8"/>
+          <p:cNvSpPr/>
+          <p:nvPr/>
+        </p:nvSpPr>
+        <p:spPr>
+          <a:xfrm>
+            <a:off x="457200" y="2276856"/>
+            <a:ext cx="11277295" cy="950976"/>
+          </a:xfrm>
+          <a:prstGeom prst="roundRect">
+            <a:avLst>
+              <a:gd name="adj" fmla="val 12000"/>
+            </a:avLst>
+          </a:prstGeom>
+          <a:solidFill>
+            <a:srgbClr val="E8F4FA"/>
+          </a:solidFill>
+          <a:ln>
+            <a:noFill/>
+          </a:ln>
+        </p:spPr>
+        <p:style>
+          <a:lnRef idx="1">
+            <a:schemeClr val="accent1"/>
+          </a:lnRef>
+          <a:fillRef idx="3">
+            <a:schemeClr val="accent1"/>
+          </a:fillRef>
+          <a:effectRef idx="2">
+            <a:schemeClr val="accent1"/>
+          </a:effectRef>
+          <a:fontRef idx="minor">
+            <a:schemeClr val="lt1"/>
+          </a:fontRef>
+        </p:style>
+        <p:txBody>
+          <a:bodyPr rtlCol="0" anchor="ctr"/>
+          <a:lstStyle/>
+          <a:p>
+            <a:pPr algn="ctr"/>
+          </a:p>
+        </p:txBody>
+      </p:sp>
+      <p:sp>
+        <p:nvSpPr>
+          <p:cNvPr id="10" name="Rounded Rectangle 9"/>
+          <p:cNvSpPr/>
+          <p:nvPr/>
+        </p:nvSpPr>
+        <p:spPr>
+          <a:xfrm>
+            <a:off x="594360" y="2532888"/>
+            <a:ext cx="438912" cy="438912"/>
+          </a:xfrm>
+          <a:prstGeom prst="roundRect">
+            <a:avLst>
+              <a:gd name="adj" fmla="val 12000"/>
+            </a:avLst>
+          </a:prstGeom>
+          <a:solidFill>
+            <a:srgbClr val="095292"/>
+          </a:solidFill>
+          <a:ln>
+            <a:noFill/>
+          </a:ln>
+        </p:spPr>
+        <p:style>
+          <a:lnRef idx="1">
+            <a:schemeClr val="accent1"/>
+          </a:lnRef>
+          <a:fillRef idx="3">
+            <a:schemeClr val="accent1"/>
+          </a:fillRef>
+          <a:effectRef idx="2">
+            <a:schemeClr val="accent1"/>
+          </a:effectRef>
+          <a:fontRef idx="minor">
+            <a:schemeClr val="lt1"/>
+          </a:fontRef>
+        </p:style>
+        <p:txBody>
+          <a:bodyPr rtlCol="0" anchor="ctr"/>
+          <a:lstStyle/>
+          <a:p>
+            <a:pPr algn="ctr"/>
+          </a:p>
+        </p:txBody>
+      </p:sp>
+      <p:sp>
+        <p:nvSpPr>
+          <p:cNvPr id="11" name="TextBox 10"/>
+          <p:cNvSpPr txBox="1"/>
+          <p:nvPr/>
+        </p:nvSpPr>
+        <p:spPr>
+          <a:xfrm>
+            <a:off x="594360" y="2532888"/>
+            <a:ext cx="438912" cy="438912"/>
+          </a:xfrm>
+          <a:prstGeom prst="rect">
+            <a:avLst/>
+          </a:prstGeom>
+          <a:noFill/>
+        </p:spPr>
+        <p:txBody>
+          <a:bodyPr wrap="square" anchor="ctr"/>
+          <a:lstStyle/>
+          <a:p>
+            <a:pPr algn="ctr"/>
+            <a:r>
+              <a:rPr sz="1600" b="1" i="0">
+                <a:solidFill>
+                  <a:srgbClr val="FFFFFF"/>
+                </a:solidFill>
+                <a:latin typeface="Calibri"/>
+              </a:rPr>
+              <a:t>2</a:t>
+            </a:r>
+          </a:p>
+        </p:txBody>
+      </p:sp>
+      <p:sp>
+        <p:nvSpPr>
+          <p:cNvPr id="12" name="TextBox 11"/>
+          <p:cNvSpPr txBox="1"/>
+          <p:nvPr/>
+        </p:nvSpPr>
+        <p:spPr>
+          <a:xfrm>
+            <a:off x="1188720" y="2368296"/>
+            <a:ext cx="10271455" cy="786384"/>
+          </a:xfrm>
+          <a:prstGeom prst="rect">
+            <a:avLst/>
+          </a:prstGeom>
+          <a:noFill/>
+        </p:spPr>
+        <p:txBody>
+          <a:bodyPr wrap="square" anchor="ctr"/>
+          <a:lstStyle/>
+          <a:p>
+            <a:r>
+              <a:rPr sz="1400" b="1" i="0">
+                <a:solidFill>
+                  <a:srgbClr val="095292"/>
+                </a:solidFill>
+                <a:latin typeface="Calibri"/>
+              </a:rPr>
+              <a:t>Elimine todos los 'new RepositorioVetCare()' que queden en las ventanas y reemplacelos por RepositorioVetCare.getInstancia(); use Ctrl+F en el proyecto para confirmar que no queda ni uno solo fuera del propio metodo getInstancia.</a:t>
+            </a:r>
+          </a:p>
+        </p:txBody>
+      </p:sp>
+      <p:sp>
+        <p:nvSpPr>
+          <p:cNvPr id="13" name="Rounded Rectangle 12"/>
+          <p:cNvSpPr/>
+          <p:nvPr/>
+        </p:nvSpPr>
+        <p:spPr>
+          <a:xfrm>
+            <a:off x="457200" y="3319272"/>
+            <a:ext cx="11277295" cy="950976"/>
+          </a:xfrm>
+          <a:prstGeom prst="roundRect">
+            <a:avLst>
+              <a:gd name="adj" fmla="val 12000"/>
+            </a:avLst>
+          </a:prstGeom>
+          <a:solidFill>
+            <a:srgbClr val="F2F2F2"/>
+          </a:solidFill>
+          <a:ln>
+            <a:noFill/>
+          </a:ln>
+        </p:spPr>
+        <p:style>
+          <a:lnRef idx="1">
+            <a:schemeClr val="accent1"/>
+          </a:lnRef>
+          <a:fillRef idx="3">
+            <a:schemeClr val="accent1"/>
+          </a:fillRef>
+          <a:effectRef idx="2">
+            <a:schemeClr val="accent1"/>
+          </a:effectRef>
+          <a:fontRef idx="minor">
+            <a:schemeClr val="lt1"/>
+          </a:fontRef>
+        </p:style>
+        <p:txBody>
+          <a:bodyPr rtlCol="0" anchor="ctr"/>
+          <a:lstStyle/>
+          <a:p>
+            <a:pPr algn="ctr"/>
+          </a:p>
+        </p:txBody>
+      </p:sp>
+      <p:sp>
+        <p:nvSpPr>
+          <p:cNvPr id="14" name="Rounded Rectangle 13"/>
+          <p:cNvSpPr/>
+          <p:nvPr/>
+        </p:nvSpPr>
+        <p:spPr>
+          <a:xfrm>
+            <a:off x="594360" y="3575304"/>
+            <a:ext cx="438912" cy="438912"/>
+          </a:xfrm>
+          <a:prstGeom prst="roundRect">
+            <a:avLst>
+              <a:gd name="adj" fmla="val 12000"/>
+            </a:avLst>
+          </a:prstGeom>
+          <a:solidFill>
+            <a:srgbClr val="095292"/>
+          </a:solidFill>
+          <a:ln>
+            <a:noFill/>
+          </a:ln>
+        </p:spPr>
+        <p:style>
+          <a:lnRef idx="1">
+            <a:schemeClr val="accent1"/>
+          </a:lnRef>
+          <a:fillRef idx="3">
+            <a:schemeClr val="accent1"/>
+          </a:fillRef>
+          <a:effectRef idx="2">
+            <a:schemeClr val="accent1"/>
+          </a:effectRef>
+          <a:fontRef idx="minor">
+            <a:schemeClr val="lt1"/>
+          </a:fontRef>
+        </p:style>
+        <p:txBody>
+          <a:bodyPr rtlCol="0" anchor="ctr"/>
+          <a:lstStyle/>
+          <a:p>
+            <a:pPr algn="ctr"/>
+          </a:p>
+        </p:txBody>
+      </p:sp>
+      <p:sp>
+        <p:nvSpPr>
+          <p:cNvPr id="15" name="TextBox 14"/>
+          <p:cNvSpPr txBox="1"/>
+          <p:nvPr/>
+        </p:nvSpPr>
+        <p:spPr>
+          <a:xfrm>
+            <a:off x="594360" y="3575304"/>
+            <a:ext cx="438912" cy="438912"/>
+          </a:xfrm>
+          <a:prstGeom prst="rect">
+            <a:avLst/>
+          </a:prstGeom>
+          <a:noFill/>
+        </p:spPr>
+        <p:txBody>
+          <a:bodyPr wrap="square" anchor="ctr"/>
+          <a:lstStyle/>
+          <a:p>
+            <a:pPr algn="ctr"/>
+            <a:r>
+              <a:rPr sz="1600" b="1" i="0">
+                <a:solidFill>
+                  <a:srgbClr val="FFFFFF"/>
+                </a:solidFill>
+                <a:latin typeface="Calibri"/>
+              </a:rPr>
+              <a:t>3</a:t>
+            </a:r>
+          </a:p>
+        </p:txBody>
+      </p:sp>
+      <p:sp>
+        <p:nvSpPr>
+          <p:cNvPr id="16" name="TextBox 15"/>
+          <p:cNvSpPr txBox="1"/>
+          <p:nvPr/>
+        </p:nvSpPr>
+        <p:spPr>
+          <a:xfrm>
+            <a:off x="1188720" y="3410712"/>
+            <a:ext cx="10271455" cy="786384"/>
+          </a:xfrm>
+          <a:prstGeom prst="rect">
+            <a:avLst/>
+          </a:prstGeom>
+          <a:noFill/>
+        </p:spPr>
+        <p:txBody>
+          <a:bodyPr wrap="square" anchor="ctr"/>
+          <a:lstStyle/>
+          <a:p>
+            <a:r>
+              <a:rPr sz="1400" b="1" i="0">
+                <a:solidFill>
+                  <a:srgbClr val="095292"/>
+                </a:solidFill>
+                <a:latin typeface="Calibri"/>
+              </a:rPr>
+              <a:t>Cree la jerarquia Consulta (abstracta) con ConsultaVacunacion, ConsultaControl y ConsultaUrgencia, cada una con su duracionMinutos() y tarifaBase(), y la clase FabricaConsultas con el metodo estatico crear(String tipo, String idMascota) que normalice el texto y lance IllegalArgumentException si el tipo no existe.</a:t>
+            </a:r>
+          </a:p>
+        </p:txBody>
+      </p:sp>
+      <p:sp>
+        <p:nvSpPr>
+          <p:cNvPr id="17" name="Rounded Rectangle 16"/>
+          <p:cNvSpPr/>
+          <p:nvPr/>
+        </p:nvSpPr>
+        <p:spPr>
+          <a:xfrm>
+            <a:off x="457200" y="4361688"/>
+            <a:ext cx="11277295" cy="950976"/>
+          </a:xfrm>
+          <a:prstGeom prst="roundRect">
+            <a:avLst>
+              <a:gd name="adj" fmla="val 12000"/>
+            </a:avLst>
+          </a:prstGeom>
+          <a:solidFill>
+            <a:srgbClr val="E8F4FA"/>
+          </a:solidFill>
+          <a:ln>
+            <a:noFill/>
+          </a:ln>
+        </p:spPr>
+        <p:style>
+          <a:lnRef idx="1">
+            <a:schemeClr val="accent1"/>
+          </a:lnRef>
+          <a:fillRef idx="3">
+            <a:schemeClr val="accent1"/>
+          </a:fillRef>
+          <a:effectRef idx="2">
+            <a:schemeClr val="accent1"/>
+          </a:effectRef>
+          <a:fontRef idx="minor">
+            <a:schemeClr val="lt1"/>
+          </a:fontRef>
+        </p:style>
+        <p:txBody>
+          <a:bodyPr rtlCol="0" anchor="ctr"/>
+          <a:lstStyle/>
+          <a:p>
+            <a:pPr algn="ctr"/>
+          </a:p>
+        </p:txBody>
+      </p:sp>
+      <p:sp>
+        <p:nvSpPr>
+          <p:cNvPr id="18" name="Rounded Rectangle 17"/>
+          <p:cNvSpPr/>
+          <p:nvPr/>
+        </p:nvSpPr>
+        <p:spPr>
+          <a:xfrm>
+            <a:off x="594360" y="4617720"/>
+            <a:ext cx="438912" cy="438912"/>
+          </a:xfrm>
+          <a:prstGeom prst="roundRect">
+            <a:avLst>
+              <a:gd name="adj" fmla="val 12000"/>
+            </a:avLst>
+          </a:prstGeom>
+          <a:solidFill>
+            <a:srgbClr val="095292"/>
+          </a:solidFill>
+          <a:ln>
+            <a:noFill/>
+          </a:ln>
+        </p:spPr>
+        <p:style>
+          <a:lnRef idx="1">
+            <a:schemeClr val="accent1"/>
+          </a:lnRef>
+          <a:fillRef idx="3">
+            <a:schemeClr val="accent1"/>
+          </a:fillRef>
+          <a:effectRef idx="2">
+            <a:schemeClr val="accent1"/>
+          </a:effectRef>
+          <a:fontRef idx="minor">
+            <a:schemeClr val="lt1"/>
+          </a:fontRef>
+        </p:style>
+        <p:txBody>
+          <a:bodyPr rtlCol="0" anchor="ctr"/>
+          <a:lstStyle/>
+          <a:p>
+            <a:pPr algn="ctr"/>
+          </a:p>
+        </p:txBody>
+      </p:sp>
+      <p:sp>
+        <p:nvSpPr>
+          <p:cNvPr id="19" name="TextBox 18"/>
+          <p:cNvSpPr txBox="1"/>
+          <p:nvPr/>
+        </p:nvSpPr>
+        <p:spPr>
+          <a:xfrm>
+            <a:off x="594360" y="4617720"/>
+            <a:ext cx="438912" cy="438912"/>
+          </a:xfrm>
+          <a:prstGeom prst="rect">
+            <a:avLst/>
+          </a:prstGeom>
+          <a:noFill/>
+        </p:spPr>
+        <p:txBody>
+          <a:bodyPr wrap="square" anchor="ctr"/>
+          <a:lstStyle/>
+          <a:p>
+            <a:pPr algn="ctr"/>
+            <a:r>
+              <a:rPr sz="1600" b="1" i="0">
+                <a:solidFill>
+                  <a:srgbClr val="FFFFFF"/>
+                </a:solidFill>
+                <a:latin typeface="Calibri"/>
+              </a:rPr>
+              <a:t>4</a:t>
+            </a:r>
+          </a:p>
+        </p:txBody>
+      </p:sp>
+      <p:sp>
+        <p:nvSpPr>
+          <p:cNvPr id="20" name="TextBox 19"/>
+          <p:cNvSpPr txBox="1"/>
+          <p:nvPr/>
+        </p:nvSpPr>
+        <p:spPr>
+          <a:xfrm>
+            <a:off x="1188720" y="4453128"/>
+            <a:ext cx="10271455" cy="786384"/>
+          </a:xfrm>
+          <a:prstGeom prst="rect">
+            <a:avLst/>
+          </a:prstGeom>
+          <a:noFill/>
+        </p:spPr>
+        <p:txBody>
+          <a:bodyPr wrap="square" anchor="ctr"/>
+          <a:lstStyle/>
+          <a:p>
+            <a:r>
+              <a:rPr sz="1400" b="1" i="0">
+                <a:solidFill>
+                  <a:srgbClr val="095292"/>
+                </a:solidFill>
+                <a:latin typeface="Calibri"/>
+              </a:rPr>
+              <a:t>Ejecute el demo y compruebe dos cosas: en la consola, que el mensaje del constructor sale una sola vez y que los dos identityHashCode coinciden; en pantalla, que al registrar M-002 Michi en la ventana Recepcion y oprimir Refrescar en la ventana Consultorio, Michi aparece junto a M-001 Kira, que fue registrada desde el main.</a:t>
+            </a:r>
+          </a:p>
+        </p:txBody>
+      </p:sp>
+      <p:sp>
+        <p:nvSpPr>
+          <p:cNvPr id="21" name="Rounded Rectangle 20"/>
+          <p:cNvSpPr/>
+          <p:nvPr/>
+        </p:nvSpPr>
+        <p:spPr>
+          <a:xfrm>
+            <a:off x="457200" y="5404104"/>
+            <a:ext cx="11277295" cy="950976"/>
+          </a:xfrm>
+          <a:prstGeom prst="roundRect">
+            <a:avLst>
+              <a:gd name="adj" fmla="val 12000"/>
+            </a:avLst>
+          </a:prstGeom>
+          <a:solidFill>
+            <a:srgbClr val="F2F2F2"/>
+          </a:solidFill>
+          <a:ln>
+            <a:noFill/>
+          </a:ln>
+        </p:spPr>
+        <p:style>
+          <a:lnRef idx="1">
+            <a:schemeClr val="accent1"/>
+          </a:lnRef>
+          <a:fillRef idx="3">
+            <a:schemeClr val="accent1"/>
+          </a:fillRef>
+          <a:effectRef idx="2">
+            <a:schemeClr val="accent1"/>
+          </a:effectRef>
+          <a:fontRef idx="minor">
+            <a:schemeClr val="lt1"/>
+          </a:fontRef>
+        </p:style>
+        <p:txBody>
+          <a:bodyPr rtlCol="0" anchor="ctr"/>
+          <a:lstStyle/>
+          <a:p>
+            <a:pPr algn="ctr"/>
+          </a:p>
+        </p:txBody>
+      </p:sp>
+      <p:sp>
+        <p:nvSpPr>
+          <p:cNvPr id="22" name="Rounded Rectangle 21"/>
+          <p:cNvSpPr/>
+          <p:nvPr/>
+        </p:nvSpPr>
+        <p:spPr>
+          <a:xfrm>
+            <a:off x="594360" y="5660136"/>
+            <a:ext cx="438912" cy="438912"/>
+          </a:xfrm>
+          <a:prstGeom prst="roundRect">
+            <a:avLst>
+              <a:gd name="adj" fmla="val 12000"/>
+            </a:avLst>
+          </a:prstGeom>
+          <a:solidFill>
+            <a:srgbClr val="095292"/>
+          </a:solidFill>
+          <a:ln>
+            <a:noFill/>
+          </a:ln>
+        </p:spPr>
+        <p:style>
+          <a:lnRef idx="1">
+            <a:schemeClr val="accent1"/>
+          </a:lnRef>
+          <a:fillRef idx="3">
+            <a:schemeClr val="accent1"/>
+          </a:fillRef>
+          <a:effectRef idx="2">
+            <a:schemeClr val="accent1"/>
+          </a:effectRef>
+          <a:fontRef idx="minor">
+            <a:schemeClr val="lt1"/>
+          </a:fontRef>
+        </p:style>
+        <p:txBody>
+          <a:bodyPr rtlCol="0" anchor="ctr"/>
+          <a:lstStyle/>
+          <a:p>
+            <a:pPr algn="ctr"/>
+          </a:p>
+        </p:txBody>
+      </p:sp>
+      <p:sp>
+        <p:nvSpPr>
+          <p:cNvPr id="23" name="TextBox 22"/>
+          <p:cNvSpPr txBox="1"/>
+          <p:nvPr/>
+        </p:nvSpPr>
+        <p:spPr>
+          <a:xfrm>
+            <a:off x="594360" y="5660136"/>
+            <a:ext cx="438912" cy="438912"/>
+          </a:xfrm>
+          <a:prstGeom prst="rect">
+            <a:avLst/>
+          </a:prstGeom>
+          <a:noFill/>
+        </p:spPr>
+        <p:txBody>
+          <a:bodyPr wrap="square" anchor="ctr"/>
+          <a:lstStyle/>
+          <a:p>
+            <a:pPr algn="ctr"/>
+            <a:r>
+              <a:rPr sz="1600" b="1" i="0">
+                <a:solidFill>
+                  <a:srgbClr val="FFFFFF"/>
+                </a:solidFill>
+                <a:latin typeface="Calibri"/>
+              </a:rPr>
+              <a:t>5</a:t>
+            </a:r>
+          </a:p>
+        </p:txBody>
+      </p:sp>
+      <p:sp>
+        <p:nvSpPr>
+          <p:cNvPr id="24" name="TextBox 23"/>
+          <p:cNvSpPr txBox="1"/>
+          <p:nvPr/>
+        </p:nvSpPr>
+        <p:spPr>
+          <a:xfrm>
+            <a:off x="1188720" y="5495544"/>
+            <a:ext cx="10271455" cy="786384"/>
+          </a:xfrm>
+          <a:prstGeom prst="rect">
+            <a:avLst/>
+          </a:prstGeom>
+          <a:noFill/>
+        </p:spPr>
+        <p:txBody>
+          <a:bodyPr wrap="square" anchor="ctr"/>
+          <a:lstStyle/>
+          <a:p>
+            <a:r>
+              <a:rPr sz="1400" b="1" i="0">
+                <a:solidFill>
+                  <a:srgbClr val="095292"/>
+                </a:solidFill>
+                <a:latin typeface="Calibri"/>
+              </a:rPr>
+              <a:t>Escriba al final del archivo un comentario de tres lineas justificando por que el repositorio SI es Singleton, por que Mascota NO debe serlo y que problema tendria el Singleton cuando lleguemos a las pruebas; suba el proyecto y el comentario a la plataforma del curso.</a:t>
+            </a:r>
+          </a:p>
+        </p:txBody>
+      </p:sp>
+      <p:sp>
+        <p:nvSpPr>
+          <p:cNvPr id="25" name="TextBox 24"/>
+          <p:cNvSpPr txBox="1"/>
+          <p:nvPr/>
+        </p:nvSpPr>
+        <p:spPr>
+          <a:xfrm>
+            <a:off x="11185855" y="6473952"/>
+            <a:ext cx="640080" cy="274320"/>
+          </a:xfrm>
+          <a:prstGeom prst="rect">
+            <a:avLst/>
+          </a:prstGeom>
+          <a:noFill/>
+        </p:spPr>
+        <p:txBody>
+          <a:bodyPr wrap="square">
+            <a:spAutoFit/>
+          </a:bodyPr>
+          <a:lstStyle/>
+          <a:p>
+            <a:pPr algn="r"/>
+            <a:r>
+              <a:rPr sz="1100" b="0" i="0">
+                <a:solidFill>
+                  <a:srgbClr val="666666"/>
+                </a:solidFill>
+                <a:latin typeface="Calibri"/>
+              </a:rPr>
+              <a:t>14</a:t>
+            </a:r>
+          </a:p>
+        </p:txBody>
+      </p:sp>
+    </p:spTree>
+  </p:cSld>
+  <p:clrMapOvr>
+    <a:masterClrMapping/>
+  </p:clrMapOvr>
+</p:sld>
+</file>
+
+<file path=ppt/slides/slide15.xml><?xml version="1.0" encoding="utf-8"?>
+<p:sld xmlns:a="http://schemas.openxmlformats.org/drawingml/2006/main" xmlns:p="http://schemas.openxmlformats.org/presentationml/2006/main" xmlns:r="http://schemas.openxmlformats.org/officeDocument/2006/relationships">
+  <p:cSld>
+    <p:bg>
+      <p:bgPr>
+        <a:solidFill>
+          <a:srgbClr val="FFFFFF"/>
+        </a:solidFill>
+        <a:effectLst/>
+      </p:bgPr>
+    </p:bg>
+    <p:spTree>
+      <p:nvGrpSpPr>
+        <p:cNvPr id="1" name=""/>
+        <p:cNvGrpSpPr/>
+        <p:nvPr/>
+      </p:nvGrpSpPr>
+      <p:grpSpPr/>
+      <p:sp>
+        <p:nvSpPr>
+          <p:cNvPr id="2" name="Rectangle 1"/>
+          <p:cNvSpPr/>
+          <p:nvPr/>
+        </p:nvSpPr>
+        <p:spPr>
+          <a:xfrm>
+            <a:off x="0" y="0"/>
+            <a:ext cx="12191695" cy="960120"/>
+          </a:xfrm>
+          <a:prstGeom prst="rect">
+            <a:avLst/>
+          </a:prstGeom>
+          <a:solidFill>
+            <a:srgbClr val="095292"/>
+          </a:solidFill>
+          <a:ln>
+            <a:noFill/>
+          </a:ln>
+        </p:spPr>
+        <p:style>
+          <a:lnRef idx="1">
+            <a:schemeClr val="accent1"/>
+          </a:lnRef>
+          <a:fillRef idx="3">
+            <a:schemeClr val="accent1"/>
+          </a:fillRef>
+          <a:effectRef idx="2">
+            <a:schemeClr val="accent1"/>
+          </a:effectRef>
+          <a:fontRef idx="minor">
+            <a:schemeClr val="lt1"/>
+          </a:fontRef>
+        </p:style>
+        <p:txBody>
+          <a:bodyPr rtlCol="0" anchor="ctr"/>
+          <a:lstStyle/>
+          <a:p>
+            <a:pPr algn="ctr"/>
+          </a:p>
+        </p:txBody>
+      </p:sp>
+      <p:sp>
+        <p:nvSpPr>
+          <p:cNvPr id="3" name="Rectangle 2"/>
+          <p:cNvSpPr/>
+          <p:nvPr/>
+        </p:nvSpPr>
+        <p:spPr>
+          <a:xfrm>
+            <a:off x="0" y="960120"/>
+            <a:ext cx="12191695" cy="41148"/>
+          </a:xfrm>
+          <a:prstGeom prst="rect">
+            <a:avLst/>
+          </a:prstGeom>
+          <a:solidFill>
+            <a:srgbClr val="FFD000"/>
+          </a:solidFill>
+          <a:ln>
+            <a:noFill/>
+          </a:ln>
+        </p:spPr>
+        <p:style>
+          <a:lnRef idx="1">
+            <a:schemeClr val="accent1"/>
+          </a:lnRef>
+          <a:fillRef idx="3">
+            <a:schemeClr val="accent1"/>
+          </a:fillRef>
+          <a:effectRef idx="2">
+            <a:schemeClr val="accent1"/>
+          </a:effectRef>
+          <a:fontRef idx="minor">
+            <a:schemeClr val="lt1"/>
+          </a:fontRef>
+        </p:style>
+        <p:txBody>
+          <a:bodyPr rtlCol="0" anchor="ctr"/>
+          <a:lstStyle/>
+          <a:p>
+            <a:pPr algn="ctr"/>
+          </a:p>
+        </p:txBody>
+      </p:sp>
+      <p:sp>
+        <p:nvSpPr>
+          <p:cNvPr id="4" name="TextBox 3"/>
+          <p:cNvSpPr txBox="1"/>
+          <p:nvPr/>
+        </p:nvSpPr>
+        <p:spPr>
+          <a:xfrm>
+            <a:off x="457200" y="164592"/>
+            <a:ext cx="11277295" cy="502920"/>
+          </a:xfrm>
+          <a:prstGeom prst="rect">
+            <a:avLst/>
+          </a:prstGeom>
+          <a:noFill/>
+        </p:spPr>
+        <p:txBody>
+          <a:bodyPr wrap="square">
+            <a:spAutoFit/>
+          </a:bodyPr>
+          <a:lstStyle/>
+          <a:p>
+            <a:r>
+              <a:rPr sz="2600" b="1" i="0">
+                <a:solidFill>
+                  <a:srgbClr val="FFFFFF"/>
+                </a:solidFill>
+                <a:latin typeface="Calibri"/>
+              </a:rPr>
+              <a:t>Antes de entregar — autochequeo</a:t>
+            </a:r>
+          </a:p>
+        </p:txBody>
+      </p:sp>
+      <p:sp>
+        <p:nvSpPr>
+          <p:cNvPr id="5" name="Rounded Rectangle 4"/>
+          <p:cNvSpPr/>
+          <p:nvPr/>
+        </p:nvSpPr>
+        <p:spPr>
+          <a:xfrm>
+            <a:off x="457200" y="1261872"/>
+            <a:ext cx="11277295" cy="566928"/>
+          </a:xfrm>
+          <a:prstGeom prst="roundRect">
+            <a:avLst>
+              <a:gd name="adj" fmla="val 12000"/>
+            </a:avLst>
+          </a:prstGeom>
+          <a:solidFill>
+            <a:srgbClr val="F2F2F2"/>
+          </a:solidFill>
+          <a:ln>
+            <a:noFill/>
+          </a:ln>
+        </p:spPr>
+        <p:style>
+          <a:lnRef idx="1">
+            <a:schemeClr val="accent1"/>
+          </a:lnRef>
+          <a:fillRef idx="3">
+            <a:schemeClr val="accent1"/>
+          </a:fillRef>
+          <a:effectRef idx="2">
+            <a:schemeClr val="accent1"/>
+          </a:effectRef>
+          <a:fontRef idx="minor">
+            <a:schemeClr val="lt1"/>
+          </a:fontRef>
+        </p:style>
+        <p:txBody>
+          <a:bodyPr rtlCol="0" anchor="ctr"/>
+          <a:lstStyle/>
+          <a:p>
+            <a:pPr algn="ctr"/>
+          </a:p>
+        </p:txBody>
+      </p:sp>
+      <p:sp>
+        <p:nvSpPr>
+          <p:cNvPr id="6" name="Rectangle 5"/>
+          <p:cNvSpPr/>
+          <p:nvPr/>
+        </p:nvSpPr>
+        <p:spPr>
+          <a:xfrm>
+            <a:off x="640080" y="1408175"/>
+            <a:ext cx="274320" cy="274320"/>
+          </a:xfrm>
+          <a:prstGeom prst="rect">
+            <a:avLst/>
+          </a:prstGeom>
+          <a:solidFill>
+            <a:srgbClr val="FFFFFF"/>
+          </a:solidFill>
+          <a:ln>
+            <a:solidFill>
+              <a:srgbClr val="333333"/>
+            </a:solidFill>
+          </a:ln>
+        </p:spPr>
+        <p:style>
+          <a:lnRef idx="1">
+            <a:schemeClr val="accent1"/>
+          </a:lnRef>
+          <a:fillRef idx="3">
+            <a:schemeClr val="accent1"/>
+          </a:fillRef>
+          <a:effectRef idx="2">
+            <a:schemeClr val="accent1"/>
+          </a:effectRef>
+          <a:fontRef idx="minor">
+            <a:schemeClr val="lt1"/>
+          </a:fontRef>
+        </p:style>
+        <p:txBody>
+          <a:bodyPr rtlCol="0" anchor="ctr"/>
+          <a:lstStyle/>
+          <a:p>
+            <a:pPr algn="ctr"/>
+          </a:p>
+        </p:txBody>
+      </p:sp>
+      <p:sp>
+        <p:nvSpPr>
+          <p:cNvPr id="7" name="Rectangle 6"/>
+          <p:cNvSpPr/>
+          <p:nvPr/>
+        </p:nvSpPr>
+        <p:spPr>
+          <a:xfrm>
+            <a:off x="640080" y="1408175"/>
+            <a:ext cx="73152" cy="274320"/>
+          </a:xfrm>
+          <a:prstGeom prst="rect">
+            <a:avLst/>
+          </a:prstGeom>
+          <a:solidFill>
+            <a:srgbClr val="269CCB"/>
+          </a:solidFill>
+          <a:ln>
+            <a:noFill/>
+          </a:ln>
+        </p:spPr>
+        <p:style>
+          <a:lnRef idx="1">
+            <a:schemeClr val="accent1"/>
+          </a:lnRef>
+          <a:fillRef idx="3">
+            <a:schemeClr val="accent1"/>
+          </a:fillRef>
+          <a:effectRef idx="2">
+            <a:schemeClr val="accent1"/>
+          </a:effectRef>
+          <a:fontRef idx="minor">
+            <a:schemeClr val="lt1"/>
+          </a:fontRef>
+        </p:style>
+        <p:txBody>
+          <a:bodyPr rtlCol="0" anchor="ctr"/>
+          <a:lstStyle/>
+          <a:p>
+            <a:pPr algn="ctr"/>
+          </a:p>
+        </p:txBody>
+      </p:sp>
+      <p:sp>
+        <p:nvSpPr>
+          <p:cNvPr id="8" name="TextBox 7"/>
+          <p:cNvSpPr txBox="1"/>
+          <p:nvPr/>
+        </p:nvSpPr>
+        <p:spPr>
+          <a:xfrm>
+            <a:off x="1097280" y="1353312"/>
+            <a:ext cx="10362895" cy="402336"/>
+          </a:xfrm>
+          <a:prstGeom prst="rect">
+            <a:avLst/>
+          </a:prstGeom>
+          <a:noFill/>
+        </p:spPr>
+        <p:txBody>
+          <a:bodyPr wrap="square" anchor="ctr"/>
+          <a:lstStyle/>
+          <a:p>
+            <a:r>
+              <a:rPr sz="1500" b="0" i="0">
+                <a:solidFill>
+                  <a:srgbClr val="333333"/>
+                </a:solidFill>
+                <a:latin typeface="Calibri"/>
+              </a:rPr>
+              <a:t>Si el mensaje del constructor aparece dos veces, quien mas esta creando el objeto y en que linea quedo un new olvidado?</a:t>
+            </a:r>
+          </a:p>
+        </p:txBody>
+      </p:sp>
+      <p:sp>
+        <p:nvSpPr>
+          <p:cNvPr id="9" name="Rounded Rectangle 8"/>
+          <p:cNvSpPr/>
+          <p:nvPr/>
+        </p:nvSpPr>
+        <p:spPr>
+          <a:xfrm>
+            <a:off x="457200" y="1938528"/>
+            <a:ext cx="11277295" cy="566928"/>
+          </a:xfrm>
+          <a:prstGeom prst="roundRect">
+            <a:avLst>
+              <a:gd name="adj" fmla="val 12000"/>
+            </a:avLst>
+          </a:prstGeom>
+          <a:solidFill>
+            <a:srgbClr val="F2F2F2"/>
+          </a:solidFill>
+          <a:ln>
+            <a:noFill/>
+          </a:ln>
+        </p:spPr>
+        <p:style>
+          <a:lnRef idx="1">
+            <a:schemeClr val="accent1"/>
+          </a:lnRef>
+          <a:fillRef idx="3">
+            <a:schemeClr val="accent1"/>
+          </a:fillRef>
+          <a:effectRef idx="2">
+            <a:schemeClr val="accent1"/>
+          </a:effectRef>
+          <a:fontRef idx="minor">
+            <a:schemeClr val="lt1"/>
+          </a:fontRef>
+        </p:style>
+        <p:txBody>
+          <a:bodyPr rtlCol="0" anchor="ctr"/>
+          <a:lstStyle/>
+          <a:p>
+            <a:pPr algn="ctr"/>
+          </a:p>
+        </p:txBody>
+      </p:sp>
+      <p:sp>
+        <p:nvSpPr>
+          <p:cNvPr id="10" name="Rectangle 9"/>
+          <p:cNvSpPr/>
+          <p:nvPr/>
+        </p:nvSpPr>
+        <p:spPr>
+          <a:xfrm>
+            <a:off x="640080" y="2084832"/>
+            <a:ext cx="274320" cy="274320"/>
+          </a:xfrm>
+          <a:prstGeom prst="rect">
+            <a:avLst/>
+          </a:prstGeom>
+          <a:solidFill>
+            <a:srgbClr val="FFFFFF"/>
+          </a:solidFill>
+          <a:ln>
+            <a:solidFill>
+              <a:srgbClr val="333333"/>
+            </a:solidFill>
+          </a:ln>
+        </p:spPr>
+        <p:style>
+          <a:lnRef idx="1">
+            <a:schemeClr val="accent1"/>
+          </a:lnRef>
+          <a:fillRef idx="3">
+            <a:schemeClr val="accent1"/>
+          </a:fillRef>
+          <a:effectRef idx="2">
+            <a:schemeClr val="accent1"/>
+          </a:effectRef>
+          <a:fontRef idx="minor">
+            <a:schemeClr val="lt1"/>
+          </a:fontRef>
+        </p:style>
+        <p:txBody>
+          <a:bodyPr rtlCol="0" anchor="ctr"/>
+          <a:lstStyle/>
+          <a:p>
+            <a:pPr algn="ctr"/>
+          </a:p>
+        </p:txBody>
+      </p:sp>
+      <p:sp>
+        <p:nvSpPr>
+          <p:cNvPr id="11" name="Rectangle 10"/>
+          <p:cNvSpPr/>
+          <p:nvPr/>
+        </p:nvSpPr>
+        <p:spPr>
+          <a:xfrm>
+            <a:off x="640080" y="2084832"/>
+            <a:ext cx="73152" cy="274320"/>
+          </a:xfrm>
+          <a:prstGeom prst="rect">
+            <a:avLst/>
+          </a:prstGeom>
+          <a:solidFill>
+            <a:srgbClr val="269CCB"/>
+          </a:solidFill>
+          <a:ln>
+            <a:noFill/>
+          </a:ln>
+        </p:spPr>
+        <p:style>
+          <a:lnRef idx="1">
+            <a:schemeClr val="accent1"/>
+          </a:lnRef>
+          <a:fillRef idx="3">
+            <a:schemeClr val="accent1"/>
+          </a:fillRef>
+          <a:effectRef idx="2">
+            <a:schemeClr val="accent1"/>
+          </a:effectRef>
+          <a:fontRef idx="minor">
+            <a:schemeClr val="lt1"/>
+          </a:fontRef>
+        </p:style>
+        <p:txBody>
+          <a:bodyPr rtlCol="0" anchor="ctr"/>
+          <a:lstStyle/>
+          <a:p>
+            <a:pPr algn="ctr"/>
+          </a:p>
+        </p:txBody>
+      </p:sp>
+      <p:sp>
+        <p:nvSpPr>
+          <p:cNvPr id="12" name="TextBox 11"/>
+          <p:cNvSpPr txBox="1"/>
+          <p:nvPr/>
+        </p:nvSpPr>
+        <p:spPr>
+          <a:xfrm>
+            <a:off x="1097280" y="2029968"/>
+            <a:ext cx="10362895" cy="402336"/>
+          </a:xfrm>
+          <a:prstGeom prst="rect">
+            <a:avLst/>
+          </a:prstGeom>
+          <a:noFill/>
+        </p:spPr>
+        <p:txBody>
+          <a:bodyPr wrap="square" anchor="ctr"/>
+          <a:lstStyle/>
+          <a:p>
+            <a:r>
+              <a:rPr sz="1500" b="0" i="0">
+                <a:solidFill>
+                  <a:srgbClr val="333333"/>
+                </a:solidFill>
+                <a:latin typeface="Calibri"/>
+              </a:rPr>
+              <a:t>Si alguien hace 'RepositorioVetCare.instancia = null;' desde otra clase y el programa se lo permite, que modificador de acceso quedo mal puesto?</a:t>
+            </a:r>
+          </a:p>
+        </p:txBody>
+      </p:sp>
+      <p:sp>
+        <p:nvSpPr>
+          <p:cNvPr id="13" name="Rounded Rectangle 12"/>
+          <p:cNvSpPr/>
+          <p:nvPr/>
+        </p:nvSpPr>
+        <p:spPr>
+          <a:xfrm>
+            <a:off x="457200" y="2615184"/>
+            <a:ext cx="11277295" cy="566928"/>
+          </a:xfrm>
+          <a:prstGeom prst="roundRect">
+            <a:avLst>
+              <a:gd name="adj" fmla="val 12000"/>
+            </a:avLst>
+          </a:prstGeom>
+          <a:solidFill>
+            <a:srgbClr val="F2F2F2"/>
+          </a:solidFill>
+          <a:ln>
+            <a:noFill/>
+          </a:ln>
+        </p:spPr>
+        <p:style>
+          <a:lnRef idx="1">
+            <a:schemeClr val="accent1"/>
+          </a:lnRef>
+          <a:fillRef idx="3">
+            <a:schemeClr val="accent1"/>
+          </a:fillRef>
+          <a:effectRef idx="2">
+            <a:schemeClr val="accent1"/>
+          </a:effectRef>
+          <a:fontRef idx="minor">
+            <a:schemeClr val="lt1"/>
+          </a:fontRef>
+        </p:style>
+        <p:txBody>
+          <a:bodyPr rtlCol="0" anchor="ctr"/>
+          <a:lstStyle/>
+          <a:p>
+            <a:pPr algn="ctr"/>
+          </a:p>
+        </p:txBody>
+      </p:sp>
+      <p:sp>
+        <p:nvSpPr>
+          <p:cNvPr id="14" name="Rectangle 13"/>
+          <p:cNvSpPr/>
+          <p:nvPr/>
+        </p:nvSpPr>
+        <p:spPr>
+          <a:xfrm>
+            <a:off x="640080" y="2761488"/>
+            <a:ext cx="274320" cy="274320"/>
+          </a:xfrm>
+          <a:prstGeom prst="rect">
+            <a:avLst/>
+          </a:prstGeom>
+          <a:solidFill>
+            <a:srgbClr val="FFFFFF"/>
+          </a:solidFill>
+          <a:ln>
+            <a:solidFill>
+              <a:srgbClr val="333333"/>
+            </a:solidFill>
+          </a:ln>
+        </p:spPr>
+        <p:style>
+          <a:lnRef idx="1">
+            <a:schemeClr val="accent1"/>
+          </a:lnRef>
+          <a:fillRef idx="3">
+            <a:schemeClr val="accent1"/>
+          </a:fillRef>
+          <a:effectRef idx="2">
+            <a:schemeClr val="accent1"/>
+          </a:effectRef>
+          <a:fontRef idx="minor">
+            <a:schemeClr val="lt1"/>
+          </a:fontRef>
+        </p:style>
+        <p:txBody>
+          <a:bodyPr rtlCol="0" anchor="ctr"/>
+          <a:lstStyle/>
+          <a:p>
+            <a:pPr algn="ctr"/>
+          </a:p>
+        </p:txBody>
+      </p:sp>
+      <p:sp>
+        <p:nvSpPr>
+          <p:cNvPr id="15" name="Rectangle 14"/>
+          <p:cNvSpPr/>
+          <p:nvPr/>
+        </p:nvSpPr>
+        <p:spPr>
+          <a:xfrm>
+            <a:off x="640080" y="2761488"/>
+            <a:ext cx="73152" cy="274320"/>
+          </a:xfrm>
+          <a:prstGeom prst="rect">
+            <a:avLst/>
+          </a:prstGeom>
+          <a:solidFill>
+            <a:srgbClr val="269CCB"/>
+          </a:solidFill>
+          <a:ln>
+            <a:noFill/>
+          </a:ln>
+        </p:spPr>
+        <p:style>
+          <a:lnRef idx="1">
+            <a:schemeClr val="accent1"/>
+          </a:lnRef>
+          <a:fillRef idx="3">
+            <a:schemeClr val="accent1"/>
+          </a:fillRef>
+          <a:effectRef idx="2">
+            <a:schemeClr val="accent1"/>
+          </a:effectRef>
+          <a:fontRef idx="minor">
+            <a:schemeClr val="lt1"/>
+          </a:fontRef>
+        </p:style>
+        <p:txBody>
+          <a:bodyPr rtlCol="0" anchor="ctr"/>
+          <a:lstStyle/>
+          <a:p>
+            <a:pPr algn="ctr"/>
+          </a:p>
+        </p:txBody>
+      </p:sp>
+      <p:sp>
+        <p:nvSpPr>
+          <p:cNvPr id="16" name="TextBox 15"/>
+          <p:cNvSpPr txBox="1"/>
+          <p:nvPr/>
+        </p:nvSpPr>
+        <p:spPr>
+          <a:xfrm>
+            <a:off x="1097280" y="2706624"/>
+            <a:ext cx="10362895" cy="402336"/>
+          </a:xfrm>
+          <a:prstGeom prst="rect">
+            <a:avLst/>
+          </a:prstGeom>
+          <a:noFill/>
+        </p:spPr>
+        <p:txBody>
+          <a:bodyPr wrap="square" anchor="ctr"/>
+          <a:lstStyle/>
+          <a:p>
+            <a:r>
+              <a:rPr sz="1500" b="0" i="0">
+                <a:solidFill>
+                  <a:srgbClr val="333333"/>
+                </a:solidFill>
+                <a:latin typeface="Calibri"/>
+              </a:rPr>
+              <a:t>Pregunta de criterio: cuantas mascotas hay en la clinica y cuantos archivadores hay? Cual de esos dos conceptos merece ser Singleton?</a:t>
+            </a:r>
+          </a:p>
+        </p:txBody>
+      </p:sp>
+      <p:sp>
+        <p:nvSpPr>
+          <p:cNvPr id="17" name="TextBox 16"/>
+          <p:cNvSpPr txBox="1"/>
+          <p:nvPr/>
+        </p:nvSpPr>
+        <p:spPr>
+          <a:xfrm>
+            <a:off x="11185855" y="6473952"/>
+            <a:ext cx="640080" cy="274320"/>
+          </a:xfrm>
+          <a:prstGeom prst="rect">
+            <a:avLst/>
+          </a:prstGeom>
+          <a:noFill/>
+        </p:spPr>
+        <p:txBody>
+          <a:bodyPr wrap="square">
+            <a:spAutoFit/>
+          </a:bodyPr>
+          <a:lstStyle/>
+          <a:p>
+            <a:pPr algn="r"/>
+            <a:r>
+              <a:rPr sz="1100" b="0" i="0">
+                <a:solidFill>
+                  <a:srgbClr val="666666"/>
+                </a:solidFill>
+                <a:latin typeface="Calibri"/>
+              </a:rPr>
+              <a:t>15</a:t>
+            </a:r>
+          </a:p>
+        </p:txBody>
+      </p:sp>
+    </p:spTree>
+  </p:cSld>
+  <p:clrMapOvr>
+    <a:masterClrMapping/>
+  </p:clrMapOvr>
+</p:sld>
+</file>
+
+<file path=ppt/slides/slide16.xml><?xml version="1.0" encoding="utf-8"?>
+<p:sld xmlns:a="http://schemas.openxmlformats.org/drawingml/2006/main" xmlns:p="http://schemas.openxmlformats.org/presentationml/2006/main" xmlns:r="http://schemas.openxmlformats.org/officeDocument/2006/relationships">
+  <p:cSld>
+    <p:bg>
+      <p:bgPr>
+        <a:solidFill>
+          <a:srgbClr val="FFFFFF"/>
+        </a:solidFill>
+        <a:effectLst/>
+      </p:bgPr>
+    </p:bg>
+    <p:spTree>
+      <p:nvGrpSpPr>
+        <p:cNvPr id="1" name=""/>
+        <p:cNvGrpSpPr/>
+        <p:nvPr/>
+      </p:nvGrpSpPr>
+      <p:grpSpPr/>
+      <p:sp>
+        <p:nvSpPr>
+          <p:cNvPr id="2" name="Rectangle 1"/>
+          <p:cNvSpPr/>
+          <p:nvPr/>
+        </p:nvSpPr>
+        <p:spPr>
+          <a:xfrm>
+            <a:off x="0" y="0"/>
+            <a:ext cx="12191695" cy="960120"/>
+          </a:xfrm>
+          <a:prstGeom prst="rect">
+            <a:avLst/>
+          </a:prstGeom>
+          <a:solidFill>
+            <a:srgbClr val="095292"/>
+          </a:solidFill>
+          <a:ln>
+            <a:noFill/>
+          </a:ln>
+        </p:spPr>
+        <p:style>
+          <a:lnRef idx="1">
+            <a:schemeClr val="accent1"/>
+          </a:lnRef>
+          <a:fillRef idx="3">
+            <a:schemeClr val="accent1"/>
+          </a:fillRef>
+          <a:effectRef idx="2">
+            <a:schemeClr val="accent1"/>
+          </a:effectRef>
+          <a:fontRef idx="minor">
+            <a:schemeClr val="lt1"/>
+          </a:fontRef>
+        </p:style>
+        <p:txBody>
+          <a:bodyPr rtlCol="0" anchor="ctr"/>
+          <a:lstStyle/>
+          <a:p>
+            <a:pPr algn="ctr"/>
+          </a:p>
+        </p:txBody>
+      </p:sp>
+      <p:sp>
+        <p:nvSpPr>
+          <p:cNvPr id="3" name="Rectangle 2"/>
+          <p:cNvSpPr/>
+          <p:nvPr/>
+        </p:nvSpPr>
+        <p:spPr>
+          <a:xfrm>
+            <a:off x="0" y="960120"/>
+            <a:ext cx="12191695" cy="41148"/>
+          </a:xfrm>
+          <a:prstGeom prst="rect">
+            <a:avLst/>
+          </a:prstGeom>
+          <a:solidFill>
+            <a:srgbClr val="FFD000"/>
+          </a:solidFill>
+          <a:ln>
+            <a:noFill/>
+          </a:ln>
+        </p:spPr>
+        <p:style>
+          <a:lnRef idx="1">
+            <a:schemeClr val="accent1"/>
+          </a:lnRef>
+          <a:fillRef idx="3">
+            <a:schemeClr val="accent1"/>
+          </a:fillRef>
+          <a:effectRef idx="2">
+            <a:schemeClr val="accent1"/>
+          </a:effectRef>
+          <a:fontRef idx="minor">
+            <a:schemeClr val="lt1"/>
+          </a:fontRef>
+        </p:style>
+        <p:txBody>
+          <a:bodyPr rtlCol="0" anchor="ctr"/>
+          <a:lstStyle/>
+          <a:p>
+            <a:pPr algn="ctr"/>
+          </a:p>
+        </p:txBody>
+      </p:sp>
+      <p:sp>
+        <p:nvSpPr>
+          <p:cNvPr id="4" name="TextBox 3"/>
+          <p:cNvSpPr txBox="1"/>
+          <p:nvPr/>
+        </p:nvSpPr>
+        <p:spPr>
+          <a:xfrm>
+            <a:off x="457200" y="164592"/>
+            <a:ext cx="11277295" cy="502920"/>
+          </a:xfrm>
+          <a:prstGeom prst="rect">
+            <a:avLst/>
+          </a:prstGeom>
+          <a:noFill/>
+        </p:spPr>
+        <p:txBody>
+          <a:bodyPr wrap="square">
+            <a:spAutoFit/>
+          </a:bodyPr>
+          <a:lstStyle/>
+          <a:p>
+            <a:r>
+              <a:rPr sz="2600" b="1" i="0">
+                <a:solidFill>
+                  <a:srgbClr val="FFFFFF"/>
+                </a:solidFill>
+                <a:latin typeface="Calibri"/>
+              </a:rPr>
+              <a:t>Criterios de exito / entregable</a:t>
+            </a:r>
+          </a:p>
+        </p:txBody>
+      </p:sp>
+      <p:sp>
+        <p:nvSpPr>
+          <p:cNvPr id="5" name="TextBox 4"/>
+          <p:cNvSpPr txBox="1"/>
+          <p:nvPr/>
+        </p:nvSpPr>
+        <p:spPr>
+          <a:xfrm>
+            <a:off x="457200" y="1170432"/>
+            <a:ext cx="11277295" cy="5230368"/>
+          </a:xfrm>
+          <a:prstGeom prst="rect">
+            <a:avLst/>
+          </a:prstGeom>
+          <a:noFill/>
+        </p:spPr>
+        <p:txBody>
+          <a:bodyPr wrap="square">
+            <a:spAutoFit/>
+          </a:bodyPr>
+          <a:lstStyle/>
+          <a:p>
+            <a:pPr>
+              <a:spcAft>
+                <a:spcPts val="800"/>
+              </a:spcAft>
+            </a:pPr>
+            <a:r>
+              <a:rPr sz="2000" b="0" i="0">
+                <a:solidFill>
+                  <a:srgbClr val="333333"/>
+                </a:solidFill>
+                <a:latin typeface="Calibri"/>
+              </a:rPr>
+              <a:t>–   </a:t>
+            </a:r>
+            <a:r>
+              <a:rPr sz="2000" b="1" i="0">
+                <a:solidFill>
+                  <a:srgbClr val="333333"/>
+                </a:solidFill>
+                <a:latin typeface="Calibri"/>
+              </a:rPr>
+              <a:t>Entregable:</a:t>
+            </a:r>
+            <a:r>
+              <a:rPr sz="2000" b="0" i="0">
+                <a:solidFill>
+                  <a:srgbClr val="333333"/>
+                </a:solidFill>
+                <a:latin typeface="Calibri"/>
+              </a:rPr>
+              <a:t> Clase RepositorioVetCare convertida en Singleton, FabricaConsultas con tres tipos y evidencia de que dos ventanas ven la misma lista, subido a la plataforma del curso.</a:t>
+            </a:r>
+          </a:p>
+          <a:p>
+            <a:pPr>
+              <a:spcAft>
+                <a:spcPts val="800"/>
+              </a:spcAft>
+            </a:pPr>
+            <a:r>
+              <a:rPr sz="2000" b="0" i="0">
+                <a:solidFill>
+                  <a:srgbClr val="333333"/>
+                </a:solidFill>
+                <a:latin typeface="Calibri"/>
+              </a:rPr>
+              <a:t>–   </a:t>
+            </a:r>
+            <a:r>
+              <a:rPr sz="2000" b="1" i="0">
+                <a:solidFill>
+                  <a:srgbClr val="333333"/>
+                </a:solidFill>
+                <a:latin typeface="Calibri"/>
+              </a:rPr>
+              <a:t>Exito:</a:t>
+            </a:r>
+            <a:r>
+              <a:rPr sz="2000" b="0" i="0">
+                <a:solidFill>
+                  <a:srgbClr val="333333"/>
+                </a:solidFill>
+                <a:latin typeface="Calibri"/>
+              </a:rPr>
+              <a:t> El mensaje del constructor del repositorio se imprime una sola vez en toda la ejecucion, sin importar cuantas veces se pida la instancia.</a:t>
+            </a:r>
+          </a:p>
+          <a:p>
+            <a:pPr>
+              <a:spcAft>
+                <a:spcPts val="800"/>
+              </a:spcAft>
+            </a:pPr>
+            <a:r>
+              <a:rPr sz="2000" b="0" i="0">
+                <a:solidFill>
+                  <a:srgbClr val="333333"/>
+                </a:solidFill>
+                <a:latin typeface="Calibri"/>
+              </a:rPr>
+              <a:t>–   </a:t>
+            </a:r>
+            <a:r>
+              <a:rPr sz="2000" b="1" i="0">
+                <a:solidFill>
+                  <a:srgbClr val="333333"/>
+                </a:solidFill>
+                <a:latin typeface="Calibri"/>
+              </a:rPr>
+              <a:t>Exito:</a:t>
+            </a:r>
+            <a:r>
+              <a:rPr sz="2000" b="0" i="0">
+                <a:solidFill>
+                  <a:srgbClr val="333333"/>
+                </a:solidFill>
+                <a:latin typeface="Calibri"/>
+              </a:rPr>
+              <a:t> El constructor del repositorio es privado y no existe ningun new RepositorioVetCare() fuera de getInstancia().</a:t>
+            </a:r>
+          </a:p>
+          <a:p>
+            <a:pPr>
+              <a:spcAft>
+                <a:spcPts val="800"/>
+              </a:spcAft>
+            </a:pPr>
+            <a:r>
+              <a:rPr sz="2000" b="0" i="0">
+                <a:solidFill>
+                  <a:srgbClr val="333333"/>
+                </a:solidFill>
+                <a:latin typeface="Calibri"/>
+              </a:rPr>
+              <a:t>–   </a:t>
+            </a:r>
+            <a:r>
+              <a:rPr sz="2000" b="1" i="0">
+                <a:solidFill>
+                  <a:srgbClr val="333333"/>
+                </a:solidFill>
+                <a:latin typeface="Calibri"/>
+              </a:rPr>
+              <a:t>Exito:</a:t>
+            </a:r>
+            <a:r>
+              <a:rPr sz="2000" b="0" i="0">
+                <a:solidFill>
+                  <a:srgbClr val="333333"/>
+                </a:solidFill>
+                <a:latin typeface="Calibri"/>
+              </a:rPr>
+              <a:t> Registrar una mascota en la ventana Recepcion y refrescar la ventana Consultorio muestra esa mascota en ambas, y el identityHashCode del repositorio impreso en las dos ventanas es identico.</a:t>
+            </a:r>
+          </a:p>
+          <a:p>
+            <a:pPr>
+              <a:spcAft>
+                <a:spcPts val="800"/>
+              </a:spcAft>
+            </a:pPr>
+            <a:r>
+              <a:rPr sz="2000" b="0" i="0">
+                <a:solidFill>
+                  <a:srgbClr val="333333"/>
+                </a:solidFill>
+                <a:latin typeface="Calibri"/>
+              </a:rPr>
+              <a:t>–   </a:t>
+            </a:r>
+            <a:r>
+              <a:rPr sz="2000" b="1" i="0">
+                <a:solidFill>
+                  <a:srgbClr val="333333"/>
+                </a:solidFill>
+                <a:latin typeface="Calibri"/>
+              </a:rPr>
+              <a:t>Exito:</a:t>
+            </a:r>
+            <a:r>
+              <a:rPr sz="2000" b="0" i="0">
+                <a:solidFill>
+                  <a:srgbClr val="333333"/>
+                </a:solidFill>
+                <a:latin typeface="Calibri"/>
+              </a:rPr>
+              <a:t> FabricaConsultas devuelve el tipo base Consulta para los tres tipos validos y rechaza con excepcion un tipo desconocido como 'peluqueria espacial'.</a:t>
+            </a:r>
+          </a:p>
+          <a:p>
+            <a:pPr>
+              <a:spcAft>
+                <a:spcPts val="800"/>
+              </a:spcAft>
+            </a:pPr>
+            <a:r>
+              <a:rPr sz="2000" b="0" i="0">
+                <a:solidFill>
+                  <a:srgbClr val="333333"/>
+                </a:solidFill>
+                <a:latin typeface="Calibri"/>
+              </a:rPr>
+              <a:t>–   </a:t>
+            </a:r>
+            <a:r>
+              <a:rPr sz="2000" b="1" i="0">
+                <a:solidFill>
+                  <a:srgbClr val="333333"/>
+                </a:solidFill>
+                <a:latin typeface="Calibri"/>
+              </a:rPr>
+              <a:t>Entrega en la plataforma del curso</a:t>
+            </a:r>
+            <a:r>
+              <a:rPr sz="2000" b="0" i="0">
+                <a:solidFill>
+                  <a:srgbClr val="333333"/>
+                </a:solidFill>
+                <a:latin typeface="Calibri"/>
+              </a:rPr>
+              <a:t> — en la fecha que indique el docente.</a:t>
+            </a:r>
+          </a:p>
+        </p:txBody>
+      </p:sp>
+      <p:sp>
+        <p:nvSpPr>
+          <p:cNvPr id="6" name="TextBox 5"/>
+          <p:cNvSpPr txBox="1"/>
+          <p:nvPr/>
+        </p:nvSpPr>
+        <p:spPr>
+          <a:xfrm>
+            <a:off x="11185855" y="6473952"/>
+            <a:ext cx="640080" cy="274320"/>
+          </a:xfrm>
+          <a:prstGeom prst="rect">
+            <a:avLst/>
+          </a:prstGeom>
+          <a:noFill/>
+        </p:spPr>
+        <p:txBody>
+          <a:bodyPr wrap="square">
+            <a:spAutoFit/>
+          </a:bodyPr>
+          <a:lstStyle/>
+          <a:p>
+            <a:pPr algn="r"/>
+            <a:r>
+              <a:rPr sz="1100" b="0" i="0">
+                <a:solidFill>
+                  <a:srgbClr val="666666"/>
+                </a:solidFill>
+                <a:latin typeface="Calibri"/>
+              </a:rPr>
+              <a:t>16</a:t>
+            </a:r>
+          </a:p>
+        </p:txBody>
+      </p:sp>
+    </p:spTree>
+  </p:cSld>
+  <p:clrMapOvr>
+    <a:masterClrMapping/>
+  </p:clrMapOvr>
+</p:sld>
+</file>
+
+<file path=ppt/slides/slide17.xml><?xml version="1.0" encoding="utf-8"?>
+<p:sld xmlns:a="http://schemas.openxmlformats.org/drawingml/2006/main" xmlns:p="http://schemas.openxmlformats.org/presentationml/2006/main" xmlns:r="http://schemas.openxmlformats.org/officeDocument/2006/relationships">
+  <p:cSld>
+    <p:bg>
+      <p:bgPr>
+        <a:solidFill>
+          <a:srgbClr val="FFFFFF"/>
+        </a:solidFill>
+        <a:effectLst/>
+      </p:bgPr>
+    </p:bg>
+    <p:spTree>
+      <p:nvGrpSpPr>
+        <p:cNvPr id="1" name=""/>
+        <p:cNvGrpSpPr/>
+        <p:nvPr/>
+      </p:nvGrpSpPr>
+      <p:grpSpPr/>
+      <p:sp>
+        <p:nvSpPr>
+          <p:cNvPr id="2" name="Rectangle 1"/>
+          <p:cNvSpPr/>
+          <p:nvPr/>
+        </p:nvSpPr>
+        <p:spPr>
+          <a:xfrm>
+            <a:off x="0" y="0"/>
+            <a:ext cx="12191695" cy="960120"/>
+          </a:xfrm>
+          <a:prstGeom prst="rect">
+            <a:avLst/>
+          </a:prstGeom>
+          <a:solidFill>
+            <a:srgbClr val="095292"/>
+          </a:solidFill>
+          <a:ln>
+            <a:noFill/>
+          </a:ln>
+        </p:spPr>
+        <p:style>
+          <a:lnRef idx="1">
+            <a:schemeClr val="accent1"/>
+          </a:lnRef>
+          <a:fillRef idx="3">
+            <a:schemeClr val="accent1"/>
+          </a:fillRef>
+          <a:effectRef idx="2">
+            <a:schemeClr val="accent1"/>
+          </a:effectRef>
+          <a:fontRef idx="minor">
+            <a:schemeClr val="lt1"/>
+          </a:fontRef>
+        </p:style>
+        <p:txBody>
+          <a:bodyPr rtlCol="0" anchor="ctr"/>
+          <a:lstStyle/>
+          <a:p>
+            <a:pPr algn="ctr"/>
+          </a:p>
+        </p:txBody>
+      </p:sp>
+      <p:sp>
+        <p:nvSpPr>
+          <p:cNvPr id="3" name="Rectangle 2"/>
+          <p:cNvSpPr/>
+          <p:nvPr/>
+        </p:nvSpPr>
+        <p:spPr>
+          <a:xfrm>
+            <a:off x="0" y="960120"/>
+            <a:ext cx="12191695" cy="41148"/>
+          </a:xfrm>
+          <a:prstGeom prst="rect">
+            <a:avLst/>
+          </a:prstGeom>
+          <a:solidFill>
+            <a:srgbClr val="FFD000"/>
+          </a:solidFill>
+          <a:ln>
+            <a:noFill/>
+          </a:ln>
+        </p:spPr>
+        <p:style>
+          <a:lnRef idx="1">
+            <a:schemeClr val="accent1"/>
+          </a:lnRef>
+          <a:fillRef idx="3">
+            <a:schemeClr val="accent1"/>
+          </a:fillRef>
+          <a:effectRef idx="2">
+            <a:schemeClr val="accent1"/>
+          </a:effectRef>
+          <a:fontRef idx="minor">
+            <a:schemeClr val="lt1"/>
+          </a:fontRef>
+        </p:style>
+        <p:txBody>
+          <a:bodyPr rtlCol="0" anchor="ctr"/>
+          <a:lstStyle/>
+          <a:p>
+            <a:pPr algn="ctr"/>
+          </a:p>
+        </p:txBody>
+      </p:sp>
+      <p:sp>
+        <p:nvSpPr>
+          <p:cNvPr id="4" name="TextBox 3"/>
+          <p:cNvSpPr txBox="1"/>
+          <p:nvPr/>
+        </p:nvSpPr>
+        <p:spPr>
+          <a:xfrm>
+            <a:off x="457200" y="164592"/>
+            <a:ext cx="11277295" cy="502920"/>
+          </a:xfrm>
+          <a:prstGeom prst="rect">
+            <a:avLst/>
+          </a:prstGeom>
+          <a:noFill/>
+        </p:spPr>
+        <p:txBody>
+          <a:bodyPr wrap="square">
+            <a:spAutoFit/>
+          </a:bodyPr>
+          <a:lstStyle/>
+          <a:p>
+            <a:r>
+              <a:rPr sz="2600" b="1" i="0">
+                <a:solidFill>
+                  <a:srgbClr val="FFFFFF"/>
+                </a:solidFill>
+                <a:latin typeface="Calibri"/>
+              </a:rPr>
+              <a:t>Para el PI esta semana</a:t>
+            </a:r>
+          </a:p>
+        </p:txBody>
+      </p:sp>
+      <p:sp>
+        <p:nvSpPr>
+          <p:cNvPr id="5" name="Rounded Rectangle 4"/>
+          <p:cNvSpPr/>
+          <p:nvPr/>
+        </p:nvSpPr>
+        <p:spPr>
+          <a:xfrm>
+            <a:off x="457200" y="1261872"/>
+            <a:ext cx="11277295" cy="1051560"/>
+          </a:xfrm>
+          <a:prstGeom prst="roundRect">
+            <a:avLst>
+              <a:gd name="adj" fmla="val 12000"/>
+            </a:avLst>
+          </a:prstGeom>
+          <a:solidFill>
+            <a:srgbClr val="E8F4FA"/>
+          </a:solidFill>
+          <a:ln>
+            <a:noFill/>
+          </a:ln>
+        </p:spPr>
+        <p:style>
+          <a:lnRef idx="1">
+            <a:schemeClr val="accent1"/>
+          </a:lnRef>
+          <a:fillRef idx="3">
+            <a:schemeClr val="accent1"/>
+          </a:fillRef>
+          <a:effectRef idx="2">
+            <a:schemeClr val="accent1"/>
+          </a:effectRef>
+          <a:fontRef idx="minor">
+            <a:schemeClr val="lt1"/>
+          </a:fontRef>
+        </p:style>
+        <p:txBody>
+          <a:bodyPr rtlCol="0" anchor="ctr"/>
+          <a:lstStyle/>
+          <a:p>
+            <a:pPr algn="ctr"/>
+          </a:p>
+        </p:txBody>
+      </p:sp>
+      <p:sp>
+        <p:nvSpPr>
+          <p:cNvPr id="6" name="Rectangle 5"/>
+          <p:cNvSpPr/>
+          <p:nvPr/>
+        </p:nvSpPr>
+        <p:spPr>
+          <a:xfrm>
+            <a:off x="457200" y="1261872"/>
+            <a:ext cx="128016" cy="1051560"/>
+          </a:xfrm>
+          <a:prstGeom prst="rect">
+            <a:avLst/>
+          </a:prstGeom>
+          <a:solidFill>
+            <a:srgbClr val="269CCB"/>
+          </a:solidFill>
+          <a:ln>
+            <a:noFill/>
+          </a:ln>
+        </p:spPr>
+        <p:style>
+          <a:lnRef idx="1">
+            <a:schemeClr val="accent1"/>
+          </a:lnRef>
+          <a:fillRef idx="3">
+            <a:schemeClr val="accent1"/>
+          </a:fillRef>
+          <a:effectRef idx="2">
+            <a:schemeClr val="accent1"/>
+          </a:effectRef>
+          <a:fontRef idx="minor">
+            <a:schemeClr val="lt1"/>
+          </a:fontRef>
+        </p:style>
+        <p:txBody>
+          <a:bodyPr rtlCol="0" anchor="ctr"/>
+          <a:lstStyle/>
+          <a:p>
+            <a:pPr algn="ctr"/>
+          </a:p>
+        </p:txBody>
+      </p:sp>
+      <p:sp>
+        <p:nvSpPr>
+          <p:cNvPr id="7" name="TextBox 6"/>
+          <p:cNvSpPr txBox="1"/>
+          <p:nvPr/>
+        </p:nvSpPr>
+        <p:spPr>
+          <a:xfrm>
+            <a:off x="777240" y="1399031"/>
+            <a:ext cx="10774375" cy="822959"/>
+          </a:xfrm>
+          <a:prstGeom prst="rect">
+            <a:avLst/>
+          </a:prstGeom>
+          <a:noFill/>
+        </p:spPr>
+        <p:txBody>
+          <a:bodyPr wrap="square">
+            <a:spAutoFit/>
+          </a:bodyPr>
+          <a:lstStyle/>
+          <a:p>
+            <a:r>
+              <a:rPr sz="1200" b="1" i="0">
+                <a:solidFill>
+                  <a:srgbClr val="269CCB"/>
+                </a:solidFill>
+                <a:latin typeface="Calibri"/>
+              </a:rPr>
+              <a:t>Info</a:t>
+            </a:r>
+          </a:p>
+          <a:p>
+            <a:pPr>
+              <a:spcBef>
+                <a:spcPts val="400"/>
+              </a:spcBef>
+            </a:pPr>
+            <a:r>
+              <a:rPr sz="1400" b="0" i="0">
+                <a:solidFill>
+                  <a:srgbClr val="333333"/>
+                </a:solidFill>
+                <a:latin typeface="Calibri"/>
+              </a:rPr>
+              <a:t>Hito: VetCare queda con un unico repositorio de datos en memoria compartido por todas las ventanas y una fabrica que crea las consultas del dominio.</a:t>
+            </a:r>
+          </a:p>
+        </p:txBody>
+      </p:sp>
+      <p:sp>
+        <p:nvSpPr>
+          <p:cNvPr id="8" name="Rounded Rectangle 7"/>
+          <p:cNvSpPr/>
+          <p:nvPr/>
+        </p:nvSpPr>
+        <p:spPr>
+          <a:xfrm>
+            <a:off x="457200" y="2478024"/>
+            <a:ext cx="11277295" cy="1051560"/>
+          </a:xfrm>
+          <a:prstGeom prst="roundRect">
+            <a:avLst>
+              <a:gd name="adj" fmla="val 12000"/>
+            </a:avLst>
+          </a:prstGeom>
+          <a:solidFill>
+            <a:srgbClr val="FFF8E1"/>
+          </a:solidFill>
+          <a:ln>
+            <a:noFill/>
+          </a:ln>
+        </p:spPr>
+        <p:style>
+          <a:lnRef idx="1">
+            <a:schemeClr val="accent1"/>
+          </a:lnRef>
+          <a:fillRef idx="3">
+            <a:schemeClr val="accent1"/>
+          </a:fillRef>
+          <a:effectRef idx="2">
+            <a:schemeClr val="accent1"/>
+          </a:effectRef>
+          <a:fontRef idx="minor">
+            <a:schemeClr val="lt1"/>
+          </a:fontRef>
+        </p:style>
+        <p:txBody>
+          <a:bodyPr rtlCol="0" anchor="ctr"/>
+          <a:lstStyle/>
+          <a:p>
+            <a:pPr algn="ctr"/>
+          </a:p>
+        </p:txBody>
+      </p:sp>
+      <p:sp>
+        <p:nvSpPr>
+          <p:cNvPr id="9" name="Rectangle 8"/>
+          <p:cNvSpPr/>
+          <p:nvPr/>
+        </p:nvSpPr>
+        <p:spPr>
+          <a:xfrm>
+            <a:off x="457200" y="2478024"/>
+            <a:ext cx="128016" cy="1051560"/>
+          </a:xfrm>
+          <a:prstGeom prst="rect">
+            <a:avLst/>
+          </a:prstGeom>
+          <a:solidFill>
+            <a:srgbClr val="FFD000"/>
+          </a:solidFill>
+          <a:ln>
+            <a:noFill/>
+          </a:ln>
+        </p:spPr>
+        <p:style>
+          <a:lnRef idx="1">
+            <a:schemeClr val="accent1"/>
+          </a:lnRef>
+          <a:fillRef idx="3">
+            <a:schemeClr val="accent1"/>
+          </a:fillRef>
+          <a:effectRef idx="2">
+            <a:schemeClr val="accent1"/>
+          </a:effectRef>
+          <a:fontRef idx="minor">
+            <a:schemeClr val="lt1"/>
+          </a:fontRef>
+        </p:style>
+        <p:txBody>
+          <a:bodyPr rtlCol="0" anchor="ctr"/>
+          <a:lstStyle/>
+          <a:p>
+            <a:pPr algn="ctr"/>
+          </a:p>
+        </p:txBody>
+      </p:sp>
+      <p:sp>
+        <p:nvSpPr>
+          <p:cNvPr id="10" name="TextBox 9"/>
+          <p:cNvSpPr txBox="1"/>
+          <p:nvPr/>
+        </p:nvSpPr>
+        <p:spPr>
+          <a:xfrm>
+            <a:off x="777240" y="2615184"/>
+            <a:ext cx="10774375" cy="822959"/>
+          </a:xfrm>
+          <a:prstGeom prst="rect">
+            <a:avLst/>
+          </a:prstGeom>
+          <a:noFill/>
+        </p:spPr>
+        <p:txBody>
+          <a:bodyPr wrap="square">
+            <a:spAutoFit/>
+          </a:bodyPr>
+          <a:lstStyle/>
+          <a:p>
+            <a:r>
+              <a:rPr sz="1200" b="1" i="0">
+                <a:solidFill>
+                  <a:srgbClr val="FFD000"/>
+                </a:solidFill>
+                <a:latin typeface="Calibri"/>
+              </a:rPr>
+              <a:t>Aclaración</a:t>
+            </a:r>
+          </a:p>
+          <a:p>
+            <a:pPr>
+              <a:spcBef>
+                <a:spcPts val="400"/>
+              </a:spcBef>
+            </a:pPr>
+            <a:r>
+              <a:rPr sz="1400" b="0" i="0">
+                <a:solidFill>
+                  <a:srgbClr val="333333"/>
+                </a:solidFill>
+                <a:latin typeface="Calibri"/>
+              </a:rPr>
+              <a:t>Enunciado completo: Clases/Proyecto Integrador/ (VetCare).</a:t>
+            </a:r>
+          </a:p>
+        </p:txBody>
+      </p:sp>
+      <p:sp>
+        <p:nvSpPr>
+          <p:cNvPr id="11" name="Rounded Rectangle 10"/>
+          <p:cNvSpPr/>
+          <p:nvPr/>
+        </p:nvSpPr>
+        <p:spPr>
+          <a:xfrm>
+            <a:off x="457200" y="3694176"/>
+            <a:ext cx="11277295" cy="1051560"/>
+          </a:xfrm>
+          <a:prstGeom prst="roundRect">
+            <a:avLst>
+              <a:gd name="adj" fmla="val 12000"/>
+            </a:avLst>
+          </a:prstGeom>
+          <a:solidFill>
+            <a:srgbClr val="FBE4E4"/>
+          </a:solidFill>
+          <a:ln>
+            <a:noFill/>
+          </a:ln>
+        </p:spPr>
+        <p:style>
+          <a:lnRef idx="1">
+            <a:schemeClr val="accent1"/>
+          </a:lnRef>
+          <a:fillRef idx="3">
+            <a:schemeClr val="accent1"/>
+          </a:fillRef>
+          <a:effectRef idx="2">
+            <a:schemeClr val="accent1"/>
+          </a:effectRef>
+          <a:fontRef idx="minor">
+            <a:schemeClr val="lt1"/>
+          </a:fontRef>
+        </p:style>
+        <p:txBody>
+          <a:bodyPr rtlCol="0" anchor="ctr"/>
+          <a:lstStyle/>
+          <a:p>
+            <a:pPr algn="ctr"/>
+          </a:p>
+        </p:txBody>
+      </p:sp>
+      <p:sp>
+        <p:nvSpPr>
+          <p:cNvPr id="12" name="Rectangle 11"/>
+          <p:cNvSpPr/>
+          <p:nvPr/>
+        </p:nvSpPr>
+        <p:spPr>
+          <a:xfrm>
+            <a:off x="457200" y="3694176"/>
+            <a:ext cx="128016" cy="1051560"/>
+          </a:xfrm>
+          <a:prstGeom prst="rect">
+            <a:avLst/>
+          </a:prstGeom>
+          <a:solidFill>
+            <a:srgbClr val="A02030"/>
+          </a:solidFill>
+          <a:ln>
+            <a:noFill/>
+          </a:ln>
+        </p:spPr>
+        <p:style>
+          <a:lnRef idx="1">
+            <a:schemeClr val="accent1"/>
+          </a:lnRef>
+          <a:fillRef idx="3">
+            <a:schemeClr val="accent1"/>
+          </a:fillRef>
+          <a:effectRef idx="2">
+            <a:schemeClr val="accent1"/>
+          </a:effectRef>
+          <a:fontRef idx="minor">
+            <a:schemeClr val="lt1"/>
+          </a:fontRef>
+        </p:style>
+        <p:txBody>
+          <a:bodyPr rtlCol="0" anchor="ctr"/>
+          <a:lstStyle/>
+          <a:p>
+            <a:pPr algn="ctr"/>
+          </a:p>
+        </p:txBody>
+      </p:sp>
+      <p:sp>
+        <p:nvSpPr>
+          <p:cNvPr id="13" name="TextBox 12"/>
+          <p:cNvSpPr txBox="1"/>
+          <p:nvPr/>
+        </p:nvSpPr>
+        <p:spPr>
+          <a:xfrm>
+            <a:off x="777240" y="3831336"/>
+            <a:ext cx="10774375" cy="822959"/>
+          </a:xfrm>
+          <a:prstGeom prst="rect">
+            <a:avLst/>
+          </a:prstGeom>
+          <a:noFill/>
+        </p:spPr>
+        <p:txBody>
+          <a:bodyPr wrap="square">
+            <a:spAutoFit/>
+          </a:bodyPr>
+          <a:lstStyle/>
+          <a:p>
+            <a:r>
+              <a:rPr sz="1200" b="1" i="0">
+                <a:solidFill>
+                  <a:srgbClr val="A02030"/>
+                </a:solidFill>
+                <a:latin typeface="Calibri"/>
+              </a:rPr>
+              <a:t>Atención</a:t>
+            </a:r>
+          </a:p>
+          <a:p>
+            <a:pPr>
+              <a:spcBef>
+                <a:spcPts val="400"/>
+              </a:spcBef>
+            </a:pPr>
+            <a:r>
+              <a:rPr sz="1400" b="0" i="0">
+                <a:solidFill>
+                  <a:srgbClr val="333333"/>
+                </a:solidFill>
+                <a:latin typeface="Calibri"/>
+              </a:rPr>
+              <a:t>Entrega del taller, si el docente lo asigna · en la fecha que indique el docente.</a:t>
+            </a:r>
+          </a:p>
+        </p:txBody>
+      </p:sp>
+      <p:sp>
+        <p:nvSpPr>
+          <p:cNvPr id="14" name="TextBox 13"/>
+          <p:cNvSpPr txBox="1"/>
+          <p:nvPr/>
+        </p:nvSpPr>
+        <p:spPr>
+          <a:xfrm>
+            <a:off x="11185855" y="6473952"/>
+            <a:ext cx="640080" cy="274320"/>
+          </a:xfrm>
+          <a:prstGeom prst="rect">
+            <a:avLst/>
+          </a:prstGeom>
+          <a:noFill/>
+        </p:spPr>
+        <p:txBody>
+          <a:bodyPr wrap="square">
+            <a:spAutoFit/>
+          </a:bodyPr>
+          <a:lstStyle/>
+          <a:p>
+            <a:pPr algn="r"/>
+            <a:r>
+              <a:rPr sz="1100" b="0" i="0">
+                <a:solidFill>
+                  <a:srgbClr val="666666"/>
+                </a:solidFill>
+                <a:latin typeface="Calibri"/>
+              </a:rPr>
+              <a:t>17</a:t>
+            </a:r>
+          </a:p>
+        </p:txBody>
+      </p:sp>
+    </p:spTree>
+  </p:cSld>
+  <p:clrMapOvr>
+    <a:masterClrMapping/>
+  </p:clrMapOvr>
+</p:sld>
+</file>
+
+<file path=ppt/slides/slide18.xml><?xml version="1.0" encoding="utf-8"?>
+<p:sld xmlns:a="http://schemas.openxmlformats.org/drawingml/2006/main" xmlns:p="http://schemas.openxmlformats.org/presentationml/2006/main" xmlns:r="http://schemas.openxmlformats.org/officeDocument/2006/relationships">
+  <p:cSld>
+    <p:bg>
+      <p:bgPr>
+        <a:solidFill>
+          <a:srgbClr val="FFFFFF"/>
+        </a:solidFill>
+        <a:effectLst/>
+      </p:bgPr>
+    </p:bg>
+    <p:spTree>
+      <p:nvGrpSpPr>
+        <p:cNvPr id="1" name=""/>
+        <p:cNvGrpSpPr/>
+        <p:nvPr/>
+      </p:nvGrpSpPr>
+      <p:grpSpPr/>
+      <p:sp>
+        <p:nvSpPr>
+          <p:cNvPr id="2" name="Rectangle 1"/>
+          <p:cNvSpPr/>
+          <p:nvPr/>
+        </p:nvSpPr>
+        <p:spPr>
+          <a:xfrm>
+            <a:off x="0" y="0"/>
             <a:ext cx="12191695" cy="164592"/>
           </a:xfrm>
           <a:prstGeom prst="rect">
@@ -6712,7 +9066,7 @@
                 </a:solidFill>
                 <a:latin typeface="Calibri"/>
               </a:rPr>
-              <a:t>Teoria Core</a:t>
+              <a:t>Un patron de diseño no es una libreria que se importa ni un archivo que...</a:t>
             </a:r>
           </a:p>
         </p:txBody>
@@ -6751,7 +9105,7 @@
                 </a:solidFill>
                 <a:latin typeface="Calibri"/>
               </a:rPr>
-              <a:t>–   Un patron de diseño no es una libreria que se importa ni un archivo que se descarga: es una solucion probada, con…</a:t>
+              <a:t>–   Un patron de diseño no es una libreria que se importa ni un archivo que se descarga: es una solucion probada, con nombre propio, a un problema de diseño que se repite.</a:t>
             </a:r>
           </a:p>
           <a:p>
@@ -6767,7 +9121,7 @@
                 </a:solidFill>
                 <a:latin typeface="Calibri"/>
               </a:rPr>
-              <a:t>–   El problema que motiva el Singleton ya lo vivimos en la clase pasada, aunque no le pusimos nombre</a:t>
+              <a:t>–   La analogia que mejor funciona es la de arquitectura: cuando un arquitecto dice 'aqui va un patio interior', nadie le pide los planos del patio, porque el nombre ya comunica el problema (ventilar e iluminar el centro de la casa) y la forma de resolverlo.</a:t>
             </a:r>
           </a:p>
           <a:p>
@@ -6783,7 +9137,7 @@
                 </a:solidFill>
                 <a:latin typeface="Calibri"/>
               </a:rPr>
-              <a:t>–   El mecanismo en Java tiene tres piezas y las tres son obligatorias</a:t>
+              <a:t>–   En programacion pasa igual: cuando un desarrollador dice 'el repositorio de VetCare es un Singleton', su compañero entiende de una que hay una sola instancia y un punto de acceso global, sin necesidad de leer el codigo.</a:t>
             </a:r>
           </a:p>
           <a:p>
@@ -6799,7 +9153,7 @@
                 </a:solidFill>
                 <a:latin typeface="Calibri"/>
               </a:rPr>
-              <a:t>–   El segundo patron responde a otro problema distinto: quien decide como se construye un objeto</a:t>
+              <a:t>–   El catalogo clasico es el de la Banda de los Cuatro (GoF) y agrupa los patrones en creacionales (como se crean los objetos: Singleton</a:t>
             </a:r>
           </a:p>
           <a:p>
@@ -6815,7 +9169,23 @@
                 </a:solidFill>
                 <a:latin typeface="Calibri"/>
               </a:rPr>
-              <a:t>–   Ahora la parte que casi nadie enseña: cuando NO usarlos</a:t>
+              <a:t>–   Factory, Builder), estructurales (como se componen: Adapter, Decorator, Facade) y de comportamiento (como se comunican: Observer, Strategy).</a:t>
+            </a:r>
+          </a:p>
+          <a:p>
+            <a:pPr>
+              <a:spcAft>
+                <a:spcPts val="800"/>
+              </a:spcAft>
+            </a:pPr>
+            <a:r>
+              <a:rPr sz="2000" b="0" i="0">
+                <a:solidFill>
+                  <a:srgbClr val="333333"/>
+                </a:solidFill>
+                <a:latin typeface="Calibri"/>
+              </a:rPr>
+              <a:t>–   Nosotros vamos a usar solo dos hoy, pero bien usados y con criterio, no por coleccionarlos.</a:t>
             </a:r>
           </a:p>
         </p:txBody>
@@ -6996,141 +9366,21 @@
                 </a:solidFill>
                 <a:latin typeface="Calibri"/>
               </a:rPr>
-              <a:t>Singleton: un solo archivador para toda la clinica</a:t>
-            </a:r>
-          </a:p>
-        </p:txBody>
-      </p:sp>
-      <p:sp>
-        <p:nvSpPr>
-          <p:cNvPr id="5" name="Rounded Rectangle 4"/>
-          <p:cNvSpPr/>
-          <p:nvPr/>
-        </p:nvSpPr>
-        <p:spPr>
-          <a:xfrm>
-            <a:off x="457200" y="1261872"/>
-            <a:ext cx="11277295" cy="4773168"/>
-          </a:xfrm>
-          <a:prstGeom prst="roundRect">
-            <a:avLst>
-              <a:gd name="adj" fmla="val 12000"/>
-            </a:avLst>
-          </a:prstGeom>
-          <a:solidFill>
-            <a:srgbClr val="1E2A38"/>
-          </a:solidFill>
-          <a:ln>
-            <a:noFill/>
-          </a:ln>
-        </p:spPr>
-        <p:style>
-          <a:lnRef idx="1">
-            <a:schemeClr val="accent1"/>
-          </a:lnRef>
-          <a:fillRef idx="3">
-            <a:schemeClr val="accent1"/>
-          </a:fillRef>
-          <a:effectRef idx="2">
-            <a:schemeClr val="accent1"/>
-          </a:effectRef>
-          <a:fontRef idx="minor">
-            <a:schemeClr val="lt1"/>
-          </a:fontRef>
-        </p:style>
-        <p:txBody>
-          <a:bodyPr rtlCol="0" anchor="ctr"/>
-          <a:lstStyle/>
-          <a:p>
-            <a:pPr algn="ctr"/>
-          </a:p>
-        </p:txBody>
-      </p:sp>
-      <p:sp>
-        <p:nvSpPr>
-          <p:cNvPr id="6" name="Rectangle 5"/>
-          <p:cNvSpPr/>
-          <p:nvPr/>
-        </p:nvSpPr>
-        <p:spPr>
-          <a:xfrm>
-            <a:off x="457200" y="1261872"/>
-            <a:ext cx="11277295" cy="320040"/>
-          </a:xfrm>
-          <a:prstGeom prst="rect">
-            <a:avLst/>
-          </a:prstGeom>
-          <a:solidFill>
-            <a:srgbClr val="095292"/>
-          </a:solidFill>
-          <a:ln>
-            <a:noFill/>
-          </a:ln>
-        </p:spPr>
-        <p:style>
-          <a:lnRef idx="1">
-            <a:schemeClr val="accent1"/>
-          </a:lnRef>
-          <a:fillRef idx="3">
-            <a:schemeClr val="accent1"/>
-          </a:fillRef>
-          <a:effectRef idx="2">
-            <a:schemeClr val="accent1"/>
-          </a:effectRef>
-          <a:fontRef idx="minor">
-            <a:schemeClr val="lt1"/>
-          </a:fontRef>
-        </p:style>
-        <p:txBody>
-          <a:bodyPr rtlCol="0" anchor="ctr"/>
-          <a:lstStyle/>
-          <a:p>
-            <a:pPr algn="ctr"/>
-          </a:p>
-        </p:txBody>
-      </p:sp>
-      <p:sp>
-        <p:nvSpPr>
-          <p:cNvPr id="7" name="TextBox 6"/>
+              <a:t>El problema que motiva el Singleton ya lo vivimos en la clase pasada...</a:t>
+            </a:r>
+          </a:p>
+        </p:txBody>
+      </p:sp>
+      <p:sp>
+        <p:nvSpPr>
+          <p:cNvPr id="5" name="TextBox 4"/>
           <p:cNvSpPr txBox="1"/>
           <p:nvPr/>
         </p:nvSpPr>
         <p:spPr>
           <a:xfrm>
-            <a:off x="685800" y="1307592"/>
-            <a:ext cx="10820095" cy="256032"/>
-          </a:xfrm>
-          <a:prstGeom prst="rect">
-            <a:avLst/>
-          </a:prstGeom>
-          <a:noFill/>
-        </p:spPr>
-        <p:txBody>
-          <a:bodyPr wrap="square" anchor="ctr"/>
-          <a:lstStyle/>
-          <a:p>
-            <a:r>
-              <a:rPr sz="1000" b="1" i="0">
-                <a:solidFill>
-                  <a:srgbClr val="269CCB"/>
-                </a:solidFill>
-                <a:latin typeface="Calibri"/>
-              </a:rPr>
-              <a:t>● ● ●</a:t>
-            </a:r>
-          </a:p>
-        </p:txBody>
-      </p:sp>
-      <p:sp>
-        <p:nvSpPr>
-          <p:cNvPr id="8" name="TextBox 7"/>
-          <p:cNvSpPr txBox="1"/>
-          <p:nvPr/>
-        </p:nvSpPr>
-        <p:spPr>
-          <a:xfrm>
-            <a:off x="777240" y="1719072"/>
-            <a:ext cx="10637215" cy="4133087"/>
+            <a:off x="457200" y="1170432"/>
+            <a:ext cx="11277295" cy="5230368"/>
           </a:xfrm>
           <a:prstGeom prst="rect">
             <a:avLst/>
@@ -7145,267 +9395,104 @@
           <a:p>
             <a:pPr>
               <a:spcAft>
-                <a:spcPts val="400"/>
+                <a:spcPts val="800"/>
               </a:spcAft>
             </a:pPr>
             <a:r>
-              <a:rPr sz="1400" b="0" i="0">
-                <a:solidFill>
-                  <a:srgbClr val="FFFFFF"/>
-                </a:solidFill>
-                <a:latin typeface="Calibri"/>
-              </a:rPr>
-              <a:t>public class RepositorioVetCare {                  // el archivador de Huellitas</a:t>
+              <a:rPr sz="2000" b="0" i="0">
+                <a:solidFill>
+                  <a:srgbClr val="333333"/>
+                </a:solidFill>
+                <a:latin typeface="Calibri"/>
+              </a:rPr>
+              <a:t>–   El problema que motiva el Singleton ya lo vivimos en la clase pasada, aunque no le pusimos nombre.</a:t>
             </a:r>
           </a:p>
           <a:p>
             <a:pPr>
               <a:spcAft>
-                <a:spcPts val="400"/>
+                <a:spcPts val="800"/>
               </a:spcAft>
             </a:pPr>
             <a:r>
-              <a:rPr sz="1400" b="0" i="0">
-                <a:solidFill>
-                  <a:srgbClr val="FFFFFF"/>
-                </a:solidFill>
-                <a:latin typeface="Calibri"/>
-              </a:rPr>
-              <a:t>    private static RepositorioVetCare instancia;   // 1. unica referencia, privada y estatica</a:t>
+              <a:rPr sz="2000" b="0" i="0">
+                <a:solidFill>
+                  <a:srgbClr val="333333"/>
+                </a:solidFill>
+                <a:latin typeface="Calibri"/>
+              </a:rPr>
+              <a:t>–   En VetCare la ventana de registro creaba su propio RepositorioMascotas.</a:t>
             </a:r>
           </a:p>
           <a:p>
             <a:pPr>
               <a:spcAft>
-                <a:spcPts val="400"/>
+                <a:spcPts val="800"/>
               </a:spcAft>
             </a:pPr>
             <a:r>
-              <a:rPr sz="1400" b="0" i="0">
-                <a:solidFill>
-                  <a:srgbClr val="FFFFFF"/>
-                </a:solidFill>
-                <a:latin typeface="Calibri"/>
-              </a:rPr>
-              <a:t>    private final List&lt;Mascota&gt; mascotas = new ArrayList&lt;Mascota&gt;();</a:t>
+              <a:rPr sz="2000" b="0" i="0">
+                <a:solidFill>
+                  <a:srgbClr val="333333"/>
+                </a:solidFill>
+                <a:latin typeface="Calibri"/>
+              </a:rPr>
+              <a:t>–   Cuando abramos la ventana de citas y esta haga otro new RepositorioMascotas(), la agenda no vera ni una sola de las mascotas registradas, porque son dos ArrayList distintos en dos zonas distintas de memoria.</a:t>
             </a:r>
           </a:p>
           <a:p>
             <a:pPr>
               <a:spcAft>
-                <a:spcPts val="400"/>
+                <a:spcPts val="800"/>
               </a:spcAft>
             </a:pPr>
             <a:r>
-              <a:rPr sz="1400" b="0" i="0">
-                <a:solidFill>
-                  <a:srgbClr val="FFFFFF"/>
-                </a:solidFill>
-                <a:latin typeface="Calibri"/>
-              </a:rPr>
-              <a:t/>
+              <a:rPr sz="2000" b="0" i="0">
+                <a:solidFill>
+                  <a:srgbClr val="333333"/>
+                </a:solidFill>
+                <a:latin typeface="Calibri"/>
+              </a:rPr>
+              <a:t>–   Y no sirve pasar datos por copia: la clinica Huellitas necesita que exista un solo lugar donde vivan los expedientes mientras la aplicacion corre, igual que en la clinica fisica hay un solo archivador y no uno por escritorio.</a:t>
             </a:r>
           </a:p>
           <a:p>
             <a:pPr>
               <a:spcAft>
-                <a:spcPts val="400"/>
+                <a:spcPts val="800"/>
               </a:spcAft>
             </a:pPr>
             <a:r>
-              <a:rPr sz="1400" b="0" i="0">
-                <a:solidFill>
-                  <a:srgbClr val="FFFFFF"/>
-                </a:solidFill>
-                <a:latin typeface="Calibri"/>
-              </a:rPr>
-              <a:t>    private RepositorioVetCare() { }               // 2. privado: nadie puede hacer new</a:t>
+              <a:rPr sz="2000" b="0" i="0">
+                <a:solidFill>
+                  <a:srgbClr val="333333"/>
+                </a:solidFill>
+                <a:latin typeface="Calibri"/>
+              </a:rPr>
+              <a:t>–   El problema entonces se enuncia asi: necesito garantizar que exista una y solo una instancia de esta clase y que cualquier parte del programa pueda llegar a ella sin andar pasandosela de constructor en constructor.</a:t>
             </a:r>
           </a:p>
           <a:p>
             <a:pPr>
               <a:spcAft>
-                <a:spcPts val="400"/>
+                <a:spcPts val="800"/>
               </a:spcAft>
             </a:pPr>
             <a:r>
-              <a:rPr sz="1400" b="0" i="0">
-                <a:solidFill>
-                  <a:srgbClr val="FFFFFF"/>
-                </a:solidFill>
-                <a:latin typeface="Calibri"/>
-              </a:rPr>
-              <a:t/>
-            </a:r>
-          </a:p>
-          <a:p>
-            <a:pPr>
-              <a:spcAft>
-                <a:spcPts val="400"/>
-              </a:spcAft>
-            </a:pPr>
-            <a:r>
-              <a:rPr sz="1400" b="0" i="0">
-                <a:solidFill>
-                  <a:srgbClr val="FFFFFF"/>
-                </a:solidFill>
-                <a:latin typeface="Calibri"/>
-              </a:rPr>
-              <a:t>    public static synchronized RepositorioVetCare getInstancia() {</a:t>
-            </a:r>
-          </a:p>
-          <a:p>
-            <a:pPr>
-              <a:spcAft>
-                <a:spcPts val="400"/>
-              </a:spcAft>
-            </a:pPr>
-            <a:r>
-              <a:rPr sz="1400" b="0" i="0">
-                <a:solidFill>
-                  <a:srgbClr val="FFFFFF"/>
-                </a:solidFill>
-                <a:latin typeface="Calibri"/>
-              </a:rPr>
-              <a:t>        if (instancia == null) {                   // 3. se crea la primera vez que la piden</a:t>
-            </a:r>
-          </a:p>
-          <a:p>
-            <a:pPr>
-              <a:spcAft>
-                <a:spcPts val="400"/>
-              </a:spcAft>
-            </a:pPr>
-            <a:r>
-              <a:rPr sz="1400" b="0" i="0">
-                <a:solidFill>
-                  <a:srgbClr val="FFFFFF"/>
-                </a:solidFill>
-                <a:latin typeface="Calibri"/>
-              </a:rPr>
-              <a:t>            instancia = new RepositorioVetCare();</a:t>
-            </a:r>
-          </a:p>
-          <a:p>
-            <a:pPr>
-              <a:spcAft>
-                <a:spcPts val="400"/>
-              </a:spcAft>
-            </a:pPr>
-            <a:r>
-              <a:rPr sz="1400" b="0" i="0">
-                <a:solidFill>
-                  <a:srgbClr val="FFFFFF"/>
-                </a:solidFill>
-                <a:latin typeface="Calibri"/>
-              </a:rPr>
-              <a:t>        }</a:t>
-            </a:r>
-          </a:p>
-          <a:p>
-            <a:pPr>
-              <a:spcAft>
-                <a:spcPts val="400"/>
-              </a:spcAft>
-            </a:pPr>
-            <a:r>
-              <a:rPr sz="1400" b="0" i="0">
-                <a:solidFill>
-                  <a:srgbClr val="FFFFFF"/>
-                </a:solidFill>
-                <a:latin typeface="Calibri"/>
-              </a:rPr>
-              <a:t>        return instancia;                          // 4. de ahi en adelante, siempre la misma</a:t>
-            </a:r>
-          </a:p>
-          <a:p>
-            <a:pPr>
-              <a:spcAft>
-                <a:spcPts val="400"/>
-              </a:spcAft>
-            </a:pPr>
-            <a:r>
-              <a:rPr sz="1400" b="0" i="0">
-                <a:solidFill>
-                  <a:srgbClr val="FFFFFF"/>
-                </a:solidFill>
-                <a:latin typeface="Calibri"/>
-              </a:rPr>
-              <a:t>    }</a:t>
-            </a:r>
-          </a:p>
-          <a:p>
-            <a:pPr>
-              <a:spcAft>
-                <a:spcPts val="400"/>
-              </a:spcAft>
-            </a:pPr>
-            <a:r>
-              <a:rPr sz="1400" b="0" i="0">
-                <a:solidFill>
-                  <a:srgbClr val="FFFFFF"/>
-                </a:solidFill>
-                <a:latin typeface="Calibri"/>
-              </a:rPr>
-              <a:t>}</a:t>
-            </a:r>
-          </a:p>
-          <a:p>
-            <a:pPr>
-              <a:spcAft>
-                <a:spcPts val="400"/>
-              </a:spcAft>
-            </a:pPr>
-            <a:r>
-              <a:rPr sz="1400" b="0" i="0">
-                <a:solidFill>
-                  <a:srgbClr val="FFFFFF"/>
-                </a:solidFill>
-                <a:latin typeface="Calibri"/>
-              </a:rPr>
-              <a:t>// En cada ventana: RepositorioVetCare repo = RepositorioVetCare.getInstancia();  // nunca new</a:t>
-            </a:r>
-          </a:p>
-        </p:txBody>
-      </p:sp>
-      <p:sp>
-        <p:nvSpPr>
-          <p:cNvPr id="9" name="TextBox 8"/>
-          <p:cNvSpPr txBox="1"/>
-          <p:nvPr/>
-        </p:nvSpPr>
-        <p:spPr>
-          <a:xfrm>
-            <a:off x="457200" y="6080760"/>
-            <a:ext cx="11277295" cy="320040"/>
-          </a:xfrm>
-          <a:prstGeom prst="rect">
-            <a:avLst/>
-          </a:prstGeom>
-          <a:noFill/>
-        </p:spPr>
-        <p:txBody>
-          <a:bodyPr wrap="square">
-            <a:spAutoFit/>
-          </a:bodyPr>
-          <a:lstStyle/>
-          <a:p>
-            <a:pPr algn="ctr"/>
-            <a:r>
-              <a:rPr sz="1200" b="0" i="1">
-                <a:solidFill>
-                  <a:srgbClr val="666666"/>
-                </a:solidFill>
-                <a:latin typeface="Calibri"/>
-              </a:rPr>
-              <a:t>El constructor privado no es un adorno: es lo unico que le garantiza al compilador que existira una sola instancia.</a:t>
-            </a:r>
-          </a:p>
-        </p:txBody>
-      </p:sp>
-      <p:sp>
-        <p:nvSpPr>
-          <p:cNvPr id="10" name="TextBox 9"/>
+              <a:rPr sz="2000" b="0" i="0">
+                <a:solidFill>
+                  <a:srgbClr val="333333"/>
+                </a:solidFill>
+                <a:latin typeface="Calibri"/>
+              </a:rPr>
+              <a:t>–   Esa es exactamente la intencion del patron Singleton.</a:t>
+            </a:r>
+          </a:p>
+        </p:txBody>
+      </p:sp>
+      <p:sp>
+        <p:nvSpPr>
+          <p:cNvPr id="6" name="TextBox 5"/>
           <p:cNvSpPr txBox="1"/>
           <p:nvPr/>
         </p:nvSpPr>
@@ -7579,7 +9666,7 @@
                 </a:solidFill>
                 <a:latin typeface="Calibri"/>
               </a:rPr>
-              <a:t>Demo del dia</a:t>
+              <a:t>El mecanismo en Java tiene tres piezas y las tres son obligatorias (1/2)</a:t>
             </a:r>
           </a:p>
         </p:txBody>
@@ -7618,25 +9705,7 @@
                 </a:solidFill>
                 <a:latin typeface="Calibri"/>
               </a:rPr>
-              <a:t>–   </a:t>
-            </a:r>
-            <a:r>
-              <a:rPr sz="2000" b="1" i="0">
-                <a:solidFill>
-                  <a:srgbClr val="333333"/>
-                </a:solidFill>
-                <a:latin typeface="Calibri"/>
-              </a:rPr>
-              <a:t>Herramienta:</a:t>
-            </a:r>
-            <a:r>
-              <a:rPr sz="2000" b="0" i="0">
-                <a:solidFill>
-                  <a:srgbClr val="333333"/>
-                </a:solidFill>
-                <a:latin typeface="Calibri"/>
-              </a:rPr>
-              <a:t> Visual Studio Code (Java)</a:t>
+              <a:t>–   El mecanismo en Java tiene tres piezas y las tres son obligatorias.</a:t>
             </a:r>
           </a:p>
           <a:p>
@@ -7652,25 +9721,7 @@
                 </a:solidFill>
                 <a:latin typeface="Calibri"/>
               </a:rPr>
-              <a:t>–   </a:t>
-            </a:r>
-            <a:r>
-              <a:rPr sz="2000" b="1" i="0">
-                <a:solidFill>
-                  <a:srgbClr val="333333"/>
-                </a:solidFill>
-                <a:latin typeface="Calibri"/>
-              </a:rPr>
-              <a:t>Demo:</a:t>
-            </a:r>
-            <a:r>
-              <a:rPr sz="2000" b="0" i="0">
-                <a:solidFill>
-                  <a:srgbClr val="333333"/>
-                </a:solidFill>
-                <a:latin typeface="Calibri"/>
-              </a:rPr>
-              <a:t> El docente abre dos ventanas de VetCare, registra una mascota en la primera y la muestra apareciendo en la segunda porque ambas comparten la unica instancia del repositorio.</a:t>
+              <a:t>–   Primera, un atributo privado y estatico del mismo tipo de la clase (private static RepositorioVetCare instancia): estatico porque debe pertenecer a la clase y no a un objeto, privado para que nadie lo reemplace desde afuera.</a:t>
             </a:r>
           </a:p>
           <a:p>
@@ -7686,7 +9737,23 @@
                 </a:solidFill>
                 <a:latin typeface="Calibri"/>
               </a:rPr>
-              <a:t>–   Mismo dominio VetCare — no otro ejemplo.</a:t>
+              <a:t>–   Segunda, el constructor declarado private: mientras exista un constructor publico, cualquiera puede hacer new y el patron se rompe; al hacerlo privado el compilador se vuelve su aliado y marca en rojo cada intento.</a:t>
+            </a:r>
+          </a:p>
+          <a:p>
+            <a:pPr>
+              <a:spcAft>
+                <a:spcPts val="800"/>
+              </a:spcAft>
+            </a:pPr>
+            <a:r>
+              <a:rPr sz="2000" b="0" i="0">
+                <a:solidFill>
+                  <a:srgbClr val="333333"/>
+                </a:solidFill>
+                <a:latin typeface="Calibri"/>
+              </a:rPr>
+              <a:t>–   Tercera, un metodo publico y estatico getInstancia() que revisa si el atributo es null, lo crea la primera vez y de ahi en adelante devuelve siempre el mismo objeto; a eso se le llama inicializacion perezosa (lazy).</a:t>
             </a:r>
           </a:p>
         </p:txBody>
@@ -7867,7 +9934,7 @@
                 </a:solidFill>
                 <a:latin typeface="Calibri"/>
               </a:rPr>
-              <a:t>Taller PI — por que importa</a:t>
+              <a:t>El mecanismo en Java tiene tres piezas y las tres son obligatorias (2/2)</a:t>
             </a:r>
           </a:p>
         </p:txBody>
@@ -7906,25 +9973,7 @@
                 </a:solidFill>
                 <a:latin typeface="Calibri"/>
               </a:rPr>
-              <a:t>–   </a:t>
-            </a:r>
-            <a:r>
-              <a:rPr sz="2000" b="1" i="0">
-                <a:solidFill>
-                  <a:srgbClr val="333333"/>
-                </a:solidFill>
-                <a:latin typeface="Calibri"/>
-              </a:rPr>
-              <a:t>Por que importa al PI:</a:t>
-            </a:r>
-            <a:r>
-              <a:rPr sz="2000" b="0" i="0">
-                <a:solidFill>
-                  <a:srgbClr val="333333"/>
-                </a:solidFill>
-                <a:latin typeface="Calibri"/>
-              </a:rPr>
-              <a:t> el PI pide una sola aplicacion con varias ventanas trabajando sobre los mismos datos; sin un unico repositorio compartido, la agenda de citas nunca vera las mascotas registradas.</a:t>
+              <a:t>–   Si el programa fuera multihilo, dos hilos podrian entrar al mismo tiempo al if y crear dos instancias</a:t>
             </a:r>
           </a:p>
           <a:p>
@@ -7940,7 +9989,7 @@
                 </a:solidFill>
                 <a:latin typeface="Calibri"/>
               </a:rPr>
-              <a:t>–   La fabrica de consultas es la que va a permitir agregar nuevos servicios de la clinica (guarderia, cirugia) sin tocar el codigo de las ventanas.</a:t>
+              <a:t>–   Por eso se marca synchronized, o se usa la version temprana (private static final RepositorioVetCare INSTANCIA = new RepositorioVetCare();) que Java garantiza unica.</a:t>
             </a:r>
           </a:p>
           <a:p>
@@ -7956,7 +10005,7 @@
                 </a:solidFill>
                 <a:latin typeface="Calibri"/>
               </a:rPr>
-              <a:t>–   El punto unico de acceso a los datos es tambien el punto unico por donde despues pasara la lectura y escritura de los archivos .txt/.csv del PI.</a:t>
+              <a:t>–   Para verificarlo en pantalla no hay que creer en la fe: se imprime System.identityHashCode(a) y System.identityHashCode(b) desde las dos ventanas y se comprueba que el numero es el mismo.</a:t>
             </a:r>
           </a:p>
         </p:txBody>
@@ -8137,7 +10186,7 @@
                 </a:solidFill>
                 <a:latin typeface="Calibri"/>
               </a:rPr>
-              <a:t>Taller PI — punto de partida</a:t>
+              <a:t>El segundo patron responde a otro problema distinto: quien decide como...</a:t>
             </a:r>
           </a:p>
         </p:txBody>
@@ -8176,7 +10225,7 @@
                 </a:solidFill>
                 <a:latin typeface="Calibri"/>
               </a:rPr>
-              <a:t>–   VetCare ya tiene la ventana de registro funcionando y esta a punto de nacer la ventana de agendamiento de citas.</a:t>
+              <a:t>–   El segundo patron responde a otro problema distinto: quien decide como se construye un objeto.</a:t>
             </a:r>
           </a:p>
           <a:p>
@@ -8192,7 +10241,7 @@
                 </a:solidFill>
                 <a:latin typeface="Calibri"/>
               </a:rPr>
-              <a:t>–   Cada ventana esta creando hoy su propio repositorio, asi que lo registrado en una es invisible para la otra.</a:t>
+              <a:t>–   En VetCare hay tres tipos de consulta con reglas propias: Vacunacion dura 15 minutos y cuesta 35.000, Control dura 30 minutos y cuesta 60.000, Urgencia dura 45 minutos y cuesta 120.000.</a:t>
             </a:r>
           </a:p>
           <a:p>
@@ -8208,7 +10257,55 @@
                 </a:solidFill>
                 <a:latin typeface="Calibri"/>
               </a:rPr>
-              <a:t>–   La clinica Huellitas maneja por ahora tres tipos de consulta: vacunacion (15 min, 35.000), control (30 min, 60.000) y urgencia (45 min, 120.000).</a:t>
+              <a:t>–   Si la ventana de agendamiento hace directamente el new de cada subclase, esos numeros y esas decisiones quedan regados por toda la interfaz, y el dia que la clinica suba la tarifa hay que ir a buscarlos en cinco ventanas.</a:t>
+            </a:r>
+          </a:p>
+          <a:p>
+            <a:pPr>
+              <a:spcAft>
+                <a:spcPts val="800"/>
+              </a:spcAft>
+            </a:pPr>
+            <a:r>
+              <a:rPr sz="2000" b="0" i="0">
+                <a:solidFill>
+                  <a:srgbClr val="333333"/>
+                </a:solidFill>
+                <a:latin typeface="Calibri"/>
+              </a:rPr>
+              <a:t>–   Una Factory concentra esa decision en un solo lugar: FabricaConsultas.crear("URGENCIA", "M-001") devuelve un objeto de tipo Consulta y la ventana ni se entera de que subclase le entregaron</a:t>
+            </a:r>
+          </a:p>
+          <a:p>
+            <a:pPr>
+              <a:spcAft>
+                <a:spcPts val="800"/>
+              </a:spcAft>
+            </a:pPr>
+            <a:r>
+              <a:rPr sz="2000" b="0" i="0">
+                <a:solidFill>
+                  <a:srgbClr val="333333"/>
+                </a:solidFill>
+                <a:latin typeface="Calibri"/>
+              </a:rPr>
+              <a:t>–   Ademas la fabrica normaliza el texto que llega del JComboBox y lanza IllegalArgumentException si el tipo no existe, con lo cual un dato basura nunca se convierte en objeto.</a:t>
+            </a:r>
+          </a:p>
+          <a:p>
+            <a:pPr>
+              <a:spcAft>
+                <a:spcPts val="800"/>
+              </a:spcAft>
+            </a:pPr>
+            <a:r>
+              <a:rPr sz="2000" b="0" i="0">
+                <a:solidFill>
+                  <a:srgbClr val="333333"/>
+                </a:solidFill>
+                <a:latin typeface="Calibri"/>
+              </a:rPr>
+              <a:t>–   Fijese en el detalle importante: el metodo retorna el tipo base (Consulta), no la subclase; ahi es donde el polimorfismo que vimos en clases anteriores empieza a pagar, porque el dia que Huellitas agregue 'CIRUGIA' solo se toca la fabrica.</a:t>
             </a:r>
           </a:p>
         </p:txBody>
@@ -8389,111 +10486,21 @@
                 </a:solidFill>
                 <a:latin typeface="Calibri"/>
               </a:rPr>
-              <a:t>Taller PI — pasos guiados</a:t>
-            </a:r>
-          </a:p>
-        </p:txBody>
-      </p:sp>
-      <p:sp>
-        <p:nvSpPr>
-          <p:cNvPr id="5" name="Rounded Rectangle 4"/>
-          <p:cNvSpPr/>
-          <p:nvPr/>
-        </p:nvSpPr>
-        <p:spPr>
-          <a:xfrm>
-            <a:off x="457200" y="1234440"/>
-            <a:ext cx="11277295" cy="950976"/>
-          </a:xfrm>
-          <a:prstGeom prst="roundRect">
-            <a:avLst>
-              <a:gd name="adj" fmla="val 12000"/>
-            </a:avLst>
-          </a:prstGeom>
-          <a:solidFill>
-            <a:srgbClr val="F2F2F2"/>
-          </a:solidFill>
-          <a:ln>
-            <a:noFill/>
-          </a:ln>
-        </p:spPr>
-        <p:style>
-          <a:lnRef idx="1">
-            <a:schemeClr val="accent1"/>
-          </a:lnRef>
-          <a:fillRef idx="3">
-            <a:schemeClr val="accent1"/>
-          </a:fillRef>
-          <a:effectRef idx="2">
-            <a:schemeClr val="accent1"/>
-          </a:effectRef>
-          <a:fontRef idx="minor">
-            <a:schemeClr val="lt1"/>
-          </a:fontRef>
-        </p:style>
-        <p:txBody>
-          <a:bodyPr rtlCol="0" anchor="ctr"/>
-          <a:lstStyle/>
-          <a:p>
-            <a:pPr algn="ctr"/>
-          </a:p>
-        </p:txBody>
-      </p:sp>
-      <p:sp>
-        <p:nvSpPr>
-          <p:cNvPr id="6" name="Rounded Rectangle 5"/>
-          <p:cNvSpPr/>
-          <p:nvPr/>
-        </p:nvSpPr>
-        <p:spPr>
-          <a:xfrm>
-            <a:off x="594360" y="1490472"/>
-            <a:ext cx="438912" cy="438912"/>
-          </a:xfrm>
-          <a:prstGeom prst="roundRect">
-            <a:avLst>
-              <a:gd name="adj" fmla="val 12000"/>
-            </a:avLst>
-          </a:prstGeom>
-          <a:solidFill>
-            <a:srgbClr val="095292"/>
-          </a:solidFill>
-          <a:ln>
-            <a:noFill/>
-          </a:ln>
-        </p:spPr>
-        <p:style>
-          <a:lnRef idx="1">
-            <a:schemeClr val="accent1"/>
-          </a:lnRef>
-          <a:fillRef idx="3">
-            <a:schemeClr val="accent1"/>
-          </a:fillRef>
-          <a:effectRef idx="2">
-            <a:schemeClr val="accent1"/>
-          </a:effectRef>
-          <a:fontRef idx="minor">
-            <a:schemeClr val="lt1"/>
-          </a:fontRef>
-        </p:style>
-        <p:txBody>
-          <a:bodyPr rtlCol="0" anchor="ctr"/>
-          <a:lstStyle/>
-          <a:p>
-            <a:pPr algn="ctr"/>
-          </a:p>
-        </p:txBody>
-      </p:sp>
-      <p:sp>
-        <p:nvSpPr>
-          <p:cNvPr id="7" name="TextBox 6"/>
+              <a:t>Ahora la parte que casi nadie enseña: cuando NO usarlos</a:t>
+            </a:r>
+          </a:p>
+        </p:txBody>
+      </p:sp>
+      <p:sp>
+        <p:nvSpPr>
+          <p:cNvPr id="5" name="TextBox 4"/>
           <p:cNvSpPr txBox="1"/>
           <p:nvPr/>
         </p:nvSpPr>
         <p:spPr>
           <a:xfrm>
-            <a:off x="594360" y="1490472"/>
-            <a:ext cx="438912" cy="438912"/>
+            <a:off x="457200" y="1170432"/>
+            <a:ext cx="11277295" cy="5230368"/>
           </a:xfrm>
           <a:prstGeom prst="rect">
             <a:avLst/>
@@ -8501,677 +10508,143 @@
           <a:noFill/>
         </p:spPr>
         <p:txBody>
-          <a:bodyPr wrap="square" anchor="ctr"/>
-          <a:lstStyle/>
-          <a:p>
-            <a:pPr algn="ctr"/>
-            <a:r>
-              <a:rPr sz="1600" b="1" i="0">
-                <a:solidFill>
-                  <a:srgbClr val="FFFFFF"/>
-                </a:solidFill>
-                <a:latin typeface="Calibri"/>
-              </a:rPr>
-              <a:t>1</a:t>
-            </a:r>
-          </a:p>
-        </p:txBody>
-      </p:sp>
-      <p:sp>
-        <p:nvSpPr>
-          <p:cNvPr id="8" name="TextBox 7"/>
-          <p:cNvSpPr txBox="1"/>
-          <p:nvPr/>
-        </p:nvSpPr>
-        <p:spPr>
-          <a:xfrm>
-            <a:off x="1188720" y="1325880"/>
-            <a:ext cx="10271455" cy="786384"/>
-          </a:xfrm>
-          <a:prstGeom prst="rect">
-            <a:avLst/>
-          </a:prstGeom>
-          <a:noFill/>
-        </p:spPr>
-        <p:txBody>
-          <a:bodyPr wrap="square" anchor="ctr"/>
-          <a:lstStyle/>
-          <a:p>
-            <a:r>
-              <a:rPr sz="1400" b="1" i="0">
-                <a:solidFill>
-                  <a:srgbClr val="095292"/>
-                </a:solidFill>
-                <a:latin typeface="Calibri"/>
-              </a:rPr>
-              <a:t>Convierta RepositorioVetCare en Singleton: atributo private static instancia, constructor private con un System.out.println que avise cuando se crea, y metodo public static synchronized getInstancia(); ejecute el programa y verifique que el mensaje de creacion aparece una sola vez aunque llame getInstancia() tres veces.</a:t>
-            </a:r>
-          </a:p>
-        </p:txBody>
-      </p:sp>
-      <p:sp>
-        <p:nvSpPr>
-          <p:cNvPr id="9" name="Rounded Rectangle 8"/>
-          <p:cNvSpPr/>
-          <p:nvPr/>
-        </p:nvSpPr>
-        <p:spPr>
-          <a:xfrm>
-            <a:off x="457200" y="2276856"/>
-            <a:ext cx="11277295" cy="950976"/>
-          </a:xfrm>
-          <a:prstGeom prst="roundRect">
-            <a:avLst>
-              <a:gd name="adj" fmla="val 12000"/>
-            </a:avLst>
-          </a:prstGeom>
-          <a:solidFill>
-            <a:srgbClr val="E8F4FA"/>
-          </a:solidFill>
-          <a:ln>
-            <a:noFill/>
-          </a:ln>
-        </p:spPr>
-        <p:style>
-          <a:lnRef idx="1">
-            <a:schemeClr val="accent1"/>
-          </a:lnRef>
-          <a:fillRef idx="3">
-            <a:schemeClr val="accent1"/>
-          </a:fillRef>
-          <a:effectRef idx="2">
-            <a:schemeClr val="accent1"/>
-          </a:effectRef>
-          <a:fontRef idx="minor">
-            <a:schemeClr val="lt1"/>
-          </a:fontRef>
-        </p:style>
-        <p:txBody>
-          <a:bodyPr rtlCol="0" anchor="ctr"/>
-          <a:lstStyle/>
-          <a:p>
-            <a:pPr algn="ctr"/>
-          </a:p>
-        </p:txBody>
-      </p:sp>
-      <p:sp>
-        <p:nvSpPr>
-          <p:cNvPr id="10" name="Rounded Rectangle 9"/>
-          <p:cNvSpPr/>
-          <p:nvPr/>
-        </p:nvSpPr>
-        <p:spPr>
-          <a:xfrm>
-            <a:off x="594360" y="2532888"/>
-            <a:ext cx="438912" cy="438912"/>
-          </a:xfrm>
-          <a:prstGeom prst="roundRect">
-            <a:avLst>
-              <a:gd name="adj" fmla="val 12000"/>
-            </a:avLst>
-          </a:prstGeom>
-          <a:solidFill>
-            <a:srgbClr val="095292"/>
-          </a:solidFill>
-          <a:ln>
-            <a:noFill/>
-          </a:ln>
-        </p:spPr>
-        <p:style>
-          <a:lnRef idx="1">
-            <a:schemeClr val="accent1"/>
-          </a:lnRef>
-          <a:fillRef idx="3">
-            <a:schemeClr val="accent1"/>
-          </a:fillRef>
-          <a:effectRef idx="2">
-            <a:schemeClr val="accent1"/>
-          </a:effectRef>
-          <a:fontRef idx="minor">
-            <a:schemeClr val="lt1"/>
-          </a:fontRef>
-        </p:style>
-        <p:txBody>
-          <a:bodyPr rtlCol="0" anchor="ctr"/>
-          <a:lstStyle/>
-          <a:p>
-            <a:pPr algn="ctr"/>
-          </a:p>
-        </p:txBody>
-      </p:sp>
-      <p:sp>
-        <p:nvSpPr>
-          <p:cNvPr id="11" name="TextBox 10"/>
-          <p:cNvSpPr txBox="1"/>
-          <p:nvPr/>
-        </p:nvSpPr>
-        <p:spPr>
-          <a:xfrm>
-            <a:off x="594360" y="2532888"/>
-            <a:ext cx="438912" cy="438912"/>
-          </a:xfrm>
-          <a:prstGeom prst="rect">
-            <a:avLst/>
-          </a:prstGeom>
-          <a:noFill/>
-        </p:spPr>
-        <p:txBody>
-          <a:bodyPr wrap="square" anchor="ctr"/>
-          <a:lstStyle/>
-          <a:p>
-            <a:pPr algn="ctr"/>
-            <a:r>
-              <a:rPr sz="1600" b="1" i="0">
-                <a:solidFill>
-                  <a:srgbClr val="FFFFFF"/>
-                </a:solidFill>
-                <a:latin typeface="Calibri"/>
-              </a:rPr>
-              <a:t>2</a:t>
-            </a:r>
-          </a:p>
-        </p:txBody>
-      </p:sp>
-      <p:sp>
-        <p:nvSpPr>
-          <p:cNvPr id="12" name="TextBox 11"/>
-          <p:cNvSpPr txBox="1"/>
-          <p:nvPr/>
-        </p:nvSpPr>
-        <p:spPr>
-          <a:xfrm>
-            <a:off x="1188720" y="2368296"/>
-            <a:ext cx="10271455" cy="786384"/>
-          </a:xfrm>
-          <a:prstGeom prst="rect">
-            <a:avLst/>
-          </a:prstGeom>
-          <a:noFill/>
-        </p:spPr>
-        <p:txBody>
-          <a:bodyPr wrap="square" anchor="ctr"/>
-          <a:lstStyle/>
-          <a:p>
-            <a:r>
-              <a:rPr sz="1400" b="1" i="0">
-                <a:solidFill>
-                  <a:srgbClr val="095292"/>
-                </a:solidFill>
-                <a:latin typeface="Calibri"/>
-              </a:rPr>
-              <a:t>Elimine todos los 'new RepositorioVetCare()' que queden en las ventanas y reemplacelos por RepositorioVetCare.getInstancia(); use Ctrl+F en el proyecto para confirmar que no queda ni uno solo fuera del propio metodo getInstancia.</a:t>
-            </a:r>
-          </a:p>
-        </p:txBody>
-      </p:sp>
-      <p:sp>
-        <p:nvSpPr>
-          <p:cNvPr id="13" name="Rounded Rectangle 12"/>
-          <p:cNvSpPr/>
-          <p:nvPr/>
-        </p:nvSpPr>
-        <p:spPr>
-          <a:xfrm>
-            <a:off x="457200" y="3319272"/>
-            <a:ext cx="11277295" cy="950976"/>
-          </a:xfrm>
-          <a:prstGeom prst="roundRect">
-            <a:avLst>
-              <a:gd name="adj" fmla="val 12000"/>
-            </a:avLst>
-          </a:prstGeom>
-          <a:solidFill>
-            <a:srgbClr val="F2F2F2"/>
-          </a:solidFill>
-          <a:ln>
-            <a:noFill/>
-          </a:ln>
-        </p:spPr>
-        <p:style>
-          <a:lnRef idx="1">
-            <a:schemeClr val="accent1"/>
-          </a:lnRef>
-          <a:fillRef idx="3">
-            <a:schemeClr val="accent1"/>
-          </a:fillRef>
-          <a:effectRef idx="2">
-            <a:schemeClr val="accent1"/>
-          </a:effectRef>
-          <a:fontRef idx="minor">
-            <a:schemeClr val="lt1"/>
-          </a:fontRef>
-        </p:style>
-        <p:txBody>
-          <a:bodyPr rtlCol="0" anchor="ctr"/>
-          <a:lstStyle/>
-          <a:p>
-            <a:pPr algn="ctr"/>
-          </a:p>
-        </p:txBody>
-      </p:sp>
-      <p:sp>
-        <p:nvSpPr>
-          <p:cNvPr id="14" name="Rounded Rectangle 13"/>
-          <p:cNvSpPr/>
-          <p:nvPr/>
-        </p:nvSpPr>
-        <p:spPr>
-          <a:xfrm>
-            <a:off x="594360" y="3575304"/>
-            <a:ext cx="438912" cy="438912"/>
-          </a:xfrm>
-          <a:prstGeom prst="roundRect">
-            <a:avLst>
-              <a:gd name="adj" fmla="val 12000"/>
-            </a:avLst>
-          </a:prstGeom>
-          <a:solidFill>
-            <a:srgbClr val="095292"/>
-          </a:solidFill>
-          <a:ln>
-            <a:noFill/>
-          </a:ln>
-        </p:spPr>
-        <p:style>
-          <a:lnRef idx="1">
-            <a:schemeClr val="accent1"/>
-          </a:lnRef>
-          <a:fillRef idx="3">
-            <a:schemeClr val="accent1"/>
-          </a:fillRef>
-          <a:effectRef idx="2">
-            <a:schemeClr val="accent1"/>
-          </a:effectRef>
-          <a:fontRef idx="minor">
-            <a:schemeClr val="lt1"/>
-          </a:fontRef>
-        </p:style>
-        <p:txBody>
-          <a:bodyPr rtlCol="0" anchor="ctr"/>
-          <a:lstStyle/>
-          <a:p>
-            <a:pPr algn="ctr"/>
-          </a:p>
-        </p:txBody>
-      </p:sp>
-      <p:sp>
-        <p:nvSpPr>
-          <p:cNvPr id="15" name="TextBox 14"/>
-          <p:cNvSpPr txBox="1"/>
-          <p:nvPr/>
-        </p:nvSpPr>
-        <p:spPr>
-          <a:xfrm>
-            <a:off x="594360" y="3575304"/>
-            <a:ext cx="438912" cy="438912"/>
-          </a:xfrm>
-          <a:prstGeom prst="rect">
-            <a:avLst/>
-          </a:prstGeom>
-          <a:noFill/>
-        </p:spPr>
-        <p:txBody>
-          <a:bodyPr wrap="square" anchor="ctr"/>
-          <a:lstStyle/>
-          <a:p>
-            <a:pPr algn="ctr"/>
-            <a:r>
-              <a:rPr sz="1600" b="1" i="0">
-                <a:solidFill>
-                  <a:srgbClr val="FFFFFF"/>
-                </a:solidFill>
-                <a:latin typeface="Calibri"/>
-              </a:rPr>
-              <a:t>3</a:t>
-            </a:r>
-          </a:p>
-        </p:txBody>
-      </p:sp>
-      <p:sp>
-        <p:nvSpPr>
-          <p:cNvPr id="16" name="TextBox 15"/>
-          <p:cNvSpPr txBox="1"/>
-          <p:nvPr/>
-        </p:nvSpPr>
-        <p:spPr>
-          <a:xfrm>
-            <a:off x="1188720" y="3410712"/>
-            <a:ext cx="10271455" cy="786384"/>
-          </a:xfrm>
-          <a:prstGeom prst="rect">
-            <a:avLst/>
-          </a:prstGeom>
-          <a:noFill/>
-        </p:spPr>
-        <p:txBody>
-          <a:bodyPr wrap="square" anchor="ctr"/>
-          <a:lstStyle/>
-          <a:p>
-            <a:r>
-              <a:rPr sz="1400" b="1" i="0">
-                <a:solidFill>
-                  <a:srgbClr val="095292"/>
-                </a:solidFill>
-                <a:latin typeface="Calibri"/>
-              </a:rPr>
-              <a:t>Cree la jerarquia Consulta (abstracta) con ConsultaVacunacion, ConsultaControl y ConsultaUrgencia, cada una con su duracionMinutos() y tarifaBase(), y la clase FabricaConsultas con el metodo estatico crear(String tipo, String idMascota) que normalice el texto y lance IllegalArgumentException si el tipo no existe.</a:t>
-            </a:r>
-          </a:p>
-        </p:txBody>
-      </p:sp>
-      <p:sp>
-        <p:nvSpPr>
-          <p:cNvPr id="17" name="Rounded Rectangle 16"/>
-          <p:cNvSpPr/>
-          <p:nvPr/>
-        </p:nvSpPr>
-        <p:spPr>
-          <a:xfrm>
-            <a:off x="457200" y="4361688"/>
-            <a:ext cx="11277295" cy="950976"/>
-          </a:xfrm>
-          <a:prstGeom prst="roundRect">
-            <a:avLst>
-              <a:gd name="adj" fmla="val 12000"/>
-            </a:avLst>
-          </a:prstGeom>
-          <a:solidFill>
-            <a:srgbClr val="E8F4FA"/>
-          </a:solidFill>
-          <a:ln>
-            <a:noFill/>
-          </a:ln>
-        </p:spPr>
-        <p:style>
-          <a:lnRef idx="1">
-            <a:schemeClr val="accent1"/>
-          </a:lnRef>
-          <a:fillRef idx="3">
-            <a:schemeClr val="accent1"/>
-          </a:fillRef>
-          <a:effectRef idx="2">
-            <a:schemeClr val="accent1"/>
-          </a:effectRef>
-          <a:fontRef idx="minor">
-            <a:schemeClr val="lt1"/>
-          </a:fontRef>
-        </p:style>
-        <p:txBody>
-          <a:bodyPr rtlCol="0" anchor="ctr"/>
-          <a:lstStyle/>
-          <a:p>
-            <a:pPr algn="ctr"/>
-          </a:p>
-        </p:txBody>
-      </p:sp>
-      <p:sp>
-        <p:nvSpPr>
-          <p:cNvPr id="18" name="Rounded Rectangle 17"/>
-          <p:cNvSpPr/>
-          <p:nvPr/>
-        </p:nvSpPr>
-        <p:spPr>
-          <a:xfrm>
-            <a:off x="594360" y="4617720"/>
-            <a:ext cx="438912" cy="438912"/>
-          </a:xfrm>
-          <a:prstGeom prst="roundRect">
-            <a:avLst>
-              <a:gd name="adj" fmla="val 12000"/>
-            </a:avLst>
-          </a:prstGeom>
-          <a:solidFill>
-            <a:srgbClr val="095292"/>
-          </a:solidFill>
-          <a:ln>
-            <a:noFill/>
-          </a:ln>
-        </p:spPr>
-        <p:style>
-          <a:lnRef idx="1">
-            <a:schemeClr val="accent1"/>
-          </a:lnRef>
-          <a:fillRef idx="3">
-            <a:schemeClr val="accent1"/>
-          </a:fillRef>
-          <a:effectRef idx="2">
-            <a:schemeClr val="accent1"/>
-          </a:effectRef>
-          <a:fontRef idx="minor">
-            <a:schemeClr val="lt1"/>
-          </a:fontRef>
-        </p:style>
-        <p:txBody>
-          <a:bodyPr rtlCol="0" anchor="ctr"/>
-          <a:lstStyle/>
-          <a:p>
-            <a:pPr algn="ctr"/>
-          </a:p>
-        </p:txBody>
-      </p:sp>
-      <p:sp>
-        <p:nvSpPr>
-          <p:cNvPr id="19" name="TextBox 18"/>
-          <p:cNvSpPr txBox="1"/>
-          <p:nvPr/>
-        </p:nvSpPr>
-        <p:spPr>
-          <a:xfrm>
-            <a:off x="594360" y="4617720"/>
-            <a:ext cx="438912" cy="438912"/>
-          </a:xfrm>
-          <a:prstGeom prst="rect">
-            <a:avLst/>
-          </a:prstGeom>
-          <a:noFill/>
-        </p:spPr>
-        <p:txBody>
-          <a:bodyPr wrap="square" anchor="ctr"/>
-          <a:lstStyle/>
-          <a:p>
-            <a:pPr algn="ctr"/>
-            <a:r>
-              <a:rPr sz="1600" b="1" i="0">
-                <a:solidFill>
-                  <a:srgbClr val="FFFFFF"/>
-                </a:solidFill>
-                <a:latin typeface="Calibri"/>
-              </a:rPr>
-              <a:t>4</a:t>
-            </a:r>
-          </a:p>
-        </p:txBody>
-      </p:sp>
-      <p:sp>
-        <p:nvSpPr>
-          <p:cNvPr id="20" name="TextBox 19"/>
-          <p:cNvSpPr txBox="1"/>
-          <p:nvPr/>
-        </p:nvSpPr>
-        <p:spPr>
-          <a:xfrm>
-            <a:off x="1188720" y="4453128"/>
-            <a:ext cx="10271455" cy="786384"/>
-          </a:xfrm>
-          <a:prstGeom prst="rect">
-            <a:avLst/>
-          </a:prstGeom>
-          <a:noFill/>
-        </p:spPr>
-        <p:txBody>
-          <a:bodyPr wrap="square" anchor="ctr"/>
-          <a:lstStyle/>
-          <a:p>
-            <a:r>
-              <a:rPr sz="1400" b="1" i="0">
-                <a:solidFill>
-                  <a:srgbClr val="095292"/>
-                </a:solidFill>
-                <a:latin typeface="Calibri"/>
-              </a:rPr>
-              <a:t>Ejecute el demo y compruebe dos cosas: en la consola, que el mensaje del constructor sale una sola vez y que los dos identityHashCode coinciden; en pantalla, que al registrar M-002 Michi en la ventana Recepcion y oprimir Refrescar en la ventana Consultorio, Michi aparece junto a M-001 Kira, que fue registrada desde el main.</a:t>
-            </a:r>
-          </a:p>
-        </p:txBody>
-      </p:sp>
-      <p:sp>
-        <p:nvSpPr>
-          <p:cNvPr id="21" name="Rounded Rectangle 20"/>
-          <p:cNvSpPr/>
-          <p:nvPr/>
-        </p:nvSpPr>
-        <p:spPr>
-          <a:xfrm>
-            <a:off x="457200" y="5404104"/>
-            <a:ext cx="11277295" cy="950976"/>
-          </a:xfrm>
-          <a:prstGeom prst="roundRect">
-            <a:avLst>
-              <a:gd name="adj" fmla="val 12000"/>
-            </a:avLst>
-          </a:prstGeom>
-          <a:solidFill>
-            <a:srgbClr val="F2F2F2"/>
-          </a:solidFill>
-          <a:ln>
-            <a:noFill/>
-          </a:ln>
-        </p:spPr>
-        <p:style>
-          <a:lnRef idx="1">
-            <a:schemeClr val="accent1"/>
-          </a:lnRef>
-          <a:fillRef idx="3">
-            <a:schemeClr val="accent1"/>
-          </a:fillRef>
-          <a:effectRef idx="2">
-            <a:schemeClr val="accent1"/>
-          </a:effectRef>
-          <a:fontRef idx="minor">
-            <a:schemeClr val="lt1"/>
-          </a:fontRef>
-        </p:style>
-        <p:txBody>
-          <a:bodyPr rtlCol="0" anchor="ctr"/>
-          <a:lstStyle/>
-          <a:p>
-            <a:pPr algn="ctr"/>
-          </a:p>
-        </p:txBody>
-      </p:sp>
-      <p:sp>
-        <p:nvSpPr>
-          <p:cNvPr id="22" name="Rounded Rectangle 21"/>
-          <p:cNvSpPr/>
-          <p:nvPr/>
-        </p:nvSpPr>
-        <p:spPr>
-          <a:xfrm>
-            <a:off x="594360" y="5660136"/>
-            <a:ext cx="438912" cy="438912"/>
-          </a:xfrm>
-          <a:prstGeom prst="roundRect">
-            <a:avLst>
-              <a:gd name="adj" fmla="val 12000"/>
-            </a:avLst>
-          </a:prstGeom>
-          <a:solidFill>
-            <a:srgbClr val="095292"/>
-          </a:solidFill>
-          <a:ln>
-            <a:noFill/>
-          </a:ln>
-        </p:spPr>
-        <p:style>
-          <a:lnRef idx="1">
-            <a:schemeClr val="accent1"/>
-          </a:lnRef>
-          <a:fillRef idx="3">
-            <a:schemeClr val="accent1"/>
-          </a:fillRef>
-          <a:effectRef idx="2">
-            <a:schemeClr val="accent1"/>
-          </a:effectRef>
-          <a:fontRef idx="minor">
-            <a:schemeClr val="lt1"/>
-          </a:fontRef>
-        </p:style>
-        <p:txBody>
-          <a:bodyPr rtlCol="0" anchor="ctr"/>
-          <a:lstStyle/>
-          <a:p>
-            <a:pPr algn="ctr"/>
-          </a:p>
-        </p:txBody>
-      </p:sp>
-      <p:sp>
-        <p:nvSpPr>
-          <p:cNvPr id="23" name="TextBox 22"/>
-          <p:cNvSpPr txBox="1"/>
-          <p:nvPr/>
-        </p:nvSpPr>
-        <p:spPr>
-          <a:xfrm>
-            <a:off x="594360" y="5660136"/>
-            <a:ext cx="438912" cy="438912"/>
-          </a:xfrm>
-          <a:prstGeom prst="rect">
-            <a:avLst/>
-          </a:prstGeom>
-          <a:noFill/>
-        </p:spPr>
-        <p:txBody>
-          <a:bodyPr wrap="square" anchor="ctr"/>
-          <a:lstStyle/>
-          <a:p>
-            <a:pPr algn="ctr"/>
-            <a:r>
-              <a:rPr sz="1600" b="1" i="0">
-                <a:solidFill>
-                  <a:srgbClr val="FFFFFF"/>
-                </a:solidFill>
-                <a:latin typeface="Calibri"/>
-              </a:rPr>
-              <a:t>5</a:t>
-            </a:r>
-          </a:p>
-        </p:txBody>
-      </p:sp>
-      <p:sp>
-        <p:nvSpPr>
-          <p:cNvPr id="24" name="TextBox 23"/>
-          <p:cNvSpPr txBox="1"/>
-          <p:nvPr/>
-        </p:nvSpPr>
-        <p:spPr>
-          <a:xfrm>
-            <a:off x="1188720" y="5495544"/>
-            <a:ext cx="10271455" cy="786384"/>
-          </a:xfrm>
-          <a:prstGeom prst="rect">
-            <a:avLst/>
-          </a:prstGeom>
-          <a:noFill/>
-        </p:spPr>
-        <p:txBody>
-          <a:bodyPr wrap="square" anchor="ctr"/>
-          <a:lstStyle/>
-          <a:p>
-            <a:r>
-              <a:rPr sz="1400" b="1" i="0">
-                <a:solidFill>
-                  <a:srgbClr val="095292"/>
-                </a:solidFill>
-                <a:latin typeface="Calibri"/>
-              </a:rPr>
-              <a:t>Escriba al final del archivo un comentario de tres lineas justificando por que el repositorio SI es Singleton, por que Mascota NO debe serlo y que problema tendria el Singleton cuando lleguemos a las pruebas; suba el proyecto y el comentario a la plataforma del curso.</a:t>
-            </a:r>
-          </a:p>
-        </p:txBody>
-      </p:sp>
-      <p:sp>
-        <p:nvSpPr>
-          <p:cNvPr id="25" name="TextBox 24"/>
+          <a:bodyPr wrap="square">
+            <a:spAutoFit/>
+          </a:bodyPr>
+          <a:lstStyle/>
+          <a:p>
+            <a:pPr>
+              <a:spcAft>
+                <a:spcPts val="800"/>
+              </a:spcAft>
+            </a:pPr>
+            <a:r>
+              <a:rPr sz="1900" b="0" i="0">
+                <a:solidFill>
+                  <a:srgbClr val="333333"/>
+                </a:solidFill>
+                <a:latin typeface="Calibri"/>
+              </a:rPr>
+              <a:t>–   Ahora la parte que casi nadie enseña: cuando NO usarlos.</a:t>
+            </a:r>
+          </a:p>
+          <a:p>
+            <a:pPr>
+              <a:spcAft>
+                <a:spcPts val="800"/>
+              </a:spcAft>
+            </a:pPr>
+            <a:r>
+              <a:rPr sz="1900" b="0" i="0">
+                <a:solidFill>
+                  <a:srgbClr val="333333"/>
+                </a:solidFill>
+                <a:latin typeface="Calibri"/>
+              </a:rPr>
+              <a:t>–   El Singleton es, sin maquillaje, una variable global con corbata.</a:t>
+            </a:r>
+          </a:p>
+          <a:p>
+            <a:pPr>
+              <a:spcAft>
+                <a:spcPts val="800"/>
+              </a:spcAft>
+            </a:pPr>
+            <a:r>
+              <a:rPr sz="1900" b="0" i="0">
+                <a:solidFill>
+                  <a:srgbClr val="333333"/>
+                </a:solidFill>
+                <a:latin typeface="Calibri"/>
+              </a:rPr>
+              <a:t>–   Trae tres costos reales: esconde dependencias (una clase que por dentro llama a getInstancia() no declara en su firma que necesita el repositorio)</a:t>
+            </a:r>
+          </a:p>
+          <a:p>
+            <a:pPr>
+              <a:spcAft>
+                <a:spcPts val="800"/>
+              </a:spcAft>
+            </a:pPr>
+            <a:r>
+              <a:rPr sz="1900" b="0" i="0">
+                <a:solidFill>
+                  <a:srgbClr val="333333"/>
+                </a:solidFill>
+                <a:latin typeface="Calibri"/>
+              </a:rPr>
+              <a:t>–   Complica las pruebas (en la clase 8 vamos a querer un repositorio limpio en cada caso de prueba y el Singleton nos va a devolver el sucio de la prueba anterior) y concentra estado compartido que en aplicaciones grandes se vuelve impredecible.</a:t>
+            </a:r>
+          </a:p>
+          <a:p>
+            <a:pPr>
+              <a:spcAft>
+                <a:spcPts val="800"/>
+              </a:spcAft>
+            </a:pPr>
+            <a:r>
+              <a:rPr sz="1900" b="0" i="0">
+                <a:solidFill>
+                  <a:srgbClr val="333333"/>
+                </a:solidFill>
+                <a:latin typeface="Calibri"/>
+              </a:rPr>
+              <a:t>–   La alternativa profesional se llama inyeccion por constructor: pasar el repositorio como parametro, tal como hicimos con ControladorRegistro en la clase 6.</a:t>
+            </a:r>
+          </a:p>
+          <a:p>
+            <a:pPr>
+              <a:spcAft>
+                <a:spcPts val="800"/>
+              </a:spcAft>
+            </a:pPr>
+            <a:r>
+              <a:rPr sz="1900" b="0" i="0">
+                <a:solidFill>
+                  <a:srgbClr val="333333"/>
+                </a:solidFill>
+                <a:latin typeface="Calibri"/>
+              </a:rPr>
+              <a:t>–   En VetCare aceptamos el Singleton para el repositorio porque es una aplicacion de escritorio pequeña, con un solo usuario y una unica fuente de datos, y aun asi vamos a dejarle un metodo limpiar() para poder probarlo.</a:t>
+            </a:r>
+          </a:p>
+          <a:p>
+            <a:pPr>
+              <a:spcAft>
+                <a:spcPts val="800"/>
+              </a:spcAft>
+            </a:pPr>
+            <a:r>
+              <a:rPr sz="1900" b="0" i="0">
+                <a:solidFill>
+                  <a:srgbClr val="333333"/>
+                </a:solidFill>
+                <a:latin typeface="Calibri"/>
+              </a:rPr>
+              <a:t>–   La Factory tiene su propio abuso: si solo hay una clase que crear y ninguna regla que aplicar, una fabrica que hace un new pelado no aporta nada, solo una capa mas de ruido.</a:t>
+            </a:r>
+          </a:p>
+          <a:p>
+            <a:pPr>
+              <a:spcAft>
+                <a:spcPts val="800"/>
+              </a:spcAft>
+            </a:pPr>
+            <a:r>
+              <a:rPr sz="1900" b="0" i="0">
+                <a:solidFill>
+                  <a:srgbClr val="333333"/>
+                </a:solidFill>
+                <a:latin typeface="Calibri"/>
+              </a:rPr>
+              <a:t>–   La regla de oro es: primero el problema, despues el patron; nunca al reves.</a:t>
+            </a:r>
+          </a:p>
+        </p:txBody>
+      </p:sp>
+      <p:sp>
+        <p:nvSpPr>
+          <p:cNvPr id="6" name="TextBox 5"/>
           <p:cNvSpPr txBox="1"/>
           <p:nvPr/>
         </p:nvSpPr>

--- a/Programacion II/Clases/Clase 7 - Patrones de diseno Singleton y Factory/Presentacion.pptx
+++ b/Programacion II/Clases/Clase 7 - Patrones de diseno Singleton y Factory/Presentacion.pptx
@@ -11,45 +11,39 @@
     <p:sldId id="259" r:id="rId10"/>
     <p:sldId id="260" r:id="rId11"/>
     <p:sldId id="261" r:id="rId12"/>
-    <p:sldId id="262" r:id="rId13"/>
-    <p:sldId id="263" r:id="rId14"/>
-    <p:sldId id="264" r:id="rId15"/>
-    <p:sldId id="265" r:id="rId16"/>
-    <p:sldId id="266" r:id="rId17"/>
-    <p:sldId id="267" r:id="rId18"/>
-    <p:sldId id="268" r:id="rId19"/>
-    <p:sldId id="269" r:id="rId20"/>
-    <p:sldId id="270" r:id="rId21"/>
-    <p:sldId id="271" r:id="rId22"/>
-    <p:sldId id="272" r:id="rId23"/>
-    <p:sldId id="273" r:id="rId24"/>
-    <p:sldId id="274" r:id="rId25"/>
-    <p:sldId id="275" r:id="rId26"/>
-    <p:sldId id="276" r:id="rId27"/>
-    <p:sldId id="277" r:id="rId28"/>
-    <p:sldId id="278" r:id="rId29"/>
-    <p:sldId id="279" r:id="rId30"/>
-    <p:sldId id="280" r:id="rId31"/>
-    <p:sldId id="281" r:id="rId32"/>
-    <p:sldId id="282" r:id="rId33"/>
-    <p:sldId id="283" r:id="rId34"/>
-    <p:sldId id="284" r:id="rId35"/>
-    <p:sldId id="285" r:id="rId36"/>
-    <p:sldId id="286" r:id="rId37"/>
-    <p:sldId id="287" r:id="rId38"/>
-    <p:sldId id="288" r:id="rId39"/>
-    <p:sldId id="289" r:id="rId40"/>
-    <p:sldId id="290" r:id="rId41"/>
-    <p:sldId id="291" r:id="rId42"/>
-    <p:sldId id="292" r:id="rId43"/>
-    <p:sldId id="293" r:id="rId44"/>
-    <p:sldId id="294" r:id="rId45"/>
-    <p:sldId id="295" r:id="rId46"/>
-    <p:sldId id="296" r:id="rId47"/>
-    <p:sldId id="297" r:id="rId48"/>
-    <p:sldId id="298" r:id="rId49"/>
-    <p:sldId id="299" r:id="rId50"/>
-    <p:sldId id="300" r:id="rId51"/>
+    <p:sldId id="262" r:id="rId14"/>
+    <p:sldId id="263" r:id="rId15"/>
+    <p:sldId id="264" r:id="rId16"/>
+    <p:sldId id="265" r:id="rId17"/>
+    <p:sldId id="266" r:id="rId18"/>
+    <p:sldId id="267" r:id="rId19"/>
+    <p:sldId id="268" r:id="rId20"/>
+    <p:sldId id="269" r:id="rId21"/>
+    <p:sldId id="270" r:id="rId22"/>
+    <p:sldId id="271" r:id="rId23"/>
+    <p:sldId id="272" r:id="rId24"/>
+    <p:sldId id="273" r:id="rId25"/>
+    <p:sldId id="274" r:id="rId26"/>
+    <p:sldId id="275" r:id="rId27"/>
+    <p:sldId id="276" r:id="rId28"/>
+    <p:sldId id="277" r:id="rId29"/>
+    <p:sldId id="278" r:id="rId30"/>
+    <p:sldId id="279" r:id="rId31"/>
+    <p:sldId id="280" r:id="rId32"/>
+    <p:sldId id="281" r:id="rId33"/>
+    <p:sldId id="282" r:id="rId34"/>
+    <p:sldId id="283" r:id="rId35"/>
+    <p:sldId id="284" r:id="rId36"/>
+    <p:sldId id="285" r:id="rId37"/>
+    <p:sldId id="286" r:id="rId38"/>
+    <p:sldId id="287" r:id="rId39"/>
+    <p:sldId id="288" r:id="rId40"/>
+    <p:sldId id="289" r:id="rId41"/>
+    <p:sldId id="290" r:id="rId42"/>
+    <p:sldId id="291" r:id="rId43"/>
+    <p:sldId id="292" r:id="rId44"/>
+    <p:sldId id="293" r:id="rId45"/>
+    <p:sldId id="294" r:id="rId46"/>
   </p:sldIdLst>
   <p:sldSz cx="12191695" cy="6858000" type="screen4x3"/>
   <p:notesSz cx="6858000" cy="9144000"/>
@@ -149,6 +143,438 @@
     </a:lvl9pPr>
   </p:defaultTextStyle>
 </p:presentation>
+</file>
+
+<file path=ppt/notesMasters/notesMaster1.xml><?xml version="1.0" encoding="utf-8"?>
+<p:notesMaster xmlns:a="http://schemas.openxmlformats.org/drawingml/2006/main" xmlns:p="http://schemas.openxmlformats.org/presentationml/2006/main" xmlns:r="http://schemas.openxmlformats.org/officeDocument/2006/relationships">
+  <p:cSld>
+    <p:bg>
+      <p:bgRef idx="1001">
+        <a:schemeClr val="bg1"/>
+      </p:bgRef>
+    </p:bg>
+    <p:spTree>
+      <p:nvGrpSpPr>
+        <p:cNvPr id="1" name=""/>
+        <p:cNvGrpSpPr/>
+        <p:nvPr/>
+      </p:nvGrpSpPr>
+      <p:grpSpPr>
+        <a:xfrm>
+          <a:off x="0" y="0"/>
+          <a:ext cx="0" cy="0"/>
+          <a:chOff x="0" y="0"/>
+          <a:chExt cx="0" cy="0"/>
+        </a:xfrm>
+      </p:grpSpPr>
+      <p:sp>
+        <p:nvSpPr>
+          <p:cNvPr id="2" name="Header Placeholder 1"/>
+          <p:cNvSpPr>
+            <a:spLocks noGrp="1"/>
+          </p:cNvSpPr>
+          <p:nvPr>
+            <p:ph type="hdr" sz="quarter"/>
+          </p:nvPr>
+        </p:nvSpPr>
+        <p:spPr>
+          <a:xfrm>
+            <a:off x="0" y="0"/>
+            <a:ext cx="2971800" cy="457200"/>
+          </a:xfrm>
+          <a:prstGeom prst="rect">
+            <a:avLst/>
+          </a:prstGeom>
+        </p:spPr>
+        <p:txBody>
+          <a:bodyPr vert="horz" lIns="91440" tIns="45720" rIns="91440" bIns="45720" rtlCol="0"/>
+          <a:lstStyle>
+            <a:lvl1pPr algn="l">
+              <a:defRPr sz="1200"/>
+            </a:lvl1pPr>
+          </a:lstStyle>
+          <a:p>
+            <a:endParaRPr lang="en-US"/>
+          </a:p>
+        </p:txBody>
+      </p:sp>
+      <p:sp>
+        <p:nvSpPr>
+          <p:cNvPr id="3" name="Date Placeholder 2"/>
+          <p:cNvSpPr>
+            <a:spLocks noGrp="1"/>
+          </p:cNvSpPr>
+          <p:nvPr>
+            <p:ph type="dt" idx="1"/>
+          </p:nvPr>
+        </p:nvSpPr>
+        <p:spPr>
+          <a:xfrm>
+            <a:off x="3884613" y="0"/>
+            <a:ext cx="2971800" cy="457200"/>
+          </a:xfrm>
+          <a:prstGeom prst="rect">
+            <a:avLst/>
+          </a:prstGeom>
+        </p:spPr>
+        <p:txBody>
+          <a:bodyPr vert="horz" lIns="91440" tIns="45720" rIns="91440" bIns="45720" rtlCol="0"/>
+          <a:lstStyle>
+            <a:lvl1pPr algn="r">
+              <a:defRPr sz="1200"/>
+            </a:lvl1pPr>
+          </a:lstStyle>
+          <a:p>
+            <a:fld id="{0F89C1C7-3DCD-1040-A9CF-14679D8B5DDD}" type="datetimeFigureOut">
+              <a:rPr lang="en-US" smtClean="0"/>
+              <a:t>10/17/16</a:t>
+            </a:fld>
+            <a:endParaRPr lang="en-US"/>
+          </a:p>
+        </p:txBody>
+      </p:sp>
+      <p:sp>
+        <p:nvSpPr>
+          <p:cNvPr id="4" name="Slide Image Placeholder 3"/>
+          <p:cNvSpPr>
+            <a:spLocks noGrp="1" noRot="1" noChangeAspect="1"/>
+          </p:cNvSpPr>
+          <p:nvPr>
+            <p:ph type="sldImg" idx="2"/>
+          </p:nvPr>
+        </p:nvSpPr>
+        <p:spPr>
+          <a:xfrm>
+            <a:off x="1143000" y="685800"/>
+            <a:ext cx="4572000" cy="3429000"/>
+          </a:xfrm>
+          <a:prstGeom prst="rect">
+            <a:avLst/>
+          </a:prstGeom>
+          <a:noFill/>
+          <a:ln w="12700">
+            <a:solidFill>
+              <a:prstClr val="black"/>
+            </a:solidFill>
+          </a:ln>
+        </p:spPr>
+        <p:txBody>
+          <a:bodyPr vert="horz" lIns="91440" tIns="45720" rIns="91440" bIns="45720" rtlCol="0" anchor="ctr"/>
+          <a:lstStyle/>
+          <a:p>
+            <a:endParaRPr lang="en-US"/>
+          </a:p>
+        </p:txBody>
+      </p:sp>
+      <p:sp>
+        <p:nvSpPr>
+          <p:cNvPr id="5" name="Notes Placeholder 4"/>
+          <p:cNvSpPr>
+            <a:spLocks noGrp="1"/>
+          </p:cNvSpPr>
+          <p:nvPr>
+            <p:ph type="body" sz="quarter" idx="3"/>
+          </p:nvPr>
+        </p:nvSpPr>
+        <p:spPr>
+          <a:xfrm>
+            <a:off x="685800" y="4343400"/>
+            <a:ext cx="5486400" cy="4114800"/>
+          </a:xfrm>
+          <a:prstGeom prst="rect">
+            <a:avLst/>
+          </a:prstGeom>
+        </p:spPr>
+        <p:txBody>
+          <a:bodyPr vert="horz" lIns="91440" tIns="45720" rIns="91440" bIns="45720" rtlCol="0"/>
+          <a:lstStyle/>
+          <a:p>
+            <a:pPr lvl="0"/>
+            <a:r>
+              <a:rPr lang="en-US" smtClean="0"/>
+              <a:t>Click to edit Master text styles</a:t>
+            </a:r>
+          </a:p>
+          <a:p>
+            <a:pPr lvl="1"/>
+            <a:r>
+              <a:rPr lang="en-US" smtClean="0"/>
+              <a:t>Second level</a:t>
+            </a:r>
+          </a:p>
+          <a:p>
+            <a:pPr lvl="2"/>
+            <a:r>
+              <a:rPr lang="en-US" smtClean="0"/>
+              <a:t>Third level</a:t>
+            </a:r>
+          </a:p>
+          <a:p>
+            <a:pPr lvl="3"/>
+            <a:r>
+              <a:rPr lang="en-US" smtClean="0"/>
+              <a:t>Fourth level</a:t>
+            </a:r>
+          </a:p>
+          <a:p>
+            <a:pPr lvl="4"/>
+            <a:r>
+              <a:rPr lang="en-US" smtClean="0"/>
+              <a:t>Fifth level</a:t>
+            </a:r>
+            <a:endParaRPr lang="en-US"/>
+          </a:p>
+        </p:txBody>
+      </p:sp>
+      <p:sp>
+        <p:nvSpPr>
+          <p:cNvPr id="6" name="Footer Placeholder 5"/>
+          <p:cNvSpPr>
+            <a:spLocks noGrp="1"/>
+          </p:cNvSpPr>
+          <p:nvPr>
+            <p:ph type="ftr" sz="quarter" idx="4"/>
+          </p:nvPr>
+        </p:nvSpPr>
+        <p:spPr>
+          <a:xfrm>
+            <a:off x="0" y="8685213"/>
+            <a:ext cx="2971800" cy="457200"/>
+          </a:xfrm>
+          <a:prstGeom prst="rect">
+            <a:avLst/>
+          </a:prstGeom>
+        </p:spPr>
+        <p:txBody>
+          <a:bodyPr vert="horz" lIns="91440" tIns="45720" rIns="91440" bIns="45720" rtlCol="0" anchor="b"/>
+          <a:lstStyle>
+            <a:lvl1pPr algn="l">
+              <a:defRPr sz="1200"/>
+            </a:lvl1pPr>
+          </a:lstStyle>
+          <a:p>
+            <a:endParaRPr lang="en-US"/>
+          </a:p>
+        </p:txBody>
+      </p:sp>
+      <p:sp>
+        <p:nvSpPr>
+          <p:cNvPr id="7" name="Slide Number Placeholder 6"/>
+          <p:cNvSpPr>
+            <a:spLocks noGrp="1"/>
+          </p:cNvSpPr>
+          <p:nvPr>
+            <p:ph type="sldNum" sz="quarter" idx="5"/>
+          </p:nvPr>
+        </p:nvSpPr>
+        <p:spPr>
+          <a:xfrm>
+            <a:off x="3884613" y="8685213"/>
+            <a:ext cx="2971800" cy="457200"/>
+          </a:xfrm>
+          <a:prstGeom prst="rect">
+            <a:avLst/>
+          </a:prstGeom>
+        </p:spPr>
+        <p:txBody>
+          <a:bodyPr vert="horz" lIns="91440" tIns="45720" rIns="91440" bIns="45720" rtlCol="0" anchor="b"/>
+          <a:lstStyle>
+            <a:lvl1pPr algn="r">
+              <a:defRPr sz="1200"/>
+            </a:lvl1pPr>
+          </a:lstStyle>
+          <a:p>
+            <a:fld id="{BB5E49A5-4136-284D-997B-48E1D791AD67}" type="slidenum">
+              <a:rPr lang="en-US" smtClean="0"/>
+              <a:t>‹#›</a:t>
+            </a:fld>
+            <a:endParaRPr lang="en-US"/>
+          </a:p>
+        </p:txBody>
+      </p:sp>
+    </p:spTree>
+    <p:extLst>
+      <p:ext uri="{BB962C8B-B14F-4D97-AF65-F5344CB8AC3E}">
+        <p14:creationId xmlns:p14="http://schemas.microsoft.com/office/powerpoint/2010/main" val="2623252185"/>
+      </p:ext>
+    </p:extLst>
+  </p:cSld>
+  <p:clrMap bg1="lt1" tx1="dk1" bg2="lt2" tx2="dk2" accent1="accent1" accent2="accent2" accent3="accent3" accent4="accent4" accent5="accent5" accent6="accent6" hlink="hlink" folHlink="folHlink"/>
+  <p:notesStyle>
+    <a:lvl1pPr marL="0" algn="l" defTabSz="457200" rtl="0" eaLnBrk="1" latinLnBrk="0" hangingPunct="1">
+      <a:defRPr sz="1200" kern="1200">
+        <a:solidFill>
+          <a:schemeClr val="tx1"/>
+        </a:solidFill>
+        <a:latin typeface="+mn-lt"/>
+        <a:ea typeface="+mn-ea"/>
+        <a:cs typeface="+mn-cs"/>
+      </a:defRPr>
+    </a:lvl1pPr>
+    <a:lvl2pPr marL="457200" algn="l" defTabSz="457200" rtl="0" eaLnBrk="1" latinLnBrk="0" hangingPunct="1">
+      <a:defRPr sz="1200" kern="1200">
+        <a:solidFill>
+          <a:schemeClr val="tx1"/>
+        </a:solidFill>
+        <a:latin typeface="+mn-lt"/>
+        <a:ea typeface="+mn-ea"/>
+        <a:cs typeface="+mn-cs"/>
+      </a:defRPr>
+    </a:lvl2pPr>
+    <a:lvl3pPr marL="914400" algn="l" defTabSz="457200" rtl="0" eaLnBrk="1" latinLnBrk="0" hangingPunct="1">
+      <a:defRPr sz="1200" kern="1200">
+        <a:solidFill>
+          <a:schemeClr val="tx1"/>
+        </a:solidFill>
+        <a:latin typeface="+mn-lt"/>
+        <a:ea typeface="+mn-ea"/>
+        <a:cs typeface="+mn-cs"/>
+      </a:defRPr>
+    </a:lvl3pPr>
+    <a:lvl4pPr marL="1371600" algn="l" defTabSz="457200" rtl="0" eaLnBrk="1" latinLnBrk="0" hangingPunct="1">
+      <a:defRPr sz="1200" kern="1200">
+        <a:solidFill>
+          <a:schemeClr val="tx1"/>
+        </a:solidFill>
+        <a:latin typeface="+mn-lt"/>
+        <a:ea typeface="+mn-ea"/>
+        <a:cs typeface="+mn-cs"/>
+      </a:defRPr>
+    </a:lvl4pPr>
+    <a:lvl5pPr marL="1828800" algn="l" defTabSz="457200" rtl="0" eaLnBrk="1" latinLnBrk="0" hangingPunct="1">
+      <a:defRPr sz="1200" kern="1200">
+        <a:solidFill>
+          <a:schemeClr val="tx1"/>
+        </a:solidFill>
+        <a:latin typeface="+mn-lt"/>
+        <a:ea typeface="+mn-ea"/>
+        <a:cs typeface="+mn-cs"/>
+      </a:defRPr>
+    </a:lvl5pPr>
+    <a:lvl6pPr marL="2286000" algn="l" defTabSz="457200" rtl="0" eaLnBrk="1" latinLnBrk="0" hangingPunct="1">
+      <a:defRPr sz="1200" kern="1200">
+        <a:solidFill>
+          <a:schemeClr val="tx1"/>
+        </a:solidFill>
+        <a:latin typeface="+mn-lt"/>
+        <a:ea typeface="+mn-ea"/>
+        <a:cs typeface="+mn-cs"/>
+      </a:defRPr>
+    </a:lvl6pPr>
+    <a:lvl7pPr marL="2743200" algn="l" defTabSz="457200" rtl="0" eaLnBrk="1" latinLnBrk="0" hangingPunct="1">
+      <a:defRPr sz="1200" kern="1200">
+        <a:solidFill>
+          <a:schemeClr val="tx1"/>
+        </a:solidFill>
+        <a:latin typeface="+mn-lt"/>
+        <a:ea typeface="+mn-ea"/>
+        <a:cs typeface="+mn-cs"/>
+      </a:defRPr>
+    </a:lvl7pPr>
+    <a:lvl8pPr marL="3200400" algn="l" defTabSz="457200" rtl="0" eaLnBrk="1" latinLnBrk="0" hangingPunct="1">
+      <a:defRPr sz="1200" kern="1200">
+        <a:solidFill>
+          <a:schemeClr val="tx1"/>
+        </a:solidFill>
+        <a:latin typeface="+mn-lt"/>
+        <a:ea typeface="+mn-ea"/>
+        <a:cs typeface="+mn-cs"/>
+      </a:defRPr>
+    </a:lvl8pPr>
+    <a:lvl9pPr marL="3657600" algn="l" defTabSz="457200" rtl="0" eaLnBrk="1" latinLnBrk="0" hangingPunct="1">
+      <a:defRPr sz="1200" kern="1200">
+        <a:solidFill>
+          <a:schemeClr val="tx1"/>
+        </a:solidFill>
+        <a:latin typeface="+mn-lt"/>
+        <a:ea typeface="+mn-ea"/>
+        <a:cs typeface="+mn-cs"/>
+      </a:defRPr>
+    </a:lvl9pPr>
+  </p:notesStyle>
+</p:notesMaster>
+</file>
+
+<file path=ppt/notesSlides/notesSlide1.xml><?xml version="1.0" encoding="utf-8"?>
+<p:notes xmlns:a="http://schemas.openxmlformats.org/drawingml/2006/main" xmlns:p="http://schemas.openxmlformats.org/presentationml/2006/main" xmlns:r="http://schemas.openxmlformats.org/officeDocument/2006/relationships">
+  <p:cSld>
+    <p:spTree>
+      <p:nvGrpSpPr>
+        <p:cNvPr id="1" name=""/>
+        <p:cNvGrpSpPr/>
+        <p:nvPr/>
+      </p:nvGrpSpPr>
+      <p:grpSpPr>
+        <a:xfrm>
+          <a:off x="0" y="0"/>
+          <a:ext cx="0" cy="0"/>
+          <a:chOff x="0" y="0"/>
+          <a:chExt cx="0" cy="0"/>
+        </a:xfrm>
+      </p:grpSpPr>
+      <p:sp>
+        <p:nvSpPr>
+          <p:cNvPr id="2" name="Slide Image Placeholder 1"/>
+          <p:cNvSpPr>
+            <a:spLocks noGrp="1"/>
+          </p:cNvSpPr>
+          <p:nvPr>
+            <p:ph type="sldImg" idx="2"/>
+          </p:nvPr>
+        </p:nvSpPr>
+        <p:spPr/>
+      </p:sp>
+      <p:sp>
+        <p:nvSpPr>
+          <p:cNvPr id="3" name="Notes Placeholder 2"/>
+          <p:cNvSpPr>
+            <a:spLocks noGrp="1"/>
+          </p:cNvSpPr>
+          <p:nvPr>
+            <p:ph type="body" idx="3" sz="quarter"/>
+          </p:nvPr>
+        </p:nvSpPr>
+        <p:spPr/>
+        <p:txBody>
+          <a:bodyPr/>
+          <a:lstStyle/>
+          <a:p>
+            <a:r>
+              <a:t>El problema que motiva el Singleton ya lo vivimos en la clase pasada, aunque no le pusimos nombre.</a:t>
+            </a:r>
+          </a:p>
+          <a:p/>
+          <a:p>
+            <a:r>
+              <a:t>En VetCare la ventana de registro creaba su propio RepositorioMascotas.</a:t>
+            </a:r>
+          </a:p>
+          <a:p/>
+          <a:p>
+            <a:r>
+              <a:t>Esa es exactamente la intencion del patron Singleton.</a:t>
+            </a:r>
+          </a:p>
+        </p:txBody>
+      </p:sp>
+      <p:sp>
+        <p:nvSpPr>
+          <p:cNvPr id="4" name="Slide Number Placeholder 3"/>
+          <p:cNvSpPr>
+            <a:spLocks noGrp="1"/>
+          </p:cNvSpPr>
+          <p:nvPr>
+            <p:ph type="sldNum" idx="5" sz="quarter"/>
+          </p:nvPr>
+        </p:nvSpPr>
+        <p:spPr/>
+      </p:sp>
+    </p:spTree>
+  </p:cSld>
+  <p:clrMapOvr>
+    <a:masterClrMapping/>
+  </p:clrMapOvr>
+</p:notes>
 </file>
 
 <file path=ppt/slideLayouts/slideLayout1.xml><?xml version="1.0" encoding="utf-8"?>
@@ -7585,7 +8011,7 @@
                 </a:solidFill>
                 <a:latin typeface="Calibri"/>
               </a:rPr>
-              <a:t>Encuadre de hoy · Objetivo del PI</a:t>
+              <a:t>Encuadre de hoy</a:t>
             </a:r>
           </a:p>
         </p:txBody>
@@ -7633,7 +8059,7 @@
                 </a:solidFill>
                 <a:latin typeface="Calibri"/>
               </a:rPr>
-              <a:t>Hoy avanzamos VetCare en:</a:t>
+              <a:t>Tema de hoy:</a:t>
             </a:r>
             <a:r>
               <a:rPr sz="2000" b="0" i="0">
@@ -7642,7 +8068,7 @@
                 </a:solidFill>
                 <a:latin typeface="Calibri"/>
               </a:rPr>
-              <a:t> VetCare queda con un unico repositorio de datos en memoria compartido por todas las ventanas y una fabrica que crea las consultas del dominio.</a:t>
+              <a:t> Patrones de diseno · Singleton y Factory — Soluciones con nombre a problemas que ya nos pasaron</a:t>
             </a:r>
           </a:p>
           <a:p>
@@ -7701,41 +8127,23 @@
                 </a:solidFill>
                 <a:latin typeface="Calibri"/>
               </a:rPr>
-              <a:t>–   </a:t>
-            </a:r>
-            <a:r>
-              <a:rPr sz="2000" b="1" i="0">
+              <a:t>–   Primero el concepto, despues el codigo que lo muestra y la demo en vivo.</a:t>
+            </a:r>
+          </a:p>
+          <a:p>
+            <a:pPr>
+              <a:spcAft>
+                <a:spcPts val="800"/>
+              </a:spcAft>
+            </a:pPr>
+            <a:r>
+              <a:rPr sz="2000" b="0" i="0">
                 <a:solidFill>
                   <a:srgbClr val="333333"/>
                 </a:solidFill>
                 <a:latin typeface="Calibri"/>
               </a:rPr>
-              <a:t>Entregable de hoy:</a:t>
-            </a:r>
-            <a:r>
-              <a:rPr sz="2000" b="0" i="0">
-                <a:solidFill>
-                  <a:srgbClr val="333333"/>
-                </a:solidFill>
-                <a:latin typeface="Calibri"/>
-              </a:rPr>
-              <a:t> Clase RepositorioVetCare convertida en Singleton, FabricaConsultas con tres tipos y evidencia de que dos ventanas ven la misma lista, subido a la plataforma del curso.</a:t>
-            </a:r>
-          </a:p>
-          <a:p>
-            <a:pPr>
-              <a:spcAft>
-                <a:spcPts val="800"/>
-              </a:spcAft>
-            </a:pPr>
-            <a:r>
-              <a:rPr sz="2000" b="0" i="0">
-                <a:solidFill>
-                  <a:srgbClr val="333333"/>
-                </a:solidFill>
-                <a:latin typeface="Calibri"/>
-              </a:rPr>
-              <a:t>–   La teoria esta al servicio del producto: al salir, VetCare avanzo.</a:t>
+              <a:t>–   Todo con el mismo dominio: la clinica veterinaria Huellitas (VetCare).</a:t>
             </a:r>
           </a:p>
         </p:txBody>
@@ -12770,7 +13178,7 @@
                 </a:solidFill>
                 <a:latin typeface="Calibri"/>
               </a:rPr>
-              <a:t>Encuadre y repaso del avance</a:t>
+              <a:t>Encuadre y repaso de la clase anterior</a:t>
             </a:r>
           </a:p>
         </p:txBody>
@@ -13115,7 +13523,7 @@
                 </a:solidFill>
                 <a:latin typeface="Calibri"/>
               </a:rPr>
-              <a:t>Taller guiado = avance del PI</a:t>
+              <a:t>Practica (opcional, guia en la carpeta)</a:t>
             </a:r>
           </a:p>
         </p:txBody>
@@ -13230,7 +13638,7 @@
                 </a:solidFill>
                 <a:latin typeface="Calibri"/>
               </a:rPr>
-              <a:t>Criterios de exito y cierre</a:t>
+              <a:t>Repaso de conceptos y cierre</a:t>
             </a:r>
           </a:p>
         </p:txBody>
@@ -18040,13 +18448,13 @@
         <p:spPr>
           <a:xfrm>
             <a:off x="0" y="0"/>
-            <a:ext cx="12191695" cy="960120"/>
+            <a:ext cx="12191695" cy="164592"/>
           </a:xfrm>
           <a:prstGeom prst="rect">
             <a:avLst/>
           </a:prstGeom>
           <a:solidFill>
-            <a:srgbClr val="095292"/>
+            <a:srgbClr val="269CCB"/>
           </a:solidFill>
           <a:ln>
             <a:noFill/>
@@ -18074,49 +18482,30 @@
           </a:p>
         </p:txBody>
       </p:sp>
-      <p:sp>
-        <p:nvSpPr>
-          <p:cNvPr id="3" name="Rectangle 2"/>
-          <p:cNvSpPr/>
-          <p:nvPr/>
-        </p:nvSpPr>
-        <p:spPr>
-          <a:xfrm>
-            <a:off x="0" y="960120"/>
-            <a:ext cx="12191695" cy="41148"/>
-          </a:xfrm>
-          <a:prstGeom prst="rect">
-            <a:avLst/>
-          </a:prstGeom>
-          <a:solidFill>
-            <a:srgbClr val="FFD000"/>
-          </a:solidFill>
-          <a:ln>
-            <a:noFill/>
-          </a:ln>
-        </p:spPr>
-        <p:style>
-          <a:lnRef idx="1">
-            <a:schemeClr val="accent1"/>
-          </a:lnRef>
-          <a:fillRef idx="3">
-            <a:schemeClr val="accent1"/>
-          </a:fillRef>
-          <a:effectRef idx="2">
-            <a:schemeClr val="accent1"/>
-          </a:effectRef>
-          <a:fontRef idx="minor">
-            <a:schemeClr val="lt1"/>
-          </a:fontRef>
-        </p:style>
-        <p:txBody>
-          <a:bodyPr rtlCol="0" anchor="ctr"/>
-          <a:lstStyle/>
-          <a:p>
-            <a:pPr algn="ctr"/>
-          </a:p>
-        </p:txBody>
-      </p:sp>
+      <p:pic>
+        <p:nvPicPr>
+          <p:cNvPr id="3" name="Picture 2" descr="logo_uniajc_color.png"/>
+          <p:cNvPicPr>
+            <a:picLocks noChangeAspect="1"/>
+          </p:cNvPicPr>
+          <p:nvPr/>
+        </p:nvPicPr>
+        <p:blipFill>
+          <a:blip r:embed="rId2"/>
+          <a:stretch>
+            <a:fillRect/>
+          </a:stretch>
+        </p:blipFill>
+        <p:spPr>
+          <a:xfrm>
+            <a:off x="10271455" y="5998464"/>
+            <a:ext cx="1463040" cy="643233"/>
+          </a:xfrm>
+          <a:prstGeom prst="rect">
+            <a:avLst/>
+          </a:prstGeom>
+        </p:spPr>
+      </p:pic>
       <p:sp>
         <p:nvSpPr>
           <p:cNvPr id="4" name="TextBox 3"/>
@@ -18125,8 +18514,41 @@
         </p:nvSpPr>
         <p:spPr>
           <a:xfrm>
-            <a:off x="457200" y="164592"/>
-            <a:ext cx="11277295" cy="502920"/>
+            <a:off x="457200" y="1737360"/>
+            <a:ext cx="11277295" cy="1097280"/>
+          </a:xfrm>
+          <a:prstGeom prst="rect">
+            <a:avLst/>
+          </a:prstGeom>
+          <a:noFill/>
+        </p:spPr>
+        <p:txBody>
+          <a:bodyPr wrap="square" anchor="ctr"/>
+          <a:lstStyle/>
+          <a:p>
+            <a:pPr algn="ctr"/>
+            <a:r>
+              <a:rPr sz="3400" b="1" i="0">
+                <a:solidFill>
+                  <a:srgbClr val="095292"/>
+                </a:solidFill>
+                <a:latin typeface="Calibri"/>
+              </a:rPr>
+              <a:t>Clase 7 · Patrones de diseno · Singleton y Factory</a:t>
+            </a:r>
+          </a:p>
+        </p:txBody>
+      </p:sp>
+      <p:sp>
+        <p:nvSpPr>
+          <p:cNvPr id="5" name="TextBox 4"/>
+          <p:cNvSpPr txBox="1"/>
+          <p:nvPr/>
+        </p:nvSpPr>
+        <p:spPr>
+          <a:xfrm>
+            <a:off x="457200" y="3017520"/>
+            <a:ext cx="11277295" cy="1645920"/>
           </a:xfrm>
           <a:prstGeom prst="rect">
             <a:avLst/>
@@ -18139,28 +18561,65 @@
           </a:bodyPr>
           <a:lstStyle/>
           <a:p>
-            <a:r>
-              <a:rPr sz="2600" b="1" i="0">
-                <a:solidFill>
-                  <a:srgbClr val="FFFFFF"/>
-                </a:solidFill>
-                <a:latin typeface="Calibri"/>
-              </a:rPr>
-              <a:t>Taller PI — por que importa</a:t>
-            </a:r>
-          </a:p>
-        </p:txBody>
-      </p:sp>
-      <p:sp>
-        <p:nvSpPr>
-          <p:cNvPr id="5" name="TextBox 4"/>
+            <a:pPr algn="ctr">
+              <a:spcAft>
+                <a:spcPts val="600"/>
+              </a:spcAft>
+            </a:pPr>
+            <a:r>
+              <a:rPr sz="1600" b="0" i="0">
+                <a:solidFill>
+                  <a:srgbClr val="333333"/>
+                </a:solidFill>
+                <a:latin typeface="Calibri"/>
+              </a:rPr>
+              <a:t>Soluciones con nombre a problemas que ya nos pasaron</a:t>
+            </a:r>
+          </a:p>
+          <a:p>
+            <a:pPr algn="ctr">
+              <a:spcAft>
+                <a:spcPts val="600"/>
+              </a:spcAft>
+            </a:pPr>
+            <a:r>
+              <a:rPr sz="1600" b="0" i="0">
+                <a:solidFill>
+                  <a:srgbClr val="333333"/>
+                </a:solidFill>
+                <a:latin typeface="Calibri"/>
+              </a:rPr>
+              <a:t>Repasa las laminas de concepto y el codigo de la demo</a:t>
+            </a:r>
+          </a:p>
+          <a:p>
+            <a:pPr algn="ctr">
+              <a:spcAft>
+                <a:spcPts val="600"/>
+              </a:spcAft>
+            </a:pPr>
+            <a:r>
+              <a:rPr sz="1600" b="0" i="0">
+                <a:solidFill>
+                  <a:srgbClr val="333333"/>
+                </a:solidFill>
+                <a:latin typeface="Calibri"/>
+              </a:rPr>
+              <a:t>Siguiente clase: continuamos el hilo del tema</a:t>
+            </a:r>
+          </a:p>
+        </p:txBody>
+      </p:sp>
+      <p:sp>
+        <p:nvSpPr>
+          <p:cNvPr id="6" name="TextBox 5"/>
           <p:cNvSpPr txBox="1"/>
           <p:nvPr/>
         </p:nvSpPr>
         <p:spPr>
           <a:xfrm>
-            <a:off x="457200" y="1170432"/>
-            <a:ext cx="11277295" cy="5230368"/>
+            <a:off x="457200" y="4754880"/>
+            <a:ext cx="11277295" cy="640080"/>
           </a:xfrm>
           <a:prstGeom prst="rect">
             <a:avLst/>
@@ -18173,104 +18632,15 @@
           </a:bodyPr>
           <a:lstStyle/>
           <a:p>
-            <a:pPr>
-              <a:spcAft>
-                <a:spcPts val="800"/>
-              </a:spcAft>
-            </a:pPr>
-            <a:r>
-              <a:rPr sz="2000" b="0" i="0">
-                <a:solidFill>
-                  <a:srgbClr val="333333"/>
-                </a:solidFill>
-                <a:latin typeface="Calibri"/>
-              </a:rPr>
-              <a:t>–   </a:t>
-            </a:r>
+            <a:pPr algn="ctr"/>
             <a:r>
               <a:rPr sz="2000" b="1" i="0">
                 <a:solidFill>
-                  <a:srgbClr val="333333"/>
-                </a:solidFill>
-                <a:latin typeface="Calibri"/>
-              </a:rPr>
-              <a:t>Por que importa al PI:</a:t>
-            </a:r>
-            <a:r>
-              <a:rPr sz="2000" b="0" i="0">
-                <a:solidFill>
-                  <a:srgbClr val="333333"/>
-                </a:solidFill>
-                <a:latin typeface="Calibri"/>
-              </a:rPr>
-              <a:t> el PI pide una sola aplicacion con varias ventanas trabajando sobre los mismos datos; sin un unico repositorio compartido, la agenda de citas nunca vera las mascotas registradas.</a:t>
-            </a:r>
-          </a:p>
-          <a:p>
-            <a:pPr>
-              <a:spcAft>
-                <a:spcPts val="800"/>
-              </a:spcAft>
-            </a:pPr>
-            <a:r>
-              <a:rPr sz="2000" b="0" i="0">
-                <a:solidFill>
-                  <a:srgbClr val="333333"/>
-                </a:solidFill>
-                <a:latin typeface="Calibri"/>
-              </a:rPr>
-              <a:t>–   La fabrica de consultas es la que va a permitir agregar nuevos servicios de la clinica (guarderia, cirugia) sin tocar el codigo de las ventanas.</a:t>
-            </a:r>
-          </a:p>
-          <a:p>
-            <a:pPr>
-              <a:spcAft>
-                <a:spcPts val="800"/>
-              </a:spcAft>
-            </a:pPr>
-            <a:r>
-              <a:rPr sz="2000" b="0" i="0">
-                <a:solidFill>
-                  <a:srgbClr val="333333"/>
-                </a:solidFill>
-                <a:latin typeface="Calibri"/>
-              </a:rPr>
-              <a:t>–   El punto unico de acceso a los datos es tambien el punto unico por donde despues pasara la lectura y escritura de los archivos .txt/.csv del PI.</a:t>
-            </a:r>
-          </a:p>
-        </p:txBody>
-      </p:sp>
-      <p:sp>
-        <p:nvSpPr>
-          <p:cNvPr id="6" name="TextBox 5"/>
-          <p:cNvSpPr txBox="1"/>
-          <p:nvPr/>
-        </p:nvSpPr>
-        <p:spPr>
-          <a:xfrm>
-            <a:off x="11185855" y="6473952"/>
-            <a:ext cx="640080" cy="274320"/>
-          </a:xfrm>
-          <a:prstGeom prst="rect">
-            <a:avLst/>
-          </a:prstGeom>
-          <a:noFill/>
-        </p:spPr>
-        <p:txBody>
-          <a:bodyPr wrap="square">
-            <a:spAutoFit/>
-          </a:bodyPr>
-          <a:lstStyle/>
-          <a:p>
-            <a:pPr algn="r"/>
-            <a:r>
-              <a:rPr sz="1100" b="0" i="0">
-                <a:solidFill>
-                  <a:srgbClr val="666666"/>
-                </a:solidFill>
-                <a:latin typeface="Calibri"/>
-              </a:rPr>
-              <a:t>39</a:t>
+                  <a:srgbClr val="269CCB"/>
+                </a:solidFill>
+                <a:latin typeface="Calibri"/>
+              </a:rPr>
+              <a:t>Teoria al servicio del proyecto</a:t>
             </a:r>
           </a:p>
         </p:txBody>
@@ -18523,3125 +18893,6 @@
                 <a:latin typeface="Calibri"/>
               </a:rPr>
               <a:t>4</a:t>
-            </a:r>
-          </a:p>
-        </p:txBody>
-      </p:sp>
-    </p:spTree>
-  </p:cSld>
-  <p:clrMapOvr>
-    <a:masterClrMapping/>
-  </p:clrMapOvr>
-</p:sld>
-</file>
-
-<file path=ppt/slides/slide40.xml><?xml version="1.0" encoding="utf-8"?>
-<p:sld xmlns:a="http://schemas.openxmlformats.org/drawingml/2006/main" xmlns:p="http://schemas.openxmlformats.org/presentationml/2006/main" xmlns:r="http://schemas.openxmlformats.org/officeDocument/2006/relationships">
-  <p:cSld>
-    <p:bg>
-      <p:bgPr>
-        <a:solidFill>
-          <a:srgbClr val="FFFFFF"/>
-        </a:solidFill>
-        <a:effectLst/>
-      </p:bgPr>
-    </p:bg>
-    <p:spTree>
-      <p:nvGrpSpPr>
-        <p:cNvPr id="1" name=""/>
-        <p:cNvGrpSpPr/>
-        <p:nvPr/>
-      </p:nvGrpSpPr>
-      <p:grpSpPr/>
-      <p:sp>
-        <p:nvSpPr>
-          <p:cNvPr id="2" name="Rectangle 1"/>
-          <p:cNvSpPr/>
-          <p:nvPr/>
-        </p:nvSpPr>
-        <p:spPr>
-          <a:xfrm>
-            <a:off x="0" y="0"/>
-            <a:ext cx="12191695" cy="960120"/>
-          </a:xfrm>
-          <a:prstGeom prst="rect">
-            <a:avLst/>
-          </a:prstGeom>
-          <a:solidFill>
-            <a:srgbClr val="095292"/>
-          </a:solidFill>
-          <a:ln>
-            <a:noFill/>
-          </a:ln>
-        </p:spPr>
-        <p:style>
-          <a:lnRef idx="1">
-            <a:schemeClr val="accent1"/>
-          </a:lnRef>
-          <a:fillRef idx="3">
-            <a:schemeClr val="accent1"/>
-          </a:fillRef>
-          <a:effectRef idx="2">
-            <a:schemeClr val="accent1"/>
-          </a:effectRef>
-          <a:fontRef idx="minor">
-            <a:schemeClr val="lt1"/>
-          </a:fontRef>
-        </p:style>
-        <p:txBody>
-          <a:bodyPr rtlCol="0" anchor="ctr"/>
-          <a:lstStyle/>
-          <a:p>
-            <a:pPr algn="ctr"/>
-          </a:p>
-        </p:txBody>
-      </p:sp>
-      <p:sp>
-        <p:nvSpPr>
-          <p:cNvPr id="3" name="Rectangle 2"/>
-          <p:cNvSpPr/>
-          <p:nvPr/>
-        </p:nvSpPr>
-        <p:spPr>
-          <a:xfrm>
-            <a:off x="0" y="960120"/>
-            <a:ext cx="12191695" cy="41148"/>
-          </a:xfrm>
-          <a:prstGeom prst="rect">
-            <a:avLst/>
-          </a:prstGeom>
-          <a:solidFill>
-            <a:srgbClr val="FFD000"/>
-          </a:solidFill>
-          <a:ln>
-            <a:noFill/>
-          </a:ln>
-        </p:spPr>
-        <p:style>
-          <a:lnRef idx="1">
-            <a:schemeClr val="accent1"/>
-          </a:lnRef>
-          <a:fillRef idx="3">
-            <a:schemeClr val="accent1"/>
-          </a:fillRef>
-          <a:effectRef idx="2">
-            <a:schemeClr val="accent1"/>
-          </a:effectRef>
-          <a:fontRef idx="minor">
-            <a:schemeClr val="lt1"/>
-          </a:fontRef>
-        </p:style>
-        <p:txBody>
-          <a:bodyPr rtlCol="0" anchor="ctr"/>
-          <a:lstStyle/>
-          <a:p>
-            <a:pPr algn="ctr"/>
-          </a:p>
-        </p:txBody>
-      </p:sp>
-      <p:sp>
-        <p:nvSpPr>
-          <p:cNvPr id="4" name="TextBox 3"/>
-          <p:cNvSpPr txBox="1"/>
-          <p:nvPr/>
-        </p:nvSpPr>
-        <p:spPr>
-          <a:xfrm>
-            <a:off x="457200" y="164592"/>
-            <a:ext cx="11277295" cy="502920"/>
-          </a:xfrm>
-          <a:prstGeom prst="rect">
-            <a:avLst/>
-          </a:prstGeom>
-          <a:noFill/>
-        </p:spPr>
-        <p:txBody>
-          <a:bodyPr wrap="square">
-            <a:spAutoFit/>
-          </a:bodyPr>
-          <a:lstStyle/>
-          <a:p>
-            <a:r>
-              <a:rPr sz="2600" b="1" i="0">
-                <a:solidFill>
-                  <a:srgbClr val="FFFFFF"/>
-                </a:solidFill>
-                <a:latin typeface="Calibri"/>
-              </a:rPr>
-              <a:t>Taller PI — punto de partida</a:t>
-            </a:r>
-          </a:p>
-        </p:txBody>
-      </p:sp>
-      <p:sp>
-        <p:nvSpPr>
-          <p:cNvPr id="5" name="TextBox 4"/>
-          <p:cNvSpPr txBox="1"/>
-          <p:nvPr/>
-        </p:nvSpPr>
-        <p:spPr>
-          <a:xfrm>
-            <a:off x="457200" y="1170432"/>
-            <a:ext cx="11277295" cy="5230368"/>
-          </a:xfrm>
-          <a:prstGeom prst="rect">
-            <a:avLst/>
-          </a:prstGeom>
-          <a:noFill/>
-        </p:spPr>
-        <p:txBody>
-          <a:bodyPr wrap="square">
-            <a:spAutoFit/>
-          </a:bodyPr>
-          <a:lstStyle/>
-          <a:p>
-            <a:pPr>
-              <a:spcAft>
-                <a:spcPts val="800"/>
-              </a:spcAft>
-            </a:pPr>
-            <a:r>
-              <a:rPr sz="2000" b="0" i="0">
-                <a:solidFill>
-                  <a:srgbClr val="333333"/>
-                </a:solidFill>
-                <a:latin typeface="Calibri"/>
-              </a:rPr>
-              <a:t>–   VetCare ya tiene la ventana de registro funcionando y esta a punto de nacer la ventana de agendamiento de citas.</a:t>
-            </a:r>
-          </a:p>
-          <a:p>
-            <a:pPr>
-              <a:spcAft>
-                <a:spcPts val="800"/>
-              </a:spcAft>
-            </a:pPr>
-            <a:r>
-              <a:rPr sz="2000" b="0" i="0">
-                <a:solidFill>
-                  <a:srgbClr val="333333"/>
-                </a:solidFill>
-                <a:latin typeface="Calibri"/>
-              </a:rPr>
-              <a:t>–   Cada ventana esta creando hoy su propio repositorio, asi que lo registrado en una es invisible para la otra.</a:t>
-            </a:r>
-          </a:p>
-          <a:p>
-            <a:pPr>
-              <a:spcAft>
-                <a:spcPts val="800"/>
-              </a:spcAft>
-            </a:pPr>
-            <a:r>
-              <a:rPr sz="2000" b="0" i="0">
-                <a:solidFill>
-                  <a:srgbClr val="333333"/>
-                </a:solidFill>
-                <a:latin typeface="Calibri"/>
-              </a:rPr>
-              <a:t>–   La clinica Huellitas maneja por ahora tres tipos de consulta: vacunacion (15 min, 35.000), control (30 min, 60.000) y urgencia (45 min, 120.000).</a:t>
-            </a:r>
-          </a:p>
-        </p:txBody>
-      </p:sp>
-      <p:sp>
-        <p:nvSpPr>
-          <p:cNvPr id="6" name="TextBox 5"/>
-          <p:cNvSpPr txBox="1"/>
-          <p:nvPr/>
-        </p:nvSpPr>
-        <p:spPr>
-          <a:xfrm>
-            <a:off x="11185855" y="6473952"/>
-            <a:ext cx="640080" cy="274320"/>
-          </a:xfrm>
-          <a:prstGeom prst="rect">
-            <a:avLst/>
-          </a:prstGeom>
-          <a:noFill/>
-        </p:spPr>
-        <p:txBody>
-          <a:bodyPr wrap="square">
-            <a:spAutoFit/>
-          </a:bodyPr>
-          <a:lstStyle/>
-          <a:p>
-            <a:pPr algn="r"/>
-            <a:r>
-              <a:rPr sz="1100" b="0" i="0">
-                <a:solidFill>
-                  <a:srgbClr val="666666"/>
-                </a:solidFill>
-                <a:latin typeface="Calibri"/>
-              </a:rPr>
-              <a:t>40</a:t>
-            </a:r>
-          </a:p>
-        </p:txBody>
-      </p:sp>
-    </p:spTree>
-  </p:cSld>
-  <p:clrMapOvr>
-    <a:masterClrMapping/>
-  </p:clrMapOvr>
-</p:sld>
-</file>
-
-<file path=ppt/slides/slide41.xml><?xml version="1.0" encoding="utf-8"?>
-<p:sld xmlns:a="http://schemas.openxmlformats.org/drawingml/2006/main" xmlns:p="http://schemas.openxmlformats.org/presentationml/2006/main" xmlns:r="http://schemas.openxmlformats.org/officeDocument/2006/relationships">
-  <p:cSld>
-    <p:bg>
-      <p:bgPr>
-        <a:solidFill>
-          <a:srgbClr val="FFFFFF"/>
-        </a:solidFill>
-        <a:effectLst/>
-      </p:bgPr>
-    </p:bg>
-    <p:spTree>
-      <p:nvGrpSpPr>
-        <p:cNvPr id="1" name=""/>
-        <p:cNvGrpSpPr/>
-        <p:nvPr/>
-      </p:nvGrpSpPr>
-      <p:grpSpPr/>
-      <p:sp>
-        <p:nvSpPr>
-          <p:cNvPr id="2" name="Rectangle 1"/>
-          <p:cNvSpPr/>
-          <p:nvPr/>
-        </p:nvSpPr>
-        <p:spPr>
-          <a:xfrm>
-            <a:off x="0" y="0"/>
-            <a:ext cx="12191695" cy="960120"/>
-          </a:xfrm>
-          <a:prstGeom prst="rect">
-            <a:avLst/>
-          </a:prstGeom>
-          <a:solidFill>
-            <a:srgbClr val="095292"/>
-          </a:solidFill>
-          <a:ln>
-            <a:noFill/>
-          </a:ln>
-        </p:spPr>
-        <p:style>
-          <a:lnRef idx="1">
-            <a:schemeClr val="accent1"/>
-          </a:lnRef>
-          <a:fillRef idx="3">
-            <a:schemeClr val="accent1"/>
-          </a:fillRef>
-          <a:effectRef idx="2">
-            <a:schemeClr val="accent1"/>
-          </a:effectRef>
-          <a:fontRef idx="minor">
-            <a:schemeClr val="lt1"/>
-          </a:fontRef>
-        </p:style>
-        <p:txBody>
-          <a:bodyPr rtlCol="0" anchor="ctr"/>
-          <a:lstStyle/>
-          <a:p>
-            <a:pPr algn="ctr"/>
-          </a:p>
-        </p:txBody>
-      </p:sp>
-      <p:sp>
-        <p:nvSpPr>
-          <p:cNvPr id="3" name="Rectangle 2"/>
-          <p:cNvSpPr/>
-          <p:nvPr/>
-        </p:nvSpPr>
-        <p:spPr>
-          <a:xfrm>
-            <a:off x="0" y="960120"/>
-            <a:ext cx="12191695" cy="41148"/>
-          </a:xfrm>
-          <a:prstGeom prst="rect">
-            <a:avLst/>
-          </a:prstGeom>
-          <a:solidFill>
-            <a:srgbClr val="FFD000"/>
-          </a:solidFill>
-          <a:ln>
-            <a:noFill/>
-          </a:ln>
-        </p:spPr>
-        <p:style>
-          <a:lnRef idx="1">
-            <a:schemeClr val="accent1"/>
-          </a:lnRef>
-          <a:fillRef idx="3">
-            <a:schemeClr val="accent1"/>
-          </a:fillRef>
-          <a:effectRef idx="2">
-            <a:schemeClr val="accent1"/>
-          </a:effectRef>
-          <a:fontRef idx="minor">
-            <a:schemeClr val="lt1"/>
-          </a:fontRef>
-        </p:style>
-        <p:txBody>
-          <a:bodyPr rtlCol="0" anchor="ctr"/>
-          <a:lstStyle/>
-          <a:p>
-            <a:pPr algn="ctr"/>
-          </a:p>
-        </p:txBody>
-      </p:sp>
-      <p:sp>
-        <p:nvSpPr>
-          <p:cNvPr id="4" name="TextBox 3"/>
-          <p:cNvSpPr txBox="1"/>
-          <p:nvPr/>
-        </p:nvSpPr>
-        <p:spPr>
-          <a:xfrm>
-            <a:off x="457200" y="164592"/>
-            <a:ext cx="11277295" cy="502920"/>
-          </a:xfrm>
-          <a:prstGeom prst="rect">
-            <a:avLst/>
-          </a:prstGeom>
-          <a:noFill/>
-        </p:spPr>
-        <p:txBody>
-          <a:bodyPr wrap="square">
-            <a:spAutoFit/>
-          </a:bodyPr>
-          <a:lstStyle/>
-          <a:p>
-            <a:r>
-              <a:rPr sz="2600" b="1" i="0">
-                <a:solidFill>
-                  <a:srgbClr val="FFFFFF"/>
-                </a:solidFill>
-                <a:latin typeface="Calibri"/>
-              </a:rPr>
-              <a:t>Taller PI — pasos guiados</a:t>
-            </a:r>
-          </a:p>
-        </p:txBody>
-      </p:sp>
-      <p:sp>
-        <p:nvSpPr>
-          <p:cNvPr id="5" name="Rounded Rectangle 4"/>
-          <p:cNvSpPr/>
-          <p:nvPr/>
-        </p:nvSpPr>
-        <p:spPr>
-          <a:xfrm>
-            <a:off x="457200" y="1234440"/>
-            <a:ext cx="11277295" cy="950976"/>
-          </a:xfrm>
-          <a:prstGeom prst="roundRect">
-            <a:avLst>
-              <a:gd name="adj" fmla="val 12000"/>
-            </a:avLst>
-          </a:prstGeom>
-          <a:solidFill>
-            <a:srgbClr val="F2F2F2"/>
-          </a:solidFill>
-          <a:ln>
-            <a:noFill/>
-          </a:ln>
-        </p:spPr>
-        <p:style>
-          <a:lnRef idx="1">
-            <a:schemeClr val="accent1"/>
-          </a:lnRef>
-          <a:fillRef idx="3">
-            <a:schemeClr val="accent1"/>
-          </a:fillRef>
-          <a:effectRef idx="2">
-            <a:schemeClr val="accent1"/>
-          </a:effectRef>
-          <a:fontRef idx="minor">
-            <a:schemeClr val="lt1"/>
-          </a:fontRef>
-        </p:style>
-        <p:txBody>
-          <a:bodyPr rtlCol="0" anchor="ctr"/>
-          <a:lstStyle/>
-          <a:p>
-            <a:pPr algn="ctr"/>
-          </a:p>
-        </p:txBody>
-      </p:sp>
-      <p:sp>
-        <p:nvSpPr>
-          <p:cNvPr id="6" name="Rounded Rectangle 5"/>
-          <p:cNvSpPr/>
-          <p:nvPr/>
-        </p:nvSpPr>
-        <p:spPr>
-          <a:xfrm>
-            <a:off x="594360" y="1490472"/>
-            <a:ext cx="438912" cy="438912"/>
-          </a:xfrm>
-          <a:prstGeom prst="roundRect">
-            <a:avLst>
-              <a:gd name="adj" fmla="val 12000"/>
-            </a:avLst>
-          </a:prstGeom>
-          <a:solidFill>
-            <a:srgbClr val="095292"/>
-          </a:solidFill>
-          <a:ln>
-            <a:noFill/>
-          </a:ln>
-        </p:spPr>
-        <p:style>
-          <a:lnRef idx="1">
-            <a:schemeClr val="accent1"/>
-          </a:lnRef>
-          <a:fillRef idx="3">
-            <a:schemeClr val="accent1"/>
-          </a:fillRef>
-          <a:effectRef idx="2">
-            <a:schemeClr val="accent1"/>
-          </a:effectRef>
-          <a:fontRef idx="minor">
-            <a:schemeClr val="lt1"/>
-          </a:fontRef>
-        </p:style>
-        <p:txBody>
-          <a:bodyPr rtlCol="0" anchor="ctr"/>
-          <a:lstStyle/>
-          <a:p>
-            <a:pPr algn="ctr"/>
-          </a:p>
-        </p:txBody>
-      </p:sp>
-      <p:sp>
-        <p:nvSpPr>
-          <p:cNvPr id="7" name="TextBox 6"/>
-          <p:cNvSpPr txBox="1"/>
-          <p:nvPr/>
-        </p:nvSpPr>
-        <p:spPr>
-          <a:xfrm>
-            <a:off x="594360" y="1490472"/>
-            <a:ext cx="438912" cy="438912"/>
-          </a:xfrm>
-          <a:prstGeom prst="rect">
-            <a:avLst/>
-          </a:prstGeom>
-          <a:noFill/>
-        </p:spPr>
-        <p:txBody>
-          <a:bodyPr wrap="square" anchor="ctr"/>
-          <a:lstStyle/>
-          <a:p>
-            <a:pPr algn="ctr"/>
-            <a:r>
-              <a:rPr sz="1600" b="1" i="0">
-                <a:solidFill>
-                  <a:srgbClr val="FFFFFF"/>
-                </a:solidFill>
-                <a:latin typeface="Calibri"/>
-              </a:rPr>
-              <a:t>1</a:t>
-            </a:r>
-          </a:p>
-        </p:txBody>
-      </p:sp>
-      <p:sp>
-        <p:nvSpPr>
-          <p:cNvPr id="8" name="TextBox 7"/>
-          <p:cNvSpPr txBox="1"/>
-          <p:nvPr/>
-        </p:nvSpPr>
-        <p:spPr>
-          <a:xfrm>
-            <a:off x="1188720" y="1325880"/>
-            <a:ext cx="10271455" cy="786384"/>
-          </a:xfrm>
-          <a:prstGeom prst="rect">
-            <a:avLst/>
-          </a:prstGeom>
-          <a:noFill/>
-        </p:spPr>
-        <p:txBody>
-          <a:bodyPr wrap="square" anchor="ctr"/>
-          <a:lstStyle/>
-          <a:p>
-            <a:r>
-              <a:rPr sz="1400" b="1" i="0">
-                <a:solidFill>
-                  <a:srgbClr val="095292"/>
-                </a:solidFill>
-                <a:latin typeface="Calibri"/>
-              </a:rPr>
-              <a:t>Convierta RepositorioVetCare en Singleton: atributo private static instancia, constructor private con un System.out.println que avise cuando se crea, y metodo public static synchronized getInstancia(); ejecute el programa y verifique que el mensaje de creacion aparece una sola vez aunque llame getInstancia() tres veces.</a:t>
-            </a:r>
-          </a:p>
-        </p:txBody>
-      </p:sp>
-      <p:sp>
-        <p:nvSpPr>
-          <p:cNvPr id="9" name="Rounded Rectangle 8"/>
-          <p:cNvSpPr/>
-          <p:nvPr/>
-        </p:nvSpPr>
-        <p:spPr>
-          <a:xfrm>
-            <a:off x="457200" y="2276856"/>
-            <a:ext cx="11277295" cy="950976"/>
-          </a:xfrm>
-          <a:prstGeom prst="roundRect">
-            <a:avLst>
-              <a:gd name="adj" fmla="val 12000"/>
-            </a:avLst>
-          </a:prstGeom>
-          <a:solidFill>
-            <a:srgbClr val="E8F4FA"/>
-          </a:solidFill>
-          <a:ln>
-            <a:noFill/>
-          </a:ln>
-        </p:spPr>
-        <p:style>
-          <a:lnRef idx="1">
-            <a:schemeClr val="accent1"/>
-          </a:lnRef>
-          <a:fillRef idx="3">
-            <a:schemeClr val="accent1"/>
-          </a:fillRef>
-          <a:effectRef idx="2">
-            <a:schemeClr val="accent1"/>
-          </a:effectRef>
-          <a:fontRef idx="minor">
-            <a:schemeClr val="lt1"/>
-          </a:fontRef>
-        </p:style>
-        <p:txBody>
-          <a:bodyPr rtlCol="0" anchor="ctr"/>
-          <a:lstStyle/>
-          <a:p>
-            <a:pPr algn="ctr"/>
-          </a:p>
-        </p:txBody>
-      </p:sp>
-      <p:sp>
-        <p:nvSpPr>
-          <p:cNvPr id="10" name="Rounded Rectangle 9"/>
-          <p:cNvSpPr/>
-          <p:nvPr/>
-        </p:nvSpPr>
-        <p:spPr>
-          <a:xfrm>
-            <a:off x="594360" y="2532888"/>
-            <a:ext cx="438912" cy="438912"/>
-          </a:xfrm>
-          <a:prstGeom prst="roundRect">
-            <a:avLst>
-              <a:gd name="adj" fmla="val 12000"/>
-            </a:avLst>
-          </a:prstGeom>
-          <a:solidFill>
-            <a:srgbClr val="095292"/>
-          </a:solidFill>
-          <a:ln>
-            <a:noFill/>
-          </a:ln>
-        </p:spPr>
-        <p:style>
-          <a:lnRef idx="1">
-            <a:schemeClr val="accent1"/>
-          </a:lnRef>
-          <a:fillRef idx="3">
-            <a:schemeClr val="accent1"/>
-          </a:fillRef>
-          <a:effectRef idx="2">
-            <a:schemeClr val="accent1"/>
-          </a:effectRef>
-          <a:fontRef idx="minor">
-            <a:schemeClr val="lt1"/>
-          </a:fontRef>
-        </p:style>
-        <p:txBody>
-          <a:bodyPr rtlCol="0" anchor="ctr"/>
-          <a:lstStyle/>
-          <a:p>
-            <a:pPr algn="ctr"/>
-          </a:p>
-        </p:txBody>
-      </p:sp>
-      <p:sp>
-        <p:nvSpPr>
-          <p:cNvPr id="11" name="TextBox 10"/>
-          <p:cNvSpPr txBox="1"/>
-          <p:nvPr/>
-        </p:nvSpPr>
-        <p:spPr>
-          <a:xfrm>
-            <a:off x="594360" y="2532888"/>
-            <a:ext cx="438912" cy="438912"/>
-          </a:xfrm>
-          <a:prstGeom prst="rect">
-            <a:avLst/>
-          </a:prstGeom>
-          <a:noFill/>
-        </p:spPr>
-        <p:txBody>
-          <a:bodyPr wrap="square" anchor="ctr"/>
-          <a:lstStyle/>
-          <a:p>
-            <a:pPr algn="ctr"/>
-            <a:r>
-              <a:rPr sz="1600" b="1" i="0">
-                <a:solidFill>
-                  <a:srgbClr val="FFFFFF"/>
-                </a:solidFill>
-                <a:latin typeface="Calibri"/>
-              </a:rPr>
-              <a:t>2</a:t>
-            </a:r>
-          </a:p>
-        </p:txBody>
-      </p:sp>
-      <p:sp>
-        <p:nvSpPr>
-          <p:cNvPr id="12" name="TextBox 11"/>
-          <p:cNvSpPr txBox="1"/>
-          <p:nvPr/>
-        </p:nvSpPr>
-        <p:spPr>
-          <a:xfrm>
-            <a:off x="1188720" y="2368296"/>
-            <a:ext cx="10271455" cy="786384"/>
-          </a:xfrm>
-          <a:prstGeom prst="rect">
-            <a:avLst/>
-          </a:prstGeom>
-          <a:noFill/>
-        </p:spPr>
-        <p:txBody>
-          <a:bodyPr wrap="square" anchor="ctr"/>
-          <a:lstStyle/>
-          <a:p>
-            <a:r>
-              <a:rPr sz="1400" b="1" i="0">
-                <a:solidFill>
-                  <a:srgbClr val="095292"/>
-                </a:solidFill>
-                <a:latin typeface="Calibri"/>
-              </a:rPr>
-              <a:t>Elimine todos los 'new RepositorioVetCare()' que queden en las ventanas y reemplacelos por RepositorioVetCare.getInstancia(); use Ctrl+F en el proyecto para confirmar que no queda ni uno solo fuera del propio metodo getInstancia.</a:t>
-            </a:r>
-          </a:p>
-        </p:txBody>
-      </p:sp>
-      <p:sp>
-        <p:nvSpPr>
-          <p:cNvPr id="13" name="Rounded Rectangle 12"/>
-          <p:cNvSpPr/>
-          <p:nvPr/>
-        </p:nvSpPr>
-        <p:spPr>
-          <a:xfrm>
-            <a:off x="457200" y="3319272"/>
-            <a:ext cx="11277295" cy="950976"/>
-          </a:xfrm>
-          <a:prstGeom prst="roundRect">
-            <a:avLst>
-              <a:gd name="adj" fmla="val 12000"/>
-            </a:avLst>
-          </a:prstGeom>
-          <a:solidFill>
-            <a:srgbClr val="F2F2F2"/>
-          </a:solidFill>
-          <a:ln>
-            <a:noFill/>
-          </a:ln>
-        </p:spPr>
-        <p:style>
-          <a:lnRef idx="1">
-            <a:schemeClr val="accent1"/>
-          </a:lnRef>
-          <a:fillRef idx="3">
-            <a:schemeClr val="accent1"/>
-          </a:fillRef>
-          <a:effectRef idx="2">
-            <a:schemeClr val="accent1"/>
-          </a:effectRef>
-          <a:fontRef idx="minor">
-            <a:schemeClr val="lt1"/>
-          </a:fontRef>
-        </p:style>
-        <p:txBody>
-          <a:bodyPr rtlCol="0" anchor="ctr"/>
-          <a:lstStyle/>
-          <a:p>
-            <a:pPr algn="ctr"/>
-          </a:p>
-        </p:txBody>
-      </p:sp>
-      <p:sp>
-        <p:nvSpPr>
-          <p:cNvPr id="14" name="Rounded Rectangle 13"/>
-          <p:cNvSpPr/>
-          <p:nvPr/>
-        </p:nvSpPr>
-        <p:spPr>
-          <a:xfrm>
-            <a:off x="594360" y="3575304"/>
-            <a:ext cx="438912" cy="438912"/>
-          </a:xfrm>
-          <a:prstGeom prst="roundRect">
-            <a:avLst>
-              <a:gd name="adj" fmla="val 12000"/>
-            </a:avLst>
-          </a:prstGeom>
-          <a:solidFill>
-            <a:srgbClr val="095292"/>
-          </a:solidFill>
-          <a:ln>
-            <a:noFill/>
-          </a:ln>
-        </p:spPr>
-        <p:style>
-          <a:lnRef idx="1">
-            <a:schemeClr val="accent1"/>
-          </a:lnRef>
-          <a:fillRef idx="3">
-            <a:schemeClr val="accent1"/>
-          </a:fillRef>
-          <a:effectRef idx="2">
-            <a:schemeClr val="accent1"/>
-          </a:effectRef>
-          <a:fontRef idx="minor">
-            <a:schemeClr val="lt1"/>
-          </a:fontRef>
-        </p:style>
-        <p:txBody>
-          <a:bodyPr rtlCol="0" anchor="ctr"/>
-          <a:lstStyle/>
-          <a:p>
-            <a:pPr algn="ctr"/>
-          </a:p>
-        </p:txBody>
-      </p:sp>
-      <p:sp>
-        <p:nvSpPr>
-          <p:cNvPr id="15" name="TextBox 14"/>
-          <p:cNvSpPr txBox="1"/>
-          <p:nvPr/>
-        </p:nvSpPr>
-        <p:spPr>
-          <a:xfrm>
-            <a:off x="594360" y="3575304"/>
-            <a:ext cx="438912" cy="438912"/>
-          </a:xfrm>
-          <a:prstGeom prst="rect">
-            <a:avLst/>
-          </a:prstGeom>
-          <a:noFill/>
-        </p:spPr>
-        <p:txBody>
-          <a:bodyPr wrap="square" anchor="ctr"/>
-          <a:lstStyle/>
-          <a:p>
-            <a:pPr algn="ctr"/>
-            <a:r>
-              <a:rPr sz="1600" b="1" i="0">
-                <a:solidFill>
-                  <a:srgbClr val="FFFFFF"/>
-                </a:solidFill>
-                <a:latin typeface="Calibri"/>
-              </a:rPr>
-              <a:t>3</a:t>
-            </a:r>
-          </a:p>
-        </p:txBody>
-      </p:sp>
-      <p:sp>
-        <p:nvSpPr>
-          <p:cNvPr id="16" name="TextBox 15"/>
-          <p:cNvSpPr txBox="1"/>
-          <p:nvPr/>
-        </p:nvSpPr>
-        <p:spPr>
-          <a:xfrm>
-            <a:off x="1188720" y="3410712"/>
-            <a:ext cx="10271455" cy="786384"/>
-          </a:xfrm>
-          <a:prstGeom prst="rect">
-            <a:avLst/>
-          </a:prstGeom>
-          <a:noFill/>
-        </p:spPr>
-        <p:txBody>
-          <a:bodyPr wrap="square" anchor="ctr"/>
-          <a:lstStyle/>
-          <a:p>
-            <a:r>
-              <a:rPr sz="1400" b="1" i="0">
-                <a:solidFill>
-                  <a:srgbClr val="095292"/>
-                </a:solidFill>
-                <a:latin typeface="Calibri"/>
-              </a:rPr>
-              <a:t>Cree la jerarquia Consulta (abstracta) con ConsultaVacunacion, ConsultaControl y ConsultaUrgencia, cada una con su duracionMinutos() y tarifaBase(), y la clase FabricaConsultas con el metodo estatico crear(String tipo, String idMascota) que normalice el texto y lance IllegalArgumentException si el tipo no existe.</a:t>
-            </a:r>
-          </a:p>
-        </p:txBody>
-      </p:sp>
-      <p:sp>
-        <p:nvSpPr>
-          <p:cNvPr id="17" name="Rounded Rectangle 16"/>
-          <p:cNvSpPr/>
-          <p:nvPr/>
-        </p:nvSpPr>
-        <p:spPr>
-          <a:xfrm>
-            <a:off x="457200" y="4361688"/>
-            <a:ext cx="11277295" cy="950976"/>
-          </a:xfrm>
-          <a:prstGeom prst="roundRect">
-            <a:avLst>
-              <a:gd name="adj" fmla="val 12000"/>
-            </a:avLst>
-          </a:prstGeom>
-          <a:solidFill>
-            <a:srgbClr val="E8F4FA"/>
-          </a:solidFill>
-          <a:ln>
-            <a:noFill/>
-          </a:ln>
-        </p:spPr>
-        <p:style>
-          <a:lnRef idx="1">
-            <a:schemeClr val="accent1"/>
-          </a:lnRef>
-          <a:fillRef idx="3">
-            <a:schemeClr val="accent1"/>
-          </a:fillRef>
-          <a:effectRef idx="2">
-            <a:schemeClr val="accent1"/>
-          </a:effectRef>
-          <a:fontRef idx="minor">
-            <a:schemeClr val="lt1"/>
-          </a:fontRef>
-        </p:style>
-        <p:txBody>
-          <a:bodyPr rtlCol="0" anchor="ctr"/>
-          <a:lstStyle/>
-          <a:p>
-            <a:pPr algn="ctr"/>
-          </a:p>
-        </p:txBody>
-      </p:sp>
-      <p:sp>
-        <p:nvSpPr>
-          <p:cNvPr id="18" name="Rounded Rectangle 17"/>
-          <p:cNvSpPr/>
-          <p:nvPr/>
-        </p:nvSpPr>
-        <p:spPr>
-          <a:xfrm>
-            <a:off x="594360" y="4617720"/>
-            <a:ext cx="438912" cy="438912"/>
-          </a:xfrm>
-          <a:prstGeom prst="roundRect">
-            <a:avLst>
-              <a:gd name="adj" fmla="val 12000"/>
-            </a:avLst>
-          </a:prstGeom>
-          <a:solidFill>
-            <a:srgbClr val="095292"/>
-          </a:solidFill>
-          <a:ln>
-            <a:noFill/>
-          </a:ln>
-        </p:spPr>
-        <p:style>
-          <a:lnRef idx="1">
-            <a:schemeClr val="accent1"/>
-          </a:lnRef>
-          <a:fillRef idx="3">
-            <a:schemeClr val="accent1"/>
-          </a:fillRef>
-          <a:effectRef idx="2">
-            <a:schemeClr val="accent1"/>
-          </a:effectRef>
-          <a:fontRef idx="minor">
-            <a:schemeClr val="lt1"/>
-          </a:fontRef>
-        </p:style>
-        <p:txBody>
-          <a:bodyPr rtlCol="0" anchor="ctr"/>
-          <a:lstStyle/>
-          <a:p>
-            <a:pPr algn="ctr"/>
-          </a:p>
-        </p:txBody>
-      </p:sp>
-      <p:sp>
-        <p:nvSpPr>
-          <p:cNvPr id="19" name="TextBox 18"/>
-          <p:cNvSpPr txBox="1"/>
-          <p:nvPr/>
-        </p:nvSpPr>
-        <p:spPr>
-          <a:xfrm>
-            <a:off x="594360" y="4617720"/>
-            <a:ext cx="438912" cy="438912"/>
-          </a:xfrm>
-          <a:prstGeom prst="rect">
-            <a:avLst/>
-          </a:prstGeom>
-          <a:noFill/>
-        </p:spPr>
-        <p:txBody>
-          <a:bodyPr wrap="square" anchor="ctr"/>
-          <a:lstStyle/>
-          <a:p>
-            <a:pPr algn="ctr"/>
-            <a:r>
-              <a:rPr sz="1600" b="1" i="0">
-                <a:solidFill>
-                  <a:srgbClr val="FFFFFF"/>
-                </a:solidFill>
-                <a:latin typeface="Calibri"/>
-              </a:rPr>
-              <a:t>4</a:t>
-            </a:r>
-          </a:p>
-        </p:txBody>
-      </p:sp>
-      <p:sp>
-        <p:nvSpPr>
-          <p:cNvPr id="20" name="TextBox 19"/>
-          <p:cNvSpPr txBox="1"/>
-          <p:nvPr/>
-        </p:nvSpPr>
-        <p:spPr>
-          <a:xfrm>
-            <a:off x="1188720" y="4453128"/>
-            <a:ext cx="10271455" cy="786384"/>
-          </a:xfrm>
-          <a:prstGeom prst="rect">
-            <a:avLst/>
-          </a:prstGeom>
-          <a:noFill/>
-        </p:spPr>
-        <p:txBody>
-          <a:bodyPr wrap="square" anchor="ctr"/>
-          <a:lstStyle/>
-          <a:p>
-            <a:r>
-              <a:rPr sz="1400" b="1" i="0">
-                <a:solidFill>
-                  <a:srgbClr val="095292"/>
-                </a:solidFill>
-                <a:latin typeface="Calibri"/>
-              </a:rPr>
-              <a:t>Ejecute el demo y compruebe dos cosas: en la consola, que el mensaje del constructor sale una sola vez y que los dos identityHashCode coinciden; en pantalla, que al registrar M-002 Michi en la ventana Recepcion y oprimir Refrescar en la ventana Consultorio, Michi aparece junto a M-001 Kira, que fue registrada desde el main.</a:t>
-            </a:r>
-          </a:p>
-        </p:txBody>
-      </p:sp>
-      <p:sp>
-        <p:nvSpPr>
-          <p:cNvPr id="21" name="Rounded Rectangle 20"/>
-          <p:cNvSpPr/>
-          <p:nvPr/>
-        </p:nvSpPr>
-        <p:spPr>
-          <a:xfrm>
-            <a:off x="457200" y="5404104"/>
-            <a:ext cx="11277295" cy="950976"/>
-          </a:xfrm>
-          <a:prstGeom prst="roundRect">
-            <a:avLst>
-              <a:gd name="adj" fmla="val 12000"/>
-            </a:avLst>
-          </a:prstGeom>
-          <a:solidFill>
-            <a:srgbClr val="F2F2F2"/>
-          </a:solidFill>
-          <a:ln>
-            <a:noFill/>
-          </a:ln>
-        </p:spPr>
-        <p:style>
-          <a:lnRef idx="1">
-            <a:schemeClr val="accent1"/>
-          </a:lnRef>
-          <a:fillRef idx="3">
-            <a:schemeClr val="accent1"/>
-          </a:fillRef>
-          <a:effectRef idx="2">
-            <a:schemeClr val="accent1"/>
-          </a:effectRef>
-          <a:fontRef idx="minor">
-            <a:schemeClr val="lt1"/>
-          </a:fontRef>
-        </p:style>
-        <p:txBody>
-          <a:bodyPr rtlCol="0" anchor="ctr"/>
-          <a:lstStyle/>
-          <a:p>
-            <a:pPr algn="ctr"/>
-          </a:p>
-        </p:txBody>
-      </p:sp>
-      <p:sp>
-        <p:nvSpPr>
-          <p:cNvPr id="22" name="Rounded Rectangle 21"/>
-          <p:cNvSpPr/>
-          <p:nvPr/>
-        </p:nvSpPr>
-        <p:spPr>
-          <a:xfrm>
-            <a:off x="594360" y="5660136"/>
-            <a:ext cx="438912" cy="438912"/>
-          </a:xfrm>
-          <a:prstGeom prst="roundRect">
-            <a:avLst>
-              <a:gd name="adj" fmla="val 12000"/>
-            </a:avLst>
-          </a:prstGeom>
-          <a:solidFill>
-            <a:srgbClr val="095292"/>
-          </a:solidFill>
-          <a:ln>
-            <a:noFill/>
-          </a:ln>
-        </p:spPr>
-        <p:style>
-          <a:lnRef idx="1">
-            <a:schemeClr val="accent1"/>
-          </a:lnRef>
-          <a:fillRef idx="3">
-            <a:schemeClr val="accent1"/>
-          </a:fillRef>
-          <a:effectRef idx="2">
-            <a:schemeClr val="accent1"/>
-          </a:effectRef>
-          <a:fontRef idx="minor">
-            <a:schemeClr val="lt1"/>
-          </a:fontRef>
-        </p:style>
-        <p:txBody>
-          <a:bodyPr rtlCol="0" anchor="ctr"/>
-          <a:lstStyle/>
-          <a:p>
-            <a:pPr algn="ctr"/>
-          </a:p>
-        </p:txBody>
-      </p:sp>
-      <p:sp>
-        <p:nvSpPr>
-          <p:cNvPr id="23" name="TextBox 22"/>
-          <p:cNvSpPr txBox="1"/>
-          <p:nvPr/>
-        </p:nvSpPr>
-        <p:spPr>
-          <a:xfrm>
-            <a:off x="594360" y="5660136"/>
-            <a:ext cx="438912" cy="438912"/>
-          </a:xfrm>
-          <a:prstGeom prst="rect">
-            <a:avLst/>
-          </a:prstGeom>
-          <a:noFill/>
-        </p:spPr>
-        <p:txBody>
-          <a:bodyPr wrap="square" anchor="ctr"/>
-          <a:lstStyle/>
-          <a:p>
-            <a:pPr algn="ctr"/>
-            <a:r>
-              <a:rPr sz="1600" b="1" i="0">
-                <a:solidFill>
-                  <a:srgbClr val="FFFFFF"/>
-                </a:solidFill>
-                <a:latin typeface="Calibri"/>
-              </a:rPr>
-              <a:t>5</a:t>
-            </a:r>
-          </a:p>
-        </p:txBody>
-      </p:sp>
-      <p:sp>
-        <p:nvSpPr>
-          <p:cNvPr id="24" name="TextBox 23"/>
-          <p:cNvSpPr txBox="1"/>
-          <p:nvPr/>
-        </p:nvSpPr>
-        <p:spPr>
-          <a:xfrm>
-            <a:off x="1188720" y="5495544"/>
-            <a:ext cx="10271455" cy="786384"/>
-          </a:xfrm>
-          <a:prstGeom prst="rect">
-            <a:avLst/>
-          </a:prstGeom>
-          <a:noFill/>
-        </p:spPr>
-        <p:txBody>
-          <a:bodyPr wrap="square" anchor="ctr"/>
-          <a:lstStyle/>
-          <a:p>
-            <a:r>
-              <a:rPr sz="1400" b="1" i="0">
-                <a:solidFill>
-                  <a:srgbClr val="095292"/>
-                </a:solidFill>
-                <a:latin typeface="Calibri"/>
-              </a:rPr>
-              <a:t>Escriba al final del archivo un comentario de tres lineas justificando por que el repositorio SI es Singleton, por que Mascota NO debe serlo y que problema tendria el Singleton cuando lleguemos a las pruebas; suba el proyecto y el comentario a la plataforma del curso.</a:t>
-            </a:r>
-          </a:p>
-        </p:txBody>
-      </p:sp>
-      <p:sp>
-        <p:nvSpPr>
-          <p:cNvPr id="25" name="TextBox 24"/>
-          <p:cNvSpPr txBox="1"/>
-          <p:nvPr/>
-        </p:nvSpPr>
-        <p:spPr>
-          <a:xfrm>
-            <a:off x="11185855" y="6473952"/>
-            <a:ext cx="640080" cy="274320"/>
-          </a:xfrm>
-          <a:prstGeom prst="rect">
-            <a:avLst/>
-          </a:prstGeom>
-          <a:noFill/>
-        </p:spPr>
-        <p:txBody>
-          <a:bodyPr wrap="square">
-            <a:spAutoFit/>
-          </a:bodyPr>
-          <a:lstStyle/>
-          <a:p>
-            <a:pPr algn="r"/>
-            <a:r>
-              <a:rPr sz="1100" b="0" i="0">
-                <a:solidFill>
-                  <a:srgbClr val="666666"/>
-                </a:solidFill>
-                <a:latin typeface="Calibri"/>
-              </a:rPr>
-              <a:t>41</a:t>
-            </a:r>
-          </a:p>
-        </p:txBody>
-      </p:sp>
-    </p:spTree>
-  </p:cSld>
-  <p:clrMapOvr>
-    <a:masterClrMapping/>
-  </p:clrMapOvr>
-</p:sld>
-</file>
-
-<file path=ppt/slides/slide42.xml><?xml version="1.0" encoding="utf-8"?>
-<p:sld xmlns:a="http://schemas.openxmlformats.org/drawingml/2006/main" xmlns:p="http://schemas.openxmlformats.org/presentationml/2006/main" xmlns:r="http://schemas.openxmlformats.org/officeDocument/2006/relationships">
-  <p:cSld>
-    <p:bg>
-      <p:bgPr>
-        <a:solidFill>
-          <a:srgbClr val="FFFFFF"/>
-        </a:solidFill>
-        <a:effectLst/>
-      </p:bgPr>
-    </p:bg>
-    <p:spTree>
-      <p:nvGrpSpPr>
-        <p:cNvPr id="1" name=""/>
-        <p:cNvGrpSpPr/>
-        <p:nvPr/>
-      </p:nvGrpSpPr>
-      <p:grpSpPr/>
-      <p:sp>
-        <p:nvSpPr>
-          <p:cNvPr id="2" name="Rectangle 1"/>
-          <p:cNvSpPr/>
-          <p:nvPr/>
-        </p:nvSpPr>
-        <p:spPr>
-          <a:xfrm>
-            <a:off x="0" y="0"/>
-            <a:ext cx="12191695" cy="960120"/>
-          </a:xfrm>
-          <a:prstGeom prst="rect">
-            <a:avLst/>
-          </a:prstGeom>
-          <a:solidFill>
-            <a:srgbClr val="095292"/>
-          </a:solidFill>
-          <a:ln>
-            <a:noFill/>
-          </a:ln>
-        </p:spPr>
-        <p:style>
-          <a:lnRef idx="1">
-            <a:schemeClr val="accent1"/>
-          </a:lnRef>
-          <a:fillRef idx="3">
-            <a:schemeClr val="accent1"/>
-          </a:fillRef>
-          <a:effectRef idx="2">
-            <a:schemeClr val="accent1"/>
-          </a:effectRef>
-          <a:fontRef idx="minor">
-            <a:schemeClr val="lt1"/>
-          </a:fontRef>
-        </p:style>
-        <p:txBody>
-          <a:bodyPr rtlCol="0" anchor="ctr"/>
-          <a:lstStyle/>
-          <a:p>
-            <a:pPr algn="ctr"/>
-          </a:p>
-        </p:txBody>
-      </p:sp>
-      <p:sp>
-        <p:nvSpPr>
-          <p:cNvPr id="3" name="Rectangle 2"/>
-          <p:cNvSpPr/>
-          <p:nvPr/>
-        </p:nvSpPr>
-        <p:spPr>
-          <a:xfrm>
-            <a:off x="0" y="960120"/>
-            <a:ext cx="12191695" cy="41148"/>
-          </a:xfrm>
-          <a:prstGeom prst="rect">
-            <a:avLst/>
-          </a:prstGeom>
-          <a:solidFill>
-            <a:srgbClr val="FFD000"/>
-          </a:solidFill>
-          <a:ln>
-            <a:noFill/>
-          </a:ln>
-        </p:spPr>
-        <p:style>
-          <a:lnRef idx="1">
-            <a:schemeClr val="accent1"/>
-          </a:lnRef>
-          <a:fillRef idx="3">
-            <a:schemeClr val="accent1"/>
-          </a:fillRef>
-          <a:effectRef idx="2">
-            <a:schemeClr val="accent1"/>
-          </a:effectRef>
-          <a:fontRef idx="minor">
-            <a:schemeClr val="lt1"/>
-          </a:fontRef>
-        </p:style>
-        <p:txBody>
-          <a:bodyPr rtlCol="0" anchor="ctr"/>
-          <a:lstStyle/>
-          <a:p>
-            <a:pPr algn="ctr"/>
-          </a:p>
-        </p:txBody>
-      </p:sp>
-      <p:sp>
-        <p:nvSpPr>
-          <p:cNvPr id="4" name="TextBox 3"/>
-          <p:cNvSpPr txBox="1"/>
-          <p:nvPr/>
-        </p:nvSpPr>
-        <p:spPr>
-          <a:xfrm>
-            <a:off x="457200" y="164592"/>
-            <a:ext cx="11277295" cy="502920"/>
-          </a:xfrm>
-          <a:prstGeom prst="rect">
-            <a:avLst/>
-          </a:prstGeom>
-          <a:noFill/>
-        </p:spPr>
-        <p:txBody>
-          <a:bodyPr wrap="square">
-            <a:spAutoFit/>
-          </a:bodyPr>
-          <a:lstStyle/>
-          <a:p>
-            <a:r>
-              <a:rPr sz="2600" b="1" i="0">
-                <a:solidFill>
-                  <a:srgbClr val="FFFFFF"/>
-                </a:solidFill>
-                <a:latin typeface="Calibri"/>
-              </a:rPr>
-              <a:t>Antes de entregar — autochequeo</a:t>
-            </a:r>
-          </a:p>
-        </p:txBody>
-      </p:sp>
-      <p:sp>
-        <p:nvSpPr>
-          <p:cNvPr id="5" name="Rounded Rectangle 4"/>
-          <p:cNvSpPr/>
-          <p:nvPr/>
-        </p:nvSpPr>
-        <p:spPr>
-          <a:xfrm>
-            <a:off x="457200" y="1261872"/>
-            <a:ext cx="11277295" cy="566928"/>
-          </a:xfrm>
-          <a:prstGeom prst="roundRect">
-            <a:avLst>
-              <a:gd name="adj" fmla="val 12000"/>
-            </a:avLst>
-          </a:prstGeom>
-          <a:solidFill>
-            <a:srgbClr val="F2F2F2"/>
-          </a:solidFill>
-          <a:ln>
-            <a:noFill/>
-          </a:ln>
-        </p:spPr>
-        <p:style>
-          <a:lnRef idx="1">
-            <a:schemeClr val="accent1"/>
-          </a:lnRef>
-          <a:fillRef idx="3">
-            <a:schemeClr val="accent1"/>
-          </a:fillRef>
-          <a:effectRef idx="2">
-            <a:schemeClr val="accent1"/>
-          </a:effectRef>
-          <a:fontRef idx="minor">
-            <a:schemeClr val="lt1"/>
-          </a:fontRef>
-        </p:style>
-        <p:txBody>
-          <a:bodyPr rtlCol="0" anchor="ctr"/>
-          <a:lstStyle/>
-          <a:p>
-            <a:pPr algn="ctr"/>
-          </a:p>
-        </p:txBody>
-      </p:sp>
-      <p:sp>
-        <p:nvSpPr>
-          <p:cNvPr id="6" name="Rectangle 5"/>
-          <p:cNvSpPr/>
-          <p:nvPr/>
-        </p:nvSpPr>
-        <p:spPr>
-          <a:xfrm>
-            <a:off x="640080" y="1408175"/>
-            <a:ext cx="274320" cy="274320"/>
-          </a:xfrm>
-          <a:prstGeom prst="rect">
-            <a:avLst/>
-          </a:prstGeom>
-          <a:solidFill>
-            <a:srgbClr val="FFFFFF"/>
-          </a:solidFill>
-          <a:ln>
-            <a:solidFill>
-              <a:srgbClr val="333333"/>
-            </a:solidFill>
-          </a:ln>
-        </p:spPr>
-        <p:style>
-          <a:lnRef idx="1">
-            <a:schemeClr val="accent1"/>
-          </a:lnRef>
-          <a:fillRef idx="3">
-            <a:schemeClr val="accent1"/>
-          </a:fillRef>
-          <a:effectRef idx="2">
-            <a:schemeClr val="accent1"/>
-          </a:effectRef>
-          <a:fontRef idx="minor">
-            <a:schemeClr val="lt1"/>
-          </a:fontRef>
-        </p:style>
-        <p:txBody>
-          <a:bodyPr rtlCol="0" anchor="ctr"/>
-          <a:lstStyle/>
-          <a:p>
-            <a:pPr algn="ctr"/>
-          </a:p>
-        </p:txBody>
-      </p:sp>
-      <p:sp>
-        <p:nvSpPr>
-          <p:cNvPr id="7" name="Rectangle 6"/>
-          <p:cNvSpPr/>
-          <p:nvPr/>
-        </p:nvSpPr>
-        <p:spPr>
-          <a:xfrm>
-            <a:off x="640080" y="1408175"/>
-            <a:ext cx="73152" cy="274320"/>
-          </a:xfrm>
-          <a:prstGeom prst="rect">
-            <a:avLst/>
-          </a:prstGeom>
-          <a:solidFill>
-            <a:srgbClr val="269CCB"/>
-          </a:solidFill>
-          <a:ln>
-            <a:noFill/>
-          </a:ln>
-        </p:spPr>
-        <p:style>
-          <a:lnRef idx="1">
-            <a:schemeClr val="accent1"/>
-          </a:lnRef>
-          <a:fillRef idx="3">
-            <a:schemeClr val="accent1"/>
-          </a:fillRef>
-          <a:effectRef idx="2">
-            <a:schemeClr val="accent1"/>
-          </a:effectRef>
-          <a:fontRef idx="minor">
-            <a:schemeClr val="lt1"/>
-          </a:fontRef>
-        </p:style>
-        <p:txBody>
-          <a:bodyPr rtlCol="0" anchor="ctr"/>
-          <a:lstStyle/>
-          <a:p>
-            <a:pPr algn="ctr"/>
-          </a:p>
-        </p:txBody>
-      </p:sp>
-      <p:sp>
-        <p:nvSpPr>
-          <p:cNvPr id="8" name="TextBox 7"/>
-          <p:cNvSpPr txBox="1"/>
-          <p:nvPr/>
-        </p:nvSpPr>
-        <p:spPr>
-          <a:xfrm>
-            <a:off x="1097280" y="1353312"/>
-            <a:ext cx="10362895" cy="402336"/>
-          </a:xfrm>
-          <a:prstGeom prst="rect">
-            <a:avLst/>
-          </a:prstGeom>
-          <a:noFill/>
-        </p:spPr>
-        <p:txBody>
-          <a:bodyPr wrap="square" anchor="ctr"/>
-          <a:lstStyle/>
-          <a:p>
-            <a:r>
-              <a:rPr sz="1500" b="0" i="0">
-                <a:solidFill>
-                  <a:srgbClr val="333333"/>
-                </a:solidFill>
-                <a:latin typeface="Calibri"/>
-              </a:rPr>
-              <a:t>Si el mensaje del constructor aparece dos veces, quien mas esta creando el objeto y en que linea quedo un new olvidado?</a:t>
-            </a:r>
-          </a:p>
-        </p:txBody>
-      </p:sp>
-      <p:sp>
-        <p:nvSpPr>
-          <p:cNvPr id="9" name="Rounded Rectangle 8"/>
-          <p:cNvSpPr/>
-          <p:nvPr/>
-        </p:nvSpPr>
-        <p:spPr>
-          <a:xfrm>
-            <a:off x="457200" y="1938528"/>
-            <a:ext cx="11277295" cy="566928"/>
-          </a:xfrm>
-          <a:prstGeom prst="roundRect">
-            <a:avLst>
-              <a:gd name="adj" fmla="val 12000"/>
-            </a:avLst>
-          </a:prstGeom>
-          <a:solidFill>
-            <a:srgbClr val="F2F2F2"/>
-          </a:solidFill>
-          <a:ln>
-            <a:noFill/>
-          </a:ln>
-        </p:spPr>
-        <p:style>
-          <a:lnRef idx="1">
-            <a:schemeClr val="accent1"/>
-          </a:lnRef>
-          <a:fillRef idx="3">
-            <a:schemeClr val="accent1"/>
-          </a:fillRef>
-          <a:effectRef idx="2">
-            <a:schemeClr val="accent1"/>
-          </a:effectRef>
-          <a:fontRef idx="minor">
-            <a:schemeClr val="lt1"/>
-          </a:fontRef>
-        </p:style>
-        <p:txBody>
-          <a:bodyPr rtlCol="0" anchor="ctr"/>
-          <a:lstStyle/>
-          <a:p>
-            <a:pPr algn="ctr"/>
-          </a:p>
-        </p:txBody>
-      </p:sp>
-      <p:sp>
-        <p:nvSpPr>
-          <p:cNvPr id="10" name="Rectangle 9"/>
-          <p:cNvSpPr/>
-          <p:nvPr/>
-        </p:nvSpPr>
-        <p:spPr>
-          <a:xfrm>
-            <a:off x="640080" y="2084832"/>
-            <a:ext cx="274320" cy="274320"/>
-          </a:xfrm>
-          <a:prstGeom prst="rect">
-            <a:avLst/>
-          </a:prstGeom>
-          <a:solidFill>
-            <a:srgbClr val="FFFFFF"/>
-          </a:solidFill>
-          <a:ln>
-            <a:solidFill>
-              <a:srgbClr val="333333"/>
-            </a:solidFill>
-          </a:ln>
-        </p:spPr>
-        <p:style>
-          <a:lnRef idx="1">
-            <a:schemeClr val="accent1"/>
-          </a:lnRef>
-          <a:fillRef idx="3">
-            <a:schemeClr val="accent1"/>
-          </a:fillRef>
-          <a:effectRef idx="2">
-            <a:schemeClr val="accent1"/>
-          </a:effectRef>
-          <a:fontRef idx="minor">
-            <a:schemeClr val="lt1"/>
-          </a:fontRef>
-        </p:style>
-        <p:txBody>
-          <a:bodyPr rtlCol="0" anchor="ctr"/>
-          <a:lstStyle/>
-          <a:p>
-            <a:pPr algn="ctr"/>
-          </a:p>
-        </p:txBody>
-      </p:sp>
-      <p:sp>
-        <p:nvSpPr>
-          <p:cNvPr id="11" name="Rectangle 10"/>
-          <p:cNvSpPr/>
-          <p:nvPr/>
-        </p:nvSpPr>
-        <p:spPr>
-          <a:xfrm>
-            <a:off x="640080" y="2084832"/>
-            <a:ext cx="73152" cy="274320"/>
-          </a:xfrm>
-          <a:prstGeom prst="rect">
-            <a:avLst/>
-          </a:prstGeom>
-          <a:solidFill>
-            <a:srgbClr val="269CCB"/>
-          </a:solidFill>
-          <a:ln>
-            <a:noFill/>
-          </a:ln>
-        </p:spPr>
-        <p:style>
-          <a:lnRef idx="1">
-            <a:schemeClr val="accent1"/>
-          </a:lnRef>
-          <a:fillRef idx="3">
-            <a:schemeClr val="accent1"/>
-          </a:fillRef>
-          <a:effectRef idx="2">
-            <a:schemeClr val="accent1"/>
-          </a:effectRef>
-          <a:fontRef idx="minor">
-            <a:schemeClr val="lt1"/>
-          </a:fontRef>
-        </p:style>
-        <p:txBody>
-          <a:bodyPr rtlCol="0" anchor="ctr"/>
-          <a:lstStyle/>
-          <a:p>
-            <a:pPr algn="ctr"/>
-          </a:p>
-        </p:txBody>
-      </p:sp>
-      <p:sp>
-        <p:nvSpPr>
-          <p:cNvPr id="12" name="TextBox 11"/>
-          <p:cNvSpPr txBox="1"/>
-          <p:nvPr/>
-        </p:nvSpPr>
-        <p:spPr>
-          <a:xfrm>
-            <a:off x="1097280" y="2029968"/>
-            <a:ext cx="10362895" cy="402336"/>
-          </a:xfrm>
-          <a:prstGeom prst="rect">
-            <a:avLst/>
-          </a:prstGeom>
-          <a:noFill/>
-        </p:spPr>
-        <p:txBody>
-          <a:bodyPr wrap="square" anchor="ctr"/>
-          <a:lstStyle/>
-          <a:p>
-            <a:r>
-              <a:rPr sz="1500" b="0" i="0">
-                <a:solidFill>
-                  <a:srgbClr val="333333"/>
-                </a:solidFill>
-                <a:latin typeface="Calibri"/>
-              </a:rPr>
-              <a:t>Si alguien hace 'RepositorioVetCare.instancia = null;' desde otra clase y el programa se lo permite, que modificador de acceso quedo mal puesto?</a:t>
-            </a:r>
-          </a:p>
-        </p:txBody>
-      </p:sp>
-      <p:sp>
-        <p:nvSpPr>
-          <p:cNvPr id="13" name="Rounded Rectangle 12"/>
-          <p:cNvSpPr/>
-          <p:nvPr/>
-        </p:nvSpPr>
-        <p:spPr>
-          <a:xfrm>
-            <a:off x="457200" y="2615184"/>
-            <a:ext cx="11277295" cy="566928"/>
-          </a:xfrm>
-          <a:prstGeom prst="roundRect">
-            <a:avLst>
-              <a:gd name="adj" fmla="val 12000"/>
-            </a:avLst>
-          </a:prstGeom>
-          <a:solidFill>
-            <a:srgbClr val="F2F2F2"/>
-          </a:solidFill>
-          <a:ln>
-            <a:noFill/>
-          </a:ln>
-        </p:spPr>
-        <p:style>
-          <a:lnRef idx="1">
-            <a:schemeClr val="accent1"/>
-          </a:lnRef>
-          <a:fillRef idx="3">
-            <a:schemeClr val="accent1"/>
-          </a:fillRef>
-          <a:effectRef idx="2">
-            <a:schemeClr val="accent1"/>
-          </a:effectRef>
-          <a:fontRef idx="minor">
-            <a:schemeClr val="lt1"/>
-          </a:fontRef>
-        </p:style>
-        <p:txBody>
-          <a:bodyPr rtlCol="0" anchor="ctr"/>
-          <a:lstStyle/>
-          <a:p>
-            <a:pPr algn="ctr"/>
-          </a:p>
-        </p:txBody>
-      </p:sp>
-      <p:sp>
-        <p:nvSpPr>
-          <p:cNvPr id="14" name="Rectangle 13"/>
-          <p:cNvSpPr/>
-          <p:nvPr/>
-        </p:nvSpPr>
-        <p:spPr>
-          <a:xfrm>
-            <a:off x="640080" y="2761488"/>
-            <a:ext cx="274320" cy="274320"/>
-          </a:xfrm>
-          <a:prstGeom prst="rect">
-            <a:avLst/>
-          </a:prstGeom>
-          <a:solidFill>
-            <a:srgbClr val="FFFFFF"/>
-          </a:solidFill>
-          <a:ln>
-            <a:solidFill>
-              <a:srgbClr val="333333"/>
-            </a:solidFill>
-          </a:ln>
-        </p:spPr>
-        <p:style>
-          <a:lnRef idx="1">
-            <a:schemeClr val="accent1"/>
-          </a:lnRef>
-          <a:fillRef idx="3">
-            <a:schemeClr val="accent1"/>
-          </a:fillRef>
-          <a:effectRef idx="2">
-            <a:schemeClr val="accent1"/>
-          </a:effectRef>
-          <a:fontRef idx="minor">
-            <a:schemeClr val="lt1"/>
-          </a:fontRef>
-        </p:style>
-        <p:txBody>
-          <a:bodyPr rtlCol="0" anchor="ctr"/>
-          <a:lstStyle/>
-          <a:p>
-            <a:pPr algn="ctr"/>
-          </a:p>
-        </p:txBody>
-      </p:sp>
-      <p:sp>
-        <p:nvSpPr>
-          <p:cNvPr id="15" name="Rectangle 14"/>
-          <p:cNvSpPr/>
-          <p:nvPr/>
-        </p:nvSpPr>
-        <p:spPr>
-          <a:xfrm>
-            <a:off x="640080" y="2761488"/>
-            <a:ext cx="73152" cy="274320"/>
-          </a:xfrm>
-          <a:prstGeom prst="rect">
-            <a:avLst/>
-          </a:prstGeom>
-          <a:solidFill>
-            <a:srgbClr val="269CCB"/>
-          </a:solidFill>
-          <a:ln>
-            <a:noFill/>
-          </a:ln>
-        </p:spPr>
-        <p:style>
-          <a:lnRef idx="1">
-            <a:schemeClr val="accent1"/>
-          </a:lnRef>
-          <a:fillRef idx="3">
-            <a:schemeClr val="accent1"/>
-          </a:fillRef>
-          <a:effectRef idx="2">
-            <a:schemeClr val="accent1"/>
-          </a:effectRef>
-          <a:fontRef idx="minor">
-            <a:schemeClr val="lt1"/>
-          </a:fontRef>
-        </p:style>
-        <p:txBody>
-          <a:bodyPr rtlCol="0" anchor="ctr"/>
-          <a:lstStyle/>
-          <a:p>
-            <a:pPr algn="ctr"/>
-          </a:p>
-        </p:txBody>
-      </p:sp>
-      <p:sp>
-        <p:nvSpPr>
-          <p:cNvPr id="16" name="TextBox 15"/>
-          <p:cNvSpPr txBox="1"/>
-          <p:nvPr/>
-        </p:nvSpPr>
-        <p:spPr>
-          <a:xfrm>
-            <a:off x="1097280" y="2706624"/>
-            <a:ext cx="10362895" cy="402336"/>
-          </a:xfrm>
-          <a:prstGeom prst="rect">
-            <a:avLst/>
-          </a:prstGeom>
-          <a:noFill/>
-        </p:spPr>
-        <p:txBody>
-          <a:bodyPr wrap="square" anchor="ctr"/>
-          <a:lstStyle/>
-          <a:p>
-            <a:r>
-              <a:rPr sz="1500" b="0" i="0">
-                <a:solidFill>
-                  <a:srgbClr val="333333"/>
-                </a:solidFill>
-                <a:latin typeface="Calibri"/>
-              </a:rPr>
-              <a:t>Pregunta de criterio: cuantas mascotas hay en la clinica y cuantos archivadores hay? Cual de esos dos conceptos merece ser Singleton?</a:t>
-            </a:r>
-          </a:p>
-        </p:txBody>
-      </p:sp>
-      <p:sp>
-        <p:nvSpPr>
-          <p:cNvPr id="17" name="TextBox 16"/>
-          <p:cNvSpPr txBox="1"/>
-          <p:nvPr/>
-        </p:nvSpPr>
-        <p:spPr>
-          <a:xfrm>
-            <a:off x="11185855" y="6473952"/>
-            <a:ext cx="640080" cy="274320"/>
-          </a:xfrm>
-          <a:prstGeom prst="rect">
-            <a:avLst/>
-          </a:prstGeom>
-          <a:noFill/>
-        </p:spPr>
-        <p:txBody>
-          <a:bodyPr wrap="square">
-            <a:spAutoFit/>
-          </a:bodyPr>
-          <a:lstStyle/>
-          <a:p>
-            <a:pPr algn="r"/>
-            <a:r>
-              <a:rPr sz="1100" b="0" i="0">
-                <a:solidFill>
-                  <a:srgbClr val="666666"/>
-                </a:solidFill>
-                <a:latin typeface="Calibri"/>
-              </a:rPr>
-              <a:t>42</a:t>
-            </a:r>
-          </a:p>
-        </p:txBody>
-      </p:sp>
-    </p:spTree>
-  </p:cSld>
-  <p:clrMapOvr>
-    <a:masterClrMapping/>
-  </p:clrMapOvr>
-</p:sld>
-</file>
-
-<file path=ppt/slides/slide43.xml><?xml version="1.0" encoding="utf-8"?>
-<p:sld xmlns:a="http://schemas.openxmlformats.org/drawingml/2006/main" xmlns:p="http://schemas.openxmlformats.org/presentationml/2006/main" xmlns:r="http://schemas.openxmlformats.org/officeDocument/2006/relationships">
-  <p:cSld>
-    <p:bg>
-      <p:bgPr>
-        <a:solidFill>
-          <a:srgbClr val="FFFFFF"/>
-        </a:solidFill>
-        <a:effectLst/>
-      </p:bgPr>
-    </p:bg>
-    <p:spTree>
-      <p:nvGrpSpPr>
-        <p:cNvPr id="1" name=""/>
-        <p:cNvGrpSpPr/>
-        <p:nvPr/>
-      </p:nvGrpSpPr>
-      <p:grpSpPr/>
-      <p:sp>
-        <p:nvSpPr>
-          <p:cNvPr id="2" name="Rectangle 1"/>
-          <p:cNvSpPr/>
-          <p:nvPr/>
-        </p:nvSpPr>
-        <p:spPr>
-          <a:xfrm>
-            <a:off x="0" y="0"/>
-            <a:ext cx="12191695" cy="960120"/>
-          </a:xfrm>
-          <a:prstGeom prst="rect">
-            <a:avLst/>
-          </a:prstGeom>
-          <a:solidFill>
-            <a:srgbClr val="095292"/>
-          </a:solidFill>
-          <a:ln>
-            <a:noFill/>
-          </a:ln>
-        </p:spPr>
-        <p:style>
-          <a:lnRef idx="1">
-            <a:schemeClr val="accent1"/>
-          </a:lnRef>
-          <a:fillRef idx="3">
-            <a:schemeClr val="accent1"/>
-          </a:fillRef>
-          <a:effectRef idx="2">
-            <a:schemeClr val="accent1"/>
-          </a:effectRef>
-          <a:fontRef idx="minor">
-            <a:schemeClr val="lt1"/>
-          </a:fontRef>
-        </p:style>
-        <p:txBody>
-          <a:bodyPr rtlCol="0" anchor="ctr"/>
-          <a:lstStyle/>
-          <a:p>
-            <a:pPr algn="ctr"/>
-          </a:p>
-        </p:txBody>
-      </p:sp>
-      <p:sp>
-        <p:nvSpPr>
-          <p:cNvPr id="3" name="Rectangle 2"/>
-          <p:cNvSpPr/>
-          <p:nvPr/>
-        </p:nvSpPr>
-        <p:spPr>
-          <a:xfrm>
-            <a:off x="0" y="960120"/>
-            <a:ext cx="12191695" cy="41148"/>
-          </a:xfrm>
-          <a:prstGeom prst="rect">
-            <a:avLst/>
-          </a:prstGeom>
-          <a:solidFill>
-            <a:srgbClr val="FFD000"/>
-          </a:solidFill>
-          <a:ln>
-            <a:noFill/>
-          </a:ln>
-        </p:spPr>
-        <p:style>
-          <a:lnRef idx="1">
-            <a:schemeClr val="accent1"/>
-          </a:lnRef>
-          <a:fillRef idx="3">
-            <a:schemeClr val="accent1"/>
-          </a:fillRef>
-          <a:effectRef idx="2">
-            <a:schemeClr val="accent1"/>
-          </a:effectRef>
-          <a:fontRef idx="minor">
-            <a:schemeClr val="lt1"/>
-          </a:fontRef>
-        </p:style>
-        <p:txBody>
-          <a:bodyPr rtlCol="0" anchor="ctr"/>
-          <a:lstStyle/>
-          <a:p>
-            <a:pPr algn="ctr"/>
-          </a:p>
-        </p:txBody>
-      </p:sp>
-      <p:sp>
-        <p:nvSpPr>
-          <p:cNvPr id="4" name="TextBox 3"/>
-          <p:cNvSpPr txBox="1"/>
-          <p:nvPr/>
-        </p:nvSpPr>
-        <p:spPr>
-          <a:xfrm>
-            <a:off x="457200" y="164592"/>
-            <a:ext cx="11277295" cy="502920"/>
-          </a:xfrm>
-          <a:prstGeom prst="rect">
-            <a:avLst/>
-          </a:prstGeom>
-          <a:noFill/>
-        </p:spPr>
-        <p:txBody>
-          <a:bodyPr wrap="square">
-            <a:spAutoFit/>
-          </a:bodyPr>
-          <a:lstStyle/>
-          <a:p>
-            <a:r>
-              <a:rPr sz="2600" b="1" i="0">
-                <a:solidFill>
-                  <a:srgbClr val="FFFFFF"/>
-                </a:solidFill>
-                <a:latin typeface="Calibri"/>
-              </a:rPr>
-              <a:t>Criterios de exito / entregable</a:t>
-            </a:r>
-          </a:p>
-        </p:txBody>
-      </p:sp>
-      <p:sp>
-        <p:nvSpPr>
-          <p:cNvPr id="5" name="TextBox 4"/>
-          <p:cNvSpPr txBox="1"/>
-          <p:nvPr/>
-        </p:nvSpPr>
-        <p:spPr>
-          <a:xfrm>
-            <a:off x="457200" y="1170432"/>
-            <a:ext cx="11277295" cy="5230368"/>
-          </a:xfrm>
-          <a:prstGeom prst="rect">
-            <a:avLst/>
-          </a:prstGeom>
-          <a:noFill/>
-        </p:spPr>
-        <p:txBody>
-          <a:bodyPr wrap="square">
-            <a:spAutoFit/>
-          </a:bodyPr>
-          <a:lstStyle/>
-          <a:p>
-            <a:pPr>
-              <a:spcAft>
-                <a:spcPts val="800"/>
-              </a:spcAft>
-            </a:pPr>
-            <a:r>
-              <a:rPr sz="2000" b="0" i="0">
-                <a:solidFill>
-                  <a:srgbClr val="333333"/>
-                </a:solidFill>
-                <a:latin typeface="Calibri"/>
-              </a:rPr>
-              <a:t>–   </a:t>
-            </a:r>
-            <a:r>
-              <a:rPr sz="2000" b="1" i="0">
-                <a:solidFill>
-                  <a:srgbClr val="333333"/>
-                </a:solidFill>
-                <a:latin typeface="Calibri"/>
-              </a:rPr>
-              <a:t>Entregable:</a:t>
-            </a:r>
-            <a:r>
-              <a:rPr sz="2000" b="0" i="0">
-                <a:solidFill>
-                  <a:srgbClr val="333333"/>
-                </a:solidFill>
-                <a:latin typeface="Calibri"/>
-              </a:rPr>
-              <a:t> Clase RepositorioVetCare convertida en Singleton, FabricaConsultas con tres tipos y evidencia de que dos ventanas ven la misma lista, subido a la plataforma del curso.</a:t>
-            </a:r>
-          </a:p>
-          <a:p>
-            <a:pPr>
-              <a:spcAft>
-                <a:spcPts val="800"/>
-              </a:spcAft>
-            </a:pPr>
-            <a:r>
-              <a:rPr sz="2000" b="0" i="0">
-                <a:solidFill>
-                  <a:srgbClr val="333333"/>
-                </a:solidFill>
-                <a:latin typeface="Calibri"/>
-              </a:rPr>
-              <a:t>–   </a:t>
-            </a:r>
-            <a:r>
-              <a:rPr sz="2000" b="1" i="0">
-                <a:solidFill>
-                  <a:srgbClr val="333333"/>
-                </a:solidFill>
-                <a:latin typeface="Calibri"/>
-              </a:rPr>
-              <a:t>Exito:</a:t>
-            </a:r>
-            <a:r>
-              <a:rPr sz="2000" b="0" i="0">
-                <a:solidFill>
-                  <a:srgbClr val="333333"/>
-                </a:solidFill>
-                <a:latin typeface="Calibri"/>
-              </a:rPr>
-              <a:t> El mensaje del constructor del repositorio se imprime una sola vez en toda la ejecucion, sin importar cuantas veces se pida la instancia.</a:t>
-            </a:r>
-          </a:p>
-          <a:p>
-            <a:pPr>
-              <a:spcAft>
-                <a:spcPts val="800"/>
-              </a:spcAft>
-            </a:pPr>
-            <a:r>
-              <a:rPr sz="2000" b="0" i="0">
-                <a:solidFill>
-                  <a:srgbClr val="333333"/>
-                </a:solidFill>
-                <a:latin typeface="Calibri"/>
-              </a:rPr>
-              <a:t>–   </a:t>
-            </a:r>
-            <a:r>
-              <a:rPr sz="2000" b="1" i="0">
-                <a:solidFill>
-                  <a:srgbClr val="333333"/>
-                </a:solidFill>
-                <a:latin typeface="Calibri"/>
-              </a:rPr>
-              <a:t>Exito:</a:t>
-            </a:r>
-            <a:r>
-              <a:rPr sz="2000" b="0" i="0">
-                <a:solidFill>
-                  <a:srgbClr val="333333"/>
-                </a:solidFill>
-                <a:latin typeface="Calibri"/>
-              </a:rPr>
-              <a:t> El constructor del repositorio es privado y no existe ningun new RepositorioVetCare() fuera de getInstancia().</a:t>
-            </a:r>
-          </a:p>
-          <a:p>
-            <a:pPr>
-              <a:spcAft>
-                <a:spcPts val="800"/>
-              </a:spcAft>
-            </a:pPr>
-            <a:r>
-              <a:rPr sz="2000" b="0" i="0">
-                <a:solidFill>
-                  <a:srgbClr val="333333"/>
-                </a:solidFill>
-                <a:latin typeface="Calibri"/>
-              </a:rPr>
-              <a:t>–   </a:t>
-            </a:r>
-            <a:r>
-              <a:rPr sz="2000" b="1" i="0">
-                <a:solidFill>
-                  <a:srgbClr val="333333"/>
-                </a:solidFill>
-                <a:latin typeface="Calibri"/>
-              </a:rPr>
-              <a:t>Exito:</a:t>
-            </a:r>
-            <a:r>
-              <a:rPr sz="2000" b="0" i="0">
-                <a:solidFill>
-                  <a:srgbClr val="333333"/>
-                </a:solidFill>
-                <a:latin typeface="Calibri"/>
-              </a:rPr>
-              <a:t> Registrar una mascota en la ventana Recepcion y refrescar la ventana Consultorio muestra esa mascota en ambas, y el identityHashCode del repositorio impreso en las dos ventanas es identico.</a:t>
-            </a:r>
-          </a:p>
-          <a:p>
-            <a:pPr>
-              <a:spcAft>
-                <a:spcPts val="800"/>
-              </a:spcAft>
-            </a:pPr>
-            <a:r>
-              <a:rPr sz="2000" b="0" i="0">
-                <a:solidFill>
-                  <a:srgbClr val="333333"/>
-                </a:solidFill>
-                <a:latin typeface="Calibri"/>
-              </a:rPr>
-              <a:t>–   </a:t>
-            </a:r>
-            <a:r>
-              <a:rPr sz="2000" b="1" i="0">
-                <a:solidFill>
-                  <a:srgbClr val="333333"/>
-                </a:solidFill>
-                <a:latin typeface="Calibri"/>
-              </a:rPr>
-              <a:t>Exito:</a:t>
-            </a:r>
-            <a:r>
-              <a:rPr sz="2000" b="0" i="0">
-                <a:solidFill>
-                  <a:srgbClr val="333333"/>
-                </a:solidFill>
-                <a:latin typeface="Calibri"/>
-              </a:rPr>
-              <a:t> FabricaConsultas devuelve el tipo base Consulta para los tres tipos validos y rechaza con excepcion un tipo desconocido como 'peluqueria espacial'.</a:t>
-            </a:r>
-          </a:p>
-          <a:p>
-            <a:pPr>
-              <a:spcAft>
-                <a:spcPts val="800"/>
-              </a:spcAft>
-            </a:pPr>
-            <a:r>
-              <a:rPr sz="2000" b="0" i="0">
-                <a:solidFill>
-                  <a:srgbClr val="333333"/>
-                </a:solidFill>
-                <a:latin typeface="Calibri"/>
-              </a:rPr>
-              <a:t>–   </a:t>
-            </a:r>
-            <a:r>
-              <a:rPr sz="2000" b="1" i="0">
-                <a:solidFill>
-                  <a:srgbClr val="333333"/>
-                </a:solidFill>
-                <a:latin typeface="Calibri"/>
-              </a:rPr>
-              <a:t>Entrega en la plataforma del curso</a:t>
-            </a:r>
-            <a:r>
-              <a:rPr sz="2000" b="0" i="0">
-                <a:solidFill>
-                  <a:srgbClr val="333333"/>
-                </a:solidFill>
-                <a:latin typeface="Calibri"/>
-              </a:rPr>
-              <a:t> — en la fecha que indique el docente.</a:t>
-            </a:r>
-          </a:p>
-        </p:txBody>
-      </p:sp>
-      <p:sp>
-        <p:nvSpPr>
-          <p:cNvPr id="6" name="TextBox 5"/>
-          <p:cNvSpPr txBox="1"/>
-          <p:nvPr/>
-        </p:nvSpPr>
-        <p:spPr>
-          <a:xfrm>
-            <a:off x="11185855" y="6473952"/>
-            <a:ext cx="640080" cy="274320"/>
-          </a:xfrm>
-          <a:prstGeom prst="rect">
-            <a:avLst/>
-          </a:prstGeom>
-          <a:noFill/>
-        </p:spPr>
-        <p:txBody>
-          <a:bodyPr wrap="square">
-            <a:spAutoFit/>
-          </a:bodyPr>
-          <a:lstStyle/>
-          <a:p>
-            <a:pPr algn="r"/>
-            <a:r>
-              <a:rPr sz="1100" b="0" i="0">
-                <a:solidFill>
-                  <a:srgbClr val="666666"/>
-                </a:solidFill>
-                <a:latin typeface="Calibri"/>
-              </a:rPr>
-              <a:t>43</a:t>
-            </a:r>
-          </a:p>
-        </p:txBody>
-      </p:sp>
-    </p:spTree>
-  </p:cSld>
-  <p:clrMapOvr>
-    <a:masterClrMapping/>
-  </p:clrMapOvr>
-</p:sld>
-</file>
-
-<file path=ppt/slides/slide44.xml><?xml version="1.0" encoding="utf-8"?>
-<p:sld xmlns:a="http://schemas.openxmlformats.org/drawingml/2006/main" xmlns:p="http://schemas.openxmlformats.org/presentationml/2006/main" xmlns:r="http://schemas.openxmlformats.org/officeDocument/2006/relationships">
-  <p:cSld>
-    <p:bg>
-      <p:bgPr>
-        <a:solidFill>
-          <a:srgbClr val="FFFFFF"/>
-        </a:solidFill>
-        <a:effectLst/>
-      </p:bgPr>
-    </p:bg>
-    <p:spTree>
-      <p:nvGrpSpPr>
-        <p:cNvPr id="1" name=""/>
-        <p:cNvGrpSpPr/>
-        <p:nvPr/>
-      </p:nvGrpSpPr>
-      <p:grpSpPr/>
-      <p:sp>
-        <p:nvSpPr>
-          <p:cNvPr id="2" name="Rectangle 1"/>
-          <p:cNvSpPr/>
-          <p:nvPr/>
-        </p:nvSpPr>
-        <p:spPr>
-          <a:xfrm>
-            <a:off x="0" y="0"/>
-            <a:ext cx="12191695" cy="960120"/>
-          </a:xfrm>
-          <a:prstGeom prst="rect">
-            <a:avLst/>
-          </a:prstGeom>
-          <a:solidFill>
-            <a:srgbClr val="095292"/>
-          </a:solidFill>
-          <a:ln>
-            <a:noFill/>
-          </a:ln>
-        </p:spPr>
-        <p:style>
-          <a:lnRef idx="1">
-            <a:schemeClr val="accent1"/>
-          </a:lnRef>
-          <a:fillRef idx="3">
-            <a:schemeClr val="accent1"/>
-          </a:fillRef>
-          <a:effectRef idx="2">
-            <a:schemeClr val="accent1"/>
-          </a:effectRef>
-          <a:fontRef idx="minor">
-            <a:schemeClr val="lt1"/>
-          </a:fontRef>
-        </p:style>
-        <p:txBody>
-          <a:bodyPr rtlCol="0" anchor="ctr"/>
-          <a:lstStyle/>
-          <a:p>
-            <a:pPr algn="ctr"/>
-          </a:p>
-        </p:txBody>
-      </p:sp>
-      <p:sp>
-        <p:nvSpPr>
-          <p:cNvPr id="3" name="Rectangle 2"/>
-          <p:cNvSpPr/>
-          <p:nvPr/>
-        </p:nvSpPr>
-        <p:spPr>
-          <a:xfrm>
-            <a:off x="0" y="960120"/>
-            <a:ext cx="12191695" cy="41148"/>
-          </a:xfrm>
-          <a:prstGeom prst="rect">
-            <a:avLst/>
-          </a:prstGeom>
-          <a:solidFill>
-            <a:srgbClr val="FFD000"/>
-          </a:solidFill>
-          <a:ln>
-            <a:noFill/>
-          </a:ln>
-        </p:spPr>
-        <p:style>
-          <a:lnRef idx="1">
-            <a:schemeClr val="accent1"/>
-          </a:lnRef>
-          <a:fillRef idx="3">
-            <a:schemeClr val="accent1"/>
-          </a:fillRef>
-          <a:effectRef idx="2">
-            <a:schemeClr val="accent1"/>
-          </a:effectRef>
-          <a:fontRef idx="minor">
-            <a:schemeClr val="lt1"/>
-          </a:fontRef>
-        </p:style>
-        <p:txBody>
-          <a:bodyPr rtlCol="0" anchor="ctr"/>
-          <a:lstStyle/>
-          <a:p>
-            <a:pPr algn="ctr"/>
-          </a:p>
-        </p:txBody>
-      </p:sp>
-      <p:sp>
-        <p:nvSpPr>
-          <p:cNvPr id="4" name="TextBox 3"/>
-          <p:cNvSpPr txBox="1"/>
-          <p:nvPr/>
-        </p:nvSpPr>
-        <p:spPr>
-          <a:xfrm>
-            <a:off x="457200" y="164592"/>
-            <a:ext cx="11277295" cy="502920"/>
-          </a:xfrm>
-          <a:prstGeom prst="rect">
-            <a:avLst/>
-          </a:prstGeom>
-          <a:noFill/>
-        </p:spPr>
-        <p:txBody>
-          <a:bodyPr wrap="square">
-            <a:spAutoFit/>
-          </a:bodyPr>
-          <a:lstStyle/>
-          <a:p>
-            <a:r>
-              <a:rPr sz="2600" b="1" i="0">
-                <a:solidFill>
-                  <a:srgbClr val="FFFFFF"/>
-                </a:solidFill>
-                <a:latin typeface="Calibri"/>
-              </a:rPr>
-              <a:t>Para el PI esta semana</a:t>
-            </a:r>
-          </a:p>
-        </p:txBody>
-      </p:sp>
-      <p:sp>
-        <p:nvSpPr>
-          <p:cNvPr id="5" name="Rounded Rectangle 4"/>
-          <p:cNvSpPr/>
-          <p:nvPr/>
-        </p:nvSpPr>
-        <p:spPr>
-          <a:xfrm>
-            <a:off x="457200" y="1261872"/>
-            <a:ext cx="11277295" cy="1051560"/>
-          </a:xfrm>
-          <a:prstGeom prst="roundRect">
-            <a:avLst>
-              <a:gd name="adj" fmla="val 12000"/>
-            </a:avLst>
-          </a:prstGeom>
-          <a:solidFill>
-            <a:srgbClr val="E8F4FA"/>
-          </a:solidFill>
-          <a:ln>
-            <a:noFill/>
-          </a:ln>
-        </p:spPr>
-        <p:style>
-          <a:lnRef idx="1">
-            <a:schemeClr val="accent1"/>
-          </a:lnRef>
-          <a:fillRef idx="3">
-            <a:schemeClr val="accent1"/>
-          </a:fillRef>
-          <a:effectRef idx="2">
-            <a:schemeClr val="accent1"/>
-          </a:effectRef>
-          <a:fontRef idx="minor">
-            <a:schemeClr val="lt1"/>
-          </a:fontRef>
-        </p:style>
-        <p:txBody>
-          <a:bodyPr rtlCol="0" anchor="ctr"/>
-          <a:lstStyle/>
-          <a:p>
-            <a:pPr algn="ctr"/>
-          </a:p>
-        </p:txBody>
-      </p:sp>
-      <p:sp>
-        <p:nvSpPr>
-          <p:cNvPr id="6" name="Rectangle 5"/>
-          <p:cNvSpPr/>
-          <p:nvPr/>
-        </p:nvSpPr>
-        <p:spPr>
-          <a:xfrm>
-            <a:off x="457200" y="1261872"/>
-            <a:ext cx="128016" cy="1051560"/>
-          </a:xfrm>
-          <a:prstGeom prst="rect">
-            <a:avLst/>
-          </a:prstGeom>
-          <a:solidFill>
-            <a:srgbClr val="269CCB"/>
-          </a:solidFill>
-          <a:ln>
-            <a:noFill/>
-          </a:ln>
-        </p:spPr>
-        <p:style>
-          <a:lnRef idx="1">
-            <a:schemeClr val="accent1"/>
-          </a:lnRef>
-          <a:fillRef idx="3">
-            <a:schemeClr val="accent1"/>
-          </a:fillRef>
-          <a:effectRef idx="2">
-            <a:schemeClr val="accent1"/>
-          </a:effectRef>
-          <a:fontRef idx="minor">
-            <a:schemeClr val="lt1"/>
-          </a:fontRef>
-        </p:style>
-        <p:txBody>
-          <a:bodyPr rtlCol="0" anchor="ctr"/>
-          <a:lstStyle/>
-          <a:p>
-            <a:pPr algn="ctr"/>
-          </a:p>
-        </p:txBody>
-      </p:sp>
-      <p:sp>
-        <p:nvSpPr>
-          <p:cNvPr id="7" name="TextBox 6"/>
-          <p:cNvSpPr txBox="1"/>
-          <p:nvPr/>
-        </p:nvSpPr>
-        <p:spPr>
-          <a:xfrm>
-            <a:off x="777240" y="1399031"/>
-            <a:ext cx="10774375" cy="822959"/>
-          </a:xfrm>
-          <a:prstGeom prst="rect">
-            <a:avLst/>
-          </a:prstGeom>
-          <a:noFill/>
-        </p:spPr>
-        <p:txBody>
-          <a:bodyPr wrap="square">
-            <a:spAutoFit/>
-          </a:bodyPr>
-          <a:lstStyle/>
-          <a:p>
-            <a:r>
-              <a:rPr sz="1200" b="1" i="0">
-                <a:solidFill>
-                  <a:srgbClr val="269CCB"/>
-                </a:solidFill>
-                <a:latin typeface="Calibri"/>
-              </a:rPr>
-              <a:t>Info</a:t>
-            </a:r>
-          </a:p>
-          <a:p>
-            <a:pPr>
-              <a:spcBef>
-                <a:spcPts val="400"/>
-              </a:spcBef>
-            </a:pPr>
-            <a:r>
-              <a:rPr sz="1400" b="0" i="0">
-                <a:solidFill>
-                  <a:srgbClr val="333333"/>
-                </a:solidFill>
-                <a:latin typeface="Calibri"/>
-              </a:rPr>
-              <a:t>Hito: VetCare queda con un unico repositorio de datos en memoria compartido por todas las ventanas y una fabrica que crea las consultas del dominio.</a:t>
-            </a:r>
-          </a:p>
-        </p:txBody>
-      </p:sp>
-      <p:sp>
-        <p:nvSpPr>
-          <p:cNvPr id="8" name="Rounded Rectangle 7"/>
-          <p:cNvSpPr/>
-          <p:nvPr/>
-        </p:nvSpPr>
-        <p:spPr>
-          <a:xfrm>
-            <a:off x="457200" y="2478024"/>
-            <a:ext cx="11277295" cy="1051560"/>
-          </a:xfrm>
-          <a:prstGeom prst="roundRect">
-            <a:avLst>
-              <a:gd name="adj" fmla="val 12000"/>
-            </a:avLst>
-          </a:prstGeom>
-          <a:solidFill>
-            <a:srgbClr val="FFF8E1"/>
-          </a:solidFill>
-          <a:ln>
-            <a:noFill/>
-          </a:ln>
-        </p:spPr>
-        <p:style>
-          <a:lnRef idx="1">
-            <a:schemeClr val="accent1"/>
-          </a:lnRef>
-          <a:fillRef idx="3">
-            <a:schemeClr val="accent1"/>
-          </a:fillRef>
-          <a:effectRef idx="2">
-            <a:schemeClr val="accent1"/>
-          </a:effectRef>
-          <a:fontRef idx="minor">
-            <a:schemeClr val="lt1"/>
-          </a:fontRef>
-        </p:style>
-        <p:txBody>
-          <a:bodyPr rtlCol="0" anchor="ctr"/>
-          <a:lstStyle/>
-          <a:p>
-            <a:pPr algn="ctr"/>
-          </a:p>
-        </p:txBody>
-      </p:sp>
-      <p:sp>
-        <p:nvSpPr>
-          <p:cNvPr id="9" name="Rectangle 8"/>
-          <p:cNvSpPr/>
-          <p:nvPr/>
-        </p:nvSpPr>
-        <p:spPr>
-          <a:xfrm>
-            <a:off x="457200" y="2478024"/>
-            <a:ext cx="128016" cy="1051560"/>
-          </a:xfrm>
-          <a:prstGeom prst="rect">
-            <a:avLst/>
-          </a:prstGeom>
-          <a:solidFill>
-            <a:srgbClr val="FFD000"/>
-          </a:solidFill>
-          <a:ln>
-            <a:noFill/>
-          </a:ln>
-        </p:spPr>
-        <p:style>
-          <a:lnRef idx="1">
-            <a:schemeClr val="accent1"/>
-          </a:lnRef>
-          <a:fillRef idx="3">
-            <a:schemeClr val="accent1"/>
-          </a:fillRef>
-          <a:effectRef idx="2">
-            <a:schemeClr val="accent1"/>
-          </a:effectRef>
-          <a:fontRef idx="minor">
-            <a:schemeClr val="lt1"/>
-          </a:fontRef>
-        </p:style>
-        <p:txBody>
-          <a:bodyPr rtlCol="0" anchor="ctr"/>
-          <a:lstStyle/>
-          <a:p>
-            <a:pPr algn="ctr"/>
-          </a:p>
-        </p:txBody>
-      </p:sp>
-      <p:sp>
-        <p:nvSpPr>
-          <p:cNvPr id="10" name="TextBox 9"/>
-          <p:cNvSpPr txBox="1"/>
-          <p:nvPr/>
-        </p:nvSpPr>
-        <p:spPr>
-          <a:xfrm>
-            <a:off x="777240" y="2615184"/>
-            <a:ext cx="10774375" cy="822959"/>
-          </a:xfrm>
-          <a:prstGeom prst="rect">
-            <a:avLst/>
-          </a:prstGeom>
-          <a:noFill/>
-        </p:spPr>
-        <p:txBody>
-          <a:bodyPr wrap="square">
-            <a:spAutoFit/>
-          </a:bodyPr>
-          <a:lstStyle/>
-          <a:p>
-            <a:r>
-              <a:rPr sz="1200" b="1" i="0">
-                <a:solidFill>
-                  <a:srgbClr val="FFD000"/>
-                </a:solidFill>
-                <a:latin typeface="Calibri"/>
-              </a:rPr>
-              <a:t>Aclaración</a:t>
-            </a:r>
-          </a:p>
-          <a:p>
-            <a:pPr>
-              <a:spcBef>
-                <a:spcPts val="400"/>
-              </a:spcBef>
-            </a:pPr>
-            <a:r>
-              <a:rPr sz="1400" b="0" i="0">
-                <a:solidFill>
-                  <a:srgbClr val="333333"/>
-                </a:solidFill>
-                <a:latin typeface="Calibri"/>
-              </a:rPr>
-              <a:t>Enunciado completo: Clases/Proyecto Integrador/ (VetCare).</a:t>
-            </a:r>
-          </a:p>
-        </p:txBody>
-      </p:sp>
-      <p:sp>
-        <p:nvSpPr>
-          <p:cNvPr id="11" name="Rounded Rectangle 10"/>
-          <p:cNvSpPr/>
-          <p:nvPr/>
-        </p:nvSpPr>
-        <p:spPr>
-          <a:xfrm>
-            <a:off x="457200" y="3694176"/>
-            <a:ext cx="11277295" cy="1051560"/>
-          </a:xfrm>
-          <a:prstGeom prst="roundRect">
-            <a:avLst>
-              <a:gd name="adj" fmla="val 12000"/>
-            </a:avLst>
-          </a:prstGeom>
-          <a:solidFill>
-            <a:srgbClr val="FBE4E4"/>
-          </a:solidFill>
-          <a:ln>
-            <a:noFill/>
-          </a:ln>
-        </p:spPr>
-        <p:style>
-          <a:lnRef idx="1">
-            <a:schemeClr val="accent1"/>
-          </a:lnRef>
-          <a:fillRef idx="3">
-            <a:schemeClr val="accent1"/>
-          </a:fillRef>
-          <a:effectRef idx="2">
-            <a:schemeClr val="accent1"/>
-          </a:effectRef>
-          <a:fontRef idx="minor">
-            <a:schemeClr val="lt1"/>
-          </a:fontRef>
-        </p:style>
-        <p:txBody>
-          <a:bodyPr rtlCol="0" anchor="ctr"/>
-          <a:lstStyle/>
-          <a:p>
-            <a:pPr algn="ctr"/>
-          </a:p>
-        </p:txBody>
-      </p:sp>
-      <p:sp>
-        <p:nvSpPr>
-          <p:cNvPr id="12" name="Rectangle 11"/>
-          <p:cNvSpPr/>
-          <p:nvPr/>
-        </p:nvSpPr>
-        <p:spPr>
-          <a:xfrm>
-            <a:off x="457200" y="3694176"/>
-            <a:ext cx="128016" cy="1051560"/>
-          </a:xfrm>
-          <a:prstGeom prst="rect">
-            <a:avLst/>
-          </a:prstGeom>
-          <a:solidFill>
-            <a:srgbClr val="A02030"/>
-          </a:solidFill>
-          <a:ln>
-            <a:noFill/>
-          </a:ln>
-        </p:spPr>
-        <p:style>
-          <a:lnRef idx="1">
-            <a:schemeClr val="accent1"/>
-          </a:lnRef>
-          <a:fillRef idx="3">
-            <a:schemeClr val="accent1"/>
-          </a:fillRef>
-          <a:effectRef idx="2">
-            <a:schemeClr val="accent1"/>
-          </a:effectRef>
-          <a:fontRef idx="minor">
-            <a:schemeClr val="lt1"/>
-          </a:fontRef>
-        </p:style>
-        <p:txBody>
-          <a:bodyPr rtlCol="0" anchor="ctr"/>
-          <a:lstStyle/>
-          <a:p>
-            <a:pPr algn="ctr"/>
-          </a:p>
-        </p:txBody>
-      </p:sp>
-      <p:sp>
-        <p:nvSpPr>
-          <p:cNvPr id="13" name="TextBox 12"/>
-          <p:cNvSpPr txBox="1"/>
-          <p:nvPr/>
-        </p:nvSpPr>
-        <p:spPr>
-          <a:xfrm>
-            <a:off x="777240" y="3831336"/>
-            <a:ext cx="10774375" cy="822959"/>
-          </a:xfrm>
-          <a:prstGeom prst="rect">
-            <a:avLst/>
-          </a:prstGeom>
-          <a:noFill/>
-        </p:spPr>
-        <p:txBody>
-          <a:bodyPr wrap="square">
-            <a:spAutoFit/>
-          </a:bodyPr>
-          <a:lstStyle/>
-          <a:p>
-            <a:r>
-              <a:rPr sz="1200" b="1" i="0">
-                <a:solidFill>
-                  <a:srgbClr val="A02030"/>
-                </a:solidFill>
-                <a:latin typeface="Calibri"/>
-              </a:rPr>
-              <a:t>Atención</a:t>
-            </a:r>
-          </a:p>
-          <a:p>
-            <a:pPr>
-              <a:spcBef>
-                <a:spcPts val="400"/>
-              </a:spcBef>
-            </a:pPr>
-            <a:r>
-              <a:rPr sz="1400" b="0" i="0">
-                <a:solidFill>
-                  <a:srgbClr val="333333"/>
-                </a:solidFill>
-                <a:latin typeface="Calibri"/>
-              </a:rPr>
-              <a:t>Entrega del taller, si el docente lo asigna · en la fecha que indique el docente.</a:t>
-            </a:r>
-          </a:p>
-        </p:txBody>
-      </p:sp>
-      <p:sp>
-        <p:nvSpPr>
-          <p:cNvPr id="14" name="TextBox 13"/>
-          <p:cNvSpPr txBox="1"/>
-          <p:nvPr/>
-        </p:nvSpPr>
-        <p:spPr>
-          <a:xfrm>
-            <a:off x="11185855" y="6473952"/>
-            <a:ext cx="640080" cy="274320"/>
-          </a:xfrm>
-          <a:prstGeom prst="rect">
-            <a:avLst/>
-          </a:prstGeom>
-          <a:noFill/>
-        </p:spPr>
-        <p:txBody>
-          <a:bodyPr wrap="square">
-            <a:spAutoFit/>
-          </a:bodyPr>
-          <a:lstStyle/>
-          <a:p>
-            <a:pPr algn="r"/>
-            <a:r>
-              <a:rPr sz="1100" b="0" i="0">
-                <a:solidFill>
-                  <a:srgbClr val="666666"/>
-                </a:solidFill>
-                <a:latin typeface="Calibri"/>
-              </a:rPr>
-              <a:t>44</a:t>
-            </a:r>
-          </a:p>
-        </p:txBody>
-      </p:sp>
-    </p:spTree>
-  </p:cSld>
-  <p:clrMapOvr>
-    <a:masterClrMapping/>
-  </p:clrMapOvr>
-</p:sld>
-</file>
-
-<file path=ppt/slides/slide45.xml><?xml version="1.0" encoding="utf-8"?>
-<p:sld xmlns:a="http://schemas.openxmlformats.org/drawingml/2006/main" xmlns:p="http://schemas.openxmlformats.org/presentationml/2006/main" xmlns:r="http://schemas.openxmlformats.org/officeDocument/2006/relationships">
-  <p:cSld>
-    <p:bg>
-      <p:bgPr>
-        <a:solidFill>
-          <a:srgbClr val="FFFFFF"/>
-        </a:solidFill>
-        <a:effectLst/>
-      </p:bgPr>
-    </p:bg>
-    <p:spTree>
-      <p:nvGrpSpPr>
-        <p:cNvPr id="1" name=""/>
-        <p:cNvGrpSpPr/>
-        <p:nvPr/>
-      </p:nvGrpSpPr>
-      <p:grpSpPr/>
-      <p:sp>
-        <p:nvSpPr>
-          <p:cNvPr id="2" name="Rectangle 1"/>
-          <p:cNvSpPr/>
-          <p:nvPr/>
-        </p:nvSpPr>
-        <p:spPr>
-          <a:xfrm>
-            <a:off x="0" y="0"/>
-            <a:ext cx="12191695" cy="164592"/>
-          </a:xfrm>
-          <a:prstGeom prst="rect">
-            <a:avLst/>
-          </a:prstGeom>
-          <a:solidFill>
-            <a:srgbClr val="269CCB"/>
-          </a:solidFill>
-          <a:ln>
-            <a:noFill/>
-          </a:ln>
-        </p:spPr>
-        <p:style>
-          <a:lnRef idx="1">
-            <a:schemeClr val="accent1"/>
-          </a:lnRef>
-          <a:fillRef idx="3">
-            <a:schemeClr val="accent1"/>
-          </a:fillRef>
-          <a:effectRef idx="2">
-            <a:schemeClr val="accent1"/>
-          </a:effectRef>
-          <a:fontRef idx="minor">
-            <a:schemeClr val="lt1"/>
-          </a:fontRef>
-        </p:style>
-        <p:txBody>
-          <a:bodyPr rtlCol="0" anchor="ctr"/>
-          <a:lstStyle/>
-          <a:p>
-            <a:pPr algn="ctr"/>
-          </a:p>
-        </p:txBody>
-      </p:sp>
-      <p:pic>
-        <p:nvPicPr>
-          <p:cNvPr id="3" name="Picture 2" descr="logo_uniajc_color.png"/>
-          <p:cNvPicPr>
-            <a:picLocks noChangeAspect="1"/>
-          </p:cNvPicPr>
-          <p:nvPr/>
-        </p:nvPicPr>
-        <p:blipFill>
-          <a:blip r:embed="rId2"/>
-          <a:stretch>
-            <a:fillRect/>
-          </a:stretch>
-        </p:blipFill>
-        <p:spPr>
-          <a:xfrm>
-            <a:off x="10271455" y="5998464"/>
-            <a:ext cx="1463040" cy="643233"/>
-          </a:xfrm>
-          <a:prstGeom prst="rect">
-            <a:avLst/>
-          </a:prstGeom>
-        </p:spPr>
-      </p:pic>
-      <p:sp>
-        <p:nvSpPr>
-          <p:cNvPr id="4" name="TextBox 3"/>
-          <p:cNvSpPr txBox="1"/>
-          <p:nvPr/>
-        </p:nvSpPr>
-        <p:spPr>
-          <a:xfrm>
-            <a:off x="457200" y="1737360"/>
-            <a:ext cx="11277295" cy="1097280"/>
-          </a:xfrm>
-          <a:prstGeom prst="rect">
-            <a:avLst/>
-          </a:prstGeom>
-          <a:noFill/>
-        </p:spPr>
-        <p:txBody>
-          <a:bodyPr wrap="square" anchor="ctr"/>
-          <a:lstStyle/>
-          <a:p>
-            <a:pPr algn="ctr"/>
-            <a:r>
-              <a:rPr sz="3400" b="1" i="0">
-                <a:solidFill>
-                  <a:srgbClr val="095292"/>
-                </a:solidFill>
-                <a:latin typeface="Calibri"/>
-              </a:rPr>
-              <a:t>Clase 7 · VetCare avanza</a:t>
-            </a:r>
-          </a:p>
-        </p:txBody>
-      </p:sp>
-      <p:sp>
-        <p:nvSpPr>
-          <p:cNvPr id="5" name="TextBox 4"/>
-          <p:cNvSpPr txBox="1"/>
-          <p:nvPr/>
-        </p:nvSpPr>
-        <p:spPr>
-          <a:xfrm>
-            <a:off x="457200" y="3017520"/>
-            <a:ext cx="11277295" cy="1645920"/>
-          </a:xfrm>
-          <a:prstGeom prst="rect">
-            <a:avLst/>
-          </a:prstGeom>
-          <a:noFill/>
-        </p:spPr>
-        <p:txBody>
-          <a:bodyPr wrap="square">
-            <a:spAutoFit/>
-          </a:bodyPr>
-          <a:lstStyle/>
-          <a:p>
-            <a:pPr algn="ctr">
-              <a:spcAft>
-                <a:spcPts val="600"/>
-              </a:spcAft>
-            </a:pPr>
-            <a:r>
-              <a:rPr sz="1600" b="0" i="0">
-                <a:solidFill>
-                  <a:srgbClr val="333333"/>
-                </a:solidFill>
-                <a:latin typeface="Calibri"/>
-              </a:rPr>
-              <a:t>VetCare queda con un unico repositorio de datos en memoria compartido por todas las ventanas y una fabrica que crea las consultas del dominio.</a:t>
-            </a:r>
-          </a:p>
-          <a:p>
-            <a:pPr algn="ctr">
-              <a:spcAft>
-                <a:spcPts val="600"/>
-              </a:spcAft>
-            </a:pPr>
-            <a:r>
-              <a:rPr sz="1600" b="0" i="0">
-                <a:solidFill>
-                  <a:srgbClr val="333333"/>
-                </a:solidFill>
-                <a:latin typeface="Calibri"/>
-              </a:rPr>
-              <a:t>Entregable: Clase RepositorioVetCare convertida en Singleton, FabricaConsultas con tres tipos y evidencia de que dos ventanas ven la misma lista, subido a la plataforma del curso.</a:t>
-            </a:r>
-          </a:p>
-          <a:p>
-            <a:pPr algn="ctr">
-              <a:spcAft>
-                <a:spcPts val="600"/>
-              </a:spcAft>
-            </a:pPr>
-            <a:r>
-              <a:rPr sz="1600" b="0" i="0">
-                <a:solidFill>
-                  <a:srgbClr val="333333"/>
-                </a:solidFill>
-                <a:latin typeface="Calibri"/>
-              </a:rPr>
-              <a:t>Siguiente clase: continuamos el hilo del PI</a:t>
-            </a:r>
-          </a:p>
-        </p:txBody>
-      </p:sp>
-      <p:sp>
-        <p:nvSpPr>
-          <p:cNvPr id="6" name="TextBox 5"/>
-          <p:cNvSpPr txBox="1"/>
-          <p:nvPr/>
-        </p:nvSpPr>
-        <p:spPr>
-          <a:xfrm>
-            <a:off x="457200" y="4754880"/>
-            <a:ext cx="11277295" cy="640080"/>
-          </a:xfrm>
-          <a:prstGeom prst="rect">
-            <a:avLst/>
-          </a:prstGeom>
-          <a:noFill/>
-        </p:spPr>
-        <p:txBody>
-          <a:bodyPr wrap="square">
-            <a:spAutoFit/>
-          </a:bodyPr>
-          <a:lstStyle/>
-          <a:p>
-            <a:pPr algn="ctr"/>
-            <a:r>
-              <a:rPr sz="2000" b="1" i="0">
-                <a:solidFill>
-                  <a:srgbClr val="269CCB"/>
-                </a:solidFill>
-                <a:latin typeface="Calibri"/>
-              </a:rPr>
-              <a:t>Teoria al servicio del proyecto</a:t>
             </a:r>
           </a:p>
         </p:txBody>
@@ -23320,4 +20571,324 @@
   </a:objectDefaults>
   <a:extraClrSchemeLst/>
 </a:theme>
+</file>
+
+<file path=ppt/theme/theme2.xml><?xml version="1.0" encoding="utf-8"?>
+<a:theme xmlns:a="http://schemas.openxmlformats.org/drawingml/2006/main" name="Office Theme">
+  <a:themeElements>
+    <a:clrScheme name="Office">
+      <a:dk1>
+        <a:sysClr val="windowText" lastClr="000000"/>
+      </a:dk1>
+      <a:lt1>
+        <a:sysClr val="window" lastClr="FFFFFF"/>
+      </a:lt1>
+      <a:dk2>
+        <a:srgbClr val="1F497D"/>
+      </a:dk2>
+      <a:lt2>
+        <a:srgbClr val="EEECE1"/>
+      </a:lt2>
+      <a:accent1>
+        <a:srgbClr val="4F81BD"/>
+      </a:accent1>
+      <a:accent2>
+        <a:srgbClr val="C0504D"/>
+      </a:accent2>
+      <a:accent3>
+        <a:srgbClr val="9BBB59"/>
+      </a:accent3>
+      <a:accent4>
+        <a:srgbClr val="8064A2"/>
+      </a:accent4>
+      <a:accent5>
+        <a:srgbClr val="4BACC6"/>
+      </a:accent5>
+      <a:accent6>
+        <a:srgbClr val="F79646"/>
+      </a:accent6>
+      <a:hlink>
+        <a:srgbClr val="0000FF"/>
+      </a:hlink>
+      <a:folHlink>
+        <a:srgbClr val="800080"/>
+      </a:folHlink>
+    </a:clrScheme>
+    <a:fontScheme name="Office">
+      <a:majorFont>
+        <a:latin typeface="Calibri"/>
+        <a:ea typeface=""/>
+        <a:cs typeface=""/>
+        <a:font script="Jpan" typeface="ＭＳ Ｐゴシック"/>
+        <a:font script="Hang" typeface="맑은 고딕"/>
+        <a:font script="Hans" typeface="宋体"/>
+        <a:font script="Hant" typeface="新細明體"/>
+        <a:font script="Arab" typeface="Times New Roman"/>
+        <a:font script="Hebr" typeface="Times New Roman"/>
+        <a:font script="Thai" typeface="Angsana New"/>
+        <a:font script="Ethi" typeface="Nyala"/>
+        <a:font script="Beng" typeface="Vrinda"/>
+        <a:font script="Gujr" typeface="Shruti"/>
+        <a:font script="Khmr" typeface="MoolBoran"/>
+        <a:font script="Knda" typeface="Tunga"/>
+        <a:font script="Guru" typeface="Raavi"/>
+        <a:font script="Cans" typeface="Euphemia"/>
+        <a:font script="Cher" typeface="Plantagenet Cherokee"/>
+        <a:font script="Yiii" typeface="Microsoft Yi Baiti"/>
+        <a:font script="Tibt" typeface="Microsoft Himalaya"/>
+        <a:font script="Thaa" typeface="MV Boli"/>
+        <a:font script="Deva" typeface="Mangal"/>
+        <a:font script="Telu" typeface="Gautami"/>
+        <a:font script="Taml" typeface="Latha"/>
+        <a:font script="Syrc" typeface="Estrangelo Edessa"/>
+        <a:font script="Orya" typeface="Kalinga"/>
+        <a:font script="Mlym" typeface="Kartika"/>
+        <a:font script="Laoo" typeface="DokChampa"/>
+        <a:font script="Sinh" typeface="Iskoola Pota"/>
+        <a:font script="Mong" typeface="Mongolian Baiti"/>
+        <a:font script="Viet" typeface="Times New Roman"/>
+        <a:font script="Uigh" typeface="Microsoft Uighur"/>
+        <a:font script="Geor" typeface="Sylfaen"/>
+      </a:majorFont>
+      <a:minorFont>
+        <a:latin typeface="Calibri"/>
+        <a:ea typeface=""/>
+        <a:cs typeface=""/>
+        <a:font script="Jpan" typeface="ＭＳ Ｐゴシック"/>
+        <a:font script="Hang" typeface="맑은 고딕"/>
+        <a:font script="Hans" typeface="宋体"/>
+        <a:font script="Hant" typeface="新細明體"/>
+        <a:font script="Arab" typeface="Arial"/>
+        <a:font script="Hebr" typeface="Arial"/>
+        <a:font script="Thai" typeface="Cordia New"/>
+        <a:font script="Ethi" typeface="Nyala"/>
+        <a:font script="Beng" typeface="Vrinda"/>
+        <a:font script="Gujr" typeface="Shruti"/>
+        <a:font script="Khmr" typeface="DaunPenh"/>
+        <a:font script="Knda" typeface="Tunga"/>
+        <a:font script="Guru" typeface="Raavi"/>
+        <a:font script="Cans" typeface="Euphemia"/>
+        <a:font script="Cher" typeface="Plantagenet Cherokee"/>
+        <a:font script="Yiii" typeface="Microsoft Yi Baiti"/>
+        <a:font script="Tibt" typeface="Microsoft Himalaya"/>
+        <a:font script="Thaa" typeface="MV Boli"/>
+        <a:font script="Deva" typeface="Mangal"/>
+        <a:font script="Telu" typeface="Gautami"/>
+        <a:font script="Taml" typeface="Latha"/>
+        <a:font script="Syrc" typeface="Estrangelo Edessa"/>
+        <a:font script="Orya" typeface="Kalinga"/>
+        <a:font script="Mlym" typeface="Kartika"/>
+        <a:font script="Laoo" typeface="DokChampa"/>
+        <a:font script="Sinh" typeface="Iskoola Pota"/>
+        <a:font script="Mong" typeface="Mongolian Baiti"/>
+        <a:font script="Viet" typeface="Arial"/>
+        <a:font script="Uigh" typeface="Microsoft Uighur"/>
+        <a:font script="Geor" typeface="Sylfaen"/>
+      </a:minorFont>
+    </a:fontScheme>
+    <a:fmtScheme name="Office">
+      <a:fillStyleLst>
+        <a:solidFill>
+          <a:schemeClr val="phClr"/>
+        </a:solidFill>
+        <a:gradFill rotWithShape="1">
+          <a:gsLst>
+            <a:gs pos="0">
+              <a:schemeClr val="phClr">
+                <a:tint val="50000"/>
+                <a:satMod val="300000"/>
+              </a:schemeClr>
+            </a:gs>
+            <a:gs pos="35000">
+              <a:schemeClr val="phClr">
+                <a:tint val="37000"/>
+                <a:satMod val="300000"/>
+              </a:schemeClr>
+            </a:gs>
+            <a:gs pos="100000">
+              <a:schemeClr val="phClr">
+                <a:tint val="15000"/>
+                <a:satMod val="350000"/>
+              </a:schemeClr>
+            </a:gs>
+          </a:gsLst>
+          <a:lin ang="16200000" scaled="1"/>
+        </a:gradFill>
+        <a:gradFill rotWithShape="1">
+          <a:gsLst>
+            <a:gs pos="0">
+              <a:schemeClr val="phClr">
+                <a:tint val="100000"/>
+                <a:shade val="100000"/>
+                <a:satMod val="130000"/>
+              </a:schemeClr>
+            </a:gs>
+            <a:gs pos="100000">
+              <a:schemeClr val="phClr">
+                <a:tint val="50000"/>
+                <a:shade val="100000"/>
+                <a:satMod val="350000"/>
+              </a:schemeClr>
+            </a:gs>
+          </a:gsLst>
+          <a:lin ang="16200000" scaled="0"/>
+        </a:gradFill>
+      </a:fillStyleLst>
+      <a:lnStyleLst>
+        <a:ln w="9525" cap="flat" cmpd="sng" algn="ctr">
+          <a:solidFill>
+            <a:schemeClr val="phClr">
+              <a:shade val="95000"/>
+              <a:satMod val="105000"/>
+            </a:schemeClr>
+          </a:solidFill>
+          <a:prstDash val="solid"/>
+        </a:ln>
+        <a:ln w="25400" cap="flat" cmpd="sng" algn="ctr">
+          <a:solidFill>
+            <a:schemeClr val="phClr"/>
+          </a:solidFill>
+          <a:prstDash val="solid"/>
+        </a:ln>
+        <a:ln w="38100" cap="flat" cmpd="sng" algn="ctr">
+          <a:solidFill>
+            <a:schemeClr val="phClr"/>
+          </a:solidFill>
+          <a:prstDash val="solid"/>
+        </a:ln>
+      </a:lnStyleLst>
+      <a:effectStyleLst>
+        <a:effectStyle>
+          <a:effectLst>
+            <a:outerShdw blurRad="40000" dist="20000" dir="5400000" rotWithShape="0">
+              <a:srgbClr val="000000">
+                <a:alpha val="38000"/>
+              </a:srgbClr>
+            </a:outerShdw>
+          </a:effectLst>
+        </a:effectStyle>
+        <a:effectStyle>
+          <a:effectLst>
+            <a:outerShdw blurRad="40000" dist="23000" dir="5400000" rotWithShape="0">
+              <a:srgbClr val="000000">
+                <a:alpha val="35000"/>
+              </a:srgbClr>
+            </a:outerShdw>
+          </a:effectLst>
+        </a:effectStyle>
+        <a:effectStyle>
+          <a:effectLst>
+            <a:outerShdw blurRad="40000" dist="23000" dir="5400000" rotWithShape="0">
+              <a:srgbClr val="000000">
+                <a:alpha val="35000"/>
+              </a:srgbClr>
+            </a:outerShdw>
+          </a:effectLst>
+          <a:scene3d>
+            <a:camera prst="orthographicFront">
+              <a:rot lat="0" lon="0" rev="0"/>
+            </a:camera>
+            <a:lightRig rig="threePt" dir="t">
+              <a:rot lat="0" lon="0" rev="1200000"/>
+            </a:lightRig>
+          </a:scene3d>
+          <a:sp3d>
+            <a:bevelT w="63500" h="25400"/>
+          </a:sp3d>
+        </a:effectStyle>
+      </a:effectStyleLst>
+      <a:bgFillStyleLst>
+        <a:solidFill>
+          <a:schemeClr val="phClr"/>
+        </a:solidFill>
+        <a:gradFill rotWithShape="1">
+          <a:gsLst>
+            <a:gs pos="0">
+              <a:schemeClr val="phClr">
+                <a:tint val="40000"/>
+                <a:satMod val="350000"/>
+              </a:schemeClr>
+            </a:gs>
+            <a:gs pos="40000">
+              <a:schemeClr val="phClr">
+                <a:tint val="45000"/>
+                <a:shade val="99000"/>
+                <a:satMod val="350000"/>
+              </a:schemeClr>
+            </a:gs>
+            <a:gs pos="100000">
+              <a:schemeClr val="phClr">
+                <a:shade val="20000"/>
+                <a:satMod val="255000"/>
+              </a:schemeClr>
+            </a:gs>
+          </a:gsLst>
+          <a:path path="circle">
+            <a:fillToRect l="50000" t="-80000" r="50000" b="180000"/>
+          </a:path>
+        </a:gradFill>
+        <a:gradFill rotWithShape="1">
+          <a:gsLst>
+            <a:gs pos="0">
+              <a:schemeClr val="phClr">
+                <a:tint val="80000"/>
+                <a:satMod val="300000"/>
+              </a:schemeClr>
+            </a:gs>
+            <a:gs pos="100000">
+              <a:schemeClr val="phClr">
+                <a:shade val="30000"/>
+                <a:satMod val="200000"/>
+              </a:schemeClr>
+            </a:gs>
+          </a:gsLst>
+          <a:path path="circle">
+            <a:fillToRect l="50000" t="50000" r="50000" b="50000"/>
+          </a:path>
+        </a:gradFill>
+      </a:bgFillStyleLst>
+    </a:fmtScheme>
+  </a:themeElements>
+  <a:objectDefaults>
+    <a:spDef>
+      <a:spPr/>
+      <a:bodyPr/>
+      <a:lstStyle/>
+      <a:style>
+        <a:lnRef idx="1">
+          <a:schemeClr val="accent1"/>
+        </a:lnRef>
+        <a:fillRef idx="3">
+          <a:schemeClr val="accent1"/>
+        </a:fillRef>
+        <a:effectRef idx="2">
+          <a:schemeClr val="accent1"/>
+        </a:effectRef>
+        <a:fontRef idx="minor">
+          <a:schemeClr val="lt1"/>
+        </a:fontRef>
+      </a:style>
+    </a:spDef>
+    <a:lnDef>
+      <a:spPr/>
+      <a:bodyPr/>
+      <a:lstStyle/>
+      <a:style>
+        <a:lnRef idx="2">
+          <a:schemeClr val="accent1"/>
+        </a:lnRef>
+        <a:fillRef idx="0">
+          <a:schemeClr val="accent1"/>
+        </a:fillRef>
+        <a:effectRef idx="1">
+          <a:schemeClr val="accent1"/>
+        </a:effectRef>
+        <a:fontRef idx="minor">
+          <a:schemeClr val="tx1"/>
+        </a:fontRef>
+      </a:style>
+    </a:lnDef>
+  </a:objectDefaults>
+  <a:extraClrSchemeLst/>
+</a:theme>
 </file>
--- a/Programacion II/Clases/Clase 7 - Patrones de diseno Singleton y Factory/Presentacion.pptx
+++ b/Programacion II/Clases/Clase 7 - Patrones de diseno Singleton y Factory/Presentacion.pptx
@@ -546,7 +546,7 @@
           <a:p/>
           <a:p>
             <a:r>
-              <a:t>En VetCare la ventana de registro creaba su propio RepositorioMascotas.</a:t>
+              <a:t>En el sistema de la clinica la ventana de registro creaba su propio RepositorioMascotas.</a:t>
             </a:r>
           </a:p>
           <a:p/>
@@ -4131,7 +4131,7 @@
                 </a:solidFill>
                 <a:latin typeface="Calibri"/>
               </a:rPr>
-              <a:t>–   En VetCare hay tres tipos de consulta con reglas propias: Vacunacion dura 15 minutos y cuesta 35.000, Control dura 30 minutos y cuesta 60.000, Urgencia dura 45 minutos y cuesta 120.000.</a:t>
+              <a:t>–   En el sistema de la clinica hay tres tipos de consulta con reglas propias: Vacunacion dura 15 minutos y cuesta 35.000, Control dura 30 minutos y cuesta 60.000, Urgencia dura 45 minutos y cuesta 120.000.</a:t>
             </a:r>
           </a:p>
           <a:p>
@@ -4399,7 +4399,7 @@
                 </a:solidFill>
                 <a:latin typeface="Calibri"/>
               </a:rPr>
-              <a:t>–   Fijese en el detalle importante: el metodo retorna el tipo base (Consulta), no la subclase; ahi es donde el polimorfismo que vimos en clases anteriores empieza a pagar, porque el dia que Huellitas agregue 'CIRUGIA' solo se toca la fabrica.</a:t>
+              <a:t>–   Fijese en el detalle importante: el metodo retorna el tipo base (Consulta), no la subclase; ahi es donde el polimorfismo que vimos en clases anteriores empieza a pagar, porque el dia que la clinica agregue 'CIRUGIA' solo se toca la fabrica.</a:t>
             </a:r>
           </a:p>
         </p:txBody>
@@ -4903,7 +4903,7 @@
                 </a:solidFill>
                 <a:latin typeface="Calibri"/>
               </a:rPr>
-              <a:t>–   En VetCare aceptamos el Singleton para el repositorio porque es una aplicacion de escritorio pequeña, con un solo usuario y una unica fuente de datos, y aun asi vamos a dejarle un metodo limpiar() para poder probarlo.</a:t>
+              <a:t>–   En el sistema de la clinica aceptamos el Singleton para el repositorio porque es una aplicacion de escritorio pequeña, con un solo usuario y una unica fuente de datos, y aun asi vamos a dejarle un metodo limpiar() para poder probarlo.</a:t>
             </a:r>
           </a:p>
           <a:p>
@@ -5116,7 +5116,7 @@
                 </a:solidFill>
                 <a:latin typeface="Calibri"/>
               </a:rPr>
-              <a:t>VetCarePatronesDemo.java — class VetCarePatronesDemo</a:t>
+              <a:t>ClinicaPatronesDemo.java — class ClinicaPatronesDemo</a:t>
             </a:r>
           </a:p>
         </p:txBody>
@@ -5275,7 +5275,7 @@
                 </a:solidFill>
                 <a:latin typeface="Calibri"/>
               </a:rPr>
-              <a:t>public class VetCarePatronesDemo {</a:t>
+              <a:t>public class ClinicaPatronesDemo {</a:t>
             </a:r>
           </a:p>
           <a:p>
@@ -5472,7 +5472,7 @@
                 </a:solidFill>
                 <a:latin typeface="Calibri"/>
               </a:rPr>
-              <a:t>VetCarePatronesDemo.java — main() (1/2)</a:t>
+              <a:t>ClinicaPatronesDemo.java — main() (1/2)</a:t>
             </a:r>
           </a:p>
         </p:txBody>
@@ -5647,7 +5647,7 @@
                 </a:solidFill>
                 <a:latin typeface="Calibri"/>
               </a:rPr>
-              <a:t>        RepositorioVetCare a = RepositorioVetCare.getInstancia();</a:t>
+              <a:t>        RepositorioClinica a = RepositorioClinica.getInstancia();</a:t>
             </a:r>
           </a:p>
           <a:p>
@@ -5663,7 +5663,7 @@
                 </a:solidFill>
                 <a:latin typeface="Calibri"/>
               </a:rPr>
-              <a:t>        RepositorioVetCare b = RepositorioVetCare.getInstancia();</a:t>
+              <a:t>        RepositorioClinica b = RepositorioClinica.getInstancia();</a:t>
             </a:r>
           </a:p>
           <a:p>
@@ -6139,7 +6139,7 @@
                 </a:solidFill>
                 <a:latin typeface="Calibri"/>
               </a:rPr>
-              <a:t>VetCarePatronesDemo.java — main() (2/2)</a:t>
+              <a:t>ClinicaPatronesDemo.java — main() (2/2)</a:t>
             </a:r>
           </a:p>
         </p:txBody>
@@ -6458,7 +6458,7 @@
                 </a:solidFill>
                 <a:latin typeface="Calibri"/>
               </a:rPr>
-              <a:t>/** Expediente basico de una mascota de la clinica Huellitas. */</a:t>
+              <a:t>/** Expediente basico de una mascota de la clinica. */</a:t>
             </a:r>
           </a:p>
         </p:txBody>
@@ -6639,7 +6639,7 @@
                 </a:solidFill>
                 <a:latin typeface="Calibri"/>
               </a:rPr>
-              <a:t>VetCarePatronesDemo.java — class Mascota</a:t>
+              <a:t>ClinicaPatronesDemo.java — class Mascota</a:t>
             </a:r>
           </a:p>
         </p:txBody>
@@ -7059,7 +7059,7 @@
                 </a:solidFill>
                 <a:latin typeface="Calibri"/>
               </a:rPr>
-              <a:t>VetCarePatronesDemo.java — Mascota()</a:t>
+              <a:t>ClinicaPatronesDemo.java — Mascota()</a:t>
             </a:r>
           </a:p>
         </p:txBody>
@@ -7591,7 +7591,7 @@
                 </a:solidFill>
                 <a:latin typeface="Calibri"/>
               </a:rPr>
-              <a:t>VetCarePatronesDemo.java — class RepositorioVetCare</a:t>
+              <a:t>ClinicaPatronesDemo.java — class RepositorioClinica</a:t>
             </a:r>
           </a:p>
         </p:txBody>
@@ -7750,7 +7750,7 @@
                 </a:solidFill>
                 <a:latin typeface="Calibri"/>
               </a:rPr>
-              <a:t>class RepositorioVetCare {</a:t>
+              <a:t>class RepositorioClinica {</a:t>
             </a:r>
           </a:p>
           <a:p>
@@ -7782,7 +7782,7 @@
                 </a:solidFill>
                 <a:latin typeface="Calibri"/>
               </a:rPr>
-              <a:t>    private static RepositorioVetCare instancia;</a:t>
+              <a:t>    private static RepositorioClinica instancia;</a:t>
             </a:r>
           </a:p>
           <a:p>
@@ -8143,7 +8143,7 @@
                 </a:solidFill>
                 <a:latin typeface="Calibri"/>
               </a:rPr>
-              <a:t>–   Todo con el mismo dominio: la clinica veterinaria Huellitas (VetCare).</a:t>
+              <a:t>–   Todo con el mismo dominio: una clinica veterinaria.</a:t>
             </a:r>
           </a:p>
         </p:txBody>
@@ -8324,7 +8324,7 @@
                 </a:solidFill>
                 <a:latin typeface="Calibri"/>
               </a:rPr>
-              <a:t>VetCarePatronesDemo.java — RepositorioVetCare()</a:t>
+              <a:t>ClinicaPatronesDemo.java — RepositorioClinica()</a:t>
             </a:r>
           </a:p>
         </p:txBody>
@@ -8483,7 +8483,7 @@
                 </a:solidFill>
                 <a:latin typeface="Calibri"/>
               </a:rPr>
-              <a:t>    private RepositorioVetCare() {</a:t>
+              <a:t>    private RepositorioClinica() {</a:t>
             </a:r>
           </a:p>
           <a:p>
@@ -8712,7 +8712,7 @@
                 </a:solidFill>
                 <a:latin typeface="Calibri"/>
               </a:rPr>
-              <a:t>VetCarePatronesDemo.java — getInstancia()</a:t>
+              <a:t>ClinicaPatronesDemo.java — getInstancia()</a:t>
             </a:r>
           </a:p>
         </p:txBody>
@@ -8871,7 +8871,7 @@
                 </a:solidFill>
                 <a:latin typeface="Calibri"/>
               </a:rPr>
-              <a:t>    public static synchronized RepositorioVetCare getInstancia() {</a:t>
+              <a:t>    public static synchronized RepositorioClinica getInstancia() {</a:t>
             </a:r>
           </a:p>
           <a:p>
@@ -8903,7 +8903,7 @@
                 </a:solidFill>
                 <a:latin typeface="Calibri"/>
               </a:rPr>
-              <a:t>            instancia = new RepositorioVetCare();</a:t>
+              <a:t>            instancia = new RepositorioClinica();</a:t>
             </a:r>
           </a:p>
           <a:p>
@@ -9148,7 +9148,7 @@
                 </a:solidFill>
                 <a:latin typeface="Calibri"/>
               </a:rPr>
-              <a:t>VetCarePatronesDemo.java — registrar()</a:t>
+              <a:t>ClinicaPatronesDemo.java — registrar()</a:t>
             </a:r>
           </a:p>
         </p:txBody>
@@ -9632,7 +9632,7 @@
                 </a:solidFill>
                 <a:latin typeface="Calibri"/>
               </a:rPr>
-              <a:t>VetCarePatronesDemo.java — buscarPorId()</a:t>
+              <a:t>ClinicaPatronesDemo.java — buscarPorId()</a:t>
             </a:r>
           </a:p>
         </p:txBody>
@@ -10244,7 +10244,7 @@
                 </a:solidFill>
                 <a:latin typeface="Calibri"/>
               </a:rPr>
-              <a:t>VetCarePatronesDemo.java — class Consulta</a:t>
+              <a:t>ClinicaPatronesDemo.java — class Consulta</a:t>
             </a:r>
           </a:p>
         </p:txBody>
@@ -10632,7 +10632,7 @@
                 </a:solidFill>
                 <a:latin typeface="Calibri"/>
               </a:rPr>
-              <a:t>VetCarePatronesDemo.java — Consulta()</a:t>
+              <a:t>ClinicaPatronesDemo.java — Consulta()</a:t>
             </a:r>
           </a:p>
         </p:txBody>
@@ -11084,7 +11084,7 @@
                 </a:solidFill>
                 <a:latin typeface="Calibri"/>
               </a:rPr>
-              <a:t>VetCarePatronesDemo.java — describir()</a:t>
+              <a:t>ClinicaPatronesDemo.java — describir()</a:t>
             </a:r>
           </a:p>
         </p:txBody>
@@ -11504,7 +11504,7 @@
                 </a:solidFill>
                 <a:latin typeface="Calibri"/>
               </a:rPr>
-              <a:t>VetCarePatronesDemo.java — class ConsultaVacunacion</a:t>
+              <a:t>ClinicaPatronesDemo.java — class ConsultaVacunacion</a:t>
             </a:r>
           </a:p>
         </p:txBody>
@@ -12004,7 +12004,7 @@
                 </a:solidFill>
                 <a:latin typeface="Calibri"/>
               </a:rPr>
-              <a:t>VetCarePatronesDemo.java — class ConsultaControl</a:t>
+              <a:t>ClinicaPatronesDemo.java — class ConsultaControl</a:t>
             </a:r>
           </a:p>
         </p:txBody>
@@ -12504,7 +12504,7 @@
                 </a:solidFill>
                 <a:latin typeface="Calibri"/>
               </a:rPr>
-              <a:t>VetCarePatronesDemo.java — class ConsultaUrgencia</a:t>
+              <a:t>ClinicaPatronesDemo.java — class ConsultaUrgencia</a:t>
             </a:r>
           </a:p>
         </p:txBody>
@@ -13408,7 +13408,7 @@
                 </a:solidFill>
                 <a:latin typeface="Calibri"/>
               </a:rPr>
-              <a:t>Demo en vivo sobre VetCare</a:t>
+              <a:t>Demo en vivo sobre el tema</a:t>
             </a:r>
           </a:p>
         </p:txBody>
@@ -13872,7 +13872,7 @@
                 </a:solidFill>
                 <a:latin typeface="Calibri"/>
               </a:rPr>
-              <a:t>VetCarePatronesDemo.java — class FabricaConsultas</a:t>
+              <a:t>ClinicaPatronesDemo.java — class FabricaConsultas</a:t>
             </a:r>
           </a:p>
         </p:txBody>
@@ -14260,7 +14260,7 @@
                 </a:solidFill>
                 <a:latin typeface="Calibri"/>
               </a:rPr>
-              <a:t>VetCarePatronesDemo.java — crear()</a:t>
+              <a:t>ClinicaPatronesDemo.java — crear()</a:t>
             </a:r>
           </a:p>
         </p:txBody>
@@ -14872,7 +14872,7 @@
                 </a:solidFill>
                 <a:latin typeface="Calibri"/>
               </a:rPr>
-              <a:t>VetCarePatronesDemo.java — class VentanaSucursal</a:t>
+              <a:t>ClinicaPatronesDemo.java — class VentanaSucursal</a:t>
             </a:r>
           </a:p>
         </p:txBody>
@@ -15340,7 +15340,7 @@
                 </a:solidFill>
                 <a:latin typeface="Calibri"/>
               </a:rPr>
-              <a:t>VetCarePatronesDemo.java — VentanaSucursal() (1/2)</a:t>
+              <a:t>ClinicaPatronesDemo.java — VentanaSucursal() (1/2)</a:t>
             </a:r>
           </a:p>
         </p:txBody>
@@ -15515,7 +15515,7 @@
                 </a:solidFill>
                 <a:latin typeface="Calibri"/>
               </a:rPr>
-              <a:t>        super("VetCare - " + punto);</a:t>
+              <a:t>        super("Clinica - " + punto);</a:t>
             </a:r>
           </a:p>
           <a:p>
@@ -16007,7 +16007,7 @@
                 </a:solidFill>
                 <a:latin typeface="Calibri"/>
               </a:rPr>
-              <a:t>VetCarePatronesDemo.java — VentanaSucursal() (2/2)</a:t>
+              <a:t>ClinicaPatronesDemo.java — VentanaSucursal() (2/2)</a:t>
             </a:r>
           </a:p>
         </p:txBody>
@@ -16619,7 +16619,7 @@
                 </a:solidFill>
                 <a:latin typeface="Calibri"/>
               </a:rPr>
-              <a:t>VetCarePatronesDemo.java — registrar()</a:t>
+              <a:t>ClinicaPatronesDemo.java — registrar()</a:t>
             </a:r>
           </a:p>
         </p:txBody>
@@ -16810,7 +16810,7 @@
                 </a:solidFill>
                 <a:latin typeface="Calibri"/>
               </a:rPr>
-              <a:t>            RepositorioVetCare.getInstancia().registrar(new Mascota(</a:t>
+              <a:t>            RepositorioClinica.getInstancia().registrar(new Mascota(</a:t>
             </a:r>
           </a:p>
           <a:p>
@@ -17151,7 +17151,7 @@
                 </a:solidFill>
                 <a:latin typeface="Calibri"/>
               </a:rPr>
-              <a:t>VetCarePatronesDemo.java — refrescar()</a:t>
+              <a:t>ClinicaPatronesDemo.java — refrescar()</a:t>
             </a:r>
           </a:p>
         </p:txBody>
@@ -17358,7 +17358,7 @@
                 </a:solidFill>
                 <a:latin typeface="Calibri"/>
               </a:rPr>
-              <a:t>                .append(System.identityHashCode(RepositorioVetCare.getInstancia()))</a:t>
+              <a:t>                .append(System.identityHashCode(RepositorioClinica.getInstancia()))</a:t>
             </a:r>
           </a:p>
           <a:p>
@@ -17390,7 +17390,7 @@
                 </a:solidFill>
                 <a:latin typeface="Calibri"/>
               </a:rPr>
-              <a:t>        for (Mascota m: RepositorioVetCare.getInstancia().listar()) {</a:t>
+              <a:t>        for (Mascota m: RepositorioClinica.getInstancia().listar()) {</a:t>
             </a:r>
           </a:p>
           <a:p>
@@ -17438,7 +17438,7 @@
                 </a:solidFill>
                 <a:latin typeface="Calibri"/>
               </a:rPr>
-              <a:t>        sb.append("Total: ").append(RepositorioVetCare.getInstancia().total());</a:t>
+              <a:t>        sb.append("Total: ").append(RepositorioClinica.getInstancia().total());</a:t>
             </a:r>
           </a:p>
           <a:p>
@@ -17842,7 +17842,7 @@
                 </a:solidFill>
                 <a:latin typeface="Calibri"/>
               </a:rPr>
-              <a:t>public class RepositorioVetCare {                  // el archivador de Huellitas</a:t>
+              <a:t>public class RepositorioClinica {                  // el archivador de la clinica</a:t>
             </a:r>
           </a:p>
           <a:p>
@@ -17858,7 +17858,7 @@
                 </a:solidFill>
                 <a:latin typeface="Calibri"/>
               </a:rPr>
-              <a:t>    private static RepositorioVetCare instancia;   // 1. unica referencia, privada y estatica</a:t>
+              <a:t>    private static RepositorioClinica instancia;   // 1. unica referencia, privada y estatica</a:t>
             </a:r>
           </a:p>
           <a:p>
@@ -17906,7 +17906,7 @@
                 </a:solidFill>
                 <a:latin typeface="Calibri"/>
               </a:rPr>
-              <a:t>    private RepositorioVetCare() { }               // 2. privado: nadie puede hacer new</a:t>
+              <a:t>    private RepositorioClinica() { }               // 2. privado: nadie puede hacer new</a:t>
             </a:r>
           </a:p>
           <a:p>
@@ -17938,7 +17938,7 @@
                 </a:solidFill>
                 <a:latin typeface="Calibri"/>
               </a:rPr>
-              <a:t>    public static synchronized RepositorioVetCare getInstancia() {</a:t>
+              <a:t>    public static synchronized RepositorioClinica getInstancia() {</a:t>
             </a:r>
           </a:p>
           <a:p>
@@ -17970,7 +17970,7 @@
                 </a:solidFill>
                 <a:latin typeface="Calibri"/>
               </a:rPr>
-              <a:t>            instancia = new RepositorioVetCare();</a:t>
+              <a:t>            instancia = new RepositorioClinica();</a:t>
             </a:r>
           </a:p>
           <a:p>
@@ -18050,7 +18050,7 @@
                 </a:solidFill>
                 <a:latin typeface="Calibri"/>
               </a:rPr>
-              <a:t>// En cada ventana: RepositorioVetCare repo = RepositorioVetCare.getInstancia();  // nunca new</a:t>
+              <a:t>// En cada ventana: RepositorioClinica repo = RepositorioClinica.getInstancia();  // nunca new</a:t>
             </a:r>
           </a:p>
         </p:txBody>
@@ -18357,7 +18357,7 @@
                 </a:solidFill>
                 <a:latin typeface="Calibri"/>
               </a:rPr>
-              <a:t> El docente abre dos ventanas de VetCare, registra una mascota en la primera y la muestra apareciendo en la segunda porque ambas comparten la unica instancia del repositorio.</a:t>
+              <a:t> El docente abre dos ventanas del sistema de la clinica, registra una mascota en la primera y la muestra apareciendo en la segunda porque ambas comparten la unica instancia del repositorio.</a:t>
             </a:r>
           </a:p>
           <a:p>
@@ -18373,7 +18373,7 @@
                 </a:solidFill>
                 <a:latin typeface="Calibri"/>
               </a:rPr>
-              <a:t>–   Mismo dominio VetCare — no otro ejemplo.</a:t>
+              <a:t>–   Mismo dominio de la clinica — no otro ejemplo.</a:t>
             </a:r>
           </a:p>
         </p:txBody>
@@ -18857,7 +18857,7 @@
                 </a:solidFill>
                 <a:latin typeface="Calibri"/>
               </a:rPr>
-              <a:t>–   En programacion pasa igual: cuando un desarrollador dice 'el repositorio de VetCare es un Singleton', su compañero entiende de una que hay una sola instancia y un punto de acceso global, sin necesidad de leer el codigo.</a:t>
+              <a:t>–   En programacion pasa igual: cuando un desarrollador dice 'el repositorio del sistema de la clinica es un Singleton', su compañero entiende de una que hay una sola instancia y un punto de acceso global, sin necesidad de leer el codigo.</a:t>
             </a:r>
           </a:p>
         </p:txBody>
@@ -19345,7 +19345,7 @@
                 </a:solidFill>
                 <a:latin typeface="Calibri"/>
               </a:rPr>
-              <a:t>–   Y no sirve pasar datos por copia: la clinica Huellitas necesita que exista un solo lugar donde vivan los expedientes mientras la aplicacion corre, igual que en la clinica fisica hay un solo archivador y no uno por escritorio.</a:t>
+              <a:t>–   Y no sirve pasar datos por copia: la clinica necesita que exista un solo lugar donde vivan los expedientes mientras la aplicacion corre, igual que en la clinica fisica hay un solo archivador y no uno por escritorio.</a:t>
             </a:r>
           </a:p>
           <a:p>
@@ -19597,7 +19597,7 @@
                 </a:solidFill>
                 <a:latin typeface="Calibri"/>
               </a:rPr>
-              <a:t>–   Primera, un atributo privado y estatico del mismo tipo de la clase (private static RepositorioVetCare instancia): estatico porque debe pertenecer a la clase y no a un objeto, privado para que nadie lo reemplace desde afuera.</a:t>
+              <a:t>–   Primera, un atributo privado y estatico del mismo tipo de la clase (private static RepositorioClinica instancia): estatico porque debe pertenecer a la clase y no a un objeto, privado para que nadie lo reemplace desde afuera.</a:t>
             </a:r>
           </a:p>
           <a:p>
@@ -20205,7 +20205,7 @@
                 </a:solidFill>
                 <a:latin typeface="Calibri"/>
               </a:rPr>
-              <a:t>private static final RepositorioVetCare INSTANCIA = new RepositorioVetCare()</a:t>
+              <a:t>private static final RepositorioClinica INSTANCIA = new RepositorioClinica()</a:t>
             </a:r>
           </a:p>
         </p:txBody>

--- a/Programacion II/Clases/Clase 7 - Patrones de diseno Singleton y Factory/Presentacion.pptx
+++ b/Programacion II/Clases/Clase 7 - Patrones de diseno Singleton y Factory/Presentacion.pptx
@@ -829,94 +829,6 @@
           <a:p>
             <a:r>
               <a:t>Ahora la parte que casi nadie enseña: cuando NO usarlos. El Singleton es, sin maquillaje, una variable global con corbata. Trae tres costos reales: esconde dependencias (una clase que por dentro llama a getInstancia() no declara en su firma que necesita el repositorio), complica las pruebas (en la clase 8 vamos a querer un repositorio limpio en cada caso de prueba y el Singleton nos va a devolver el sucio de la prueba anterior) y concentra estado compartido que en aplicaciones grandes se vuelve impredecible. La alternativa profesional se llama inyeccion por constructor: pasar el repositorio como parametro, tal como hicimos con ControladorRegistro en la clase 6. En el sistema de la clinica aceptamos el Singleton para el repositorio porque es una aplicacion de escritorio pequeña, con un solo usuario y una unica fuente de datos, y aun asi vamos a dejarle un metodo limpiar() para poder probarlo. La Factory tiene su propio abuso: si solo hay una clase que crear y ninguna regla que aplicar, una fabrica que hace un new pelado no aporta nada, solo una capa mas de ruido. La regla de oro es: primero el problema, despues el patron; nunca al reves.</a:t>
-            </a:r>
-          </a:p>
-        </p:txBody>
-      </p:sp>
-      <p:sp>
-        <p:nvSpPr>
-          <p:cNvPr id="4" name="Slide Number Placeholder 3"/>
-          <p:cNvSpPr>
-            <a:spLocks noGrp="1"/>
-          </p:cNvSpPr>
-          <p:nvPr>
-            <p:ph type="sldNum" idx="5" sz="quarter"/>
-          </p:nvPr>
-        </p:nvSpPr>
-        <p:spPr/>
-      </p:sp>
-    </p:spTree>
-  </p:cSld>
-  <p:clrMapOvr>
-    <a:masterClrMapping/>
-  </p:clrMapOvr>
-</p:notes>
-</file>
-
-<file path=ppt/notesSlides/notesSlide6.xml><?xml version="1.0" encoding="utf-8"?>
-<p:notes xmlns:a="http://schemas.openxmlformats.org/drawingml/2006/main" xmlns:p="http://schemas.openxmlformats.org/presentationml/2006/main" xmlns:r="http://schemas.openxmlformats.org/officeDocument/2006/relationships">
-  <p:cSld>
-    <p:spTree>
-      <p:nvGrpSpPr>
-        <p:cNvPr id="1" name=""/>
-        <p:cNvGrpSpPr/>
-        <p:nvPr/>
-      </p:nvGrpSpPr>
-      <p:grpSpPr>
-        <a:xfrm>
-          <a:off x="0" y="0"/>
-          <a:ext cx="0" cy="0"/>
-          <a:chOff x="0" y="0"/>
-          <a:chExt cx="0" cy="0"/>
-        </a:xfrm>
-      </p:grpSpPr>
-      <p:sp>
-        <p:nvSpPr>
-          <p:cNvPr id="2" name="Slide Image Placeholder 1"/>
-          <p:cNvSpPr>
-            <a:spLocks noGrp="1"/>
-          </p:cNvSpPr>
-          <p:nvPr>
-            <p:ph type="sldImg" idx="2"/>
-          </p:nvPr>
-        </p:nvSpPr>
-        <p:spPr/>
-      </p:sp>
-      <p:sp>
-        <p:nvSpPr>
-          <p:cNvPr id="3" name="Notes Placeholder 2"/>
-          <p:cNvSpPr>
-            <a:spLocks noGrp="1"/>
-          </p:cNvSpPr>
-          <p:nvPr>
-            <p:ph type="body" idx="3" sz="quarter"/>
-          </p:nvPr>
-        </p:nvSpPr>
-        <p:spPr/>
-        <p:txBody>
-          <a:bodyPr/>
-          <a:lstStyle/>
-          <a:p>
-            <a:r>
-              <a:t>TEXTO COMPLETO DE LA LÁMINA (se proyecta resumido):</a:t>
-            </a:r>
-          </a:p>
-          <a:p/>
-          <a:p>
-            <a:r>
-              <a:t>Herramienta: Visual Studio Code (Java)</a:t>
-            </a:r>
-          </a:p>
-          <a:p/>
-          <a:p>
-            <a:r>
-              <a:t>Demo: El docente abre dos ventanas del sistema de la clinica, registra una mascota en la primera y la muestra apareciendo en la segunda porque ambas comparten la unica instancia del repositorio.</a:t>
-            </a:r>
-          </a:p>
-          <a:p/>
-          <a:p>
-            <a:r>
-              <a:t>Mismo dominio de la clinica — no otro ejemplo.</a:t>
             </a:r>
           </a:p>
         </p:txBody>
@@ -10829,83 +10741,14 @@
       </p:sp>
       <p:sp>
         <p:nvSpPr>
-          <p:cNvPr id="5" name="Rounded Rectangle 4"/>
-          <p:cNvSpPr/>
-          <p:nvPr/>
-        </p:nvSpPr>
-        <p:spPr>
-          <a:xfrm>
-            <a:off x="5797149" y="1573813"/>
-            <a:ext cx="6010497" cy="4057845"/>
-          </a:xfrm>
-          <a:prstGeom prst="roundRect">
-            <a:avLst>
-              <a:gd name="adj" fmla="val 4000"/>
-            </a:avLst>
-          </a:prstGeom>
-          <a:solidFill>
-            <a:srgbClr val="E8EEF4"/>
-          </a:solidFill>
-          <a:ln>
-            <a:noFill/>
-          </a:ln>
-        </p:spPr>
-        <p:style>
-          <a:lnRef idx="1">
-            <a:schemeClr val="accent1"/>
-          </a:lnRef>
-          <a:fillRef idx="3">
-            <a:schemeClr val="accent1"/>
-          </a:fillRef>
-          <a:effectRef idx="2">
-            <a:schemeClr val="accent1"/>
-          </a:effectRef>
-          <a:fontRef idx="minor">
-            <a:schemeClr val="lt1"/>
-          </a:fontRef>
-        </p:style>
-        <p:txBody>
-          <a:bodyPr rtlCol="0" anchor="ctr"/>
-          <a:lstStyle/>
-          <a:p>
-            <a:pPr algn="ctr"/>
-          </a:p>
-        </p:txBody>
-      </p:sp>
-      <p:pic>
-        <p:nvPicPr>
-          <p:cNvPr id="6" name="Picture 5" descr="stop-sign-road.jpg"/>
-          <p:cNvPicPr>
-            <a:picLocks noChangeAspect="1"/>
-          </p:cNvPicPr>
-          <p:nvPr/>
-        </p:nvPicPr>
-        <p:blipFill>
-          <a:blip r:embed="rId2"/>
-          <a:stretch>
-            <a:fillRect/>
-          </a:stretch>
-        </p:blipFill>
-        <p:spPr>
-          <a:xfrm>
-            <a:off x="5870301" y="1646965"/>
-            <a:ext cx="5864193" cy="3911541"/>
-          </a:xfrm>
-          <a:prstGeom prst="rect">
-            <a:avLst/>
-          </a:prstGeom>
-        </p:spPr>
-      </p:pic>
-      <p:sp>
-        <p:nvSpPr>
-          <p:cNvPr id="7" name="TextBox 6"/>
+          <p:cNvPr id="5" name="TextBox 4"/>
           <p:cNvSpPr txBox="1"/>
           <p:nvPr/>
         </p:nvSpPr>
         <p:spPr>
           <a:xfrm>
-            <a:off x="5870301" y="5961888"/>
-            <a:ext cx="5864193" cy="320040"/>
+            <a:off x="457200" y="1170432"/>
+            <a:ext cx="11277295" cy="5230368"/>
           </a:xfrm>
           <a:prstGeom prst="rect">
             <a:avLst/>
@@ -10918,40 +10761,21 @@
           </a:bodyPr>
           <a:lstStyle/>
           <a:p>
-            <a:pPr algn="ctr"/>
-            <a:r>
-              <a:rPr sz="1100" b="0" i="1">
-                <a:solidFill>
-                  <a:srgbClr val="666666"/>
+            <a:pPr>
+              <a:spcAft>
+                <a:spcPts val="800"/>
+              </a:spcAft>
+            </a:pPr>
+            <a:r>
+              <a:rPr sz="2000" b="0" i="0">
+                <a:solidFill>
+                  <a:srgbClr val="333333"/>
                 </a:solidFill>
                 <a:latin typeface="Calibri"/>
               </a:rPr>
-              <a:t>Foto: Francesco Ungaro · Pexels</a:t>
-            </a:r>
-          </a:p>
-        </p:txBody>
-      </p:sp>
-      <p:sp>
-        <p:nvSpPr>
-          <p:cNvPr id="8" name="TextBox 7"/>
-          <p:cNvSpPr txBox="1"/>
-          <p:nvPr/>
-        </p:nvSpPr>
-        <p:spPr>
-          <a:xfrm>
-            <a:off x="457200" y="1353312"/>
-            <a:ext cx="5093061" cy="5047488"/>
-          </a:xfrm>
-          <a:prstGeom prst="rect">
-            <a:avLst/>
-          </a:prstGeom>
-          <a:noFill/>
-        </p:spPr>
-        <p:txBody>
-          <a:bodyPr wrap="square">
-            <a:spAutoFit/>
-          </a:bodyPr>
-          <a:lstStyle/>
+              <a:t>–   El Singleton es una variable global: esconde dependencias y complica las pruebas.</a:t>
+            </a:r>
+          </a:p>
           <a:p>
             <a:pPr>
               <a:spcAft>
@@ -10965,7 +10789,7 @@
                 </a:solidFill>
                 <a:latin typeface="Calibri"/>
               </a:rPr>
-              <a:t>–   El Singleton es una variable global: esconde dependencias y complica las pruebas.</a:t>
+              <a:t>–   La alternativa profesional es inyectar por constructor, como en el controlador de la Clase 6.</a:t>
             </a:r>
           </a:p>
           <a:p>
@@ -10981,7 +10805,7 @@
                 </a:solidFill>
                 <a:latin typeface="Calibri"/>
               </a:rPr>
-              <a:t>–   La alternativa profesional es inyectar por constructor, como en el controlador de la Clase 6.</a:t>
+              <a:t>–   Una fábrica que solo hace un new, sin reglas, es ruido.</a:t>
             </a:r>
           </a:p>
           <a:p>
@@ -10997,22 +10821,6 @@
                 </a:solidFill>
                 <a:latin typeface="Calibri"/>
               </a:rPr>
-              <a:t>–   Una fábrica que solo hace un new, sin reglas, es ruido.</a:t>
-            </a:r>
-          </a:p>
-          <a:p>
-            <a:pPr>
-              <a:spcAft>
-                <a:spcPts val="800"/>
-              </a:spcAft>
-            </a:pPr>
-            <a:r>
-              <a:rPr sz="2000" b="0" i="0">
-                <a:solidFill>
-                  <a:srgbClr val="333333"/>
-                </a:solidFill>
-                <a:latin typeface="Calibri"/>
-              </a:rPr>
               <a:t>–   Primero el problema, después el patrón; nunca al revés.</a:t>
             </a:r>
           </a:p>
@@ -11020,7 +10828,7 @@
       </p:sp>
       <p:sp>
         <p:nvSpPr>
-          <p:cNvPr id="9" name="TextBox 8"/>
+          <p:cNvPr id="6" name="TextBox 5"/>
           <p:cNvSpPr txBox="1"/>
           <p:nvPr/>
         </p:nvSpPr>
@@ -11201,83 +11009,14 @@
       </p:sp>
       <p:sp>
         <p:nvSpPr>
-          <p:cNvPr id="5" name="Rounded Rectangle 4"/>
-          <p:cNvSpPr/>
-          <p:nvPr/>
-        </p:nvSpPr>
-        <p:spPr>
-          <a:xfrm>
-            <a:off x="5797149" y="1573813"/>
-            <a:ext cx="6010497" cy="4057845"/>
-          </a:xfrm>
-          <a:prstGeom prst="roundRect">
-            <a:avLst>
-              <a:gd name="adj" fmla="val 4000"/>
-            </a:avLst>
-          </a:prstGeom>
-          <a:solidFill>
-            <a:srgbClr val="E8EEF4"/>
-          </a:solidFill>
-          <a:ln>
-            <a:noFill/>
-          </a:ln>
-        </p:spPr>
-        <p:style>
-          <a:lnRef idx="1">
-            <a:schemeClr val="accent1"/>
-          </a:lnRef>
-          <a:fillRef idx="3">
-            <a:schemeClr val="accent1"/>
-          </a:fillRef>
-          <a:effectRef idx="2">
-            <a:schemeClr val="accent1"/>
-          </a:effectRef>
-          <a:fontRef idx="minor">
-            <a:schemeClr val="lt1"/>
-          </a:fontRef>
-        </p:style>
-        <p:txBody>
-          <a:bodyPr rtlCol="0" anchor="ctr"/>
-          <a:lstStyle/>
-          <a:p>
-            <a:pPr algn="ctr"/>
-          </a:p>
-        </p:txBody>
-      </p:sp>
-      <p:pic>
-        <p:nvPicPr>
-          <p:cNvPr id="6" name="Picture 5" descr="laptop-code-live-demo.jpg"/>
-          <p:cNvPicPr>
-            <a:picLocks noChangeAspect="1"/>
-          </p:cNvPicPr>
-          <p:nvPr/>
-        </p:nvPicPr>
-        <p:blipFill>
-          <a:blip r:embed="rId2"/>
-          <a:stretch>
-            <a:fillRect/>
-          </a:stretch>
-        </p:blipFill>
-        <p:spPr>
-          <a:xfrm>
-            <a:off x="5870301" y="1646965"/>
-            <a:ext cx="5864193" cy="3911541"/>
-          </a:xfrm>
-          <a:prstGeom prst="rect">
-            <a:avLst/>
-          </a:prstGeom>
-        </p:spPr>
-      </p:pic>
-      <p:sp>
-        <p:nvSpPr>
-          <p:cNvPr id="7" name="TextBox 6"/>
+          <p:cNvPr id="5" name="TextBox 4"/>
           <p:cNvSpPr txBox="1"/>
           <p:nvPr/>
         </p:nvSpPr>
         <p:spPr>
           <a:xfrm>
-            <a:off x="5870301" y="5961888"/>
-            <a:ext cx="5864193" cy="320040"/>
+            <a:off x="457200" y="1170432"/>
+            <a:ext cx="11277295" cy="5230368"/>
           </a:xfrm>
           <a:prstGeom prst="rect">
             <a:avLst/>
@@ -11290,40 +11029,39 @@
           </a:bodyPr>
           <a:lstStyle/>
           <a:p>
-            <a:pPr algn="ctr"/>
-            <a:r>
-              <a:rPr sz="1100" b="0" i="1">
-                <a:solidFill>
-                  <a:srgbClr val="666666"/>
+            <a:pPr>
+              <a:spcAft>
+                <a:spcPts val="800"/>
+              </a:spcAft>
+            </a:pPr>
+            <a:r>
+              <a:rPr sz="2000" b="0" i="0">
+                <a:solidFill>
+                  <a:srgbClr val="333333"/>
                 </a:solidFill>
                 <a:latin typeface="Calibri"/>
               </a:rPr>
-              <a:t>Foto: olia danilevich · Pexels</a:t>
-            </a:r>
-          </a:p>
-        </p:txBody>
-      </p:sp>
-      <p:sp>
-        <p:nvSpPr>
-          <p:cNvPr id="8" name="TextBox 7"/>
-          <p:cNvSpPr txBox="1"/>
-          <p:nvPr/>
-        </p:nvSpPr>
-        <p:spPr>
-          <a:xfrm>
-            <a:off x="457200" y="1353312"/>
-            <a:ext cx="5093061" cy="5047488"/>
-          </a:xfrm>
-          <a:prstGeom prst="rect">
-            <a:avLst/>
-          </a:prstGeom>
-          <a:noFill/>
-        </p:spPr>
-        <p:txBody>
-          <a:bodyPr wrap="square">
-            <a:spAutoFit/>
-          </a:bodyPr>
-          <a:lstStyle/>
+              <a:t>–   </a:t>
+            </a:r>
+            <a:r>
+              <a:rPr sz="2000" b="1" i="0">
+                <a:solidFill>
+                  <a:srgbClr val="333333"/>
+                </a:solidFill>
+                <a:latin typeface="Calibri"/>
+              </a:rPr>
+              <a:t>Herramienta:</a:t>
+            </a:r>
+            <a:r>
+              <a:rPr sz="2000" b="0" i="0">
+                <a:solidFill>
+                  <a:srgbClr val="333333"/>
+                </a:solidFill>
+                <a:latin typeface="Calibri"/>
+              </a:rPr>
+              <a:t> Visual Studio Code (Java)</a:t>
+            </a:r>
+          </a:p>
           <a:p>
             <a:pPr>
               <a:spcAft>
@@ -11346,7 +11084,7 @@
                 </a:solidFill>
                 <a:latin typeface="Calibri"/>
               </a:rPr>
-              <a:t>Herramienta:</a:t>
+              <a:t>Demo:</a:t>
             </a:r>
             <a:r>
               <a:rPr sz="2000" b="0" i="0">
@@ -11355,7 +11093,7 @@
                 </a:solidFill>
                 <a:latin typeface="Calibri"/>
               </a:rPr>
-              <a:t> Visual Studio Code (Java)</a:t>
+              <a:t> El docente abre dos ventanas del sistema de la clinica, registra una mascota en la primera y la muestra apareciendo en la segunda porque ambas comparten la unica instancia del repositorio.</a:t>
             </a:r>
           </a:p>
           <a:p>
@@ -11371,31 +11109,6 @@
                 </a:solidFill>
                 <a:latin typeface="Calibri"/>
               </a:rPr>
-              <a:t>–   </a:t>
-            </a:r>
-            <a:r>
-              <a:rPr sz="2000" b="1" i="0">
-                <a:solidFill>
-                  <a:srgbClr val="333333"/>
-                </a:solidFill>
-                <a:latin typeface="Calibri"/>
-              </a:rPr>
-              <a:t>Demo:</a:t>
-            </a:r>
-          </a:p>
-          <a:p>
-            <a:pPr>
-              <a:spcAft>
-                <a:spcPts val="800"/>
-              </a:spcAft>
-            </a:pPr>
-            <a:r>
-              <a:rPr sz="2000" b="0" i="0">
-                <a:solidFill>
-                  <a:srgbClr val="333333"/>
-                </a:solidFill>
-                <a:latin typeface="Calibri"/>
-              </a:rPr>
               <a:t>–   Mismo dominio de la clinica — no otro ejemplo.</a:t>
             </a:r>
           </a:p>
@@ -11403,7 +11116,7 @@
       </p:sp>
       <p:sp>
         <p:nvSpPr>
-          <p:cNvPr id="9" name="TextBox 8"/>
+          <p:cNvPr id="6" name="TextBox 5"/>
           <p:cNvSpPr txBox="1"/>
           <p:nvPr/>
         </p:nvSpPr>
@@ -11816,83 +11529,14 @@
       </p:sp>
       <p:sp>
         <p:nvSpPr>
-          <p:cNvPr id="5" name="Rounded Rectangle 4"/>
-          <p:cNvSpPr/>
-          <p:nvPr/>
-        </p:nvSpPr>
-        <p:spPr>
-          <a:xfrm>
-            <a:off x="5797149" y="1573813"/>
-            <a:ext cx="6010497" cy="4057845"/>
-          </a:xfrm>
-          <a:prstGeom prst="roundRect">
-            <a:avLst>
-              <a:gd name="adj" fmla="val 4000"/>
-            </a:avLst>
-          </a:prstGeom>
-          <a:solidFill>
-            <a:srgbClr val="E8EEF4"/>
-          </a:solidFill>
-          <a:ln>
-            <a:noFill/>
-          </a:ln>
-        </p:spPr>
-        <p:style>
-          <a:lnRef idx="1">
-            <a:schemeClr val="accent1"/>
-          </a:lnRef>
-          <a:fillRef idx="3">
-            <a:schemeClr val="accent1"/>
-          </a:fillRef>
-          <a:effectRef idx="2">
-            <a:schemeClr val="accent1"/>
-          </a:effectRef>
-          <a:fontRef idx="minor">
-            <a:schemeClr val="lt1"/>
-          </a:fontRef>
-        </p:style>
-        <p:txBody>
-          <a:bodyPr rtlCol="0" anchor="ctr"/>
-          <a:lstStyle/>
-          <a:p>
-            <a:pPr algn="ctr"/>
-          </a:p>
-        </p:txBody>
-      </p:sp>
-      <p:pic>
-        <p:nvPicPr>
-          <p:cNvPr id="6" name="Picture 5" descr="notebook-planning-desk-coffee.jpg"/>
-          <p:cNvPicPr>
-            <a:picLocks noChangeAspect="1"/>
-          </p:cNvPicPr>
-          <p:nvPr/>
-        </p:nvPicPr>
-        <p:blipFill>
-          <a:blip r:embed="rId2"/>
-          <a:stretch>
-            <a:fillRect/>
-          </a:stretch>
-        </p:blipFill>
-        <p:spPr>
-          <a:xfrm>
-            <a:off x="5870301" y="1646965"/>
-            <a:ext cx="5864193" cy="3911541"/>
-          </a:xfrm>
-          <a:prstGeom prst="rect">
-            <a:avLst/>
-          </a:prstGeom>
-        </p:spPr>
-      </p:pic>
-      <p:sp>
-        <p:nvSpPr>
-          <p:cNvPr id="7" name="TextBox 6"/>
+          <p:cNvPr id="5" name="TextBox 4"/>
           <p:cNvSpPr txBox="1"/>
           <p:nvPr/>
         </p:nvSpPr>
         <p:spPr>
           <a:xfrm>
-            <a:off x="5870301" y="5961888"/>
-            <a:ext cx="5864193" cy="320040"/>
+            <a:off x="457200" y="1170432"/>
+            <a:ext cx="11277295" cy="5230368"/>
           </a:xfrm>
           <a:prstGeom prst="rect">
             <a:avLst/>
@@ -11905,40 +11549,39 @@
           </a:bodyPr>
           <a:lstStyle/>
           <a:p>
-            <a:pPr algn="ctr"/>
-            <a:r>
-              <a:rPr sz="1100" b="0" i="1">
-                <a:solidFill>
-                  <a:srgbClr val="666666"/>
+            <a:pPr>
+              <a:spcAft>
+                <a:spcPts val="800"/>
+              </a:spcAft>
+            </a:pPr>
+            <a:r>
+              <a:rPr sz="2000" b="0" i="0">
+                <a:solidFill>
+                  <a:srgbClr val="333333"/>
                 </a:solidFill>
                 <a:latin typeface="Calibri"/>
               </a:rPr>
-              <a:t>Foto: Cup of  Couple · Pexels</a:t>
-            </a:r>
-          </a:p>
-        </p:txBody>
-      </p:sp>
-      <p:sp>
-        <p:nvSpPr>
-          <p:cNvPr id="8" name="TextBox 7"/>
-          <p:cNvSpPr txBox="1"/>
-          <p:nvPr/>
-        </p:nvSpPr>
-        <p:spPr>
-          <a:xfrm>
-            <a:off x="457200" y="1353312"/>
-            <a:ext cx="5093061" cy="5047488"/>
-          </a:xfrm>
-          <a:prstGeom prst="rect">
-            <a:avLst/>
-          </a:prstGeom>
-          <a:noFill/>
-        </p:spPr>
-        <p:txBody>
-          <a:bodyPr wrap="square">
-            <a:spAutoFit/>
-          </a:bodyPr>
-          <a:lstStyle/>
+              <a:t>–   </a:t>
+            </a:r>
+            <a:r>
+              <a:rPr sz="2000" b="1" i="0">
+                <a:solidFill>
+                  <a:srgbClr val="333333"/>
+                </a:solidFill>
+                <a:latin typeface="Calibri"/>
+              </a:rPr>
+              <a:t>Tema de hoy:</a:t>
+            </a:r>
+            <a:r>
+              <a:rPr sz="2000" b="0" i="0">
+                <a:solidFill>
+                  <a:srgbClr val="333333"/>
+                </a:solidFill>
+                <a:latin typeface="Calibri"/>
+              </a:rPr>
+              <a:t> Patrones de diseno · Singleton y Factory — Soluciones con nombre a problemas que ya nos pasaron</a:t>
+            </a:r>
+          </a:p>
           <a:p>
             <a:pPr>
               <a:spcAft>
@@ -11952,7 +11595,7 @@
                 </a:solidFill>
                 <a:latin typeface="Calibri"/>
               </a:rPr>
-              <a:t>–   </a:t>
+              <a:t>–   Herramienta: </a:t>
             </a:r>
             <a:r>
               <a:rPr sz="2000" b="1" i="0">
@@ -11961,7 +11604,7 @@
                 </a:solidFill>
                 <a:latin typeface="Calibri"/>
               </a:rPr>
-              <a:t>Tema de hoy:</a:t>
+              <a:t>Visual Studio Code (Java)</a:t>
             </a:r>
             <a:r>
               <a:rPr sz="2000" b="0" i="0">
@@ -11970,7 +11613,16 @@
                 </a:solidFill>
                 <a:latin typeface="Calibri"/>
               </a:rPr>
-              <a:t> Patrones de diseno · Singleton y Factory — Soluciones con nombre a problemas que ya nos pasaron</a:t>
+              <a:t> · Bloque </a:t>
+            </a:r>
+            <a:r>
+              <a:rPr sz="2000" b="1" i="0">
+                <a:solidFill>
+                  <a:srgbClr val="333333"/>
+                </a:solidFill>
+                <a:latin typeface="Calibri"/>
+              </a:rPr>
+              <a:t>120 min</a:t>
             </a:r>
           </a:p>
           <a:p>
@@ -11986,65 +11638,22 @@
                 </a:solidFill>
                 <a:latin typeface="Calibri"/>
               </a:rPr>
-              <a:t>–   Herramienta: </a:t>
-            </a:r>
-            <a:r>
-              <a:rPr sz="2000" b="1" i="0">
+              <a:t>–   Primero el concepto, despues el codigo que lo muestra y la demo en vivo.</a:t>
+            </a:r>
+          </a:p>
+          <a:p>
+            <a:pPr>
+              <a:spcAft>
+                <a:spcPts val="800"/>
+              </a:spcAft>
+            </a:pPr>
+            <a:r>
+              <a:rPr sz="2000" b="0" i="0">
                 <a:solidFill>
                   <a:srgbClr val="333333"/>
                 </a:solidFill>
                 <a:latin typeface="Calibri"/>
               </a:rPr>
-              <a:t>Visual Studio Code (Java)</a:t>
-            </a:r>
-            <a:r>
-              <a:rPr sz="2000" b="0" i="0">
-                <a:solidFill>
-                  <a:srgbClr val="333333"/>
-                </a:solidFill>
-                <a:latin typeface="Calibri"/>
-              </a:rPr>
-              <a:t> · Bloque </a:t>
-            </a:r>
-            <a:r>
-              <a:rPr sz="2000" b="1" i="0">
-                <a:solidFill>
-                  <a:srgbClr val="333333"/>
-                </a:solidFill>
-                <a:latin typeface="Calibri"/>
-              </a:rPr>
-              <a:t>120 min</a:t>
-            </a:r>
-          </a:p>
-          <a:p>
-            <a:pPr>
-              <a:spcAft>
-                <a:spcPts val="800"/>
-              </a:spcAft>
-            </a:pPr>
-            <a:r>
-              <a:rPr sz="2000" b="0" i="0">
-                <a:solidFill>
-                  <a:srgbClr val="333333"/>
-                </a:solidFill>
-                <a:latin typeface="Calibri"/>
-              </a:rPr>
-              <a:t>–   Primero el concepto, despues el codigo que lo muestra y la demo en vivo.</a:t>
-            </a:r>
-          </a:p>
-          <a:p>
-            <a:pPr>
-              <a:spcAft>
-                <a:spcPts val="800"/>
-              </a:spcAft>
-            </a:pPr>
-            <a:r>
-              <a:rPr sz="2000" b="0" i="0">
-                <a:solidFill>
-                  <a:srgbClr val="333333"/>
-                </a:solidFill>
-                <a:latin typeface="Calibri"/>
-              </a:rPr>
               <a:t>–   Todo con el mismo dominio: una clinica veterinaria.</a:t>
             </a:r>
           </a:p>
@@ -12052,7 +11661,7 @@
       </p:sp>
       <p:sp>
         <p:nvSpPr>
-          <p:cNvPr id="9" name="TextBox 8"/>
+          <p:cNvPr id="6" name="TextBox 5"/>
           <p:cNvSpPr txBox="1"/>
           <p:nvPr/>
         </p:nvSpPr>
@@ -13085,83 +12694,14 @@
       </p:sp>
       <p:sp>
         <p:nvSpPr>
-          <p:cNvPr id="5" name="Rounded Rectangle 4"/>
-          <p:cNvSpPr/>
-          <p:nvPr/>
-        </p:nvSpPr>
-        <p:spPr>
-          <a:xfrm>
-            <a:off x="5797149" y="1573813"/>
-            <a:ext cx="6010497" cy="4057845"/>
-          </a:xfrm>
-          <a:prstGeom prst="roundRect">
-            <a:avLst>
-              <a:gd name="adj" fmla="val 4000"/>
-            </a:avLst>
-          </a:prstGeom>
-          <a:solidFill>
-            <a:srgbClr val="E8EEF4"/>
-          </a:solidFill>
-          <a:ln>
-            <a:noFill/>
-          </a:ln>
-        </p:spPr>
-        <p:style>
-          <a:lnRef idx="1">
-            <a:schemeClr val="accent1"/>
-          </a:lnRef>
-          <a:fillRef idx="3">
-            <a:schemeClr val="accent1"/>
-          </a:fillRef>
-          <a:effectRef idx="2">
-            <a:schemeClr val="accent1"/>
-          </a:effectRef>
-          <a:fontRef idx="minor">
-            <a:schemeClr val="lt1"/>
-          </a:fontRef>
-        </p:style>
-        <p:txBody>
-          <a:bodyPr rtlCol="0" anchor="ctr"/>
-          <a:lstStyle/>
-          <a:p>
-            <a:pPr algn="ctr"/>
-          </a:p>
-        </p:txBody>
-      </p:sp>
-      <p:pic>
-        <p:nvPicPr>
-          <p:cNvPr id="6" name="Picture 5" descr="architect-blueprint-plans-desk.jpg"/>
-          <p:cNvPicPr>
-            <a:picLocks noChangeAspect="1"/>
-          </p:cNvPicPr>
-          <p:nvPr/>
-        </p:nvPicPr>
-        <p:blipFill>
-          <a:blip r:embed="rId2"/>
-          <a:stretch>
-            <a:fillRect/>
-          </a:stretch>
-        </p:blipFill>
-        <p:spPr>
-          <a:xfrm>
-            <a:off x="5870301" y="1646965"/>
-            <a:ext cx="5864193" cy="3911541"/>
-          </a:xfrm>
-          <a:prstGeom prst="rect">
-            <a:avLst/>
-          </a:prstGeom>
-        </p:spPr>
-      </p:pic>
-      <p:sp>
-        <p:nvSpPr>
-          <p:cNvPr id="7" name="TextBox 6"/>
+          <p:cNvPr id="5" name="TextBox 4"/>
           <p:cNvSpPr txBox="1"/>
           <p:nvPr/>
         </p:nvSpPr>
         <p:spPr>
           <a:xfrm>
-            <a:off x="5870301" y="5961888"/>
-            <a:ext cx="5864193" cy="320040"/>
+            <a:off x="457200" y="1170432"/>
+            <a:ext cx="11277295" cy="5230368"/>
           </a:xfrm>
           <a:prstGeom prst="rect">
             <a:avLst/>
@@ -13174,40 +12714,21 @@
           </a:bodyPr>
           <a:lstStyle/>
           <a:p>
-            <a:pPr algn="ctr"/>
-            <a:r>
-              <a:rPr sz="1100" b="0" i="1">
-                <a:solidFill>
-                  <a:srgbClr val="666666"/>
+            <a:pPr>
+              <a:spcAft>
+                <a:spcPts val="800"/>
+              </a:spcAft>
+            </a:pPr>
+            <a:r>
+              <a:rPr sz="2000" b="0" i="0">
+                <a:solidFill>
+                  <a:srgbClr val="333333"/>
                 </a:solidFill>
                 <a:latin typeface="Calibri"/>
               </a:rPr>
-              <a:t>Foto: Ron Lach · Pexels</a:t>
-            </a:r>
-          </a:p>
-        </p:txBody>
-      </p:sp>
-      <p:sp>
-        <p:nvSpPr>
-          <p:cNvPr id="8" name="TextBox 7"/>
-          <p:cNvSpPr txBox="1"/>
-          <p:nvPr/>
-        </p:nvSpPr>
-        <p:spPr>
-          <a:xfrm>
-            <a:off x="457200" y="1353312"/>
-            <a:ext cx="5093061" cy="5047488"/>
-          </a:xfrm>
-          <a:prstGeom prst="rect">
-            <a:avLst/>
-          </a:prstGeom>
-          <a:noFill/>
-        </p:spPr>
-        <p:txBody>
-          <a:bodyPr wrap="square">
-            <a:spAutoFit/>
-          </a:bodyPr>
-          <a:lstStyle/>
+              <a:t>–   Una solución probada, con nombre propio, a un problema de diseño que se repite.</a:t>
+            </a:r>
+          </a:p>
           <a:p>
             <a:pPr>
               <a:spcAft>
@@ -13221,7 +12742,7 @@
                 </a:solidFill>
                 <a:latin typeface="Calibri"/>
               </a:rPr>
-              <a:t>–   Una solución probada, con nombre propio, a un problema de diseño que se repite.</a:t>
+              <a:t>–   No es una librería que se importa: el nombre comunica el problema y la forma de resolverlo.</a:t>
             </a:r>
           </a:p>
           <a:p>
@@ -13237,7 +12758,7 @@
                 </a:solidFill>
                 <a:latin typeface="Calibri"/>
               </a:rPr>
-              <a:t>–   No es una librería que se importa: el nombre comunica el problema y la forma de resolverlo.</a:t>
+              <a:t>–   Catálogo GoF: creacionales, estructurales y de comportamiento.</a:t>
             </a:r>
           </a:p>
           <a:p>
@@ -13253,22 +12774,6 @@
                 </a:solidFill>
                 <a:latin typeface="Calibri"/>
               </a:rPr>
-              <a:t>–   Catálogo GoF: creacionales, estructurales y de comportamiento.</a:t>
-            </a:r>
-          </a:p>
-          <a:p>
-            <a:pPr>
-              <a:spcAft>
-                <a:spcPts val="800"/>
-              </a:spcAft>
-            </a:pPr>
-            <a:r>
-              <a:rPr sz="2000" b="0" i="0">
-                <a:solidFill>
-                  <a:srgbClr val="333333"/>
-                </a:solidFill>
-                <a:latin typeface="Calibri"/>
-              </a:rPr>
               <a:t>–   Hoy dos, Singleton y Factory, usados con criterio y no por coleccionarlos.</a:t>
             </a:r>
           </a:p>
@@ -13276,7 +12781,7 @@
       </p:sp>
       <p:sp>
         <p:nvSpPr>
-          <p:cNvPr id="9" name="TextBox 8"/>
+          <p:cNvPr id="6" name="TextBox 5"/>
           <p:cNvSpPr txBox="1"/>
           <p:nvPr/>
         </p:nvSpPr>

--- a/Programacion II/Clases/Clase 7 - Patrones de diseno Singleton y Factory/Presentacion.pptx
+++ b/Programacion II/Clases/Clase 7 - Patrones de diseno Singleton y Factory/Presentacion.pptx
@@ -829,6 +829,94 @@
           <a:p>
             <a:r>
               <a:t>Ahora la parte que casi nadie enseña: cuando NO usarlos. El Singleton es, sin maquillaje, una variable global con corbata. Trae tres costos reales: esconde dependencias (una clase que por dentro llama a getInstancia() no declara en su firma que necesita el repositorio), complica las pruebas (en la clase 8 vamos a querer un repositorio limpio en cada caso de prueba y el Singleton nos va a devolver el sucio de la prueba anterior) y concentra estado compartido que en aplicaciones grandes se vuelve impredecible. La alternativa profesional se llama inyeccion por constructor: pasar el repositorio como parametro, tal como hicimos con ControladorRegistro en la clase 6. En el sistema de la clinica aceptamos el Singleton para el repositorio porque es una aplicacion de escritorio pequeña, con un solo usuario y una unica fuente de datos, y aun asi vamos a dejarle un metodo limpiar() para poder probarlo. La Factory tiene su propio abuso: si solo hay una clase que crear y ninguna regla que aplicar, una fabrica que hace un new pelado no aporta nada, solo una capa mas de ruido. La regla de oro es: primero el problema, despues el patron; nunca al reves.</a:t>
+            </a:r>
+          </a:p>
+        </p:txBody>
+      </p:sp>
+      <p:sp>
+        <p:nvSpPr>
+          <p:cNvPr id="4" name="Slide Number Placeholder 3"/>
+          <p:cNvSpPr>
+            <a:spLocks noGrp="1"/>
+          </p:cNvSpPr>
+          <p:nvPr>
+            <p:ph type="sldNum" idx="5" sz="quarter"/>
+          </p:nvPr>
+        </p:nvSpPr>
+        <p:spPr/>
+      </p:sp>
+    </p:spTree>
+  </p:cSld>
+  <p:clrMapOvr>
+    <a:masterClrMapping/>
+  </p:clrMapOvr>
+</p:notes>
+</file>
+
+<file path=ppt/notesSlides/notesSlide6.xml><?xml version="1.0" encoding="utf-8"?>
+<p:notes xmlns:a="http://schemas.openxmlformats.org/drawingml/2006/main" xmlns:p="http://schemas.openxmlformats.org/presentationml/2006/main" xmlns:r="http://schemas.openxmlformats.org/officeDocument/2006/relationships">
+  <p:cSld>
+    <p:spTree>
+      <p:nvGrpSpPr>
+        <p:cNvPr id="1" name=""/>
+        <p:cNvGrpSpPr/>
+        <p:nvPr/>
+      </p:nvGrpSpPr>
+      <p:grpSpPr>
+        <a:xfrm>
+          <a:off x="0" y="0"/>
+          <a:ext cx="0" cy="0"/>
+          <a:chOff x="0" y="0"/>
+          <a:chExt cx="0" cy="0"/>
+        </a:xfrm>
+      </p:grpSpPr>
+      <p:sp>
+        <p:nvSpPr>
+          <p:cNvPr id="2" name="Slide Image Placeholder 1"/>
+          <p:cNvSpPr>
+            <a:spLocks noGrp="1"/>
+          </p:cNvSpPr>
+          <p:nvPr>
+            <p:ph type="sldImg" idx="2"/>
+          </p:nvPr>
+        </p:nvSpPr>
+        <p:spPr/>
+      </p:sp>
+      <p:sp>
+        <p:nvSpPr>
+          <p:cNvPr id="3" name="Notes Placeholder 2"/>
+          <p:cNvSpPr>
+            <a:spLocks noGrp="1"/>
+          </p:cNvSpPr>
+          <p:nvPr>
+            <p:ph type="body" idx="3" sz="quarter"/>
+          </p:nvPr>
+        </p:nvSpPr>
+        <p:spPr/>
+        <p:txBody>
+          <a:bodyPr/>
+          <a:lstStyle/>
+          <a:p>
+            <a:r>
+              <a:t>TEXTO COMPLETO DE LA LÁMINA (se proyecta resumido):</a:t>
+            </a:r>
+          </a:p>
+          <a:p/>
+          <a:p>
+            <a:r>
+              <a:t>Herramienta: Visual Studio Code (Java)</a:t>
+            </a:r>
+          </a:p>
+          <a:p/>
+          <a:p>
+            <a:r>
+              <a:t>Demo: El docente abre dos ventanas del sistema de la clinica, registra una mascota en la primera y la muestra apareciendo en la segunda porque ambas comparten la unica instancia del repositorio.</a:t>
+            </a:r>
+          </a:p>
+          <a:p/>
+          <a:p>
+            <a:r>
+              <a:t>Mismo dominio de la clinica — no otro ejemplo.</a:t>
             </a:r>
           </a:p>
         </p:txBody>
@@ -10741,14 +10829,83 @@
       </p:sp>
       <p:sp>
         <p:nvSpPr>
-          <p:cNvPr id="5" name="TextBox 4"/>
+          <p:cNvPr id="5" name="Rounded Rectangle 4"/>
+          <p:cNvSpPr/>
+          <p:nvPr/>
+        </p:nvSpPr>
+        <p:spPr>
+          <a:xfrm>
+            <a:off x="5797149" y="1343926"/>
+            <a:ext cx="6010497" cy="4837658"/>
+          </a:xfrm>
+          <a:prstGeom prst="roundRect">
+            <a:avLst>
+              <a:gd name="adj" fmla="val 4000"/>
+            </a:avLst>
+          </a:prstGeom>
+          <a:solidFill>
+            <a:srgbClr val="E8EEF4"/>
+          </a:solidFill>
+          <a:ln>
+            <a:noFill/>
+          </a:ln>
+        </p:spPr>
+        <p:style>
+          <a:lnRef idx="1">
+            <a:schemeClr val="accent1"/>
+          </a:lnRef>
+          <a:fillRef idx="3">
+            <a:schemeClr val="accent1"/>
+          </a:fillRef>
+          <a:effectRef idx="2">
+            <a:schemeClr val="accent1"/>
+          </a:effectRef>
+          <a:fontRef idx="minor">
+            <a:schemeClr val="lt1"/>
+          </a:fontRef>
+        </p:style>
+        <p:txBody>
+          <a:bodyPr rtlCol="0" anchor="ctr"/>
+          <a:lstStyle/>
+          <a:p>
+            <a:pPr algn="ctr"/>
+          </a:p>
+        </p:txBody>
+      </p:sp>
+      <p:pic>
+        <p:nvPicPr>
+          <p:cNvPr id="6" name="Picture 5" descr="ilus-cuando-no-paso1.png"/>
+          <p:cNvPicPr>
+            <a:picLocks noChangeAspect="1"/>
+          </p:cNvPicPr>
+          <p:nvPr/>
+        </p:nvPicPr>
+        <p:blipFill>
+          <a:blip r:embed="rId2"/>
+          <a:stretch>
+            <a:fillRect/>
+          </a:stretch>
+        </p:blipFill>
+        <p:spPr>
+          <a:xfrm>
+            <a:off x="5870301" y="1417078"/>
+            <a:ext cx="5864193" cy="4691354"/>
+          </a:xfrm>
+          <a:prstGeom prst="rect">
+            <a:avLst/>
+          </a:prstGeom>
+        </p:spPr>
+      </p:pic>
+      <p:sp>
+        <p:nvSpPr>
+          <p:cNvPr id="7" name="TextBox 6"/>
           <p:cNvSpPr txBox="1"/>
           <p:nvPr/>
         </p:nvSpPr>
         <p:spPr>
           <a:xfrm>
-            <a:off x="457200" y="1170432"/>
-            <a:ext cx="11277295" cy="5230368"/>
+            <a:off x="457200" y="1353312"/>
+            <a:ext cx="5093061" cy="5047488"/>
           </a:xfrm>
           <a:prstGeom prst="rect">
             <a:avLst/>
@@ -10828,7 +10985,7 @@
       </p:sp>
       <p:sp>
         <p:nvSpPr>
-          <p:cNvPr id="6" name="TextBox 5"/>
+          <p:cNvPr id="8" name="TextBox 7"/>
           <p:cNvSpPr txBox="1"/>
           <p:nvPr/>
         </p:nvSpPr>
@@ -11009,14 +11166,83 @@
       </p:sp>
       <p:sp>
         <p:nvSpPr>
-          <p:cNvPr id="5" name="TextBox 4"/>
+          <p:cNvPr id="5" name="Rounded Rectangle 4"/>
+          <p:cNvSpPr/>
+          <p:nvPr/>
+        </p:nvSpPr>
+        <p:spPr>
+          <a:xfrm>
+            <a:off x="5797149" y="1343926"/>
+            <a:ext cx="6010497" cy="4837658"/>
+          </a:xfrm>
+          <a:prstGeom prst="roundRect">
+            <a:avLst>
+              <a:gd name="adj" fmla="val 4000"/>
+            </a:avLst>
+          </a:prstGeom>
+          <a:solidFill>
+            <a:srgbClr val="E8EEF4"/>
+          </a:solidFill>
+          <a:ln>
+            <a:noFill/>
+          </a:ln>
+        </p:spPr>
+        <p:style>
+          <a:lnRef idx="1">
+            <a:schemeClr val="accent1"/>
+          </a:lnRef>
+          <a:fillRef idx="3">
+            <a:schemeClr val="accent1"/>
+          </a:fillRef>
+          <a:effectRef idx="2">
+            <a:schemeClr val="accent1"/>
+          </a:effectRef>
+          <a:fontRef idx="minor">
+            <a:schemeClr val="lt1"/>
+          </a:fontRef>
+        </p:style>
+        <p:txBody>
+          <a:bodyPr rtlCol="0" anchor="ctr"/>
+          <a:lstStyle/>
+          <a:p>
+            <a:pPr algn="ctr"/>
+          </a:p>
+        </p:txBody>
+      </p:sp>
+      <p:pic>
+        <p:nvPicPr>
+          <p:cNvPr id="6" name="Picture 5" descr="ilus-demo-paso1.png"/>
+          <p:cNvPicPr>
+            <a:picLocks noChangeAspect="1"/>
+          </p:cNvPicPr>
+          <p:nvPr/>
+        </p:nvPicPr>
+        <p:blipFill>
+          <a:blip r:embed="rId2"/>
+          <a:stretch>
+            <a:fillRect/>
+          </a:stretch>
+        </p:blipFill>
+        <p:spPr>
+          <a:xfrm>
+            <a:off x="5870301" y="1417078"/>
+            <a:ext cx="5864193" cy="4691354"/>
+          </a:xfrm>
+          <a:prstGeom prst="rect">
+            <a:avLst/>
+          </a:prstGeom>
+        </p:spPr>
+      </p:pic>
+      <p:sp>
+        <p:nvSpPr>
+          <p:cNvPr id="7" name="TextBox 6"/>
           <p:cNvSpPr txBox="1"/>
           <p:nvPr/>
         </p:nvSpPr>
         <p:spPr>
           <a:xfrm>
-            <a:off x="457200" y="1170432"/>
-            <a:ext cx="11277295" cy="5230368"/>
+            <a:off x="457200" y="1353312"/>
+            <a:ext cx="5093061" cy="5047488"/>
           </a:xfrm>
           <a:prstGeom prst="rect">
             <a:avLst/>
@@ -11093,7 +11319,7 @@
                 </a:solidFill>
                 <a:latin typeface="Calibri"/>
               </a:rPr>
-              <a:t> El docente abre dos ventanas del sistema de la clinica, registra una mascota en la primera y la muestra apareciendo en la segunda porque ambas comparten la unica instancia del repositorio.</a:t>
+              <a:t> El docente abre dos ventanas del sistema de la clinica, registra una mascota en la primera y la muestra apareciendo en la segunda porque…</a:t>
             </a:r>
           </a:p>
           <a:p>
@@ -11116,7 +11342,7 @@
       </p:sp>
       <p:sp>
         <p:nvSpPr>
-          <p:cNvPr id="6" name="TextBox 5"/>
+          <p:cNvPr id="8" name="TextBox 7"/>
           <p:cNvSpPr txBox="1"/>
           <p:nvPr/>
         </p:nvSpPr>
@@ -12694,14 +12920,83 @@
       </p:sp>
       <p:sp>
         <p:nvSpPr>
-          <p:cNvPr id="5" name="TextBox 4"/>
+          <p:cNvPr id="5" name="Rounded Rectangle 4"/>
+          <p:cNvSpPr/>
+          <p:nvPr/>
+        </p:nvSpPr>
+        <p:spPr>
+          <a:xfrm>
+            <a:off x="5797149" y="1343926"/>
+            <a:ext cx="6010497" cy="4837658"/>
+          </a:xfrm>
+          <a:prstGeom prst="roundRect">
+            <a:avLst>
+              <a:gd name="adj" fmla="val 4000"/>
+            </a:avLst>
+          </a:prstGeom>
+          <a:solidFill>
+            <a:srgbClr val="E8EEF4"/>
+          </a:solidFill>
+          <a:ln>
+            <a:noFill/>
+          </a:ln>
+        </p:spPr>
+        <p:style>
+          <a:lnRef idx="1">
+            <a:schemeClr val="accent1"/>
+          </a:lnRef>
+          <a:fillRef idx="3">
+            <a:schemeClr val="accent1"/>
+          </a:fillRef>
+          <a:effectRef idx="2">
+            <a:schemeClr val="accent1"/>
+          </a:effectRef>
+          <a:fontRef idx="minor">
+            <a:schemeClr val="lt1"/>
+          </a:fontRef>
+        </p:style>
+        <p:txBody>
+          <a:bodyPr rtlCol="0" anchor="ctr"/>
+          <a:lstStyle/>
+          <a:p>
+            <a:pPr algn="ctr"/>
+          </a:p>
+        </p:txBody>
+      </p:sp>
+      <p:pic>
+        <p:nvPicPr>
+          <p:cNvPr id="6" name="Picture 5" descr="ilus-que-es-patron-paso1.png"/>
+          <p:cNvPicPr>
+            <a:picLocks noChangeAspect="1"/>
+          </p:cNvPicPr>
+          <p:nvPr/>
+        </p:nvPicPr>
+        <p:blipFill>
+          <a:blip r:embed="rId2"/>
+          <a:stretch>
+            <a:fillRect/>
+          </a:stretch>
+        </p:blipFill>
+        <p:spPr>
+          <a:xfrm>
+            <a:off x="5870301" y="1417078"/>
+            <a:ext cx="5864193" cy="4691354"/>
+          </a:xfrm>
+          <a:prstGeom prst="rect">
+            <a:avLst/>
+          </a:prstGeom>
+        </p:spPr>
+      </p:pic>
+      <p:sp>
+        <p:nvSpPr>
+          <p:cNvPr id="7" name="TextBox 6"/>
           <p:cNvSpPr txBox="1"/>
           <p:nvPr/>
         </p:nvSpPr>
         <p:spPr>
           <a:xfrm>
-            <a:off x="457200" y="1170432"/>
-            <a:ext cx="11277295" cy="5230368"/>
+            <a:off x="457200" y="1353312"/>
+            <a:ext cx="5093061" cy="5047488"/>
           </a:xfrm>
           <a:prstGeom prst="rect">
             <a:avLst/>
@@ -12781,7 +13076,7 @@
       </p:sp>
       <p:sp>
         <p:nvSpPr>
-          <p:cNvPr id="6" name="TextBox 5"/>
+          <p:cNvPr id="8" name="TextBox 7"/>
           <p:cNvSpPr txBox="1"/>
           <p:nvPr/>
         </p:nvSpPr>
